--- a/docs/pptx/carbo/jx-carbo-linsubhr-ratio-grade3.pptx
+++ b/docs/pptx/carbo/jx-carbo-linsubhr-ratio-grade3.pptx
@@ -2271,7 +2271,7 @@
           </p:nvSpPr>
           <p:spPr>
             <a:xfrm>
-              <a:off x="817517" y="5114368"/>
+              <a:off x="817517" y="5142518"/>
               <a:ext cx="7799693" cy="0"/>
             </a:xfrm>
             <a:custGeom>
@@ -2314,7 +2314,7 @@
           </p:nvSpPr>
           <p:spPr>
             <a:xfrm>
-              <a:off x="817517" y="4244691"/>
+              <a:off x="817517" y="4313054"/>
               <a:ext cx="7799693" cy="0"/>
             </a:xfrm>
             <a:custGeom>
@@ -2357,7 +2357,7 @@
           </p:nvSpPr>
           <p:spPr>
             <a:xfrm>
-              <a:off x="817517" y="3375014"/>
+              <a:off x="817517" y="3483591"/>
               <a:ext cx="7799693" cy="0"/>
             </a:xfrm>
             <a:custGeom>
@@ -2400,7 +2400,7 @@
           </p:nvSpPr>
           <p:spPr>
             <a:xfrm>
-              <a:off x="817517" y="2505337"/>
+              <a:off x="817517" y="2654127"/>
               <a:ext cx="7799693" cy="0"/>
             </a:xfrm>
             <a:custGeom>
@@ -2443,15 +2443,15 @@
           </p:nvSpPr>
           <p:spPr>
             <a:xfrm>
-              <a:off x="1615213" y="1896563"/>
-              <a:ext cx="0" cy="3826579"/>
+              <a:off x="1615213" y="2073503"/>
+              <a:ext cx="0" cy="3649639"/>
             </a:xfrm>
             <a:custGeom>
               <a:avLst/>
               <a:pathLst>
-                <a:path w="0" h="3826579">
+                <a:path w="0" h="3649639">
                   <a:moveTo>
-                    <a:pt x="0" y="3826579"/>
+                    <a:pt x="0" y="3649639"/>
                   </a:moveTo>
                   <a:lnTo>
                     <a:pt x="0" y="0"/>
@@ -2486,15 +2486,15 @@
           </p:nvSpPr>
           <p:spPr>
             <a:xfrm>
-              <a:off x="3387871" y="1896563"/>
-              <a:ext cx="0" cy="3826579"/>
+              <a:off x="3387871" y="2073503"/>
+              <a:ext cx="0" cy="3649639"/>
             </a:xfrm>
             <a:custGeom>
               <a:avLst/>
               <a:pathLst>
-                <a:path w="0" h="3826579">
+                <a:path w="0" h="3649639">
                   <a:moveTo>
-                    <a:pt x="0" y="3826579"/>
+                    <a:pt x="0" y="3649639"/>
                   </a:moveTo>
                   <a:lnTo>
                     <a:pt x="0" y="0"/>
@@ -2529,15 +2529,15 @@
           </p:nvSpPr>
           <p:spPr>
             <a:xfrm>
-              <a:off x="5160528" y="1896563"/>
-              <a:ext cx="0" cy="3826579"/>
+              <a:off x="5160528" y="2073503"/>
+              <a:ext cx="0" cy="3649639"/>
             </a:xfrm>
             <a:custGeom>
               <a:avLst/>
               <a:pathLst>
-                <a:path w="0" h="3826579">
+                <a:path w="0" h="3649639">
                   <a:moveTo>
-                    <a:pt x="0" y="3826579"/>
+                    <a:pt x="0" y="3649639"/>
                   </a:moveTo>
                   <a:lnTo>
                     <a:pt x="0" y="0"/>
@@ -2572,15 +2572,15 @@
           </p:nvSpPr>
           <p:spPr>
             <a:xfrm>
-              <a:off x="6933186" y="1896563"/>
-              <a:ext cx="0" cy="3826579"/>
+              <a:off x="6933186" y="2073503"/>
+              <a:ext cx="0" cy="3649639"/>
             </a:xfrm>
             <a:custGeom>
               <a:avLst/>
               <a:pathLst>
-                <a:path w="0" h="3826579">
+                <a:path w="0" h="3649639">
                   <a:moveTo>
-                    <a:pt x="0" y="3826579"/>
+                    <a:pt x="0" y="3649639"/>
                   </a:moveTo>
                   <a:lnTo>
                     <a:pt x="0" y="0"/>
@@ -2615,7 +2615,7 @@
           </p:nvSpPr>
           <p:spPr>
             <a:xfrm>
-              <a:off x="817517" y="5549207"/>
+              <a:off x="817517" y="5557249"/>
               <a:ext cx="7799693" cy="0"/>
             </a:xfrm>
             <a:custGeom>
@@ -2658,7 +2658,7 @@
           </p:nvSpPr>
           <p:spPr>
             <a:xfrm>
-              <a:off x="817517" y="4679530"/>
+              <a:off x="817517" y="4727786"/>
               <a:ext cx="7799693" cy="0"/>
             </a:xfrm>
             <a:custGeom>
@@ -2701,7 +2701,7 @@
           </p:nvSpPr>
           <p:spPr>
             <a:xfrm>
-              <a:off x="817517" y="3809853"/>
+              <a:off x="817517" y="3898322"/>
               <a:ext cx="7799693" cy="0"/>
             </a:xfrm>
             <a:custGeom>
@@ -2744,7 +2744,7 @@
           </p:nvSpPr>
           <p:spPr>
             <a:xfrm>
-              <a:off x="817517" y="2940175"/>
+              <a:off x="817517" y="3068859"/>
               <a:ext cx="7799693" cy="0"/>
             </a:xfrm>
             <a:custGeom>
@@ -2787,7 +2787,7 @@
           </p:nvSpPr>
           <p:spPr>
             <a:xfrm>
-              <a:off x="817517" y="2070498"/>
+              <a:off x="817517" y="2239395"/>
               <a:ext cx="7799693" cy="0"/>
             </a:xfrm>
             <a:custGeom>
@@ -2830,15 +2830,15 @@
           </p:nvSpPr>
           <p:spPr>
             <a:xfrm>
-              <a:off x="2501542" y="1896563"/>
-              <a:ext cx="0" cy="3826579"/>
+              <a:off x="2501542" y="2073503"/>
+              <a:ext cx="0" cy="3649639"/>
             </a:xfrm>
             <a:custGeom>
               <a:avLst/>
               <a:pathLst>
-                <a:path w="0" h="3826579">
+                <a:path w="0" h="3649639">
                   <a:moveTo>
-                    <a:pt x="0" y="3826579"/>
+                    <a:pt x="0" y="3649639"/>
                   </a:moveTo>
                   <a:lnTo>
                     <a:pt x="0" y="0"/>
@@ -2873,15 +2873,15 @@
           </p:nvSpPr>
           <p:spPr>
             <a:xfrm>
-              <a:off x="4274200" y="1896563"/>
-              <a:ext cx="0" cy="3826579"/>
+              <a:off x="4274200" y="2073503"/>
+              <a:ext cx="0" cy="3649639"/>
             </a:xfrm>
             <a:custGeom>
               <a:avLst/>
               <a:pathLst>
-                <a:path w="0" h="3826579">
+                <a:path w="0" h="3649639">
                   <a:moveTo>
-                    <a:pt x="0" y="3826579"/>
+                    <a:pt x="0" y="3649639"/>
                   </a:moveTo>
                   <a:lnTo>
                     <a:pt x="0" y="0"/>
@@ -2916,15 +2916,15 @@
           </p:nvSpPr>
           <p:spPr>
             <a:xfrm>
-              <a:off x="6046857" y="1896563"/>
-              <a:ext cx="0" cy="3826579"/>
+              <a:off x="6046857" y="2073503"/>
+              <a:ext cx="0" cy="3649639"/>
             </a:xfrm>
             <a:custGeom>
               <a:avLst/>
               <a:pathLst>
-                <a:path w="0" h="3826579">
+                <a:path w="0" h="3649639">
                   <a:moveTo>
-                    <a:pt x="0" y="3826579"/>
+                    <a:pt x="0" y="3649639"/>
                   </a:moveTo>
                   <a:lnTo>
                     <a:pt x="0" y="0"/>
@@ -2959,15 +2959,15 @@
           </p:nvSpPr>
           <p:spPr>
             <a:xfrm>
-              <a:off x="7819515" y="1896563"/>
-              <a:ext cx="0" cy="3826579"/>
+              <a:off x="7819515" y="2073503"/>
+              <a:ext cx="0" cy="3649639"/>
             </a:xfrm>
             <a:custGeom>
               <a:avLst/>
               <a:pathLst>
-                <a:path w="0" h="3826579">
+                <a:path w="0" h="3649639">
                   <a:moveTo>
-                    <a:pt x="0" y="3826579"/>
+                    <a:pt x="0" y="3649639"/>
                   </a:moveTo>
                   <a:lnTo>
                     <a:pt x="0" y="0"/>
@@ -3002,540 +3002,540 @@
           </p:nvSpPr>
           <p:spPr>
             <a:xfrm>
-              <a:off x="817517" y="1896563"/>
-              <a:ext cx="7403783" cy="3611111"/>
+              <a:off x="817517" y="2073503"/>
+              <a:ext cx="7403783" cy="3444135"/>
             </a:xfrm>
             <a:custGeom>
               <a:avLst/>
               <a:pathLst>
-                <a:path w="7403783" h="3611111">
+                <a:path w="7403783" h="3444135">
                   <a:moveTo>
                     <a:pt x="1521298" y="0"/>
                   </a:moveTo>
                   <a:lnTo>
-                    <a:pt x="1579709" y="159868"/>
-                  </a:lnTo>
-                  <a:lnTo>
-                    <a:pt x="1656342" y="357726"/>
-                  </a:lnTo>
-                  <a:lnTo>
-                    <a:pt x="1732974" y="544375"/>
-                  </a:lnTo>
-                  <a:lnTo>
-                    <a:pt x="1809607" y="720452"/>
-                  </a:lnTo>
-                  <a:lnTo>
-                    <a:pt x="1886239" y="886554"/>
-                  </a:lnTo>
-                  <a:lnTo>
-                    <a:pt x="1962872" y="1043247"/>
-                  </a:lnTo>
-                  <a:lnTo>
-                    <a:pt x="2039504" y="1191063"/>
-                  </a:lnTo>
-                  <a:lnTo>
-                    <a:pt x="2116137" y="1330506"/>
-                  </a:lnTo>
-                  <a:lnTo>
-                    <a:pt x="2192769" y="1462050"/>
-                  </a:lnTo>
-                  <a:lnTo>
-                    <a:pt x="2269402" y="1586143"/>
-                  </a:lnTo>
-                  <a:lnTo>
-                    <a:pt x="2346034" y="1703205"/>
-                  </a:lnTo>
-                  <a:lnTo>
-                    <a:pt x="2422667" y="1813637"/>
-                  </a:lnTo>
-                  <a:lnTo>
-                    <a:pt x="2499300" y="1917812"/>
-                  </a:lnTo>
-                  <a:lnTo>
-                    <a:pt x="2575932" y="2016087"/>
-                  </a:lnTo>
-                  <a:lnTo>
-                    <a:pt x="2652565" y="2108794"/>
-                  </a:lnTo>
-                  <a:lnTo>
-                    <a:pt x="2729197" y="2196250"/>
-                  </a:lnTo>
-                  <a:lnTo>
-                    <a:pt x="2805830" y="2278751"/>
-                  </a:lnTo>
-                  <a:lnTo>
-                    <a:pt x="2882462" y="2356579"/>
-                  </a:lnTo>
-                  <a:lnTo>
-                    <a:pt x="2959095" y="2429998"/>
-                  </a:lnTo>
-                  <a:lnTo>
-                    <a:pt x="3035727" y="2499258"/>
-                  </a:lnTo>
-                  <a:lnTo>
-                    <a:pt x="3112360" y="2564595"/>
-                  </a:lnTo>
-                  <a:lnTo>
-                    <a:pt x="3188993" y="2626230"/>
-                  </a:lnTo>
-                  <a:lnTo>
-                    <a:pt x="3265625" y="2684374"/>
-                  </a:lnTo>
-                  <a:lnTo>
-                    <a:pt x="3342258" y="2739225"/>
-                  </a:lnTo>
-                  <a:lnTo>
-                    <a:pt x="3418890" y="2787334"/>
-                  </a:lnTo>
-                  <a:lnTo>
-                    <a:pt x="3495523" y="2814390"/>
-                  </a:lnTo>
-                  <a:lnTo>
-                    <a:pt x="3572155" y="2840600"/>
-                  </a:lnTo>
-                  <a:lnTo>
-                    <a:pt x="3648788" y="2865991"/>
-                  </a:lnTo>
-                  <a:lnTo>
-                    <a:pt x="3725420" y="2890588"/>
-                  </a:lnTo>
-                  <a:lnTo>
-                    <a:pt x="3802053" y="2914415"/>
-                  </a:lnTo>
-                  <a:lnTo>
-                    <a:pt x="3878685" y="2937498"/>
-                  </a:lnTo>
-                  <a:lnTo>
-                    <a:pt x="3955318" y="2959859"/>
-                  </a:lnTo>
-                  <a:lnTo>
-                    <a:pt x="4031951" y="2981521"/>
-                  </a:lnTo>
-                  <a:lnTo>
-                    <a:pt x="4108583" y="3002505"/>
-                  </a:lnTo>
-                  <a:lnTo>
-                    <a:pt x="4185216" y="3022833"/>
-                  </a:lnTo>
-                  <a:lnTo>
-                    <a:pt x="4261848" y="3042526"/>
-                  </a:lnTo>
-                  <a:lnTo>
-                    <a:pt x="4338481" y="3061603"/>
-                  </a:lnTo>
-                  <a:lnTo>
-                    <a:pt x="4415113" y="3080083"/>
-                  </a:lnTo>
-                  <a:lnTo>
-                    <a:pt x="4491746" y="3097986"/>
-                  </a:lnTo>
-                  <a:lnTo>
-                    <a:pt x="4568378" y="3115328"/>
-                  </a:lnTo>
-                  <a:lnTo>
-                    <a:pt x="4645011" y="3132129"/>
-                  </a:lnTo>
-                  <a:lnTo>
-                    <a:pt x="4721644" y="3148404"/>
-                  </a:lnTo>
-                  <a:lnTo>
-                    <a:pt x="4798276" y="3164171"/>
-                  </a:lnTo>
-                  <a:lnTo>
-                    <a:pt x="4874909" y="3179444"/>
-                  </a:lnTo>
-                  <a:lnTo>
-                    <a:pt x="4951541" y="3194240"/>
-                  </a:lnTo>
-                  <a:lnTo>
-                    <a:pt x="5028174" y="3208573"/>
-                  </a:lnTo>
-                  <a:lnTo>
-                    <a:pt x="5104806" y="3222458"/>
-                  </a:lnTo>
-                  <a:lnTo>
-                    <a:pt x="5181439" y="3235909"/>
-                  </a:lnTo>
-                  <a:lnTo>
-                    <a:pt x="5258071" y="3248939"/>
-                  </a:lnTo>
-                  <a:lnTo>
-                    <a:pt x="5334704" y="3261562"/>
-                  </a:lnTo>
-                  <a:lnTo>
-                    <a:pt x="5411336" y="3273790"/>
-                  </a:lnTo>
-                  <a:lnTo>
-                    <a:pt x="5487969" y="3285636"/>
-                  </a:lnTo>
-                  <a:lnTo>
-                    <a:pt x="5564602" y="3297111"/>
-                  </a:lnTo>
-                  <a:lnTo>
-                    <a:pt x="5641234" y="3308228"/>
-                  </a:lnTo>
-                  <a:lnTo>
-                    <a:pt x="5717867" y="3318997"/>
-                  </a:lnTo>
-                  <a:lnTo>
-                    <a:pt x="5794499" y="3329429"/>
-                  </a:lnTo>
-                  <a:lnTo>
-                    <a:pt x="5871132" y="3339535"/>
-                  </a:lnTo>
-                  <a:lnTo>
-                    <a:pt x="5947764" y="3349326"/>
-                  </a:lnTo>
-                  <a:lnTo>
-                    <a:pt x="6024397" y="3358810"/>
-                  </a:lnTo>
-                  <a:lnTo>
-                    <a:pt x="6101029" y="3367997"/>
-                  </a:lnTo>
-                  <a:lnTo>
-                    <a:pt x="6177662" y="3376897"/>
-                  </a:lnTo>
-                  <a:lnTo>
-                    <a:pt x="6254294" y="3385519"/>
-                  </a:lnTo>
-                  <a:lnTo>
-                    <a:pt x="6330927" y="3393871"/>
-                  </a:lnTo>
-                  <a:lnTo>
-                    <a:pt x="6407560" y="3401963"/>
-                  </a:lnTo>
-                  <a:lnTo>
-                    <a:pt x="6484192" y="3409801"/>
-                  </a:lnTo>
-                  <a:lnTo>
-                    <a:pt x="6560825" y="3417394"/>
-                  </a:lnTo>
-                  <a:lnTo>
-                    <a:pt x="6637457" y="3424750"/>
-                  </a:lnTo>
-                  <a:lnTo>
-                    <a:pt x="6714090" y="3431875"/>
-                  </a:lnTo>
-                  <a:lnTo>
-                    <a:pt x="6790722" y="3438778"/>
-                  </a:lnTo>
-                  <a:lnTo>
-                    <a:pt x="6867355" y="3445465"/>
-                  </a:lnTo>
-                  <a:lnTo>
-                    <a:pt x="6943987" y="3451943"/>
-                  </a:lnTo>
-                  <a:lnTo>
-                    <a:pt x="7020620" y="3458219"/>
-                  </a:lnTo>
-                  <a:lnTo>
-                    <a:pt x="7097253" y="3464298"/>
-                  </a:lnTo>
-                  <a:lnTo>
-                    <a:pt x="7173885" y="3470187"/>
-                  </a:lnTo>
-                  <a:lnTo>
-                    <a:pt x="7250518" y="3475892"/>
-                  </a:lnTo>
-                  <a:lnTo>
-                    <a:pt x="7327150" y="3481418"/>
-                  </a:lnTo>
-                  <a:lnTo>
-                    <a:pt x="7403783" y="3486772"/>
-                  </a:lnTo>
-                  <a:lnTo>
-                    <a:pt x="7403783" y="3611111"/>
-                  </a:lnTo>
-                  <a:lnTo>
-                    <a:pt x="7327150" y="3608617"/>
-                  </a:lnTo>
-                  <a:lnTo>
-                    <a:pt x="7250518" y="3605973"/>
-                  </a:lnTo>
-                  <a:lnTo>
-                    <a:pt x="7173885" y="3603171"/>
-                  </a:lnTo>
-                  <a:lnTo>
-                    <a:pt x="7097253" y="3600200"/>
-                  </a:lnTo>
-                  <a:lnTo>
-                    <a:pt x="7020620" y="3597051"/>
-                  </a:lnTo>
-                  <a:lnTo>
-                    <a:pt x="6943987" y="3593713"/>
-                  </a:lnTo>
-                  <a:lnTo>
-                    <a:pt x="6867355" y="3590174"/>
-                  </a:lnTo>
-                  <a:lnTo>
-                    <a:pt x="6790722" y="3586423"/>
-                  </a:lnTo>
-                  <a:lnTo>
-                    <a:pt x="6714090" y="3582446"/>
-                  </a:lnTo>
-                  <a:lnTo>
-                    <a:pt x="6637457" y="3578231"/>
-                  </a:lnTo>
-                  <a:lnTo>
-                    <a:pt x="6560825" y="3573762"/>
-                  </a:lnTo>
-                  <a:lnTo>
-                    <a:pt x="6484192" y="3569026"/>
-                  </a:lnTo>
-                  <a:lnTo>
-                    <a:pt x="6407560" y="3564004"/>
-                  </a:lnTo>
-                  <a:lnTo>
-                    <a:pt x="6330927" y="3558682"/>
-                  </a:lnTo>
-                  <a:lnTo>
-                    <a:pt x="6254294" y="3553039"/>
-                  </a:lnTo>
-                  <a:lnTo>
-                    <a:pt x="6177662" y="3547058"/>
-                  </a:lnTo>
-                  <a:lnTo>
-                    <a:pt x="6101029" y="3540718"/>
-                  </a:lnTo>
-                  <a:lnTo>
-                    <a:pt x="6024397" y="3533997"/>
-                  </a:lnTo>
-                  <a:lnTo>
-                    <a:pt x="5947764" y="3526872"/>
-                  </a:lnTo>
-                  <a:lnTo>
-                    <a:pt x="5871132" y="3519319"/>
-                  </a:lnTo>
-                  <a:lnTo>
-                    <a:pt x="5794499" y="3511313"/>
-                  </a:lnTo>
-                  <a:lnTo>
-                    <a:pt x="5717867" y="3502827"/>
-                  </a:lnTo>
-                  <a:lnTo>
-                    <a:pt x="5641234" y="3493830"/>
-                  </a:lnTo>
-                  <a:lnTo>
-                    <a:pt x="5564602" y="3484294"/>
-                  </a:lnTo>
-                  <a:lnTo>
-                    <a:pt x="5487969" y="3474184"/>
-                  </a:lnTo>
-                  <a:lnTo>
-                    <a:pt x="5411336" y="3463468"/>
-                  </a:lnTo>
-                  <a:lnTo>
-                    <a:pt x="5334704" y="3452108"/>
-                  </a:lnTo>
-                  <a:lnTo>
-                    <a:pt x="5258071" y="3440066"/>
-                  </a:lnTo>
-                  <a:lnTo>
-                    <a:pt x="5181439" y="3427301"/>
-                  </a:lnTo>
-                  <a:lnTo>
-                    <a:pt x="5104806" y="3413769"/>
-                  </a:lnTo>
-                  <a:lnTo>
-                    <a:pt x="5028174" y="3399425"/>
-                  </a:lnTo>
-                  <a:lnTo>
-                    <a:pt x="4951541" y="3384219"/>
-                  </a:lnTo>
-                  <a:lnTo>
-                    <a:pt x="4874909" y="3368101"/>
-                  </a:lnTo>
-                  <a:lnTo>
-                    <a:pt x="4798276" y="3351014"/>
-                  </a:lnTo>
-                  <a:lnTo>
-                    <a:pt x="4721644" y="3332901"/>
-                  </a:lnTo>
-                  <a:lnTo>
-                    <a:pt x="4645011" y="3313701"/>
-                  </a:lnTo>
-                  <a:lnTo>
-                    <a:pt x="4568378" y="3293348"/>
-                  </a:lnTo>
-                  <a:lnTo>
-                    <a:pt x="4491746" y="3271772"/>
-                  </a:lnTo>
-                  <a:lnTo>
-                    <a:pt x="4415113" y="3248901"/>
-                  </a:lnTo>
-                  <a:lnTo>
-                    <a:pt x="4338481" y="3224657"/>
-                  </a:lnTo>
-                  <a:lnTo>
-                    <a:pt x="4261848" y="3198956"/>
-                  </a:lnTo>
-                  <a:lnTo>
-                    <a:pt x="4185216" y="3171713"/>
-                  </a:lnTo>
-                  <a:lnTo>
-                    <a:pt x="4108583" y="3142833"/>
-                  </a:lnTo>
-                  <a:lnTo>
-                    <a:pt x="4031951" y="3112219"/>
-                  </a:lnTo>
-                  <a:lnTo>
-                    <a:pt x="3955318" y="3079767"/>
-                  </a:lnTo>
-                  <a:lnTo>
-                    <a:pt x="3878685" y="3045366"/>
-                  </a:lnTo>
-                  <a:lnTo>
-                    <a:pt x="3802053" y="3008899"/>
-                  </a:lnTo>
-                  <a:lnTo>
-                    <a:pt x="3725420" y="2970243"/>
-                  </a:lnTo>
-                  <a:lnTo>
-                    <a:pt x="3648788" y="2929265"/>
-                  </a:lnTo>
-                  <a:lnTo>
-                    <a:pt x="3572155" y="2885827"/>
-                  </a:lnTo>
-                  <a:lnTo>
-                    <a:pt x="3495523" y="2839780"/>
-                  </a:lnTo>
-                  <a:lnTo>
-                    <a:pt x="3418890" y="2790968"/>
-                  </a:lnTo>
-                  <a:lnTo>
-                    <a:pt x="3342258" y="2759405"/>
-                  </a:lnTo>
-                  <a:lnTo>
-                    <a:pt x="3265625" y="2730574"/>
-                  </a:lnTo>
-                  <a:lnTo>
-                    <a:pt x="3188993" y="2700813"/>
-                  </a:lnTo>
-                  <a:lnTo>
-                    <a:pt x="3112360" y="2670090"/>
-                  </a:lnTo>
-                  <a:lnTo>
-                    <a:pt x="3035727" y="2638377"/>
-                  </a:lnTo>
-                  <a:lnTo>
-                    <a:pt x="2959095" y="2605640"/>
-                  </a:lnTo>
-                  <a:lnTo>
-                    <a:pt x="2882462" y="2571846"/>
-                  </a:lnTo>
-                  <a:lnTo>
-                    <a:pt x="2805830" y="2536961"/>
-                  </a:lnTo>
-                  <a:lnTo>
-                    <a:pt x="2729197" y="2500950"/>
-                  </a:lnTo>
-                  <a:lnTo>
-                    <a:pt x="2652565" y="2463777"/>
-                  </a:lnTo>
-                  <a:lnTo>
-                    <a:pt x="2575932" y="2425405"/>
-                  </a:lnTo>
-                  <a:lnTo>
-                    <a:pt x="2499300" y="2385793"/>
-                  </a:lnTo>
-                  <a:lnTo>
-                    <a:pt x="2422667" y="2344903"/>
-                  </a:lnTo>
-                  <a:lnTo>
-                    <a:pt x="2346034" y="2302694"/>
-                  </a:lnTo>
-                  <a:lnTo>
-                    <a:pt x="2269402" y="2259122"/>
-                  </a:lnTo>
-                  <a:lnTo>
-                    <a:pt x="2192769" y="2214143"/>
-                  </a:lnTo>
-                  <a:lnTo>
-                    <a:pt x="2116137" y="2167713"/>
-                  </a:lnTo>
-                  <a:lnTo>
-                    <a:pt x="2039504" y="2119784"/>
-                  </a:lnTo>
-                  <a:lnTo>
-                    <a:pt x="1962872" y="2070309"/>
-                  </a:lnTo>
-                  <a:lnTo>
-                    <a:pt x="1886239" y="2019236"/>
-                  </a:lnTo>
-                  <a:lnTo>
-                    <a:pt x="1809607" y="1966515"/>
-                  </a:lnTo>
-                  <a:lnTo>
-                    <a:pt x="1732974" y="1912092"/>
-                  </a:lnTo>
-                  <a:lnTo>
-                    <a:pt x="1656342" y="1855913"/>
-                  </a:lnTo>
-                  <a:lnTo>
-                    <a:pt x="1579709" y="1797920"/>
-                  </a:lnTo>
-                  <a:lnTo>
-                    <a:pt x="1503076" y="1738055"/>
-                  </a:lnTo>
-                  <a:lnTo>
-                    <a:pt x="1426444" y="1676259"/>
-                  </a:lnTo>
-                  <a:lnTo>
-                    <a:pt x="1349811" y="1612467"/>
-                  </a:lnTo>
-                  <a:lnTo>
-                    <a:pt x="1273179" y="1546617"/>
-                  </a:lnTo>
-                  <a:lnTo>
-                    <a:pt x="1196546" y="1478641"/>
-                  </a:lnTo>
-                  <a:lnTo>
-                    <a:pt x="1119914" y="1408471"/>
-                  </a:lnTo>
-                  <a:lnTo>
-                    <a:pt x="1043281" y="1336037"/>
-                  </a:lnTo>
-                  <a:lnTo>
-                    <a:pt x="966649" y="1261264"/>
-                  </a:lnTo>
-                  <a:lnTo>
-                    <a:pt x="890016" y="1184078"/>
-                  </a:lnTo>
-                  <a:lnTo>
-                    <a:pt x="813384" y="1104401"/>
-                  </a:lnTo>
-                  <a:lnTo>
-                    <a:pt x="736751" y="1022151"/>
-                  </a:lnTo>
-                  <a:lnTo>
-                    <a:pt x="660118" y="937248"/>
-                  </a:lnTo>
-                  <a:lnTo>
-                    <a:pt x="583486" y="849603"/>
-                  </a:lnTo>
-                  <a:lnTo>
-                    <a:pt x="506853" y="759130"/>
-                  </a:lnTo>
-                  <a:lnTo>
-                    <a:pt x="430221" y="665737"/>
-                  </a:lnTo>
-                  <a:lnTo>
-                    <a:pt x="353588" y="569329"/>
-                  </a:lnTo>
-                  <a:lnTo>
-                    <a:pt x="276956" y="469810"/>
-                  </a:lnTo>
-                  <a:lnTo>
-                    <a:pt x="200323" y="367078"/>
-                  </a:lnTo>
-                  <a:lnTo>
-                    <a:pt x="123691" y="261031"/>
-                  </a:lnTo>
-                  <a:lnTo>
-                    <a:pt x="47058" y="151560"/>
-                  </a:lnTo>
-                  <a:lnTo>
-                    <a:pt x="0" y="82167"/>
+                    <a:pt x="1579709" y="152475"/>
+                  </a:lnTo>
+                  <a:lnTo>
+                    <a:pt x="1656342" y="341185"/>
+                  </a:lnTo>
+                  <a:lnTo>
+                    <a:pt x="1732974" y="519204"/>
+                  </a:lnTo>
+                  <a:lnTo>
+                    <a:pt x="1809607" y="687138"/>
+                  </a:lnTo>
+                  <a:lnTo>
+                    <a:pt x="1886239" y="845560"/>
+                  </a:lnTo>
+                  <a:lnTo>
+                    <a:pt x="1962872" y="995008"/>
+                  </a:lnTo>
+                  <a:lnTo>
+                    <a:pt x="2039504" y="1135989"/>
+                  </a:lnTo>
+                  <a:lnTo>
+                    <a:pt x="2116137" y="1268984"/>
+                  </a:lnTo>
+                  <a:lnTo>
+                    <a:pt x="2192769" y="1394446"/>
+                  </a:lnTo>
+                  <a:lnTo>
+                    <a:pt x="2269402" y="1512800"/>
+                  </a:lnTo>
+                  <a:lnTo>
+                    <a:pt x="2346034" y="1624450"/>
+                  </a:lnTo>
+                  <a:lnTo>
+                    <a:pt x="2422667" y="1729775"/>
+                  </a:lnTo>
+                  <a:lnTo>
+                    <a:pt x="2499300" y="1829133"/>
+                  </a:lnTo>
+                  <a:lnTo>
+                    <a:pt x="2575932" y="1922863"/>
+                  </a:lnTo>
+                  <a:lnTo>
+                    <a:pt x="2652565" y="2011284"/>
+                  </a:lnTo>
+                  <a:lnTo>
+                    <a:pt x="2729197" y="2094696"/>
+                  </a:lnTo>
+                  <a:lnTo>
+                    <a:pt x="2805830" y="2173382"/>
+                  </a:lnTo>
+                  <a:lnTo>
+                    <a:pt x="2882462" y="2247612"/>
+                  </a:lnTo>
+                  <a:lnTo>
+                    <a:pt x="2959095" y="2317636"/>
+                  </a:lnTo>
+                  <a:lnTo>
+                    <a:pt x="3035727" y="2383693"/>
+                  </a:lnTo>
+                  <a:lnTo>
+                    <a:pt x="3112360" y="2446009"/>
+                  </a:lnTo>
+                  <a:lnTo>
+                    <a:pt x="3188993" y="2504795"/>
+                  </a:lnTo>
+                  <a:lnTo>
+                    <a:pt x="3265625" y="2560250"/>
+                  </a:lnTo>
+                  <a:lnTo>
+                    <a:pt x="3342258" y="2612564"/>
+                  </a:lnTo>
+                  <a:lnTo>
+                    <a:pt x="3418890" y="2658449"/>
+                  </a:lnTo>
+                  <a:lnTo>
+                    <a:pt x="3495523" y="2684254"/>
+                  </a:lnTo>
+                  <a:lnTo>
+                    <a:pt x="3572155" y="2709252"/>
+                  </a:lnTo>
+                  <a:lnTo>
+                    <a:pt x="3648788" y="2733469"/>
+                  </a:lnTo>
+                  <a:lnTo>
+                    <a:pt x="3725420" y="2756928"/>
+                  </a:lnTo>
+                  <a:lnTo>
+                    <a:pt x="3802053" y="2779654"/>
+                  </a:lnTo>
+                  <a:lnTo>
+                    <a:pt x="3878685" y="2801669"/>
+                  </a:lnTo>
+                  <a:lnTo>
+                    <a:pt x="3955318" y="2822996"/>
+                  </a:lnTo>
+                  <a:lnTo>
+                    <a:pt x="4031951" y="2843656"/>
+                  </a:lnTo>
+                  <a:lnTo>
+                    <a:pt x="4108583" y="2863670"/>
+                  </a:lnTo>
+                  <a:lnTo>
+                    <a:pt x="4185216" y="2883058"/>
+                  </a:lnTo>
+                  <a:lnTo>
+                    <a:pt x="4261848" y="2901841"/>
+                  </a:lnTo>
+                  <a:lnTo>
+                    <a:pt x="4338481" y="2920035"/>
+                  </a:lnTo>
+                  <a:lnTo>
+                    <a:pt x="4415113" y="2937661"/>
+                  </a:lnTo>
+                  <a:lnTo>
+                    <a:pt x="4491746" y="2954736"/>
+                  </a:lnTo>
+                  <a:lnTo>
+                    <a:pt x="4568378" y="2971277"/>
+                  </a:lnTo>
+                  <a:lnTo>
+                    <a:pt x="4645011" y="2987301"/>
+                  </a:lnTo>
+                  <a:lnTo>
+                    <a:pt x="4721644" y="3002823"/>
+                  </a:lnTo>
+                  <a:lnTo>
+                    <a:pt x="4798276" y="3017860"/>
+                  </a:lnTo>
+                  <a:lnTo>
+                    <a:pt x="4874909" y="3032428"/>
+                  </a:lnTo>
+                  <a:lnTo>
+                    <a:pt x="4951541" y="3046539"/>
+                  </a:lnTo>
+                  <a:lnTo>
+                    <a:pt x="5028174" y="3060210"/>
+                  </a:lnTo>
+                  <a:lnTo>
+                    <a:pt x="5104806" y="3073453"/>
+                  </a:lnTo>
+                  <a:lnTo>
+                    <a:pt x="5181439" y="3086282"/>
+                  </a:lnTo>
+                  <a:lnTo>
+                    <a:pt x="5258071" y="3098709"/>
+                  </a:lnTo>
+                  <a:lnTo>
+                    <a:pt x="5334704" y="3110748"/>
+                  </a:lnTo>
+                  <a:lnTo>
+                    <a:pt x="5411336" y="3122411"/>
+                  </a:lnTo>
+                  <a:lnTo>
+                    <a:pt x="5487969" y="3133709"/>
+                  </a:lnTo>
+                  <a:lnTo>
+                    <a:pt x="5564602" y="3144654"/>
+                  </a:lnTo>
+                  <a:lnTo>
+                    <a:pt x="5641234" y="3155257"/>
+                  </a:lnTo>
+                  <a:lnTo>
+                    <a:pt x="5717867" y="3165528"/>
+                  </a:lnTo>
+                  <a:lnTo>
+                    <a:pt x="5794499" y="3175478"/>
+                  </a:lnTo>
+                  <a:lnTo>
+                    <a:pt x="5871132" y="3185116"/>
+                  </a:lnTo>
+                  <a:lnTo>
+                    <a:pt x="5947764" y="3194454"/>
+                  </a:lnTo>
+                  <a:lnTo>
+                    <a:pt x="6024397" y="3203499"/>
+                  </a:lnTo>
+                  <a:lnTo>
+                    <a:pt x="6101029" y="3212262"/>
+                  </a:lnTo>
+                  <a:lnTo>
+                    <a:pt x="6177662" y="3220751"/>
+                  </a:lnTo>
+                  <a:lnTo>
+                    <a:pt x="6254294" y="3228974"/>
+                  </a:lnTo>
+                  <a:lnTo>
+                    <a:pt x="6330927" y="3236940"/>
+                  </a:lnTo>
+                  <a:lnTo>
+                    <a:pt x="6407560" y="3244657"/>
+                  </a:lnTo>
+                  <a:lnTo>
+                    <a:pt x="6484192" y="3252133"/>
+                  </a:lnTo>
+                  <a:lnTo>
+                    <a:pt x="6560825" y="3259375"/>
+                  </a:lnTo>
+                  <a:lnTo>
+                    <a:pt x="6637457" y="3266390"/>
+                  </a:lnTo>
+                  <a:lnTo>
+                    <a:pt x="6714090" y="3273187"/>
+                  </a:lnTo>
+                  <a:lnTo>
+                    <a:pt x="6790722" y="3279770"/>
+                  </a:lnTo>
+                  <a:lnTo>
+                    <a:pt x="6867355" y="3286148"/>
+                  </a:lnTo>
+                  <a:lnTo>
+                    <a:pt x="6943987" y="3292327"/>
+                  </a:lnTo>
+                  <a:lnTo>
+                    <a:pt x="7020620" y="3298312"/>
+                  </a:lnTo>
+                  <a:lnTo>
+                    <a:pt x="7097253" y="3304110"/>
+                  </a:lnTo>
+                  <a:lnTo>
+                    <a:pt x="7173885" y="3309727"/>
+                  </a:lnTo>
+                  <a:lnTo>
+                    <a:pt x="7250518" y="3315168"/>
+                  </a:lnTo>
+                  <a:lnTo>
+                    <a:pt x="7327150" y="3320439"/>
+                  </a:lnTo>
+                  <a:lnTo>
+                    <a:pt x="7403783" y="3325545"/>
+                  </a:lnTo>
+                  <a:lnTo>
+                    <a:pt x="7403783" y="3444135"/>
+                  </a:lnTo>
+                  <a:lnTo>
+                    <a:pt x="7327150" y="3441756"/>
+                  </a:lnTo>
+                  <a:lnTo>
+                    <a:pt x="7250518" y="3439234"/>
+                  </a:lnTo>
+                  <a:lnTo>
+                    <a:pt x="7173885" y="3436562"/>
+                  </a:lnTo>
+                  <a:lnTo>
+                    <a:pt x="7097253" y="3433728"/>
+                  </a:lnTo>
+                  <a:lnTo>
+                    <a:pt x="7020620" y="3430725"/>
+                  </a:lnTo>
+                  <a:lnTo>
+                    <a:pt x="6943987" y="3427541"/>
+                  </a:lnTo>
+                  <a:lnTo>
+                    <a:pt x="6867355" y="3424165"/>
+                  </a:lnTo>
+                  <a:lnTo>
+                    <a:pt x="6790722" y="3420588"/>
+                  </a:lnTo>
+                  <a:lnTo>
+                    <a:pt x="6714090" y="3416795"/>
+                  </a:lnTo>
+                  <a:lnTo>
+                    <a:pt x="6637457" y="3412775"/>
+                  </a:lnTo>
+                  <a:lnTo>
+                    <a:pt x="6560825" y="3408513"/>
+                  </a:lnTo>
+                  <a:lnTo>
+                    <a:pt x="6484192" y="3403995"/>
+                  </a:lnTo>
+                  <a:lnTo>
+                    <a:pt x="6407560" y="3399206"/>
+                  </a:lnTo>
+                  <a:lnTo>
+                    <a:pt x="6330927" y="3394129"/>
+                  </a:lnTo>
+                  <a:lnTo>
+                    <a:pt x="6254294" y="3388748"/>
+                  </a:lnTo>
+                  <a:lnTo>
+                    <a:pt x="6177662" y="3383043"/>
+                  </a:lnTo>
+                  <a:lnTo>
+                    <a:pt x="6101029" y="3376996"/>
+                  </a:lnTo>
+                  <a:lnTo>
+                    <a:pt x="6024397" y="3370586"/>
+                  </a:lnTo>
+                  <a:lnTo>
+                    <a:pt x="5947764" y="3363791"/>
+                  </a:lnTo>
+                  <a:lnTo>
+                    <a:pt x="5871132" y="3356587"/>
+                  </a:lnTo>
+                  <a:lnTo>
+                    <a:pt x="5794499" y="3348952"/>
+                  </a:lnTo>
+                  <a:lnTo>
+                    <a:pt x="5717867" y="3340857"/>
+                  </a:lnTo>
+                  <a:lnTo>
+                    <a:pt x="5641234" y="3332277"/>
+                  </a:lnTo>
+                  <a:lnTo>
+                    <a:pt x="5564602" y="3323181"/>
+                  </a:lnTo>
+                  <a:lnTo>
+                    <a:pt x="5487969" y="3313539"/>
+                  </a:lnTo>
+                  <a:lnTo>
+                    <a:pt x="5411336" y="3303318"/>
+                  </a:lnTo>
+                  <a:lnTo>
+                    <a:pt x="5334704" y="3292484"/>
+                  </a:lnTo>
+                  <a:lnTo>
+                    <a:pt x="5258071" y="3280999"/>
+                  </a:lnTo>
+                  <a:lnTo>
+                    <a:pt x="5181439" y="3268824"/>
+                  </a:lnTo>
+                  <a:lnTo>
+                    <a:pt x="5104806" y="3255918"/>
+                  </a:lnTo>
+                  <a:lnTo>
+                    <a:pt x="5028174" y="3242237"/>
+                  </a:lnTo>
+                  <a:lnTo>
+                    <a:pt x="4951541" y="3227734"/>
+                  </a:lnTo>
+                  <a:lnTo>
+                    <a:pt x="4874909" y="3212361"/>
+                  </a:lnTo>
+                  <a:lnTo>
+                    <a:pt x="4798276" y="3196064"/>
+                  </a:lnTo>
+                  <a:lnTo>
+                    <a:pt x="4721644" y="3178789"/>
+                  </a:lnTo>
+                  <a:lnTo>
+                    <a:pt x="4645011" y="3160477"/>
+                  </a:lnTo>
+                  <a:lnTo>
+                    <a:pt x="4568378" y="3141065"/>
+                  </a:lnTo>
+                  <a:lnTo>
+                    <a:pt x="4491746" y="3120487"/>
+                  </a:lnTo>
+                  <a:lnTo>
+                    <a:pt x="4415113" y="3098673"/>
+                  </a:lnTo>
+                  <a:lnTo>
+                    <a:pt x="4338481" y="3075550"/>
+                  </a:lnTo>
+                  <a:lnTo>
+                    <a:pt x="4261848" y="3051038"/>
+                  </a:lnTo>
+                  <a:lnTo>
+                    <a:pt x="4185216" y="3025054"/>
+                  </a:lnTo>
+                  <a:lnTo>
+                    <a:pt x="4108583" y="2997510"/>
+                  </a:lnTo>
+                  <a:lnTo>
+                    <a:pt x="4031951" y="2968311"/>
+                  </a:lnTo>
+                  <a:lnTo>
+                    <a:pt x="3955318" y="2937360"/>
+                  </a:lnTo>
+                  <a:lnTo>
+                    <a:pt x="3878685" y="2904550"/>
+                  </a:lnTo>
+                  <a:lnTo>
+                    <a:pt x="3802053" y="2869769"/>
+                  </a:lnTo>
+                  <a:lnTo>
+                    <a:pt x="3725420" y="2832900"/>
+                  </a:lnTo>
+                  <a:lnTo>
+                    <a:pt x="3648788" y="2793817"/>
+                  </a:lnTo>
+                  <a:lnTo>
+                    <a:pt x="3572155" y="2752387"/>
+                  </a:lnTo>
+                  <a:lnTo>
+                    <a:pt x="3495523" y="2708470"/>
+                  </a:lnTo>
+                  <a:lnTo>
+                    <a:pt x="3418890" y="2661915"/>
+                  </a:lnTo>
+                  <a:lnTo>
+                    <a:pt x="3342258" y="2631811"/>
+                  </a:lnTo>
+                  <a:lnTo>
+                    <a:pt x="3265625" y="2604313"/>
+                  </a:lnTo>
+                  <a:lnTo>
+                    <a:pt x="3188993" y="2575928"/>
+                  </a:lnTo>
+                  <a:lnTo>
+                    <a:pt x="3112360" y="2546626"/>
+                  </a:lnTo>
+                  <a:lnTo>
+                    <a:pt x="3035727" y="2516379"/>
+                  </a:lnTo>
+                  <a:lnTo>
+                    <a:pt x="2959095" y="2485156"/>
+                  </a:lnTo>
+                  <a:lnTo>
+                    <a:pt x="2882462" y="2452924"/>
+                  </a:lnTo>
+                  <a:lnTo>
+                    <a:pt x="2805830" y="2419653"/>
+                  </a:lnTo>
+                  <a:lnTo>
+                    <a:pt x="2729197" y="2385307"/>
+                  </a:lnTo>
+                  <a:lnTo>
+                    <a:pt x="2652565" y="2349853"/>
+                  </a:lnTo>
+                  <a:lnTo>
+                    <a:pt x="2575932" y="2313255"/>
+                  </a:lnTo>
+                  <a:lnTo>
+                    <a:pt x="2499300" y="2275475"/>
+                  </a:lnTo>
+                  <a:lnTo>
+                    <a:pt x="2422667" y="2236476"/>
+                  </a:lnTo>
+                  <a:lnTo>
+                    <a:pt x="2346034" y="2196218"/>
+                  </a:lnTo>
+                  <a:lnTo>
+                    <a:pt x="2269402" y="2154661"/>
+                  </a:lnTo>
+                  <a:lnTo>
+                    <a:pt x="2192769" y="2111762"/>
+                  </a:lnTo>
+                  <a:lnTo>
+                    <a:pt x="2116137" y="2067479"/>
+                  </a:lnTo>
+                  <a:lnTo>
+                    <a:pt x="2039504" y="2021766"/>
+                  </a:lnTo>
+                  <a:lnTo>
+                    <a:pt x="1962872" y="1974578"/>
+                  </a:lnTo>
+                  <a:lnTo>
+                    <a:pt x="1886239" y="1925867"/>
+                  </a:lnTo>
+                  <a:lnTo>
+                    <a:pt x="1809607" y="1875584"/>
+                  </a:lnTo>
+                  <a:lnTo>
+                    <a:pt x="1732974" y="1823677"/>
+                  </a:lnTo>
+                  <a:lnTo>
+                    <a:pt x="1656342" y="1770096"/>
+                  </a:lnTo>
+                  <a:lnTo>
+                    <a:pt x="1579709" y="1714785"/>
+                  </a:lnTo>
+                  <a:lnTo>
+                    <a:pt x="1503076" y="1657688"/>
+                  </a:lnTo>
+                  <a:lnTo>
+                    <a:pt x="1426444" y="1598749"/>
+                  </a:lnTo>
+                  <a:lnTo>
+                    <a:pt x="1349811" y="1537907"/>
+                  </a:lnTo>
+                  <a:lnTo>
+                    <a:pt x="1273179" y="1475102"/>
+                  </a:lnTo>
+                  <a:lnTo>
+                    <a:pt x="1196546" y="1410269"/>
+                  </a:lnTo>
+                  <a:lnTo>
+                    <a:pt x="1119914" y="1343344"/>
+                  </a:lnTo>
+                  <a:lnTo>
+                    <a:pt x="1043281" y="1274259"/>
+                  </a:lnTo>
+                  <a:lnTo>
+                    <a:pt x="966649" y="1202944"/>
+                  </a:lnTo>
+                  <a:lnTo>
+                    <a:pt x="890016" y="1129327"/>
+                  </a:lnTo>
+                  <a:lnTo>
+                    <a:pt x="813384" y="1053333"/>
+                  </a:lnTo>
+                  <a:lnTo>
+                    <a:pt x="736751" y="974888"/>
+                  </a:lnTo>
+                  <a:lnTo>
+                    <a:pt x="660118" y="893910"/>
+                  </a:lnTo>
+                  <a:lnTo>
+                    <a:pt x="583486" y="810318"/>
+                  </a:lnTo>
+                  <a:lnTo>
+                    <a:pt x="506853" y="724028"/>
+                  </a:lnTo>
+                  <a:lnTo>
+                    <a:pt x="430221" y="634953"/>
+                  </a:lnTo>
+                  <a:lnTo>
+                    <a:pt x="353588" y="543004"/>
+                  </a:lnTo>
+                  <a:lnTo>
+                    <a:pt x="276956" y="448086"/>
+                  </a:lnTo>
+                  <a:lnTo>
+                    <a:pt x="200323" y="350104"/>
+                  </a:lnTo>
+                  <a:lnTo>
+                    <a:pt x="123691" y="248961"/>
+                  </a:lnTo>
+                  <a:lnTo>
+                    <a:pt x="47058" y="144552"/>
+                  </a:lnTo>
+                  <a:lnTo>
+                    <a:pt x="0" y="78367"/>
                   </a:lnTo>
                   <a:lnTo>
                     <a:pt x="0" y="0"/>
@@ -3564,246 +3564,246 @@
           </p:nvSpPr>
           <p:spPr>
             <a:xfrm>
-              <a:off x="2338816" y="1896563"/>
-              <a:ext cx="5882484" cy="3486772"/>
+              <a:off x="2338816" y="2073503"/>
+              <a:ext cx="5882484" cy="3325545"/>
             </a:xfrm>
             <a:custGeom>
               <a:avLst/>
               <a:pathLst>
-                <a:path w="5882484" h="3486772">
+                <a:path w="5882484" h="3325545">
                   <a:moveTo>
                     <a:pt x="0" y="0"/>
                   </a:moveTo>
                   <a:lnTo>
-                    <a:pt x="58411" y="159868"/>
-                  </a:lnTo>
-                  <a:lnTo>
-                    <a:pt x="135043" y="357726"/>
-                  </a:lnTo>
-                  <a:lnTo>
-                    <a:pt x="211676" y="544375"/>
-                  </a:lnTo>
-                  <a:lnTo>
-                    <a:pt x="288308" y="720452"/>
-                  </a:lnTo>
-                  <a:lnTo>
-                    <a:pt x="364941" y="886554"/>
-                  </a:lnTo>
-                  <a:lnTo>
-                    <a:pt x="441573" y="1043247"/>
-                  </a:lnTo>
-                  <a:lnTo>
-                    <a:pt x="518206" y="1191063"/>
-                  </a:lnTo>
-                  <a:lnTo>
-                    <a:pt x="594838" y="1330506"/>
-                  </a:lnTo>
-                  <a:lnTo>
-                    <a:pt x="671471" y="1462050"/>
-                  </a:lnTo>
-                  <a:lnTo>
-                    <a:pt x="748104" y="1586143"/>
-                  </a:lnTo>
-                  <a:lnTo>
-                    <a:pt x="824736" y="1703205"/>
-                  </a:lnTo>
-                  <a:lnTo>
-                    <a:pt x="901369" y="1813637"/>
-                  </a:lnTo>
-                  <a:lnTo>
-                    <a:pt x="978001" y="1917812"/>
-                  </a:lnTo>
-                  <a:lnTo>
-                    <a:pt x="1054634" y="2016087"/>
-                  </a:lnTo>
-                  <a:lnTo>
-                    <a:pt x="1131266" y="2108794"/>
-                  </a:lnTo>
-                  <a:lnTo>
-                    <a:pt x="1207899" y="2196250"/>
-                  </a:lnTo>
-                  <a:lnTo>
-                    <a:pt x="1284531" y="2278751"/>
-                  </a:lnTo>
-                  <a:lnTo>
-                    <a:pt x="1361164" y="2356579"/>
-                  </a:lnTo>
-                  <a:lnTo>
-                    <a:pt x="1437797" y="2429998"/>
-                  </a:lnTo>
-                  <a:lnTo>
-                    <a:pt x="1514429" y="2499258"/>
-                  </a:lnTo>
-                  <a:lnTo>
-                    <a:pt x="1591062" y="2564595"/>
-                  </a:lnTo>
-                  <a:lnTo>
-                    <a:pt x="1667694" y="2626230"/>
-                  </a:lnTo>
-                  <a:lnTo>
-                    <a:pt x="1744327" y="2684374"/>
-                  </a:lnTo>
-                  <a:lnTo>
-                    <a:pt x="1820959" y="2739225"/>
-                  </a:lnTo>
-                  <a:lnTo>
-                    <a:pt x="1897592" y="2787334"/>
-                  </a:lnTo>
-                  <a:lnTo>
-                    <a:pt x="1974224" y="2814390"/>
-                  </a:lnTo>
-                  <a:lnTo>
-                    <a:pt x="2050857" y="2840600"/>
-                  </a:lnTo>
-                  <a:lnTo>
-                    <a:pt x="2127489" y="2865991"/>
-                  </a:lnTo>
-                  <a:lnTo>
-                    <a:pt x="2204122" y="2890588"/>
-                  </a:lnTo>
-                  <a:lnTo>
-                    <a:pt x="2280755" y="2914415"/>
-                  </a:lnTo>
-                  <a:lnTo>
-                    <a:pt x="2357387" y="2937498"/>
-                  </a:lnTo>
-                  <a:lnTo>
-                    <a:pt x="2434020" y="2959859"/>
-                  </a:lnTo>
-                  <a:lnTo>
-                    <a:pt x="2510652" y="2981521"/>
-                  </a:lnTo>
-                  <a:lnTo>
-                    <a:pt x="2587285" y="3002505"/>
-                  </a:lnTo>
-                  <a:lnTo>
-                    <a:pt x="2663917" y="3022833"/>
-                  </a:lnTo>
-                  <a:lnTo>
-                    <a:pt x="2740550" y="3042526"/>
-                  </a:lnTo>
-                  <a:lnTo>
-                    <a:pt x="2817182" y="3061603"/>
-                  </a:lnTo>
-                  <a:lnTo>
-                    <a:pt x="2893815" y="3080083"/>
-                  </a:lnTo>
-                  <a:lnTo>
-                    <a:pt x="2970447" y="3097986"/>
-                  </a:lnTo>
-                  <a:lnTo>
-                    <a:pt x="3047080" y="3115328"/>
-                  </a:lnTo>
-                  <a:lnTo>
-                    <a:pt x="3123713" y="3132129"/>
-                  </a:lnTo>
-                  <a:lnTo>
-                    <a:pt x="3200345" y="3148404"/>
-                  </a:lnTo>
-                  <a:lnTo>
-                    <a:pt x="3276978" y="3164171"/>
-                  </a:lnTo>
-                  <a:lnTo>
-                    <a:pt x="3353610" y="3179444"/>
-                  </a:lnTo>
-                  <a:lnTo>
-                    <a:pt x="3430243" y="3194240"/>
-                  </a:lnTo>
-                  <a:lnTo>
-                    <a:pt x="3506875" y="3208573"/>
-                  </a:lnTo>
-                  <a:lnTo>
-                    <a:pt x="3583508" y="3222458"/>
-                  </a:lnTo>
-                  <a:lnTo>
-                    <a:pt x="3660140" y="3235909"/>
-                  </a:lnTo>
-                  <a:lnTo>
-                    <a:pt x="3736773" y="3248939"/>
-                  </a:lnTo>
-                  <a:lnTo>
-                    <a:pt x="3813406" y="3261562"/>
-                  </a:lnTo>
-                  <a:lnTo>
-                    <a:pt x="3890038" y="3273790"/>
-                  </a:lnTo>
-                  <a:lnTo>
-                    <a:pt x="3966671" y="3285636"/>
-                  </a:lnTo>
-                  <a:lnTo>
-                    <a:pt x="4043303" y="3297111"/>
-                  </a:lnTo>
-                  <a:lnTo>
-                    <a:pt x="4119936" y="3308228"/>
-                  </a:lnTo>
-                  <a:lnTo>
-                    <a:pt x="4196568" y="3318997"/>
-                  </a:lnTo>
-                  <a:lnTo>
-                    <a:pt x="4273201" y="3329429"/>
-                  </a:lnTo>
-                  <a:lnTo>
-                    <a:pt x="4349833" y="3339535"/>
-                  </a:lnTo>
-                  <a:lnTo>
-                    <a:pt x="4426466" y="3349326"/>
-                  </a:lnTo>
-                  <a:lnTo>
-                    <a:pt x="4503098" y="3358810"/>
-                  </a:lnTo>
-                  <a:lnTo>
-                    <a:pt x="4579731" y="3367997"/>
-                  </a:lnTo>
-                  <a:lnTo>
-                    <a:pt x="4656364" y="3376897"/>
-                  </a:lnTo>
-                  <a:lnTo>
-                    <a:pt x="4732996" y="3385519"/>
-                  </a:lnTo>
-                  <a:lnTo>
-                    <a:pt x="4809629" y="3393871"/>
-                  </a:lnTo>
-                  <a:lnTo>
-                    <a:pt x="4886261" y="3401963"/>
-                  </a:lnTo>
-                  <a:lnTo>
-                    <a:pt x="4962894" y="3409801"/>
-                  </a:lnTo>
-                  <a:lnTo>
-                    <a:pt x="5039526" y="3417394"/>
-                  </a:lnTo>
-                  <a:lnTo>
-                    <a:pt x="5116159" y="3424750"/>
-                  </a:lnTo>
-                  <a:lnTo>
-                    <a:pt x="5192791" y="3431875"/>
-                  </a:lnTo>
-                  <a:lnTo>
-                    <a:pt x="5269424" y="3438778"/>
-                  </a:lnTo>
-                  <a:lnTo>
-                    <a:pt x="5346057" y="3445465"/>
-                  </a:lnTo>
-                  <a:lnTo>
-                    <a:pt x="5422689" y="3451943"/>
-                  </a:lnTo>
-                  <a:lnTo>
-                    <a:pt x="5499322" y="3458219"/>
-                  </a:lnTo>
-                  <a:lnTo>
-                    <a:pt x="5575954" y="3464298"/>
-                  </a:lnTo>
-                  <a:lnTo>
-                    <a:pt x="5652587" y="3470187"/>
-                  </a:lnTo>
-                  <a:lnTo>
-                    <a:pt x="5729219" y="3475892"/>
-                  </a:lnTo>
-                  <a:lnTo>
-                    <a:pt x="5805852" y="3481418"/>
-                  </a:lnTo>
-                  <a:lnTo>
-                    <a:pt x="5882484" y="3486772"/>
+                    <a:pt x="58411" y="152475"/>
+                  </a:lnTo>
+                  <a:lnTo>
+                    <a:pt x="135043" y="341185"/>
+                  </a:lnTo>
+                  <a:lnTo>
+                    <a:pt x="211676" y="519204"/>
+                  </a:lnTo>
+                  <a:lnTo>
+                    <a:pt x="288308" y="687138"/>
+                  </a:lnTo>
+                  <a:lnTo>
+                    <a:pt x="364941" y="845560"/>
+                  </a:lnTo>
+                  <a:lnTo>
+                    <a:pt x="441573" y="995008"/>
+                  </a:lnTo>
+                  <a:lnTo>
+                    <a:pt x="518206" y="1135989"/>
+                  </a:lnTo>
+                  <a:lnTo>
+                    <a:pt x="594838" y="1268984"/>
+                  </a:lnTo>
+                  <a:lnTo>
+                    <a:pt x="671471" y="1394446"/>
+                  </a:lnTo>
+                  <a:lnTo>
+                    <a:pt x="748104" y="1512800"/>
+                  </a:lnTo>
+                  <a:lnTo>
+                    <a:pt x="824736" y="1624450"/>
+                  </a:lnTo>
+                  <a:lnTo>
+                    <a:pt x="901369" y="1729775"/>
+                  </a:lnTo>
+                  <a:lnTo>
+                    <a:pt x="978001" y="1829133"/>
+                  </a:lnTo>
+                  <a:lnTo>
+                    <a:pt x="1054634" y="1922863"/>
+                  </a:lnTo>
+                  <a:lnTo>
+                    <a:pt x="1131266" y="2011284"/>
+                  </a:lnTo>
+                  <a:lnTo>
+                    <a:pt x="1207899" y="2094696"/>
+                  </a:lnTo>
+                  <a:lnTo>
+                    <a:pt x="1284531" y="2173382"/>
+                  </a:lnTo>
+                  <a:lnTo>
+                    <a:pt x="1361164" y="2247612"/>
+                  </a:lnTo>
+                  <a:lnTo>
+                    <a:pt x="1437797" y="2317636"/>
+                  </a:lnTo>
+                  <a:lnTo>
+                    <a:pt x="1514429" y="2383693"/>
+                  </a:lnTo>
+                  <a:lnTo>
+                    <a:pt x="1591062" y="2446009"/>
+                  </a:lnTo>
+                  <a:lnTo>
+                    <a:pt x="1667694" y="2504795"/>
+                  </a:lnTo>
+                  <a:lnTo>
+                    <a:pt x="1744327" y="2560250"/>
+                  </a:lnTo>
+                  <a:lnTo>
+                    <a:pt x="1820959" y="2612564"/>
+                  </a:lnTo>
+                  <a:lnTo>
+                    <a:pt x="1897592" y="2658449"/>
+                  </a:lnTo>
+                  <a:lnTo>
+                    <a:pt x="1974224" y="2684254"/>
+                  </a:lnTo>
+                  <a:lnTo>
+                    <a:pt x="2050857" y="2709252"/>
+                  </a:lnTo>
+                  <a:lnTo>
+                    <a:pt x="2127489" y="2733469"/>
+                  </a:lnTo>
+                  <a:lnTo>
+                    <a:pt x="2204122" y="2756928"/>
+                  </a:lnTo>
+                  <a:lnTo>
+                    <a:pt x="2280755" y="2779654"/>
+                  </a:lnTo>
+                  <a:lnTo>
+                    <a:pt x="2357387" y="2801669"/>
+                  </a:lnTo>
+                  <a:lnTo>
+                    <a:pt x="2434020" y="2822996"/>
+                  </a:lnTo>
+                  <a:lnTo>
+                    <a:pt x="2510652" y="2843656"/>
+                  </a:lnTo>
+                  <a:lnTo>
+                    <a:pt x="2587285" y="2863670"/>
+                  </a:lnTo>
+                  <a:lnTo>
+                    <a:pt x="2663917" y="2883058"/>
+                  </a:lnTo>
+                  <a:lnTo>
+                    <a:pt x="2740550" y="2901841"/>
+                  </a:lnTo>
+                  <a:lnTo>
+                    <a:pt x="2817182" y="2920035"/>
+                  </a:lnTo>
+                  <a:lnTo>
+                    <a:pt x="2893815" y="2937661"/>
+                  </a:lnTo>
+                  <a:lnTo>
+                    <a:pt x="2970447" y="2954736"/>
+                  </a:lnTo>
+                  <a:lnTo>
+                    <a:pt x="3047080" y="2971277"/>
+                  </a:lnTo>
+                  <a:lnTo>
+                    <a:pt x="3123713" y="2987301"/>
+                  </a:lnTo>
+                  <a:lnTo>
+                    <a:pt x="3200345" y="3002823"/>
+                  </a:lnTo>
+                  <a:lnTo>
+                    <a:pt x="3276978" y="3017860"/>
+                  </a:lnTo>
+                  <a:lnTo>
+                    <a:pt x="3353610" y="3032428"/>
+                  </a:lnTo>
+                  <a:lnTo>
+                    <a:pt x="3430243" y="3046539"/>
+                  </a:lnTo>
+                  <a:lnTo>
+                    <a:pt x="3506875" y="3060210"/>
+                  </a:lnTo>
+                  <a:lnTo>
+                    <a:pt x="3583508" y="3073453"/>
+                  </a:lnTo>
+                  <a:lnTo>
+                    <a:pt x="3660140" y="3086282"/>
+                  </a:lnTo>
+                  <a:lnTo>
+                    <a:pt x="3736773" y="3098709"/>
+                  </a:lnTo>
+                  <a:lnTo>
+                    <a:pt x="3813406" y="3110748"/>
+                  </a:lnTo>
+                  <a:lnTo>
+                    <a:pt x="3890038" y="3122411"/>
+                  </a:lnTo>
+                  <a:lnTo>
+                    <a:pt x="3966671" y="3133709"/>
+                  </a:lnTo>
+                  <a:lnTo>
+                    <a:pt x="4043303" y="3144654"/>
+                  </a:lnTo>
+                  <a:lnTo>
+                    <a:pt x="4119936" y="3155257"/>
+                  </a:lnTo>
+                  <a:lnTo>
+                    <a:pt x="4196568" y="3165528"/>
+                  </a:lnTo>
+                  <a:lnTo>
+                    <a:pt x="4273201" y="3175478"/>
+                  </a:lnTo>
+                  <a:lnTo>
+                    <a:pt x="4349833" y="3185116"/>
+                  </a:lnTo>
+                  <a:lnTo>
+                    <a:pt x="4426466" y="3194454"/>
+                  </a:lnTo>
+                  <a:lnTo>
+                    <a:pt x="4503098" y="3203499"/>
+                  </a:lnTo>
+                  <a:lnTo>
+                    <a:pt x="4579731" y="3212262"/>
+                  </a:lnTo>
+                  <a:lnTo>
+                    <a:pt x="4656364" y="3220751"/>
+                  </a:lnTo>
+                  <a:lnTo>
+                    <a:pt x="4732996" y="3228974"/>
+                  </a:lnTo>
+                  <a:lnTo>
+                    <a:pt x="4809629" y="3236940"/>
+                  </a:lnTo>
+                  <a:lnTo>
+                    <a:pt x="4886261" y="3244657"/>
+                  </a:lnTo>
+                  <a:lnTo>
+                    <a:pt x="4962894" y="3252133"/>
+                  </a:lnTo>
+                  <a:lnTo>
+                    <a:pt x="5039526" y="3259375"/>
+                  </a:lnTo>
+                  <a:lnTo>
+                    <a:pt x="5116159" y="3266390"/>
+                  </a:lnTo>
+                  <a:lnTo>
+                    <a:pt x="5192791" y="3273187"/>
+                  </a:lnTo>
+                  <a:lnTo>
+                    <a:pt x="5269424" y="3279770"/>
+                  </a:lnTo>
+                  <a:lnTo>
+                    <a:pt x="5346057" y="3286148"/>
+                  </a:lnTo>
+                  <a:lnTo>
+                    <a:pt x="5422689" y="3292327"/>
+                  </a:lnTo>
+                  <a:lnTo>
+                    <a:pt x="5499322" y="3298312"/>
+                  </a:lnTo>
+                  <a:lnTo>
+                    <a:pt x="5575954" y="3304110"/>
+                  </a:lnTo>
+                  <a:lnTo>
+                    <a:pt x="5652587" y="3309727"/>
+                  </a:lnTo>
+                  <a:lnTo>
+                    <a:pt x="5729219" y="3315168"/>
+                  </a:lnTo>
+                  <a:lnTo>
+                    <a:pt x="5805852" y="3320439"/>
+                  </a:lnTo>
+                  <a:lnTo>
+                    <a:pt x="5882484" y="3325545"/>
                   </a:lnTo>
                 </a:path>
               </a:pathLst>
@@ -3823,303 +3823,303 @@
           </p:nvSpPr>
           <p:spPr>
             <a:xfrm>
-              <a:off x="817517" y="1978730"/>
-              <a:ext cx="7403783" cy="3528944"/>
+              <a:off x="817517" y="2151870"/>
+              <a:ext cx="7403783" cy="3365767"/>
             </a:xfrm>
             <a:custGeom>
               <a:avLst/>
               <a:pathLst>
-                <a:path w="7403783" h="3528944">
+                <a:path w="7403783" h="3365767">
                   <a:moveTo>
-                    <a:pt x="7403783" y="3528944"/>
+                    <a:pt x="7403783" y="3365767"/>
                   </a:moveTo>
                   <a:lnTo>
-                    <a:pt x="7327150" y="3526450"/>
-                  </a:lnTo>
-                  <a:lnTo>
-                    <a:pt x="7250518" y="3523806"/>
-                  </a:lnTo>
-                  <a:lnTo>
-                    <a:pt x="7173885" y="3521003"/>
-                  </a:lnTo>
-                  <a:lnTo>
-                    <a:pt x="7097253" y="3518033"/>
-                  </a:lnTo>
-                  <a:lnTo>
-                    <a:pt x="7020620" y="3514884"/>
-                  </a:lnTo>
-                  <a:lnTo>
-                    <a:pt x="6943987" y="3511545"/>
-                  </a:lnTo>
-                  <a:lnTo>
-                    <a:pt x="6867355" y="3508006"/>
-                  </a:lnTo>
-                  <a:lnTo>
-                    <a:pt x="6790722" y="3504255"/>
-                  </a:lnTo>
-                  <a:lnTo>
-                    <a:pt x="6714090" y="3500279"/>
-                  </a:lnTo>
-                  <a:lnTo>
-                    <a:pt x="6637457" y="3496063"/>
-                  </a:lnTo>
-                  <a:lnTo>
-                    <a:pt x="6560825" y="3491595"/>
-                  </a:lnTo>
-                  <a:lnTo>
-                    <a:pt x="6484192" y="3486858"/>
-                  </a:lnTo>
-                  <a:lnTo>
-                    <a:pt x="6407560" y="3481837"/>
-                  </a:lnTo>
-                  <a:lnTo>
-                    <a:pt x="6330927" y="3476514"/>
-                  </a:lnTo>
-                  <a:lnTo>
-                    <a:pt x="6254294" y="3470872"/>
-                  </a:lnTo>
-                  <a:lnTo>
-                    <a:pt x="6177662" y="3464891"/>
-                  </a:lnTo>
-                  <a:lnTo>
-                    <a:pt x="6101029" y="3458550"/>
-                  </a:lnTo>
-                  <a:lnTo>
-                    <a:pt x="6024397" y="3451829"/>
-                  </a:lnTo>
-                  <a:lnTo>
-                    <a:pt x="5947764" y="3444705"/>
-                  </a:lnTo>
-                  <a:lnTo>
-                    <a:pt x="5871132" y="3437152"/>
-                  </a:lnTo>
-                  <a:lnTo>
-                    <a:pt x="5794499" y="3429146"/>
-                  </a:lnTo>
-                  <a:lnTo>
-                    <a:pt x="5717867" y="3420659"/>
-                  </a:lnTo>
-                  <a:lnTo>
-                    <a:pt x="5641234" y="3411663"/>
-                  </a:lnTo>
-                  <a:lnTo>
-                    <a:pt x="5564602" y="3402126"/>
-                  </a:lnTo>
-                  <a:lnTo>
-                    <a:pt x="5487969" y="3392017"/>
-                  </a:lnTo>
-                  <a:lnTo>
-                    <a:pt x="5411336" y="3381301"/>
-                  </a:lnTo>
-                  <a:lnTo>
-                    <a:pt x="5334704" y="3369941"/>
-                  </a:lnTo>
-                  <a:lnTo>
-                    <a:pt x="5258071" y="3357899"/>
-                  </a:lnTo>
-                  <a:lnTo>
-                    <a:pt x="5181439" y="3345134"/>
-                  </a:lnTo>
-                  <a:lnTo>
-                    <a:pt x="5104806" y="3331602"/>
-                  </a:lnTo>
-                  <a:lnTo>
-                    <a:pt x="5028174" y="3317258"/>
-                  </a:lnTo>
-                  <a:lnTo>
-                    <a:pt x="4951541" y="3302052"/>
-                  </a:lnTo>
-                  <a:lnTo>
-                    <a:pt x="4874909" y="3285933"/>
-                  </a:lnTo>
-                  <a:lnTo>
-                    <a:pt x="4798276" y="3268847"/>
-                  </a:lnTo>
-                  <a:lnTo>
-                    <a:pt x="4721644" y="3250734"/>
-                  </a:lnTo>
-                  <a:lnTo>
-                    <a:pt x="4645011" y="3231534"/>
-                  </a:lnTo>
-                  <a:lnTo>
-                    <a:pt x="4568378" y="3211180"/>
-                  </a:lnTo>
-                  <a:lnTo>
-                    <a:pt x="4491746" y="3189605"/>
-                  </a:lnTo>
-                  <a:lnTo>
-                    <a:pt x="4415113" y="3166734"/>
-                  </a:lnTo>
-                  <a:lnTo>
-                    <a:pt x="4338481" y="3142489"/>
-                  </a:lnTo>
-                  <a:lnTo>
-                    <a:pt x="4261848" y="3116789"/>
-                  </a:lnTo>
-                  <a:lnTo>
-                    <a:pt x="4185216" y="3089545"/>
-                  </a:lnTo>
-                  <a:lnTo>
-                    <a:pt x="4108583" y="3060666"/>
-                  </a:lnTo>
-                  <a:lnTo>
-                    <a:pt x="4031951" y="3030052"/>
-                  </a:lnTo>
-                  <a:lnTo>
-                    <a:pt x="3955318" y="2997600"/>
-                  </a:lnTo>
-                  <a:lnTo>
-                    <a:pt x="3878685" y="2963199"/>
-                  </a:lnTo>
-                  <a:lnTo>
-                    <a:pt x="3802053" y="2926732"/>
-                  </a:lnTo>
-                  <a:lnTo>
-                    <a:pt x="3725420" y="2888076"/>
-                  </a:lnTo>
-                  <a:lnTo>
-                    <a:pt x="3648788" y="2847098"/>
-                  </a:lnTo>
-                  <a:lnTo>
-                    <a:pt x="3572155" y="2803659"/>
-                  </a:lnTo>
-                  <a:lnTo>
-                    <a:pt x="3495523" y="2757613"/>
-                  </a:lnTo>
-                  <a:lnTo>
-                    <a:pt x="3418890" y="2708801"/>
-                  </a:lnTo>
-                  <a:lnTo>
-                    <a:pt x="3342258" y="2677237"/>
-                  </a:lnTo>
-                  <a:lnTo>
-                    <a:pt x="3265625" y="2648407"/>
-                  </a:lnTo>
-                  <a:lnTo>
-                    <a:pt x="3188993" y="2618645"/>
-                  </a:lnTo>
-                  <a:lnTo>
-                    <a:pt x="3112360" y="2587923"/>
-                  </a:lnTo>
-                  <a:lnTo>
-                    <a:pt x="3035727" y="2556209"/>
-                  </a:lnTo>
-                  <a:lnTo>
-                    <a:pt x="2959095" y="2523472"/>
-                  </a:lnTo>
-                  <a:lnTo>
-                    <a:pt x="2882462" y="2489678"/>
-                  </a:lnTo>
-                  <a:lnTo>
-                    <a:pt x="2805830" y="2454794"/>
-                  </a:lnTo>
-                  <a:lnTo>
-                    <a:pt x="2729197" y="2418783"/>
-                  </a:lnTo>
-                  <a:lnTo>
-                    <a:pt x="2652565" y="2381610"/>
-                  </a:lnTo>
-                  <a:lnTo>
-                    <a:pt x="2575932" y="2343237"/>
-                  </a:lnTo>
-                  <a:lnTo>
-                    <a:pt x="2499300" y="2303626"/>
-                  </a:lnTo>
-                  <a:lnTo>
-                    <a:pt x="2422667" y="2262736"/>
-                  </a:lnTo>
-                  <a:lnTo>
-                    <a:pt x="2346034" y="2220526"/>
-                  </a:lnTo>
-                  <a:lnTo>
-                    <a:pt x="2269402" y="2176954"/>
-                  </a:lnTo>
-                  <a:lnTo>
-                    <a:pt x="2192769" y="2131976"/>
-                  </a:lnTo>
-                  <a:lnTo>
-                    <a:pt x="2116137" y="2085546"/>
-                  </a:lnTo>
-                  <a:lnTo>
-                    <a:pt x="2039504" y="2037617"/>
-                  </a:lnTo>
-                  <a:lnTo>
-                    <a:pt x="1962872" y="1988141"/>
-                  </a:lnTo>
-                  <a:lnTo>
-                    <a:pt x="1886239" y="1937069"/>
-                  </a:lnTo>
-                  <a:lnTo>
-                    <a:pt x="1809607" y="1884347"/>
-                  </a:lnTo>
-                  <a:lnTo>
-                    <a:pt x="1732974" y="1829925"/>
-                  </a:lnTo>
-                  <a:lnTo>
-                    <a:pt x="1656342" y="1773745"/>
-                  </a:lnTo>
-                  <a:lnTo>
-                    <a:pt x="1579709" y="1715752"/>
-                  </a:lnTo>
-                  <a:lnTo>
-                    <a:pt x="1503076" y="1655888"/>
-                  </a:lnTo>
-                  <a:lnTo>
-                    <a:pt x="1426444" y="1594091"/>
-                  </a:lnTo>
-                  <a:lnTo>
-                    <a:pt x="1349811" y="1530300"/>
-                  </a:lnTo>
-                  <a:lnTo>
-                    <a:pt x="1273179" y="1464450"/>
-                  </a:lnTo>
-                  <a:lnTo>
-                    <a:pt x="1196546" y="1396474"/>
-                  </a:lnTo>
-                  <a:lnTo>
-                    <a:pt x="1119914" y="1326304"/>
-                  </a:lnTo>
-                  <a:lnTo>
-                    <a:pt x="1043281" y="1253869"/>
-                  </a:lnTo>
-                  <a:lnTo>
-                    <a:pt x="966649" y="1179097"/>
-                  </a:lnTo>
-                  <a:lnTo>
-                    <a:pt x="890016" y="1101911"/>
-                  </a:lnTo>
-                  <a:lnTo>
-                    <a:pt x="813384" y="1022233"/>
-                  </a:lnTo>
-                  <a:lnTo>
-                    <a:pt x="736751" y="939984"/>
-                  </a:lnTo>
-                  <a:lnTo>
-                    <a:pt x="660118" y="855080"/>
-                  </a:lnTo>
-                  <a:lnTo>
-                    <a:pt x="583486" y="767436"/>
-                  </a:lnTo>
-                  <a:lnTo>
-                    <a:pt x="506853" y="676963"/>
-                  </a:lnTo>
-                  <a:lnTo>
-                    <a:pt x="430221" y="583570"/>
-                  </a:lnTo>
-                  <a:lnTo>
-                    <a:pt x="353588" y="487162"/>
-                  </a:lnTo>
-                  <a:lnTo>
-                    <a:pt x="276956" y="387642"/>
-                  </a:lnTo>
-                  <a:lnTo>
-                    <a:pt x="200323" y="284911"/>
-                  </a:lnTo>
-                  <a:lnTo>
-                    <a:pt x="123691" y="178863"/>
-                  </a:lnTo>
-                  <a:lnTo>
-                    <a:pt x="47058" y="69393"/>
+                    <a:pt x="7327150" y="3363388"/>
+                  </a:lnTo>
+                  <a:lnTo>
+                    <a:pt x="7250518" y="3360867"/>
+                  </a:lnTo>
+                  <a:lnTo>
+                    <a:pt x="7173885" y="3358194"/>
+                  </a:lnTo>
+                  <a:lnTo>
+                    <a:pt x="7097253" y="3355360"/>
+                  </a:lnTo>
+                  <a:lnTo>
+                    <a:pt x="7020620" y="3352357"/>
+                  </a:lnTo>
+                  <a:lnTo>
+                    <a:pt x="6943987" y="3349173"/>
+                  </a:lnTo>
+                  <a:lnTo>
+                    <a:pt x="6867355" y="3345798"/>
+                  </a:lnTo>
+                  <a:lnTo>
+                    <a:pt x="6790722" y="3342220"/>
+                  </a:lnTo>
+                  <a:lnTo>
+                    <a:pt x="6714090" y="3338427"/>
+                  </a:lnTo>
+                  <a:lnTo>
+                    <a:pt x="6637457" y="3334407"/>
+                  </a:lnTo>
+                  <a:lnTo>
+                    <a:pt x="6560825" y="3330145"/>
+                  </a:lnTo>
+                  <a:lnTo>
+                    <a:pt x="6484192" y="3325627"/>
+                  </a:lnTo>
+                  <a:lnTo>
+                    <a:pt x="6407560" y="3320838"/>
+                  </a:lnTo>
+                  <a:lnTo>
+                    <a:pt x="6330927" y="3315761"/>
+                  </a:lnTo>
+                  <a:lnTo>
+                    <a:pt x="6254294" y="3310380"/>
+                  </a:lnTo>
+                  <a:lnTo>
+                    <a:pt x="6177662" y="3304675"/>
+                  </a:lnTo>
+                  <a:lnTo>
+                    <a:pt x="6101029" y="3298628"/>
+                  </a:lnTo>
+                  <a:lnTo>
+                    <a:pt x="6024397" y="3292218"/>
+                  </a:lnTo>
+                  <a:lnTo>
+                    <a:pt x="5947764" y="3285423"/>
+                  </a:lnTo>
+                  <a:lnTo>
+                    <a:pt x="5871132" y="3278219"/>
+                  </a:lnTo>
+                  <a:lnTo>
+                    <a:pt x="5794499" y="3270584"/>
+                  </a:lnTo>
+                  <a:lnTo>
+                    <a:pt x="5717867" y="3262489"/>
+                  </a:lnTo>
+                  <a:lnTo>
+                    <a:pt x="5641234" y="3253909"/>
+                  </a:lnTo>
+                  <a:lnTo>
+                    <a:pt x="5564602" y="3244813"/>
+                  </a:lnTo>
+                  <a:lnTo>
+                    <a:pt x="5487969" y="3235171"/>
+                  </a:lnTo>
+                  <a:lnTo>
+                    <a:pt x="5411336" y="3224951"/>
+                  </a:lnTo>
+                  <a:lnTo>
+                    <a:pt x="5334704" y="3214116"/>
+                  </a:lnTo>
+                  <a:lnTo>
+                    <a:pt x="5258071" y="3202631"/>
+                  </a:lnTo>
+                  <a:lnTo>
+                    <a:pt x="5181439" y="3190456"/>
+                  </a:lnTo>
+                  <a:lnTo>
+                    <a:pt x="5104806" y="3177550"/>
+                  </a:lnTo>
+                  <a:lnTo>
+                    <a:pt x="5028174" y="3163869"/>
+                  </a:lnTo>
+                  <a:lnTo>
+                    <a:pt x="4951541" y="3149366"/>
+                  </a:lnTo>
+                  <a:lnTo>
+                    <a:pt x="4874909" y="3133993"/>
+                  </a:lnTo>
+                  <a:lnTo>
+                    <a:pt x="4798276" y="3117696"/>
+                  </a:lnTo>
+                  <a:lnTo>
+                    <a:pt x="4721644" y="3100421"/>
+                  </a:lnTo>
+                  <a:lnTo>
+                    <a:pt x="4645011" y="3082109"/>
+                  </a:lnTo>
+                  <a:lnTo>
+                    <a:pt x="4568378" y="3062697"/>
+                  </a:lnTo>
+                  <a:lnTo>
+                    <a:pt x="4491746" y="3042119"/>
+                  </a:lnTo>
+                  <a:lnTo>
+                    <a:pt x="4415113" y="3020305"/>
+                  </a:lnTo>
+                  <a:lnTo>
+                    <a:pt x="4338481" y="2997182"/>
+                  </a:lnTo>
+                  <a:lnTo>
+                    <a:pt x="4261848" y="2972670"/>
+                  </a:lnTo>
+                  <a:lnTo>
+                    <a:pt x="4185216" y="2946686"/>
+                  </a:lnTo>
+                  <a:lnTo>
+                    <a:pt x="4108583" y="2919142"/>
+                  </a:lnTo>
+                  <a:lnTo>
+                    <a:pt x="4031951" y="2889943"/>
+                  </a:lnTo>
+                  <a:lnTo>
+                    <a:pt x="3955318" y="2858992"/>
+                  </a:lnTo>
+                  <a:lnTo>
+                    <a:pt x="3878685" y="2826182"/>
+                  </a:lnTo>
+                  <a:lnTo>
+                    <a:pt x="3802053" y="2791401"/>
+                  </a:lnTo>
+                  <a:lnTo>
+                    <a:pt x="3725420" y="2754532"/>
+                  </a:lnTo>
+                  <a:lnTo>
+                    <a:pt x="3648788" y="2715449"/>
+                  </a:lnTo>
+                  <a:lnTo>
+                    <a:pt x="3572155" y="2674019"/>
+                  </a:lnTo>
+                  <a:lnTo>
+                    <a:pt x="3495523" y="2630102"/>
+                  </a:lnTo>
+                  <a:lnTo>
+                    <a:pt x="3418890" y="2583547"/>
+                  </a:lnTo>
+                  <a:lnTo>
+                    <a:pt x="3342258" y="2553443"/>
+                  </a:lnTo>
+                  <a:lnTo>
+                    <a:pt x="3265625" y="2525945"/>
+                  </a:lnTo>
+                  <a:lnTo>
+                    <a:pt x="3188993" y="2497560"/>
+                  </a:lnTo>
+                  <a:lnTo>
+                    <a:pt x="3112360" y="2468259"/>
+                  </a:lnTo>
+                  <a:lnTo>
+                    <a:pt x="3035727" y="2438011"/>
+                  </a:lnTo>
+                  <a:lnTo>
+                    <a:pt x="2959095" y="2406788"/>
+                  </a:lnTo>
+                  <a:lnTo>
+                    <a:pt x="2882462" y="2374556"/>
+                  </a:lnTo>
+                  <a:lnTo>
+                    <a:pt x="2805830" y="2341285"/>
+                  </a:lnTo>
+                  <a:lnTo>
+                    <a:pt x="2729197" y="2306939"/>
+                  </a:lnTo>
+                  <a:lnTo>
+                    <a:pt x="2652565" y="2271485"/>
+                  </a:lnTo>
+                  <a:lnTo>
+                    <a:pt x="2575932" y="2234887"/>
+                  </a:lnTo>
+                  <a:lnTo>
+                    <a:pt x="2499300" y="2197107"/>
+                  </a:lnTo>
+                  <a:lnTo>
+                    <a:pt x="2422667" y="2158108"/>
+                  </a:lnTo>
+                  <a:lnTo>
+                    <a:pt x="2346034" y="2117850"/>
+                  </a:lnTo>
+                  <a:lnTo>
+                    <a:pt x="2269402" y="2076293"/>
+                  </a:lnTo>
+                  <a:lnTo>
+                    <a:pt x="2192769" y="2033394"/>
+                  </a:lnTo>
+                  <a:lnTo>
+                    <a:pt x="2116137" y="1989111"/>
+                  </a:lnTo>
+                  <a:lnTo>
+                    <a:pt x="2039504" y="1943398"/>
+                  </a:lnTo>
+                  <a:lnTo>
+                    <a:pt x="1962872" y="1896210"/>
+                  </a:lnTo>
+                  <a:lnTo>
+                    <a:pt x="1886239" y="1847499"/>
+                  </a:lnTo>
+                  <a:lnTo>
+                    <a:pt x="1809607" y="1797216"/>
+                  </a:lnTo>
+                  <a:lnTo>
+                    <a:pt x="1732974" y="1745310"/>
+                  </a:lnTo>
+                  <a:lnTo>
+                    <a:pt x="1656342" y="1691728"/>
+                  </a:lnTo>
+                  <a:lnTo>
+                    <a:pt x="1579709" y="1636417"/>
+                  </a:lnTo>
+                  <a:lnTo>
+                    <a:pt x="1503076" y="1579320"/>
+                  </a:lnTo>
+                  <a:lnTo>
+                    <a:pt x="1426444" y="1520381"/>
+                  </a:lnTo>
+                  <a:lnTo>
+                    <a:pt x="1349811" y="1459539"/>
+                  </a:lnTo>
+                  <a:lnTo>
+                    <a:pt x="1273179" y="1396734"/>
+                  </a:lnTo>
+                  <a:lnTo>
+                    <a:pt x="1196546" y="1331901"/>
+                  </a:lnTo>
+                  <a:lnTo>
+                    <a:pt x="1119914" y="1264976"/>
+                  </a:lnTo>
+                  <a:lnTo>
+                    <a:pt x="1043281" y="1195891"/>
+                  </a:lnTo>
+                  <a:lnTo>
+                    <a:pt x="966649" y="1124576"/>
+                  </a:lnTo>
+                  <a:lnTo>
+                    <a:pt x="890016" y="1050959"/>
+                  </a:lnTo>
+                  <a:lnTo>
+                    <a:pt x="813384" y="974966"/>
+                  </a:lnTo>
+                  <a:lnTo>
+                    <a:pt x="736751" y="896520"/>
+                  </a:lnTo>
+                  <a:lnTo>
+                    <a:pt x="660118" y="815542"/>
+                  </a:lnTo>
+                  <a:lnTo>
+                    <a:pt x="583486" y="731950"/>
+                  </a:lnTo>
+                  <a:lnTo>
+                    <a:pt x="506853" y="645660"/>
+                  </a:lnTo>
+                  <a:lnTo>
+                    <a:pt x="430221" y="556586"/>
+                  </a:lnTo>
+                  <a:lnTo>
+                    <a:pt x="353588" y="464636"/>
+                  </a:lnTo>
+                  <a:lnTo>
+                    <a:pt x="276956" y="369718"/>
+                  </a:lnTo>
+                  <a:lnTo>
+                    <a:pt x="200323" y="271737"/>
+                  </a:lnTo>
+                  <a:lnTo>
+                    <a:pt x="123691" y="170593"/>
+                  </a:lnTo>
+                  <a:lnTo>
+                    <a:pt x="47058" y="66184"/>
                   </a:lnTo>
                   <a:lnTo>
                     <a:pt x="0" y="0"/>
@@ -4142,270 +4142,270 @@
           </p:nvSpPr>
           <p:spPr>
             <a:xfrm>
-              <a:off x="1782660" y="1896563"/>
-              <a:ext cx="6438640" cy="3569643"/>
+              <a:off x="1782660" y="2073503"/>
+              <a:ext cx="6438640" cy="3404584"/>
             </a:xfrm>
             <a:custGeom>
               <a:avLst/>
               <a:pathLst>
-                <a:path w="6438640" h="3569643">
+                <a:path w="6438640" h="3404584">
                   <a:moveTo>
                     <a:pt x="0" y="0"/>
                   </a:moveTo>
                   <a:lnTo>
-                    <a:pt x="1506" y="3305"/>
-                  </a:lnTo>
-                  <a:lnTo>
-                    <a:pt x="78139" y="164029"/>
-                  </a:lnTo>
-                  <a:lnTo>
-                    <a:pt x="154771" y="317674"/>
-                  </a:lnTo>
-                  <a:lnTo>
-                    <a:pt x="231404" y="464553"/>
-                  </a:lnTo>
-                  <a:lnTo>
-                    <a:pt x="308037" y="604962"/>
-                  </a:lnTo>
-                  <a:lnTo>
-                    <a:pt x="384669" y="739188"/>
-                  </a:lnTo>
-                  <a:lnTo>
-                    <a:pt x="461302" y="867502"/>
-                  </a:lnTo>
-                  <a:lnTo>
-                    <a:pt x="537934" y="990165"/>
-                  </a:lnTo>
-                  <a:lnTo>
-                    <a:pt x="614567" y="1107426"/>
-                  </a:lnTo>
-                  <a:lnTo>
-                    <a:pt x="691199" y="1219522"/>
-                  </a:lnTo>
-                  <a:lnTo>
-                    <a:pt x="767832" y="1326681"/>
-                  </a:lnTo>
-                  <a:lnTo>
-                    <a:pt x="844464" y="1429121"/>
-                  </a:lnTo>
-                  <a:lnTo>
-                    <a:pt x="921097" y="1527049"/>
-                  </a:lnTo>
-                  <a:lnTo>
-                    <a:pt x="997729" y="1620664"/>
-                  </a:lnTo>
-                  <a:lnTo>
-                    <a:pt x="1074362" y="1710157"/>
-                  </a:lnTo>
-                  <a:lnTo>
-                    <a:pt x="1150995" y="1795707"/>
-                  </a:lnTo>
-                  <a:lnTo>
-                    <a:pt x="1227627" y="1877490"/>
-                  </a:lnTo>
-                  <a:lnTo>
-                    <a:pt x="1304260" y="1955671"/>
-                  </a:lnTo>
-                  <a:lnTo>
-                    <a:pt x="1380892" y="2030409"/>
-                  </a:lnTo>
-                  <a:lnTo>
-                    <a:pt x="1457525" y="2101856"/>
-                  </a:lnTo>
-                  <a:lnTo>
-                    <a:pt x="1534157" y="2170155"/>
-                  </a:lnTo>
-                  <a:lnTo>
-                    <a:pt x="1610790" y="2235447"/>
-                  </a:lnTo>
-                  <a:lnTo>
-                    <a:pt x="1687422" y="2297863"/>
-                  </a:lnTo>
-                  <a:lnTo>
-                    <a:pt x="1764055" y="2357530"/>
-                  </a:lnTo>
-                  <a:lnTo>
-                    <a:pt x="1840688" y="2414569"/>
-                  </a:lnTo>
-                  <a:lnTo>
-                    <a:pt x="1917320" y="2469096"/>
-                  </a:lnTo>
-                  <a:lnTo>
-                    <a:pt x="1993953" y="2521222"/>
-                  </a:lnTo>
-                  <a:lnTo>
-                    <a:pt x="2070585" y="2571052"/>
-                  </a:lnTo>
-                  <a:lnTo>
-                    <a:pt x="2147218" y="2618687"/>
-                  </a:lnTo>
-                  <a:lnTo>
-                    <a:pt x="2223850" y="2664225"/>
-                  </a:lnTo>
-                  <a:lnTo>
-                    <a:pt x="2300483" y="2707757"/>
-                  </a:lnTo>
-                  <a:lnTo>
-                    <a:pt x="2377115" y="2749371"/>
-                  </a:lnTo>
-                  <a:lnTo>
-                    <a:pt x="2453748" y="2789153"/>
-                  </a:lnTo>
-                  <a:lnTo>
-                    <a:pt x="2530380" y="2827183"/>
-                  </a:lnTo>
-                  <a:lnTo>
-                    <a:pt x="2607013" y="2863538"/>
-                  </a:lnTo>
-                  <a:lnTo>
-                    <a:pt x="2683646" y="2898291"/>
-                  </a:lnTo>
-                  <a:lnTo>
-                    <a:pt x="2760278" y="2931514"/>
-                  </a:lnTo>
-                  <a:lnTo>
-                    <a:pt x="2836911" y="2963274"/>
-                  </a:lnTo>
-                  <a:lnTo>
-                    <a:pt x="2913543" y="2993635"/>
-                  </a:lnTo>
-                  <a:lnTo>
-                    <a:pt x="2990176" y="3022659"/>
-                  </a:lnTo>
-                  <a:lnTo>
-                    <a:pt x="3066808" y="3050405"/>
-                  </a:lnTo>
-                  <a:lnTo>
-                    <a:pt x="3143441" y="3076929"/>
-                  </a:lnTo>
-                  <a:lnTo>
-                    <a:pt x="3220073" y="3102284"/>
-                  </a:lnTo>
-                  <a:lnTo>
-                    <a:pt x="3296706" y="3126523"/>
-                  </a:lnTo>
-                  <a:lnTo>
-                    <a:pt x="3373338" y="3149695"/>
-                  </a:lnTo>
-                  <a:lnTo>
-                    <a:pt x="3449971" y="3171845"/>
-                  </a:lnTo>
-                  <a:lnTo>
-                    <a:pt x="3526604" y="3193021"/>
-                  </a:lnTo>
-                  <a:lnTo>
-                    <a:pt x="3603236" y="3213263"/>
-                  </a:lnTo>
-                  <a:lnTo>
-                    <a:pt x="3679869" y="3232614"/>
-                  </a:lnTo>
-                  <a:lnTo>
-                    <a:pt x="3756501" y="3251113"/>
-                  </a:lnTo>
-                  <a:lnTo>
-                    <a:pt x="3833134" y="3268797"/>
-                  </a:lnTo>
-                  <a:lnTo>
-                    <a:pt x="3909766" y="3285703"/>
-                  </a:lnTo>
-                  <a:lnTo>
-                    <a:pt x="3986399" y="3301863"/>
-                  </a:lnTo>
-                  <a:lnTo>
-                    <a:pt x="4063031" y="3317312"/>
-                  </a:lnTo>
-                  <a:lnTo>
-                    <a:pt x="4139664" y="3332081"/>
-                  </a:lnTo>
-                  <a:lnTo>
-                    <a:pt x="4216297" y="3346199"/>
-                  </a:lnTo>
-                  <a:lnTo>
-                    <a:pt x="4292929" y="3359696"/>
-                  </a:lnTo>
-                  <a:lnTo>
-                    <a:pt x="4369562" y="3372598"/>
-                  </a:lnTo>
-                  <a:lnTo>
-                    <a:pt x="4446194" y="3384931"/>
-                  </a:lnTo>
-                  <a:lnTo>
-                    <a:pt x="4522827" y="3396722"/>
-                  </a:lnTo>
-                  <a:lnTo>
-                    <a:pt x="4599459" y="3407993"/>
-                  </a:lnTo>
-                  <a:lnTo>
-                    <a:pt x="4676092" y="3418768"/>
-                  </a:lnTo>
-                  <a:lnTo>
-                    <a:pt x="4752724" y="3429068"/>
-                  </a:lnTo>
-                  <a:lnTo>
-                    <a:pt x="4829357" y="3438915"/>
-                  </a:lnTo>
-                  <a:lnTo>
-                    <a:pt x="4905989" y="3448328"/>
-                  </a:lnTo>
-                  <a:lnTo>
-                    <a:pt x="4982622" y="3457326"/>
-                  </a:lnTo>
-                  <a:lnTo>
-                    <a:pt x="5059255" y="3465929"/>
-                  </a:lnTo>
-                  <a:lnTo>
-                    <a:pt x="5135887" y="3474152"/>
-                  </a:lnTo>
-                  <a:lnTo>
-                    <a:pt x="5212520" y="3482013"/>
-                  </a:lnTo>
-                  <a:lnTo>
-                    <a:pt x="5289152" y="3489528"/>
-                  </a:lnTo>
-                  <a:lnTo>
-                    <a:pt x="5365785" y="3496712"/>
-                  </a:lnTo>
-                  <a:lnTo>
-                    <a:pt x="5442417" y="3503579"/>
-                  </a:lnTo>
-                  <a:lnTo>
-                    <a:pt x="5519050" y="3510144"/>
-                  </a:lnTo>
-                  <a:lnTo>
-                    <a:pt x="5595682" y="3516420"/>
-                  </a:lnTo>
-                  <a:lnTo>
-                    <a:pt x="5672315" y="3522420"/>
-                  </a:lnTo>
-                  <a:lnTo>
-                    <a:pt x="5748948" y="3528155"/>
-                  </a:lnTo>
-                  <a:lnTo>
-                    <a:pt x="5825580" y="3533638"/>
-                  </a:lnTo>
-                  <a:lnTo>
-                    <a:pt x="5902213" y="3538879"/>
-                  </a:lnTo>
-                  <a:lnTo>
-                    <a:pt x="5978845" y="3543889"/>
-                  </a:lnTo>
-                  <a:lnTo>
-                    <a:pt x="6055478" y="3548679"/>
-                  </a:lnTo>
-                  <a:lnTo>
-                    <a:pt x="6132110" y="3553258"/>
-                  </a:lnTo>
-                  <a:lnTo>
-                    <a:pt x="6208743" y="3557635"/>
-                  </a:lnTo>
-                  <a:lnTo>
-                    <a:pt x="6285375" y="3561819"/>
-                  </a:lnTo>
-                  <a:lnTo>
-                    <a:pt x="6362008" y="3565819"/>
-                  </a:lnTo>
-                  <a:lnTo>
-                    <a:pt x="6438640" y="3569643"/>
+                    <a:pt x="1506" y="3153"/>
+                  </a:lnTo>
+                  <a:lnTo>
+                    <a:pt x="78139" y="156445"/>
+                  </a:lnTo>
+                  <a:lnTo>
+                    <a:pt x="154771" y="302985"/>
+                  </a:lnTo>
+                  <a:lnTo>
+                    <a:pt x="231404" y="443072"/>
+                  </a:lnTo>
+                  <a:lnTo>
+                    <a:pt x="308037" y="576989"/>
+                  </a:lnTo>
+                  <a:lnTo>
+                    <a:pt x="384669" y="705008"/>
+                  </a:lnTo>
+                  <a:lnTo>
+                    <a:pt x="461302" y="827389"/>
+                  </a:lnTo>
+                  <a:lnTo>
+                    <a:pt x="537934" y="944380"/>
+                  </a:lnTo>
+                  <a:lnTo>
+                    <a:pt x="614567" y="1056219"/>
+                  </a:lnTo>
+                  <a:lnTo>
+                    <a:pt x="691199" y="1163132"/>
+                  </a:lnTo>
+                  <a:lnTo>
+                    <a:pt x="767832" y="1265336"/>
+                  </a:lnTo>
+                  <a:lnTo>
+                    <a:pt x="844464" y="1363039"/>
+                  </a:lnTo>
+                  <a:lnTo>
+                    <a:pt x="921097" y="1456439"/>
+                  </a:lnTo>
+                  <a:lnTo>
+                    <a:pt x="997729" y="1545725"/>
+                  </a:lnTo>
+                  <a:lnTo>
+                    <a:pt x="1074362" y="1631080"/>
+                  </a:lnTo>
+                  <a:lnTo>
+                    <a:pt x="1150995" y="1712675"/>
+                  </a:lnTo>
+                  <a:lnTo>
+                    <a:pt x="1227627" y="1790676"/>
+                  </a:lnTo>
+                  <a:lnTo>
+                    <a:pt x="1304260" y="1865242"/>
+                  </a:lnTo>
+                  <a:lnTo>
+                    <a:pt x="1380892" y="1936524"/>
+                  </a:lnTo>
+                  <a:lnTo>
+                    <a:pt x="1457525" y="2004667"/>
+                  </a:lnTo>
+                  <a:lnTo>
+                    <a:pt x="1534157" y="2069808"/>
+                  </a:lnTo>
+                  <a:lnTo>
+                    <a:pt x="1610790" y="2132081"/>
+                  </a:lnTo>
+                  <a:lnTo>
+                    <a:pt x="1687422" y="2191611"/>
+                  </a:lnTo>
+                  <a:lnTo>
+                    <a:pt x="1764055" y="2248519"/>
+                  </a:lnTo>
+                  <a:lnTo>
+                    <a:pt x="1840688" y="2302920"/>
+                  </a:lnTo>
+                  <a:lnTo>
+                    <a:pt x="1917320" y="2354926"/>
+                  </a:lnTo>
+                  <a:lnTo>
+                    <a:pt x="1993953" y="2404642"/>
+                  </a:lnTo>
+                  <a:lnTo>
+                    <a:pt x="2070585" y="2452167"/>
+                  </a:lnTo>
+                  <a:lnTo>
+                    <a:pt x="2147218" y="2497600"/>
+                  </a:lnTo>
+                  <a:lnTo>
+                    <a:pt x="2223850" y="2541032"/>
+                  </a:lnTo>
+                  <a:lnTo>
+                    <a:pt x="2300483" y="2582551"/>
+                  </a:lnTo>
+                  <a:lnTo>
+                    <a:pt x="2377115" y="2622241"/>
+                  </a:lnTo>
+                  <a:lnTo>
+                    <a:pt x="2453748" y="2660184"/>
+                  </a:lnTo>
+                  <a:lnTo>
+                    <a:pt x="2530380" y="2696455"/>
+                  </a:lnTo>
+                  <a:lnTo>
+                    <a:pt x="2607013" y="2731129"/>
+                  </a:lnTo>
+                  <a:lnTo>
+                    <a:pt x="2683646" y="2764275"/>
+                  </a:lnTo>
+                  <a:lnTo>
+                    <a:pt x="2760278" y="2795962"/>
+                  </a:lnTo>
+                  <a:lnTo>
+                    <a:pt x="2836911" y="2826254"/>
+                  </a:lnTo>
+                  <a:lnTo>
+                    <a:pt x="2913543" y="2855211"/>
+                  </a:lnTo>
+                  <a:lnTo>
+                    <a:pt x="2990176" y="2882893"/>
+                  </a:lnTo>
+                  <a:lnTo>
+                    <a:pt x="3066808" y="2909355"/>
+                  </a:lnTo>
+                  <a:lnTo>
+                    <a:pt x="3143441" y="2934653"/>
+                  </a:lnTo>
+                  <a:lnTo>
+                    <a:pt x="3220073" y="2958836"/>
+                  </a:lnTo>
+                  <a:lnTo>
+                    <a:pt x="3296706" y="2981954"/>
+                  </a:lnTo>
+                  <a:lnTo>
+                    <a:pt x="3373338" y="3004054"/>
+                  </a:lnTo>
+                  <a:lnTo>
+                    <a:pt x="3449971" y="3025180"/>
+                  </a:lnTo>
+                  <a:lnTo>
+                    <a:pt x="3526604" y="3045376"/>
+                  </a:lnTo>
+                  <a:lnTo>
+                    <a:pt x="3603236" y="3064683"/>
+                  </a:lnTo>
+                  <a:lnTo>
+                    <a:pt x="3679869" y="3083139"/>
+                  </a:lnTo>
+                  <a:lnTo>
+                    <a:pt x="3756501" y="3100783"/>
+                  </a:lnTo>
+                  <a:lnTo>
+                    <a:pt x="3833134" y="3117649"/>
+                  </a:lnTo>
+                  <a:lnTo>
+                    <a:pt x="3909766" y="3133773"/>
+                  </a:lnTo>
+                  <a:lnTo>
+                    <a:pt x="3986399" y="3149187"/>
+                  </a:lnTo>
+                  <a:lnTo>
+                    <a:pt x="4063031" y="3163921"/>
+                  </a:lnTo>
+                  <a:lnTo>
+                    <a:pt x="4139664" y="3178007"/>
+                  </a:lnTo>
+                  <a:lnTo>
+                    <a:pt x="4216297" y="3191472"/>
+                  </a:lnTo>
+                  <a:lnTo>
+                    <a:pt x="4292929" y="3204345"/>
+                  </a:lnTo>
+                  <a:lnTo>
+                    <a:pt x="4369562" y="3216650"/>
+                  </a:lnTo>
+                  <a:lnTo>
+                    <a:pt x="4446194" y="3228413"/>
+                  </a:lnTo>
+                  <a:lnTo>
+                    <a:pt x="4522827" y="3239659"/>
+                  </a:lnTo>
+                  <a:lnTo>
+                    <a:pt x="4599459" y="3250409"/>
+                  </a:lnTo>
+                  <a:lnTo>
+                    <a:pt x="4676092" y="3260685"/>
+                  </a:lnTo>
+                  <a:lnTo>
+                    <a:pt x="4752724" y="3270509"/>
+                  </a:lnTo>
+                  <a:lnTo>
+                    <a:pt x="4829357" y="3279901"/>
+                  </a:lnTo>
+                  <a:lnTo>
+                    <a:pt x="4905989" y="3288879"/>
+                  </a:lnTo>
+                  <a:lnTo>
+                    <a:pt x="4982622" y="3297461"/>
+                  </a:lnTo>
+                  <a:lnTo>
+                    <a:pt x="5059255" y="3305665"/>
+                  </a:lnTo>
+                  <a:lnTo>
+                    <a:pt x="5135887" y="3313508"/>
+                  </a:lnTo>
+                  <a:lnTo>
+                    <a:pt x="5212520" y="3321006"/>
+                  </a:lnTo>
+                  <a:lnTo>
+                    <a:pt x="5289152" y="3328173"/>
+                  </a:lnTo>
+                  <a:lnTo>
+                    <a:pt x="5365785" y="3335025"/>
+                  </a:lnTo>
+                  <a:lnTo>
+                    <a:pt x="5442417" y="3341575"/>
+                  </a:lnTo>
+                  <a:lnTo>
+                    <a:pt x="5519050" y="3347837"/>
+                  </a:lnTo>
+                  <a:lnTo>
+                    <a:pt x="5595682" y="3353822"/>
+                  </a:lnTo>
+                  <a:lnTo>
+                    <a:pt x="5672315" y="3359544"/>
+                  </a:lnTo>
+                  <a:lnTo>
+                    <a:pt x="5748948" y="3365014"/>
+                  </a:lnTo>
+                  <a:lnTo>
+                    <a:pt x="5825580" y="3370244"/>
+                  </a:lnTo>
+                  <a:lnTo>
+                    <a:pt x="5902213" y="3375243"/>
+                  </a:lnTo>
+                  <a:lnTo>
+                    <a:pt x="5978845" y="3380021"/>
+                  </a:lnTo>
+                  <a:lnTo>
+                    <a:pt x="6055478" y="3384589"/>
+                  </a:lnTo>
+                  <a:lnTo>
+                    <a:pt x="6132110" y="3388957"/>
+                  </a:lnTo>
+                  <a:lnTo>
+                    <a:pt x="6208743" y="3393131"/>
+                  </a:lnTo>
+                  <a:lnTo>
+                    <a:pt x="6285375" y="3397122"/>
+                  </a:lnTo>
+                  <a:lnTo>
+                    <a:pt x="6362008" y="3400937"/>
+                  </a:lnTo>
+                  <a:lnTo>
+                    <a:pt x="6438640" y="3404584"/>
                   </a:lnTo>
                 </a:path>
               </a:pathLst>
@@ -4434,7 +4434,7 @@
           </p:nvSpPr>
           <p:spPr>
             <a:xfrm>
-              <a:off x="817517" y="4679530"/>
+              <a:off x="817517" y="4727786"/>
               <a:ext cx="7799693" cy="0"/>
             </a:xfrm>
             <a:custGeom>
@@ -4477,15 +4477,15 @@
           </p:nvSpPr>
           <p:spPr>
             <a:xfrm>
-              <a:off x="4224261" y="1896563"/>
-              <a:ext cx="0" cy="3826579"/>
+              <a:off x="4224261" y="2073503"/>
+              <a:ext cx="0" cy="3649639"/>
             </a:xfrm>
             <a:custGeom>
               <a:avLst/>
               <a:pathLst>
-                <a:path w="0" h="3826579">
+                <a:path w="0" h="3649639">
                   <a:moveTo>
-                    <a:pt x="0" y="3826579"/>
+                    <a:pt x="0" y="3649639"/>
                   </a:moveTo>
                   <a:lnTo>
                     <a:pt x="0" y="0"/>
@@ -4520,7 +4520,7 @@
           </p:nvSpPr>
           <p:spPr>
             <a:xfrm>
-              <a:off x="692708" y="5509156"/>
+              <a:off x="692708" y="5517199"/>
               <a:ext cx="62179" cy="80101"/>
             </a:xfrm>
             <a:prstGeom prst="rect">
@@ -4566,7 +4566,7 @@
           </p:nvSpPr>
           <p:spPr>
             <a:xfrm>
-              <a:off x="692708" y="4639479"/>
+              <a:off x="692708" y="4687735"/>
               <a:ext cx="62179" cy="80101"/>
             </a:xfrm>
             <a:prstGeom prst="rect">
@@ -4612,7 +4612,7 @@
           </p:nvSpPr>
           <p:spPr>
             <a:xfrm>
-              <a:off x="692708" y="3769802"/>
+              <a:off x="692708" y="3858272"/>
               <a:ext cx="62179" cy="80101"/>
             </a:xfrm>
             <a:prstGeom prst="rect">
@@ -4658,7 +4658,7 @@
           </p:nvSpPr>
           <p:spPr>
             <a:xfrm>
-              <a:off x="692708" y="2900125"/>
+              <a:off x="692708" y="3028808"/>
               <a:ext cx="62179" cy="80101"/>
             </a:xfrm>
             <a:prstGeom prst="rect">
@@ -4704,7 +4704,7 @@
           </p:nvSpPr>
           <p:spPr>
             <a:xfrm>
-              <a:off x="692708" y="2030448"/>
+              <a:off x="692708" y="2199345"/>
               <a:ext cx="62179" cy="80101"/>
             </a:xfrm>
             <a:prstGeom prst="rect">
@@ -4980,7 +4980,7 @@
           </p:nvSpPr>
           <p:spPr>
             <a:xfrm rot="-5400000">
-              <a:off x="68446" y="3759743"/>
+              <a:off x="68446" y="3848213"/>
               <a:ext cx="1016904" cy="100218"/>
             </a:xfrm>
             <a:prstGeom prst="rect">
@@ -5021,6 +5021,52 @@
         <p:sp>
           <p:nvSpPr>
             <p:cNvPr id="38" name="tx38"/>
+            <p:cNvSpPr/>
+            <p:nvPr/>
+          </p:nvSpPr>
+          <p:spPr>
+            <a:xfrm>
+              <a:off x="817517" y="1896563"/>
+              <a:ext cx="5626211" cy="82021"/>
+            </a:xfrm>
+            <a:prstGeom prst="rect">
+              <a:avLst/>
+            </a:prstGeom>
+            <a:noFill/>
+          </p:spPr>
+          <p:txBody>
+            <a:bodyPr lIns="0" rIns="0" tIns="0" bIns="0" anchorCtr="1" anchor="ctr" wrap="none"/>
+            <a:lstStyle/>
+            <a:p>
+              <a:pPr algn="l" marL="0" marR="0" indent="0">
+                <a:lnSpc>
+                  <a:spcPts val="900"/>
+                </a:lnSpc>
+                <a:spcBef>
+                  <a:spcPts val="0"/>
+                </a:spcBef>
+                <a:spcAft>
+                  <a:spcPts val="0"/>
+                </a:spcAft>
+              </a:pPr>
+              <a:r>
+                <a:rPr sz="900">
+                  <a:solidFill>
+                    <a:srgbClr val="404040">
+                      <a:alpha val="100000"/>
+                    </a:srgbClr>
+                  </a:solidFill>
+                  <a:latin typeface="Helvetica"/>
+                  <a:cs typeface="Helvetica"/>
+                </a:rPr>
+                <a:t>subHR per 0.1 ratio decline: 1.68 (1.44-1.96)  |  per IQR decline (Δ = 0.30): 4.75 (3.00-7.52)  |  IQR: [0.85, 1.15]</a:t>
+              </a:r>
+            </a:p>
+          </p:txBody>
+        </p:sp>
+        <p:sp>
+          <p:nvSpPr>
+            <p:cNvPr id="39" name="tx39"/>
             <p:cNvSpPr/>
             <p:nvPr/>
           </p:nvSpPr>

--- a/docs/pptx/carbo/jx-carbo-linsubhr-ratio-grade3.pptx
+++ b/docs/pptx/carbo/jx-carbo-linsubhr-ratio-grade3.pptx
@@ -5027,7 +5027,7 @@
           <p:spPr>
             <a:xfrm>
               <a:off x="817517" y="1896563"/>
-              <a:ext cx="5626211" cy="82021"/>
+              <a:ext cx="6236116" cy="82021"/>
             </a:xfrm>
             <a:prstGeom prst="rect">
               <a:avLst/>
@@ -5059,7 +5059,7 @@
                   <a:latin typeface="Helvetica"/>
                   <a:cs typeface="Helvetica"/>
                 </a:rPr>
-                <a:t>subHR per 0.1 ratio decline: 1.68 (1.44-1.96)  |  per IQR decline (Δ = 0.30): 4.75 (3.00-7.52)  |  IQR: [0.85, 1.15]</a:t>
+                <a:t>subHR per 0.1 ratio decline: 1.68 (1.44-1.96), p = &lt;0.001  |  per IQR decline (Δ = 0.30): 4.75 (3.00-7.52)  |  IQR: [0.85, 1.15]</a:t>
               </a:r>
             </a:p>
           </p:txBody>

--- a/docs/pptx/carbo/jx-carbo-linsubhr-ratio-grade3.pptx
+++ b/docs/pptx/carbo/jx-carbo-linsubhr-ratio-grade3.pptx
@@ -5027,7 +5027,7 @@
           <p:spPr>
             <a:xfrm>
               <a:off x="817517" y="1896563"/>
-              <a:ext cx="6236116" cy="82021"/>
+              <a:ext cx="6899879" cy="82021"/>
             </a:xfrm>
             <a:prstGeom prst="rect">
               <a:avLst/>
@@ -5059,7 +5059,7 @@
                   <a:latin typeface="Helvetica"/>
                   <a:cs typeface="Helvetica"/>
                 </a:rPr>
-                <a:t>subHR per 0.1 ratio decline: 1.68 (1.44-1.96), p = &lt;0.001  |  per IQR decline (Δ = 0.30): 4.75 (3.00-7.52)  |  IQR: [0.85, 1.15]</a:t>
+                <a:t>subHR per 0.1 ratio decline: 1.68 (1.44-1.96), p_Bonf = &lt;0.001 (n = 6)  |  per IQR decline (Δ = 0.30): 4.75 (3.00-7.52)  |  IQR: [0.85, 1.15]</a:t>
               </a:r>
             </a:p>
           </p:txBody>

--- a/docs/pptx/carbo/jx-carbo-linsubhr-ratio-grade3.pptx
+++ b/docs/pptx/carbo/jx-carbo-linsubhr-ratio-grade3.pptx
@@ -2443,7 +2443,7 @@
           </p:nvSpPr>
           <p:spPr>
             <a:xfrm>
-              <a:off x="1615213" y="2073503"/>
+              <a:off x="1467192" y="2073503"/>
               <a:ext cx="0" cy="3649639"/>
             </a:xfrm>
             <a:custGeom>
@@ -2486,7 +2486,7 @@
           </p:nvSpPr>
           <p:spPr>
             <a:xfrm>
-              <a:off x="3387871" y="2073503"/>
+              <a:off x="3538150" y="2073503"/>
               <a:ext cx="0" cy="3649639"/>
             </a:xfrm>
             <a:custGeom>
@@ -2529,7 +2529,7 @@
           </p:nvSpPr>
           <p:spPr>
             <a:xfrm>
-              <a:off x="5160528" y="2073503"/>
+              <a:off x="5609107" y="2073503"/>
               <a:ext cx="0" cy="3649639"/>
             </a:xfrm>
             <a:custGeom>
@@ -2572,7 +2572,7 @@
           </p:nvSpPr>
           <p:spPr>
             <a:xfrm>
-              <a:off x="6933186" y="2073503"/>
+              <a:off x="7680065" y="2073503"/>
               <a:ext cx="0" cy="3649639"/>
             </a:xfrm>
             <a:custGeom>
@@ -2830,7 +2830,7 @@
           </p:nvSpPr>
           <p:spPr>
             <a:xfrm>
-              <a:off x="2501542" y="2073503"/>
+              <a:off x="2502671" y="2073503"/>
               <a:ext cx="0" cy="3649639"/>
             </a:xfrm>
             <a:custGeom>
@@ -2873,7 +2873,7 @@
           </p:nvSpPr>
           <p:spPr>
             <a:xfrm>
-              <a:off x="4274200" y="2073503"/>
+              <a:off x="4573628" y="2073503"/>
               <a:ext cx="0" cy="3649639"/>
             </a:xfrm>
             <a:custGeom>
@@ -2916,7 +2916,7 @@
           </p:nvSpPr>
           <p:spPr>
             <a:xfrm>
-              <a:off x="6046857" y="2073503"/>
+              <a:off x="6644586" y="2073503"/>
               <a:ext cx="0" cy="3649639"/>
             </a:xfrm>
             <a:custGeom>
@@ -2953,589 +2953,546 @@
         </p:sp>
         <p:sp>
           <p:nvSpPr>
-            <p:cNvPr id="20" name="pl20"/>
+            <p:cNvPr id="20" name="pg20"/>
             <p:cNvSpPr/>
             <p:nvPr/>
           </p:nvSpPr>
           <p:spPr>
             <a:xfrm>
-              <a:off x="7819515" y="2073503"/>
-              <a:ext cx="0" cy="3649639"/>
+              <a:off x="1291620" y="2073503"/>
+              <a:ext cx="6971058" cy="3444135"/>
             </a:xfrm>
             <a:custGeom>
               <a:avLst/>
               <a:pathLst>
-                <a:path w="0" h="3649639">
+                <a:path w="6971058" h="3444135">
                   <a:moveTo>
-                    <a:pt x="0" y="3649639"/>
+                    <a:pt x="1473154" y="0"/>
                   </a:moveTo>
                   <a:lnTo>
-                    <a:pt x="0" y="0"/>
-                  </a:lnTo>
-                  <a:lnTo>
-                    <a:pt x="0" y="0"/>
-                  </a:lnTo>
-                </a:path>
-              </a:pathLst>
-            </a:custGeom>
-            <a:ln w="13550" cap="flat">
-              <a:solidFill>
-                <a:srgbClr val="EBEBEB">
-                  <a:alpha val="100000"/>
-                </a:srgbClr>
-              </a:solidFill>
-              <a:prstDash val="solid"/>
-              <a:round/>
-            </a:ln>
-          </p:spPr>
-          <p:txBody>
-            <a:bodyPr/>
-            <a:lstStyle/>
-            <a:p/>
-          </p:txBody>
-        </p:sp>
-        <p:sp>
-          <p:nvSpPr>
-            <p:cNvPr id="21" name="pg21"/>
-            <p:cNvSpPr/>
-            <p:nvPr/>
-          </p:nvSpPr>
-          <p:spPr>
-            <a:xfrm>
-              <a:off x="817517" y="2073503"/>
-              <a:ext cx="7403783" cy="3444135"/>
-            </a:xfrm>
-            <a:custGeom>
-              <a:avLst/>
-              <a:pathLst>
-                <a:path w="7403783" h="3444135">
-                  <a:moveTo>
-                    <a:pt x="1521298" y="0"/>
-                  </a:moveTo>
-                  <a:lnTo>
-                    <a:pt x="1579709" y="152475"/>
-                  </a:lnTo>
-                  <a:lnTo>
-                    <a:pt x="1656342" y="341185"/>
-                  </a:lnTo>
-                  <a:lnTo>
-                    <a:pt x="1732974" y="519204"/>
-                  </a:lnTo>
-                  <a:lnTo>
-                    <a:pt x="1809607" y="687138"/>
-                  </a:lnTo>
-                  <a:lnTo>
-                    <a:pt x="1886239" y="845560"/>
-                  </a:lnTo>
-                  <a:lnTo>
-                    <a:pt x="1962872" y="995008"/>
-                  </a:lnTo>
-                  <a:lnTo>
-                    <a:pt x="2039504" y="1135989"/>
-                  </a:lnTo>
-                  <a:lnTo>
-                    <a:pt x="2116137" y="1268984"/>
-                  </a:lnTo>
-                  <a:lnTo>
-                    <a:pt x="2192769" y="1394446"/>
-                  </a:lnTo>
-                  <a:lnTo>
-                    <a:pt x="2269402" y="1512800"/>
-                  </a:lnTo>
-                  <a:lnTo>
-                    <a:pt x="2346034" y="1624450"/>
-                  </a:lnTo>
-                  <a:lnTo>
-                    <a:pt x="2422667" y="1729775"/>
-                  </a:lnTo>
-                  <a:lnTo>
-                    <a:pt x="2499300" y="1829133"/>
-                  </a:lnTo>
-                  <a:lnTo>
-                    <a:pt x="2575932" y="1922863"/>
-                  </a:lnTo>
-                  <a:lnTo>
-                    <a:pt x="2652565" y="2011284"/>
-                  </a:lnTo>
-                  <a:lnTo>
-                    <a:pt x="2729197" y="2094696"/>
-                  </a:lnTo>
-                  <a:lnTo>
-                    <a:pt x="2805830" y="2173382"/>
-                  </a:lnTo>
-                  <a:lnTo>
-                    <a:pt x="2882462" y="2247612"/>
-                  </a:lnTo>
-                  <a:lnTo>
-                    <a:pt x="2959095" y="2317636"/>
-                  </a:lnTo>
-                  <a:lnTo>
-                    <a:pt x="3035727" y="2383693"/>
-                  </a:lnTo>
-                  <a:lnTo>
-                    <a:pt x="3112360" y="2446009"/>
-                  </a:lnTo>
-                  <a:lnTo>
-                    <a:pt x="3188993" y="2504795"/>
-                  </a:lnTo>
-                  <a:lnTo>
-                    <a:pt x="3265625" y="2560250"/>
-                  </a:lnTo>
-                  <a:lnTo>
-                    <a:pt x="3342258" y="2612564"/>
-                  </a:lnTo>
-                  <a:lnTo>
-                    <a:pt x="3418890" y="2658449"/>
-                  </a:lnTo>
-                  <a:lnTo>
-                    <a:pt x="3495523" y="2684254"/>
-                  </a:lnTo>
-                  <a:lnTo>
-                    <a:pt x="3572155" y="2709252"/>
-                  </a:lnTo>
-                  <a:lnTo>
-                    <a:pt x="3648788" y="2733469"/>
-                  </a:lnTo>
-                  <a:lnTo>
-                    <a:pt x="3725420" y="2756928"/>
-                  </a:lnTo>
-                  <a:lnTo>
-                    <a:pt x="3802053" y="2779654"/>
-                  </a:lnTo>
-                  <a:lnTo>
-                    <a:pt x="3878685" y="2801669"/>
-                  </a:lnTo>
-                  <a:lnTo>
-                    <a:pt x="3955318" y="2822996"/>
-                  </a:lnTo>
-                  <a:lnTo>
-                    <a:pt x="4031951" y="2843656"/>
-                  </a:lnTo>
-                  <a:lnTo>
-                    <a:pt x="4108583" y="2863670"/>
-                  </a:lnTo>
-                  <a:lnTo>
-                    <a:pt x="4185216" y="2883058"/>
-                  </a:lnTo>
-                  <a:lnTo>
-                    <a:pt x="4261848" y="2901841"/>
-                  </a:lnTo>
-                  <a:lnTo>
-                    <a:pt x="4338481" y="2920035"/>
-                  </a:lnTo>
-                  <a:lnTo>
-                    <a:pt x="4415113" y="2937661"/>
-                  </a:lnTo>
-                  <a:lnTo>
-                    <a:pt x="4491746" y="2954736"/>
-                  </a:lnTo>
-                  <a:lnTo>
-                    <a:pt x="4568378" y="2971277"/>
-                  </a:lnTo>
-                  <a:lnTo>
-                    <a:pt x="4645011" y="2987301"/>
-                  </a:lnTo>
-                  <a:lnTo>
-                    <a:pt x="4721644" y="3002823"/>
-                  </a:lnTo>
-                  <a:lnTo>
-                    <a:pt x="4798276" y="3017860"/>
-                  </a:lnTo>
-                  <a:lnTo>
-                    <a:pt x="4874909" y="3032428"/>
-                  </a:lnTo>
-                  <a:lnTo>
-                    <a:pt x="4951541" y="3046539"/>
-                  </a:lnTo>
-                  <a:lnTo>
-                    <a:pt x="5028174" y="3060210"/>
-                  </a:lnTo>
-                  <a:lnTo>
-                    <a:pt x="5104806" y="3073453"/>
-                  </a:lnTo>
-                  <a:lnTo>
-                    <a:pt x="5181439" y="3086282"/>
-                  </a:lnTo>
-                  <a:lnTo>
-                    <a:pt x="5258071" y="3098709"/>
-                  </a:lnTo>
-                  <a:lnTo>
-                    <a:pt x="5334704" y="3110748"/>
-                  </a:lnTo>
-                  <a:lnTo>
-                    <a:pt x="5411336" y="3122411"/>
-                  </a:lnTo>
-                  <a:lnTo>
-                    <a:pt x="5487969" y="3133709"/>
-                  </a:lnTo>
-                  <a:lnTo>
-                    <a:pt x="5564602" y="3144654"/>
-                  </a:lnTo>
-                  <a:lnTo>
-                    <a:pt x="5641234" y="3155257"/>
-                  </a:lnTo>
-                  <a:lnTo>
-                    <a:pt x="5717867" y="3165528"/>
-                  </a:lnTo>
-                  <a:lnTo>
-                    <a:pt x="5794499" y="3175478"/>
-                  </a:lnTo>
-                  <a:lnTo>
-                    <a:pt x="5871132" y="3185116"/>
-                  </a:lnTo>
-                  <a:lnTo>
-                    <a:pt x="5947764" y="3194454"/>
-                  </a:lnTo>
-                  <a:lnTo>
-                    <a:pt x="6024397" y="3203499"/>
-                  </a:lnTo>
-                  <a:lnTo>
-                    <a:pt x="6101029" y="3212262"/>
-                  </a:lnTo>
-                  <a:lnTo>
-                    <a:pt x="6177662" y="3220751"/>
-                  </a:lnTo>
-                  <a:lnTo>
-                    <a:pt x="6254294" y="3228974"/>
-                  </a:lnTo>
-                  <a:lnTo>
-                    <a:pt x="6330927" y="3236940"/>
-                  </a:lnTo>
-                  <a:lnTo>
-                    <a:pt x="6407560" y="3244657"/>
-                  </a:lnTo>
-                  <a:lnTo>
-                    <a:pt x="6484192" y="3252133"/>
-                  </a:lnTo>
-                  <a:lnTo>
-                    <a:pt x="6560825" y="3259375"/>
-                  </a:lnTo>
-                  <a:lnTo>
-                    <a:pt x="6637457" y="3266390"/>
-                  </a:lnTo>
-                  <a:lnTo>
-                    <a:pt x="6714090" y="3273187"/>
-                  </a:lnTo>
-                  <a:lnTo>
-                    <a:pt x="6790722" y="3279770"/>
-                  </a:lnTo>
-                  <a:lnTo>
-                    <a:pt x="6867355" y="3286148"/>
-                  </a:lnTo>
-                  <a:lnTo>
-                    <a:pt x="6943987" y="3292327"/>
-                  </a:lnTo>
-                  <a:lnTo>
-                    <a:pt x="7020620" y="3298312"/>
-                  </a:lnTo>
-                  <a:lnTo>
-                    <a:pt x="7097253" y="3304110"/>
-                  </a:lnTo>
-                  <a:lnTo>
-                    <a:pt x="7173885" y="3309727"/>
-                  </a:lnTo>
-                  <a:lnTo>
-                    <a:pt x="7250518" y="3315168"/>
-                  </a:lnTo>
-                  <a:lnTo>
-                    <a:pt x="7327150" y="3320439"/>
-                  </a:lnTo>
-                  <a:lnTo>
-                    <a:pt x="7403783" y="3325545"/>
-                  </a:lnTo>
-                  <a:lnTo>
-                    <a:pt x="7403783" y="3444135"/>
-                  </a:lnTo>
-                  <a:lnTo>
-                    <a:pt x="7327150" y="3441756"/>
-                  </a:lnTo>
-                  <a:lnTo>
-                    <a:pt x="7250518" y="3439234"/>
-                  </a:lnTo>
-                  <a:lnTo>
-                    <a:pt x="7173885" y="3436562"/>
-                  </a:lnTo>
-                  <a:lnTo>
-                    <a:pt x="7097253" y="3433728"/>
-                  </a:lnTo>
-                  <a:lnTo>
-                    <a:pt x="7020620" y="3430725"/>
-                  </a:lnTo>
-                  <a:lnTo>
-                    <a:pt x="6943987" y="3427541"/>
-                  </a:lnTo>
-                  <a:lnTo>
-                    <a:pt x="6867355" y="3424165"/>
-                  </a:lnTo>
-                  <a:lnTo>
-                    <a:pt x="6790722" y="3420588"/>
-                  </a:lnTo>
-                  <a:lnTo>
-                    <a:pt x="6714090" y="3416795"/>
-                  </a:lnTo>
-                  <a:lnTo>
-                    <a:pt x="6637457" y="3412775"/>
-                  </a:lnTo>
-                  <a:lnTo>
-                    <a:pt x="6560825" y="3408513"/>
-                  </a:lnTo>
-                  <a:lnTo>
-                    <a:pt x="6484192" y="3403995"/>
-                  </a:lnTo>
-                  <a:lnTo>
-                    <a:pt x="6407560" y="3399206"/>
-                  </a:lnTo>
-                  <a:lnTo>
-                    <a:pt x="6330927" y="3394129"/>
-                  </a:lnTo>
-                  <a:lnTo>
-                    <a:pt x="6254294" y="3388748"/>
-                  </a:lnTo>
-                  <a:lnTo>
-                    <a:pt x="6177662" y="3383043"/>
-                  </a:lnTo>
-                  <a:lnTo>
-                    <a:pt x="6101029" y="3376996"/>
-                  </a:lnTo>
-                  <a:lnTo>
-                    <a:pt x="6024397" y="3370586"/>
-                  </a:lnTo>
-                  <a:lnTo>
-                    <a:pt x="5947764" y="3363791"/>
-                  </a:lnTo>
-                  <a:lnTo>
-                    <a:pt x="5871132" y="3356587"/>
-                  </a:lnTo>
-                  <a:lnTo>
-                    <a:pt x="5794499" y="3348952"/>
-                  </a:lnTo>
-                  <a:lnTo>
-                    <a:pt x="5717867" y="3340857"/>
-                  </a:lnTo>
-                  <a:lnTo>
-                    <a:pt x="5641234" y="3332277"/>
-                  </a:lnTo>
-                  <a:lnTo>
-                    <a:pt x="5564602" y="3323181"/>
-                  </a:lnTo>
-                  <a:lnTo>
-                    <a:pt x="5487969" y="3313539"/>
-                  </a:lnTo>
-                  <a:lnTo>
-                    <a:pt x="5411336" y="3303318"/>
-                  </a:lnTo>
-                  <a:lnTo>
-                    <a:pt x="5334704" y="3292484"/>
-                  </a:lnTo>
-                  <a:lnTo>
-                    <a:pt x="5258071" y="3280999"/>
-                  </a:lnTo>
-                  <a:lnTo>
-                    <a:pt x="5181439" y="3268824"/>
-                  </a:lnTo>
-                  <a:lnTo>
-                    <a:pt x="5104806" y="3255918"/>
-                  </a:lnTo>
-                  <a:lnTo>
-                    <a:pt x="5028174" y="3242237"/>
-                  </a:lnTo>
-                  <a:lnTo>
-                    <a:pt x="4951541" y="3227734"/>
-                  </a:lnTo>
-                  <a:lnTo>
-                    <a:pt x="4874909" y="3212361"/>
-                  </a:lnTo>
-                  <a:lnTo>
-                    <a:pt x="4798276" y="3196064"/>
-                  </a:lnTo>
-                  <a:lnTo>
-                    <a:pt x="4721644" y="3178789"/>
-                  </a:lnTo>
-                  <a:lnTo>
-                    <a:pt x="4645011" y="3160477"/>
-                  </a:lnTo>
-                  <a:lnTo>
-                    <a:pt x="4568378" y="3141065"/>
-                  </a:lnTo>
-                  <a:lnTo>
-                    <a:pt x="4491746" y="3120487"/>
-                  </a:lnTo>
-                  <a:lnTo>
-                    <a:pt x="4415113" y="3098673"/>
-                  </a:lnTo>
-                  <a:lnTo>
-                    <a:pt x="4338481" y="3075550"/>
-                  </a:lnTo>
-                  <a:lnTo>
-                    <a:pt x="4261848" y="3051038"/>
-                  </a:lnTo>
-                  <a:lnTo>
-                    <a:pt x="4185216" y="3025054"/>
-                  </a:lnTo>
-                  <a:lnTo>
-                    <a:pt x="4108583" y="2997510"/>
-                  </a:lnTo>
-                  <a:lnTo>
-                    <a:pt x="4031951" y="2968311"/>
-                  </a:lnTo>
-                  <a:lnTo>
-                    <a:pt x="3955318" y="2937360"/>
-                  </a:lnTo>
-                  <a:lnTo>
-                    <a:pt x="3878685" y="2904550"/>
-                  </a:lnTo>
-                  <a:lnTo>
-                    <a:pt x="3802053" y="2869769"/>
-                  </a:lnTo>
-                  <a:lnTo>
-                    <a:pt x="3725420" y="2832900"/>
-                  </a:lnTo>
-                  <a:lnTo>
-                    <a:pt x="3648788" y="2793817"/>
-                  </a:lnTo>
-                  <a:lnTo>
-                    <a:pt x="3572155" y="2752387"/>
-                  </a:lnTo>
-                  <a:lnTo>
-                    <a:pt x="3495523" y="2708470"/>
-                  </a:lnTo>
-                  <a:lnTo>
-                    <a:pt x="3418890" y="2661915"/>
-                  </a:lnTo>
-                  <a:lnTo>
-                    <a:pt x="3342258" y="2631811"/>
-                  </a:lnTo>
-                  <a:lnTo>
-                    <a:pt x="3265625" y="2604313"/>
-                  </a:lnTo>
-                  <a:lnTo>
-                    <a:pt x="3188993" y="2575928"/>
-                  </a:lnTo>
-                  <a:lnTo>
-                    <a:pt x="3112360" y="2546626"/>
-                  </a:lnTo>
-                  <a:lnTo>
-                    <a:pt x="3035727" y="2516379"/>
-                  </a:lnTo>
-                  <a:lnTo>
-                    <a:pt x="2959095" y="2485156"/>
-                  </a:lnTo>
-                  <a:lnTo>
-                    <a:pt x="2882462" y="2452924"/>
-                  </a:lnTo>
-                  <a:lnTo>
-                    <a:pt x="2805830" y="2419653"/>
-                  </a:lnTo>
-                  <a:lnTo>
-                    <a:pt x="2729197" y="2385307"/>
-                  </a:lnTo>
-                  <a:lnTo>
-                    <a:pt x="2652565" y="2349853"/>
-                  </a:lnTo>
-                  <a:lnTo>
-                    <a:pt x="2575932" y="2313255"/>
-                  </a:lnTo>
-                  <a:lnTo>
-                    <a:pt x="2499300" y="2275475"/>
-                  </a:lnTo>
-                  <a:lnTo>
-                    <a:pt x="2422667" y="2236476"/>
-                  </a:lnTo>
-                  <a:lnTo>
-                    <a:pt x="2346034" y="2196218"/>
-                  </a:lnTo>
-                  <a:lnTo>
-                    <a:pt x="2269402" y="2154661"/>
-                  </a:lnTo>
-                  <a:lnTo>
-                    <a:pt x="2192769" y="2111762"/>
-                  </a:lnTo>
-                  <a:lnTo>
-                    <a:pt x="2116137" y="2067479"/>
-                  </a:lnTo>
-                  <a:lnTo>
-                    <a:pt x="2039504" y="2021766"/>
-                  </a:lnTo>
-                  <a:lnTo>
-                    <a:pt x="1962872" y="1974578"/>
-                  </a:lnTo>
-                  <a:lnTo>
-                    <a:pt x="1886239" y="1925867"/>
-                  </a:lnTo>
-                  <a:lnTo>
-                    <a:pt x="1809607" y="1875584"/>
-                  </a:lnTo>
-                  <a:lnTo>
-                    <a:pt x="1732974" y="1823677"/>
-                  </a:lnTo>
-                  <a:lnTo>
-                    <a:pt x="1656342" y="1770096"/>
-                  </a:lnTo>
-                  <a:lnTo>
-                    <a:pt x="1579709" y="1714785"/>
-                  </a:lnTo>
-                  <a:lnTo>
-                    <a:pt x="1503076" y="1657688"/>
-                  </a:lnTo>
-                  <a:lnTo>
-                    <a:pt x="1426444" y="1598749"/>
-                  </a:lnTo>
-                  <a:lnTo>
-                    <a:pt x="1349811" y="1537907"/>
-                  </a:lnTo>
-                  <a:lnTo>
-                    <a:pt x="1273179" y="1475102"/>
-                  </a:lnTo>
-                  <a:lnTo>
-                    <a:pt x="1196546" y="1410269"/>
-                  </a:lnTo>
-                  <a:lnTo>
-                    <a:pt x="1119914" y="1343344"/>
-                  </a:lnTo>
-                  <a:lnTo>
-                    <a:pt x="1043281" y="1274259"/>
-                  </a:lnTo>
-                  <a:lnTo>
-                    <a:pt x="966649" y="1202944"/>
-                  </a:lnTo>
-                  <a:lnTo>
-                    <a:pt x="890016" y="1129327"/>
-                  </a:lnTo>
-                  <a:lnTo>
-                    <a:pt x="813384" y="1053333"/>
-                  </a:lnTo>
-                  <a:lnTo>
-                    <a:pt x="736751" y="974888"/>
-                  </a:lnTo>
-                  <a:lnTo>
-                    <a:pt x="660118" y="893910"/>
-                  </a:lnTo>
-                  <a:lnTo>
-                    <a:pt x="583486" y="810318"/>
-                  </a:lnTo>
-                  <a:lnTo>
-                    <a:pt x="506853" y="724028"/>
-                  </a:lnTo>
-                  <a:lnTo>
-                    <a:pt x="430221" y="634953"/>
-                  </a:lnTo>
-                  <a:lnTo>
-                    <a:pt x="353588" y="543004"/>
-                  </a:lnTo>
-                  <a:lnTo>
-                    <a:pt x="276956" y="448086"/>
-                  </a:lnTo>
-                  <a:lnTo>
-                    <a:pt x="200323" y="350104"/>
-                  </a:lnTo>
-                  <a:lnTo>
-                    <a:pt x="123691" y="248961"/>
-                  </a:lnTo>
-                  <a:lnTo>
-                    <a:pt x="47058" y="144552"/>
-                  </a:lnTo>
-                  <a:lnTo>
-                    <a:pt x="0" y="78367"/>
+                    <a:pt x="1527746" y="152475"/>
+                  </a:lnTo>
+                  <a:lnTo>
+                    <a:pt x="1599369" y="341185"/>
+                  </a:lnTo>
+                  <a:lnTo>
+                    <a:pt x="1670991" y="519204"/>
+                  </a:lnTo>
+                  <a:lnTo>
+                    <a:pt x="1742614" y="687138"/>
+                  </a:lnTo>
+                  <a:lnTo>
+                    <a:pt x="1814236" y="845560"/>
+                  </a:lnTo>
+                  <a:lnTo>
+                    <a:pt x="1885859" y="995008"/>
+                  </a:lnTo>
+                  <a:lnTo>
+                    <a:pt x="1957481" y="1135989"/>
+                  </a:lnTo>
+                  <a:lnTo>
+                    <a:pt x="2029104" y="1268984"/>
+                  </a:lnTo>
+                  <a:lnTo>
+                    <a:pt x="2100726" y="1394446"/>
+                  </a:lnTo>
+                  <a:lnTo>
+                    <a:pt x="2172349" y="1512800"/>
+                  </a:lnTo>
+                  <a:lnTo>
+                    <a:pt x="2243971" y="1624450"/>
+                  </a:lnTo>
+                  <a:lnTo>
+                    <a:pt x="2315594" y="1729775"/>
+                  </a:lnTo>
+                  <a:lnTo>
+                    <a:pt x="2387216" y="1829133"/>
+                  </a:lnTo>
+                  <a:lnTo>
+                    <a:pt x="2458839" y="1922863"/>
+                  </a:lnTo>
+                  <a:lnTo>
+                    <a:pt x="2530461" y="2011284"/>
+                  </a:lnTo>
+                  <a:lnTo>
+                    <a:pt x="2602084" y="2094696"/>
+                  </a:lnTo>
+                  <a:lnTo>
+                    <a:pt x="2673707" y="2173382"/>
+                  </a:lnTo>
+                  <a:lnTo>
+                    <a:pt x="2745329" y="2247612"/>
+                  </a:lnTo>
+                  <a:lnTo>
+                    <a:pt x="2816952" y="2317636"/>
+                  </a:lnTo>
+                  <a:lnTo>
+                    <a:pt x="2888574" y="2383693"/>
+                  </a:lnTo>
+                  <a:lnTo>
+                    <a:pt x="2960197" y="2446009"/>
+                  </a:lnTo>
+                  <a:lnTo>
+                    <a:pt x="3031819" y="2504795"/>
+                  </a:lnTo>
+                  <a:lnTo>
+                    <a:pt x="3103442" y="2560250"/>
+                  </a:lnTo>
+                  <a:lnTo>
+                    <a:pt x="3175064" y="2612564"/>
+                  </a:lnTo>
+                  <a:lnTo>
+                    <a:pt x="3246687" y="2658449"/>
+                  </a:lnTo>
+                  <a:lnTo>
+                    <a:pt x="3318309" y="2684254"/>
+                  </a:lnTo>
+                  <a:lnTo>
+                    <a:pt x="3389932" y="2709252"/>
+                  </a:lnTo>
+                  <a:lnTo>
+                    <a:pt x="3461554" y="2733469"/>
+                  </a:lnTo>
+                  <a:lnTo>
+                    <a:pt x="3533177" y="2756928"/>
+                  </a:lnTo>
+                  <a:lnTo>
+                    <a:pt x="3604799" y="2779654"/>
+                  </a:lnTo>
+                  <a:lnTo>
+                    <a:pt x="3676422" y="2801669"/>
+                  </a:lnTo>
+                  <a:lnTo>
+                    <a:pt x="3748044" y="2822996"/>
+                  </a:lnTo>
+                  <a:lnTo>
+                    <a:pt x="3819667" y="2843656"/>
+                  </a:lnTo>
+                  <a:lnTo>
+                    <a:pt x="3891289" y="2863670"/>
+                  </a:lnTo>
+                  <a:lnTo>
+                    <a:pt x="3962912" y="2883058"/>
+                  </a:lnTo>
+                  <a:lnTo>
+                    <a:pt x="4034535" y="2901841"/>
+                  </a:lnTo>
+                  <a:lnTo>
+                    <a:pt x="4106157" y="2920035"/>
+                  </a:lnTo>
+                  <a:lnTo>
+                    <a:pt x="4177780" y="2937661"/>
+                  </a:lnTo>
+                  <a:lnTo>
+                    <a:pt x="4249402" y="2954736"/>
+                  </a:lnTo>
+                  <a:lnTo>
+                    <a:pt x="4321025" y="2971277"/>
+                  </a:lnTo>
+                  <a:lnTo>
+                    <a:pt x="4392647" y="2987301"/>
+                  </a:lnTo>
+                  <a:lnTo>
+                    <a:pt x="4464270" y="3002823"/>
+                  </a:lnTo>
+                  <a:lnTo>
+                    <a:pt x="4535892" y="3017860"/>
+                  </a:lnTo>
+                  <a:lnTo>
+                    <a:pt x="4607515" y="3032428"/>
+                  </a:lnTo>
+                  <a:lnTo>
+                    <a:pt x="4679137" y="3046539"/>
+                  </a:lnTo>
+                  <a:lnTo>
+                    <a:pt x="4750760" y="3060210"/>
+                  </a:lnTo>
+                  <a:lnTo>
+                    <a:pt x="4822382" y="3073453"/>
+                  </a:lnTo>
+                  <a:lnTo>
+                    <a:pt x="4894005" y="3086282"/>
+                  </a:lnTo>
+                  <a:lnTo>
+                    <a:pt x="4965627" y="3098709"/>
+                  </a:lnTo>
+                  <a:lnTo>
+                    <a:pt x="5037250" y="3110748"/>
+                  </a:lnTo>
+                  <a:lnTo>
+                    <a:pt x="5108872" y="3122411"/>
+                  </a:lnTo>
+                  <a:lnTo>
+                    <a:pt x="5180495" y="3133709"/>
+                  </a:lnTo>
+                  <a:lnTo>
+                    <a:pt x="5252117" y="3144654"/>
+                  </a:lnTo>
+                  <a:lnTo>
+                    <a:pt x="5323740" y="3155257"/>
+                  </a:lnTo>
+                  <a:lnTo>
+                    <a:pt x="5395363" y="3165528"/>
+                  </a:lnTo>
+                  <a:lnTo>
+                    <a:pt x="5466985" y="3175478"/>
+                  </a:lnTo>
+                  <a:lnTo>
+                    <a:pt x="5538608" y="3185116"/>
+                  </a:lnTo>
+                  <a:lnTo>
+                    <a:pt x="5610230" y="3194454"/>
+                  </a:lnTo>
+                  <a:lnTo>
+                    <a:pt x="5681853" y="3203499"/>
+                  </a:lnTo>
+                  <a:lnTo>
+                    <a:pt x="5753475" y="3212262"/>
+                  </a:lnTo>
+                  <a:lnTo>
+                    <a:pt x="5825098" y="3220751"/>
+                  </a:lnTo>
+                  <a:lnTo>
+                    <a:pt x="5896720" y="3228974"/>
+                  </a:lnTo>
+                  <a:lnTo>
+                    <a:pt x="5968343" y="3236940"/>
+                  </a:lnTo>
+                  <a:lnTo>
+                    <a:pt x="6039965" y="3244657"/>
+                  </a:lnTo>
+                  <a:lnTo>
+                    <a:pt x="6111588" y="3252133"/>
+                  </a:lnTo>
+                  <a:lnTo>
+                    <a:pt x="6183210" y="3259375"/>
+                  </a:lnTo>
+                  <a:lnTo>
+                    <a:pt x="6254833" y="3266390"/>
+                  </a:lnTo>
+                  <a:lnTo>
+                    <a:pt x="6326455" y="3273187"/>
+                  </a:lnTo>
+                  <a:lnTo>
+                    <a:pt x="6398078" y="3279770"/>
+                  </a:lnTo>
+                  <a:lnTo>
+                    <a:pt x="6469700" y="3286148"/>
+                  </a:lnTo>
+                  <a:lnTo>
+                    <a:pt x="6541323" y="3292327"/>
+                  </a:lnTo>
+                  <a:lnTo>
+                    <a:pt x="6612945" y="3298312"/>
+                  </a:lnTo>
+                  <a:lnTo>
+                    <a:pt x="6684568" y="3304110"/>
+                  </a:lnTo>
+                  <a:lnTo>
+                    <a:pt x="6756191" y="3309727"/>
+                  </a:lnTo>
+                  <a:lnTo>
+                    <a:pt x="6827813" y="3315168"/>
+                  </a:lnTo>
+                  <a:lnTo>
+                    <a:pt x="6899436" y="3320439"/>
+                  </a:lnTo>
+                  <a:lnTo>
+                    <a:pt x="6971058" y="3325545"/>
+                  </a:lnTo>
+                  <a:lnTo>
+                    <a:pt x="6971058" y="3444135"/>
+                  </a:lnTo>
+                  <a:lnTo>
+                    <a:pt x="6899436" y="3441756"/>
+                  </a:lnTo>
+                  <a:lnTo>
+                    <a:pt x="6827813" y="3439234"/>
+                  </a:lnTo>
+                  <a:lnTo>
+                    <a:pt x="6756191" y="3436562"/>
+                  </a:lnTo>
+                  <a:lnTo>
+                    <a:pt x="6684568" y="3433728"/>
+                  </a:lnTo>
+                  <a:lnTo>
+                    <a:pt x="6612945" y="3430725"/>
+                  </a:lnTo>
+                  <a:lnTo>
+                    <a:pt x="6541323" y="3427541"/>
+                  </a:lnTo>
+                  <a:lnTo>
+                    <a:pt x="6469700" y="3424165"/>
+                  </a:lnTo>
+                  <a:lnTo>
+                    <a:pt x="6398078" y="3420588"/>
+                  </a:lnTo>
+                  <a:lnTo>
+                    <a:pt x="6326455" y="3416795"/>
+                  </a:lnTo>
+                  <a:lnTo>
+                    <a:pt x="6254833" y="3412775"/>
+                  </a:lnTo>
+                  <a:lnTo>
+                    <a:pt x="6183210" y="3408513"/>
+                  </a:lnTo>
+                  <a:lnTo>
+                    <a:pt x="6111588" y="3403995"/>
+                  </a:lnTo>
+                  <a:lnTo>
+                    <a:pt x="6039965" y="3399206"/>
+                  </a:lnTo>
+                  <a:lnTo>
+                    <a:pt x="5968343" y="3394129"/>
+                  </a:lnTo>
+                  <a:lnTo>
+                    <a:pt x="5896720" y="3388748"/>
+                  </a:lnTo>
+                  <a:lnTo>
+                    <a:pt x="5825098" y="3383043"/>
+                  </a:lnTo>
+                  <a:lnTo>
+                    <a:pt x="5753475" y="3376996"/>
+                  </a:lnTo>
+                  <a:lnTo>
+                    <a:pt x="5681853" y="3370586"/>
+                  </a:lnTo>
+                  <a:lnTo>
+                    <a:pt x="5610230" y="3363791"/>
+                  </a:lnTo>
+                  <a:lnTo>
+                    <a:pt x="5538608" y="3356587"/>
+                  </a:lnTo>
+                  <a:lnTo>
+                    <a:pt x="5466985" y="3348952"/>
+                  </a:lnTo>
+                  <a:lnTo>
+                    <a:pt x="5395363" y="3340857"/>
+                  </a:lnTo>
+                  <a:lnTo>
+                    <a:pt x="5323740" y="3332277"/>
+                  </a:lnTo>
+                  <a:lnTo>
+                    <a:pt x="5252117" y="3323181"/>
+                  </a:lnTo>
+                  <a:lnTo>
+                    <a:pt x="5180495" y="3313539"/>
+                  </a:lnTo>
+                  <a:lnTo>
+                    <a:pt x="5108872" y="3303318"/>
+                  </a:lnTo>
+                  <a:lnTo>
+                    <a:pt x="5037250" y="3292484"/>
+                  </a:lnTo>
+                  <a:lnTo>
+                    <a:pt x="4965627" y="3280999"/>
+                  </a:lnTo>
+                  <a:lnTo>
+                    <a:pt x="4894005" y="3268824"/>
+                  </a:lnTo>
+                  <a:lnTo>
+                    <a:pt x="4822382" y="3255918"/>
+                  </a:lnTo>
+                  <a:lnTo>
+                    <a:pt x="4750760" y="3242237"/>
+                  </a:lnTo>
+                  <a:lnTo>
+                    <a:pt x="4679137" y="3227734"/>
+                  </a:lnTo>
+                  <a:lnTo>
+                    <a:pt x="4607515" y="3212361"/>
+                  </a:lnTo>
+                  <a:lnTo>
+                    <a:pt x="4535892" y="3196064"/>
+                  </a:lnTo>
+                  <a:lnTo>
+                    <a:pt x="4464270" y="3178789"/>
+                  </a:lnTo>
+                  <a:lnTo>
+                    <a:pt x="4392647" y="3160477"/>
+                  </a:lnTo>
+                  <a:lnTo>
+                    <a:pt x="4321025" y="3141065"/>
+                  </a:lnTo>
+                  <a:lnTo>
+                    <a:pt x="4249402" y="3120487"/>
+                  </a:lnTo>
+                  <a:lnTo>
+                    <a:pt x="4177780" y="3098673"/>
+                  </a:lnTo>
+                  <a:lnTo>
+                    <a:pt x="4106157" y="3075550"/>
+                  </a:lnTo>
+                  <a:lnTo>
+                    <a:pt x="4034535" y="3051038"/>
+                  </a:lnTo>
+                  <a:lnTo>
+                    <a:pt x="3962912" y="3025054"/>
+                  </a:lnTo>
+                  <a:lnTo>
+                    <a:pt x="3891289" y="2997510"/>
+                  </a:lnTo>
+                  <a:lnTo>
+                    <a:pt x="3819667" y="2968311"/>
+                  </a:lnTo>
+                  <a:lnTo>
+                    <a:pt x="3748044" y="2937360"/>
+                  </a:lnTo>
+                  <a:lnTo>
+                    <a:pt x="3676422" y="2904550"/>
+                  </a:lnTo>
+                  <a:lnTo>
+                    <a:pt x="3604799" y="2869769"/>
+                  </a:lnTo>
+                  <a:lnTo>
+                    <a:pt x="3533177" y="2832900"/>
+                  </a:lnTo>
+                  <a:lnTo>
+                    <a:pt x="3461554" y="2793817"/>
+                  </a:lnTo>
+                  <a:lnTo>
+                    <a:pt x="3389932" y="2752387"/>
+                  </a:lnTo>
+                  <a:lnTo>
+                    <a:pt x="3318309" y="2708470"/>
+                  </a:lnTo>
+                  <a:lnTo>
+                    <a:pt x="3246687" y="2661915"/>
+                  </a:lnTo>
+                  <a:lnTo>
+                    <a:pt x="3175064" y="2631811"/>
+                  </a:lnTo>
+                  <a:lnTo>
+                    <a:pt x="3103442" y="2604313"/>
+                  </a:lnTo>
+                  <a:lnTo>
+                    <a:pt x="3031819" y="2575928"/>
+                  </a:lnTo>
+                  <a:lnTo>
+                    <a:pt x="2960197" y="2546626"/>
+                  </a:lnTo>
+                  <a:lnTo>
+                    <a:pt x="2888574" y="2516379"/>
+                  </a:lnTo>
+                  <a:lnTo>
+                    <a:pt x="2816952" y="2485156"/>
+                  </a:lnTo>
+                  <a:lnTo>
+                    <a:pt x="2745329" y="2452924"/>
+                  </a:lnTo>
+                  <a:lnTo>
+                    <a:pt x="2673707" y="2419653"/>
+                  </a:lnTo>
+                  <a:lnTo>
+                    <a:pt x="2602084" y="2385307"/>
+                  </a:lnTo>
+                  <a:lnTo>
+                    <a:pt x="2530461" y="2349853"/>
+                  </a:lnTo>
+                  <a:lnTo>
+                    <a:pt x="2458839" y="2313255"/>
+                  </a:lnTo>
+                  <a:lnTo>
+                    <a:pt x="2387216" y="2275475"/>
+                  </a:lnTo>
+                  <a:lnTo>
+                    <a:pt x="2315594" y="2236476"/>
+                  </a:lnTo>
+                  <a:lnTo>
+                    <a:pt x="2243971" y="2196218"/>
+                  </a:lnTo>
+                  <a:lnTo>
+                    <a:pt x="2172349" y="2154661"/>
+                  </a:lnTo>
+                  <a:lnTo>
+                    <a:pt x="2100726" y="2111762"/>
+                  </a:lnTo>
+                  <a:lnTo>
+                    <a:pt x="2029104" y="2067479"/>
+                  </a:lnTo>
+                  <a:lnTo>
+                    <a:pt x="1957481" y="2021766"/>
+                  </a:lnTo>
+                  <a:lnTo>
+                    <a:pt x="1885859" y="1974578"/>
+                  </a:lnTo>
+                  <a:lnTo>
+                    <a:pt x="1814236" y="1925867"/>
+                  </a:lnTo>
+                  <a:lnTo>
+                    <a:pt x="1742614" y="1875584"/>
+                  </a:lnTo>
+                  <a:lnTo>
+                    <a:pt x="1670991" y="1823677"/>
+                  </a:lnTo>
+                  <a:lnTo>
+                    <a:pt x="1599369" y="1770096"/>
+                  </a:lnTo>
+                  <a:lnTo>
+                    <a:pt x="1527746" y="1714785"/>
+                  </a:lnTo>
+                  <a:lnTo>
+                    <a:pt x="1456124" y="1657688"/>
+                  </a:lnTo>
+                  <a:lnTo>
+                    <a:pt x="1384501" y="1598749"/>
+                  </a:lnTo>
+                  <a:lnTo>
+                    <a:pt x="1312879" y="1537907"/>
+                  </a:lnTo>
+                  <a:lnTo>
+                    <a:pt x="1241256" y="1475102"/>
+                  </a:lnTo>
+                  <a:lnTo>
+                    <a:pt x="1169633" y="1410269"/>
+                  </a:lnTo>
+                  <a:lnTo>
+                    <a:pt x="1098011" y="1343344"/>
+                  </a:lnTo>
+                  <a:lnTo>
+                    <a:pt x="1026388" y="1274259"/>
+                  </a:lnTo>
+                  <a:lnTo>
+                    <a:pt x="954766" y="1202944"/>
+                  </a:lnTo>
+                  <a:lnTo>
+                    <a:pt x="883143" y="1129327"/>
+                  </a:lnTo>
+                  <a:lnTo>
+                    <a:pt x="811521" y="1053333"/>
+                  </a:lnTo>
+                  <a:lnTo>
+                    <a:pt x="739898" y="974888"/>
+                  </a:lnTo>
+                  <a:lnTo>
+                    <a:pt x="668276" y="893910"/>
+                  </a:lnTo>
+                  <a:lnTo>
+                    <a:pt x="596653" y="810318"/>
+                  </a:lnTo>
+                  <a:lnTo>
+                    <a:pt x="525031" y="724028"/>
+                  </a:lnTo>
+                  <a:lnTo>
+                    <a:pt x="453408" y="634953"/>
+                  </a:lnTo>
+                  <a:lnTo>
+                    <a:pt x="381786" y="543004"/>
+                  </a:lnTo>
+                  <a:lnTo>
+                    <a:pt x="310163" y="448086"/>
+                  </a:lnTo>
+                  <a:lnTo>
+                    <a:pt x="238541" y="350104"/>
+                  </a:lnTo>
+                  <a:lnTo>
+                    <a:pt x="166918" y="248961"/>
+                  </a:lnTo>
+                  <a:lnTo>
+                    <a:pt x="95296" y="144552"/>
+                  </a:lnTo>
+                  <a:lnTo>
+                    <a:pt x="23673" y="36774"/>
                   </a:lnTo>
                   <a:lnTo>
                     <a:pt x="0" y="0"/>
@@ -3558,252 +3515,574 @@
         </p:sp>
         <p:sp>
           <p:nvSpPr>
+            <p:cNvPr id="21" name="pl21"/>
+            <p:cNvSpPr/>
+            <p:nvPr/>
+          </p:nvSpPr>
+          <p:spPr>
+            <a:xfrm>
+              <a:off x="2764775" y="2073503"/>
+              <a:ext cx="5497904" cy="3325545"/>
+            </a:xfrm>
+            <a:custGeom>
+              <a:avLst/>
+              <a:pathLst>
+                <a:path w="5497904" h="3325545">
+                  <a:moveTo>
+                    <a:pt x="0" y="0"/>
+                  </a:moveTo>
+                  <a:lnTo>
+                    <a:pt x="54592" y="152475"/>
+                  </a:lnTo>
+                  <a:lnTo>
+                    <a:pt x="126214" y="341185"/>
+                  </a:lnTo>
+                  <a:lnTo>
+                    <a:pt x="197837" y="519204"/>
+                  </a:lnTo>
+                  <a:lnTo>
+                    <a:pt x="269459" y="687138"/>
+                  </a:lnTo>
+                  <a:lnTo>
+                    <a:pt x="341082" y="845560"/>
+                  </a:lnTo>
+                  <a:lnTo>
+                    <a:pt x="412705" y="995008"/>
+                  </a:lnTo>
+                  <a:lnTo>
+                    <a:pt x="484327" y="1135989"/>
+                  </a:lnTo>
+                  <a:lnTo>
+                    <a:pt x="555950" y="1268984"/>
+                  </a:lnTo>
+                  <a:lnTo>
+                    <a:pt x="627572" y="1394446"/>
+                  </a:lnTo>
+                  <a:lnTo>
+                    <a:pt x="699195" y="1512800"/>
+                  </a:lnTo>
+                  <a:lnTo>
+                    <a:pt x="770817" y="1624450"/>
+                  </a:lnTo>
+                  <a:lnTo>
+                    <a:pt x="842440" y="1729775"/>
+                  </a:lnTo>
+                  <a:lnTo>
+                    <a:pt x="914062" y="1829133"/>
+                  </a:lnTo>
+                  <a:lnTo>
+                    <a:pt x="985685" y="1922863"/>
+                  </a:lnTo>
+                  <a:lnTo>
+                    <a:pt x="1057307" y="2011284"/>
+                  </a:lnTo>
+                  <a:lnTo>
+                    <a:pt x="1128930" y="2094696"/>
+                  </a:lnTo>
+                  <a:lnTo>
+                    <a:pt x="1200552" y="2173382"/>
+                  </a:lnTo>
+                  <a:lnTo>
+                    <a:pt x="1272175" y="2247612"/>
+                  </a:lnTo>
+                  <a:lnTo>
+                    <a:pt x="1343797" y="2317636"/>
+                  </a:lnTo>
+                  <a:lnTo>
+                    <a:pt x="1415420" y="2383693"/>
+                  </a:lnTo>
+                  <a:lnTo>
+                    <a:pt x="1487042" y="2446009"/>
+                  </a:lnTo>
+                  <a:lnTo>
+                    <a:pt x="1558665" y="2504795"/>
+                  </a:lnTo>
+                  <a:lnTo>
+                    <a:pt x="1630287" y="2560250"/>
+                  </a:lnTo>
+                  <a:lnTo>
+                    <a:pt x="1701910" y="2612564"/>
+                  </a:lnTo>
+                  <a:lnTo>
+                    <a:pt x="1773533" y="2658449"/>
+                  </a:lnTo>
+                  <a:lnTo>
+                    <a:pt x="1845155" y="2684254"/>
+                  </a:lnTo>
+                  <a:lnTo>
+                    <a:pt x="1916778" y="2709252"/>
+                  </a:lnTo>
+                  <a:lnTo>
+                    <a:pt x="1988400" y="2733469"/>
+                  </a:lnTo>
+                  <a:lnTo>
+                    <a:pt x="2060023" y="2756928"/>
+                  </a:lnTo>
+                  <a:lnTo>
+                    <a:pt x="2131645" y="2779654"/>
+                  </a:lnTo>
+                  <a:lnTo>
+                    <a:pt x="2203268" y="2801669"/>
+                  </a:lnTo>
+                  <a:lnTo>
+                    <a:pt x="2274890" y="2822996"/>
+                  </a:lnTo>
+                  <a:lnTo>
+                    <a:pt x="2346513" y="2843656"/>
+                  </a:lnTo>
+                  <a:lnTo>
+                    <a:pt x="2418135" y="2863670"/>
+                  </a:lnTo>
+                  <a:lnTo>
+                    <a:pt x="2489758" y="2883058"/>
+                  </a:lnTo>
+                  <a:lnTo>
+                    <a:pt x="2561380" y="2901841"/>
+                  </a:lnTo>
+                  <a:lnTo>
+                    <a:pt x="2633003" y="2920035"/>
+                  </a:lnTo>
+                  <a:lnTo>
+                    <a:pt x="2704625" y="2937661"/>
+                  </a:lnTo>
+                  <a:lnTo>
+                    <a:pt x="2776248" y="2954736"/>
+                  </a:lnTo>
+                  <a:lnTo>
+                    <a:pt x="2847870" y="2971277"/>
+                  </a:lnTo>
+                  <a:lnTo>
+                    <a:pt x="2919493" y="2987301"/>
+                  </a:lnTo>
+                  <a:lnTo>
+                    <a:pt x="2991115" y="3002823"/>
+                  </a:lnTo>
+                  <a:lnTo>
+                    <a:pt x="3062738" y="3017860"/>
+                  </a:lnTo>
+                  <a:lnTo>
+                    <a:pt x="3134361" y="3032428"/>
+                  </a:lnTo>
+                  <a:lnTo>
+                    <a:pt x="3205983" y="3046539"/>
+                  </a:lnTo>
+                  <a:lnTo>
+                    <a:pt x="3277606" y="3060210"/>
+                  </a:lnTo>
+                  <a:lnTo>
+                    <a:pt x="3349228" y="3073453"/>
+                  </a:lnTo>
+                  <a:lnTo>
+                    <a:pt x="3420851" y="3086282"/>
+                  </a:lnTo>
+                  <a:lnTo>
+                    <a:pt x="3492473" y="3098709"/>
+                  </a:lnTo>
+                  <a:lnTo>
+                    <a:pt x="3564096" y="3110748"/>
+                  </a:lnTo>
+                  <a:lnTo>
+                    <a:pt x="3635718" y="3122411"/>
+                  </a:lnTo>
+                  <a:lnTo>
+                    <a:pt x="3707341" y="3133709"/>
+                  </a:lnTo>
+                  <a:lnTo>
+                    <a:pt x="3778963" y="3144654"/>
+                  </a:lnTo>
+                  <a:lnTo>
+                    <a:pt x="3850586" y="3155257"/>
+                  </a:lnTo>
+                  <a:lnTo>
+                    <a:pt x="3922208" y="3165528"/>
+                  </a:lnTo>
+                  <a:lnTo>
+                    <a:pt x="3993831" y="3175478"/>
+                  </a:lnTo>
+                  <a:lnTo>
+                    <a:pt x="4065453" y="3185116"/>
+                  </a:lnTo>
+                  <a:lnTo>
+                    <a:pt x="4137076" y="3194454"/>
+                  </a:lnTo>
+                  <a:lnTo>
+                    <a:pt x="4208698" y="3203499"/>
+                  </a:lnTo>
+                  <a:lnTo>
+                    <a:pt x="4280321" y="3212262"/>
+                  </a:lnTo>
+                  <a:lnTo>
+                    <a:pt x="4351943" y="3220751"/>
+                  </a:lnTo>
+                  <a:lnTo>
+                    <a:pt x="4423566" y="3228974"/>
+                  </a:lnTo>
+                  <a:lnTo>
+                    <a:pt x="4495189" y="3236940"/>
+                  </a:lnTo>
+                  <a:lnTo>
+                    <a:pt x="4566811" y="3244657"/>
+                  </a:lnTo>
+                  <a:lnTo>
+                    <a:pt x="4638434" y="3252133"/>
+                  </a:lnTo>
+                  <a:lnTo>
+                    <a:pt x="4710056" y="3259375"/>
+                  </a:lnTo>
+                  <a:lnTo>
+                    <a:pt x="4781679" y="3266390"/>
+                  </a:lnTo>
+                  <a:lnTo>
+                    <a:pt x="4853301" y="3273187"/>
+                  </a:lnTo>
+                  <a:lnTo>
+                    <a:pt x="4924924" y="3279770"/>
+                  </a:lnTo>
+                  <a:lnTo>
+                    <a:pt x="4996546" y="3286148"/>
+                  </a:lnTo>
+                  <a:lnTo>
+                    <a:pt x="5068169" y="3292327"/>
+                  </a:lnTo>
+                  <a:lnTo>
+                    <a:pt x="5139791" y="3298312"/>
+                  </a:lnTo>
+                  <a:lnTo>
+                    <a:pt x="5211414" y="3304110"/>
+                  </a:lnTo>
+                  <a:lnTo>
+                    <a:pt x="5283036" y="3309727"/>
+                  </a:lnTo>
+                  <a:lnTo>
+                    <a:pt x="5354659" y="3315168"/>
+                  </a:lnTo>
+                  <a:lnTo>
+                    <a:pt x="5426281" y="3320439"/>
+                  </a:lnTo>
+                  <a:lnTo>
+                    <a:pt x="5497904" y="3325545"/>
+                  </a:lnTo>
+                </a:path>
+              </a:pathLst>
+            </a:custGeom>
+          </p:spPr>
+          <p:txBody>
+            <a:bodyPr/>
+            <a:lstStyle/>
+            <a:p/>
+          </p:txBody>
+        </p:sp>
+        <p:sp>
+          <p:nvSpPr>
             <p:cNvPr id="22" name="pl22"/>
             <p:cNvSpPr/>
             <p:nvPr/>
           </p:nvSpPr>
           <p:spPr>
             <a:xfrm>
-              <a:off x="2338816" y="2073503"/>
-              <a:ext cx="5882484" cy="3325545"/>
+              <a:off x="1291620" y="2073503"/>
+              <a:ext cx="6971058" cy="3444135"/>
             </a:xfrm>
             <a:custGeom>
               <a:avLst/>
               <a:pathLst>
-                <a:path w="5882484" h="3325545">
+                <a:path w="6971058" h="3444135">
                   <a:moveTo>
+                    <a:pt x="6971058" y="3444135"/>
+                  </a:moveTo>
+                  <a:lnTo>
+                    <a:pt x="6899436" y="3441756"/>
+                  </a:lnTo>
+                  <a:lnTo>
+                    <a:pt x="6827813" y="3439234"/>
+                  </a:lnTo>
+                  <a:lnTo>
+                    <a:pt x="6756191" y="3436562"/>
+                  </a:lnTo>
+                  <a:lnTo>
+                    <a:pt x="6684568" y="3433728"/>
+                  </a:lnTo>
+                  <a:lnTo>
+                    <a:pt x="6612945" y="3430725"/>
+                  </a:lnTo>
+                  <a:lnTo>
+                    <a:pt x="6541323" y="3427541"/>
+                  </a:lnTo>
+                  <a:lnTo>
+                    <a:pt x="6469700" y="3424165"/>
+                  </a:lnTo>
+                  <a:lnTo>
+                    <a:pt x="6398078" y="3420588"/>
+                  </a:lnTo>
+                  <a:lnTo>
+                    <a:pt x="6326455" y="3416795"/>
+                  </a:lnTo>
+                  <a:lnTo>
+                    <a:pt x="6254833" y="3412775"/>
+                  </a:lnTo>
+                  <a:lnTo>
+                    <a:pt x="6183210" y="3408513"/>
+                  </a:lnTo>
+                  <a:lnTo>
+                    <a:pt x="6111588" y="3403995"/>
+                  </a:lnTo>
+                  <a:lnTo>
+                    <a:pt x="6039965" y="3399206"/>
+                  </a:lnTo>
+                  <a:lnTo>
+                    <a:pt x="5968343" y="3394129"/>
+                  </a:lnTo>
+                  <a:lnTo>
+                    <a:pt x="5896720" y="3388748"/>
+                  </a:lnTo>
+                  <a:lnTo>
+                    <a:pt x="5825098" y="3383043"/>
+                  </a:lnTo>
+                  <a:lnTo>
+                    <a:pt x="5753475" y="3376996"/>
+                  </a:lnTo>
+                  <a:lnTo>
+                    <a:pt x="5681853" y="3370586"/>
+                  </a:lnTo>
+                  <a:lnTo>
+                    <a:pt x="5610230" y="3363791"/>
+                  </a:lnTo>
+                  <a:lnTo>
+                    <a:pt x="5538608" y="3356587"/>
+                  </a:lnTo>
+                  <a:lnTo>
+                    <a:pt x="5466985" y="3348952"/>
+                  </a:lnTo>
+                  <a:lnTo>
+                    <a:pt x="5395363" y="3340857"/>
+                  </a:lnTo>
+                  <a:lnTo>
+                    <a:pt x="5323740" y="3332277"/>
+                  </a:lnTo>
+                  <a:lnTo>
+                    <a:pt x="5252117" y="3323181"/>
+                  </a:lnTo>
+                  <a:lnTo>
+                    <a:pt x="5180495" y="3313539"/>
+                  </a:lnTo>
+                  <a:lnTo>
+                    <a:pt x="5108872" y="3303318"/>
+                  </a:lnTo>
+                  <a:lnTo>
+                    <a:pt x="5037250" y="3292484"/>
+                  </a:lnTo>
+                  <a:lnTo>
+                    <a:pt x="4965627" y="3280999"/>
+                  </a:lnTo>
+                  <a:lnTo>
+                    <a:pt x="4894005" y="3268824"/>
+                  </a:lnTo>
+                  <a:lnTo>
+                    <a:pt x="4822382" y="3255918"/>
+                  </a:lnTo>
+                  <a:lnTo>
+                    <a:pt x="4750760" y="3242237"/>
+                  </a:lnTo>
+                  <a:lnTo>
+                    <a:pt x="4679137" y="3227734"/>
+                  </a:lnTo>
+                  <a:lnTo>
+                    <a:pt x="4607515" y="3212361"/>
+                  </a:lnTo>
+                  <a:lnTo>
+                    <a:pt x="4535892" y="3196064"/>
+                  </a:lnTo>
+                  <a:lnTo>
+                    <a:pt x="4464270" y="3178789"/>
+                  </a:lnTo>
+                  <a:lnTo>
+                    <a:pt x="4392647" y="3160477"/>
+                  </a:lnTo>
+                  <a:lnTo>
+                    <a:pt x="4321025" y="3141065"/>
+                  </a:lnTo>
+                  <a:lnTo>
+                    <a:pt x="4249402" y="3120487"/>
+                  </a:lnTo>
+                  <a:lnTo>
+                    <a:pt x="4177780" y="3098673"/>
+                  </a:lnTo>
+                  <a:lnTo>
+                    <a:pt x="4106157" y="3075550"/>
+                  </a:lnTo>
+                  <a:lnTo>
+                    <a:pt x="4034535" y="3051038"/>
+                  </a:lnTo>
+                  <a:lnTo>
+                    <a:pt x="3962912" y="3025054"/>
+                  </a:lnTo>
+                  <a:lnTo>
+                    <a:pt x="3891289" y="2997510"/>
+                  </a:lnTo>
+                  <a:lnTo>
+                    <a:pt x="3819667" y="2968311"/>
+                  </a:lnTo>
+                  <a:lnTo>
+                    <a:pt x="3748044" y="2937360"/>
+                  </a:lnTo>
+                  <a:lnTo>
+                    <a:pt x="3676422" y="2904550"/>
+                  </a:lnTo>
+                  <a:lnTo>
+                    <a:pt x="3604799" y="2869769"/>
+                  </a:lnTo>
+                  <a:lnTo>
+                    <a:pt x="3533177" y="2832900"/>
+                  </a:lnTo>
+                  <a:lnTo>
+                    <a:pt x="3461554" y="2793817"/>
+                  </a:lnTo>
+                  <a:lnTo>
+                    <a:pt x="3389932" y="2752387"/>
+                  </a:lnTo>
+                  <a:lnTo>
+                    <a:pt x="3318309" y="2708470"/>
+                  </a:lnTo>
+                  <a:lnTo>
+                    <a:pt x="3246687" y="2661915"/>
+                  </a:lnTo>
+                  <a:lnTo>
+                    <a:pt x="3175064" y="2631811"/>
+                  </a:lnTo>
+                  <a:lnTo>
+                    <a:pt x="3103442" y="2604313"/>
+                  </a:lnTo>
+                  <a:lnTo>
+                    <a:pt x="3031819" y="2575928"/>
+                  </a:lnTo>
+                  <a:lnTo>
+                    <a:pt x="2960197" y="2546626"/>
+                  </a:lnTo>
+                  <a:lnTo>
+                    <a:pt x="2888574" y="2516379"/>
+                  </a:lnTo>
+                  <a:lnTo>
+                    <a:pt x="2816952" y="2485156"/>
+                  </a:lnTo>
+                  <a:lnTo>
+                    <a:pt x="2745329" y="2452924"/>
+                  </a:lnTo>
+                  <a:lnTo>
+                    <a:pt x="2673707" y="2419653"/>
+                  </a:lnTo>
+                  <a:lnTo>
+                    <a:pt x="2602084" y="2385307"/>
+                  </a:lnTo>
+                  <a:lnTo>
+                    <a:pt x="2530461" y="2349853"/>
+                  </a:lnTo>
+                  <a:lnTo>
+                    <a:pt x="2458839" y="2313255"/>
+                  </a:lnTo>
+                  <a:lnTo>
+                    <a:pt x="2387216" y="2275475"/>
+                  </a:lnTo>
+                  <a:lnTo>
+                    <a:pt x="2315594" y="2236476"/>
+                  </a:lnTo>
+                  <a:lnTo>
+                    <a:pt x="2243971" y="2196218"/>
+                  </a:lnTo>
+                  <a:lnTo>
+                    <a:pt x="2172349" y="2154661"/>
+                  </a:lnTo>
+                  <a:lnTo>
+                    <a:pt x="2100726" y="2111762"/>
+                  </a:lnTo>
+                  <a:lnTo>
+                    <a:pt x="2029104" y="2067479"/>
+                  </a:lnTo>
+                  <a:lnTo>
+                    <a:pt x="1957481" y="2021766"/>
+                  </a:lnTo>
+                  <a:lnTo>
+                    <a:pt x="1885859" y="1974578"/>
+                  </a:lnTo>
+                  <a:lnTo>
+                    <a:pt x="1814236" y="1925867"/>
+                  </a:lnTo>
+                  <a:lnTo>
+                    <a:pt x="1742614" y="1875584"/>
+                  </a:lnTo>
+                  <a:lnTo>
+                    <a:pt x="1670991" y="1823677"/>
+                  </a:lnTo>
+                  <a:lnTo>
+                    <a:pt x="1599369" y="1770096"/>
+                  </a:lnTo>
+                  <a:lnTo>
+                    <a:pt x="1527746" y="1714785"/>
+                  </a:lnTo>
+                  <a:lnTo>
+                    <a:pt x="1456124" y="1657688"/>
+                  </a:lnTo>
+                  <a:lnTo>
+                    <a:pt x="1384501" y="1598749"/>
+                  </a:lnTo>
+                  <a:lnTo>
+                    <a:pt x="1312879" y="1537907"/>
+                  </a:lnTo>
+                  <a:lnTo>
+                    <a:pt x="1241256" y="1475102"/>
+                  </a:lnTo>
+                  <a:lnTo>
+                    <a:pt x="1169633" y="1410269"/>
+                  </a:lnTo>
+                  <a:lnTo>
+                    <a:pt x="1098011" y="1343344"/>
+                  </a:lnTo>
+                  <a:lnTo>
+                    <a:pt x="1026388" y="1274259"/>
+                  </a:lnTo>
+                  <a:lnTo>
+                    <a:pt x="954766" y="1202944"/>
+                  </a:lnTo>
+                  <a:lnTo>
+                    <a:pt x="883143" y="1129327"/>
+                  </a:lnTo>
+                  <a:lnTo>
+                    <a:pt x="811521" y="1053333"/>
+                  </a:lnTo>
+                  <a:lnTo>
+                    <a:pt x="739898" y="974888"/>
+                  </a:lnTo>
+                  <a:lnTo>
+                    <a:pt x="668276" y="893910"/>
+                  </a:lnTo>
+                  <a:lnTo>
+                    <a:pt x="596653" y="810318"/>
+                  </a:lnTo>
+                  <a:lnTo>
+                    <a:pt x="525031" y="724028"/>
+                  </a:lnTo>
+                  <a:lnTo>
+                    <a:pt x="453408" y="634953"/>
+                  </a:lnTo>
+                  <a:lnTo>
+                    <a:pt x="381786" y="543004"/>
+                  </a:lnTo>
+                  <a:lnTo>
+                    <a:pt x="310163" y="448086"/>
+                  </a:lnTo>
+                  <a:lnTo>
+                    <a:pt x="238541" y="350104"/>
+                  </a:lnTo>
+                  <a:lnTo>
+                    <a:pt x="166918" y="248961"/>
+                  </a:lnTo>
+                  <a:lnTo>
+                    <a:pt x="95296" y="144552"/>
+                  </a:lnTo>
+                  <a:lnTo>
+                    <a:pt x="23673" y="36774"/>
+                  </a:lnTo>
+                  <a:lnTo>
                     <a:pt x="0" y="0"/>
-                  </a:moveTo>
-                  <a:lnTo>
-                    <a:pt x="58411" y="152475"/>
-                  </a:lnTo>
-                  <a:lnTo>
-                    <a:pt x="135043" y="341185"/>
-                  </a:lnTo>
-                  <a:lnTo>
-                    <a:pt x="211676" y="519204"/>
-                  </a:lnTo>
-                  <a:lnTo>
-                    <a:pt x="288308" y="687138"/>
-                  </a:lnTo>
-                  <a:lnTo>
-                    <a:pt x="364941" y="845560"/>
-                  </a:lnTo>
-                  <a:lnTo>
-                    <a:pt x="441573" y="995008"/>
-                  </a:lnTo>
-                  <a:lnTo>
-                    <a:pt x="518206" y="1135989"/>
-                  </a:lnTo>
-                  <a:lnTo>
-                    <a:pt x="594838" y="1268984"/>
-                  </a:lnTo>
-                  <a:lnTo>
-                    <a:pt x="671471" y="1394446"/>
-                  </a:lnTo>
-                  <a:lnTo>
-                    <a:pt x="748104" y="1512800"/>
-                  </a:lnTo>
-                  <a:lnTo>
-                    <a:pt x="824736" y="1624450"/>
-                  </a:lnTo>
-                  <a:lnTo>
-                    <a:pt x="901369" y="1729775"/>
-                  </a:lnTo>
-                  <a:lnTo>
-                    <a:pt x="978001" y="1829133"/>
-                  </a:lnTo>
-                  <a:lnTo>
-                    <a:pt x="1054634" y="1922863"/>
-                  </a:lnTo>
-                  <a:lnTo>
-                    <a:pt x="1131266" y="2011284"/>
-                  </a:lnTo>
-                  <a:lnTo>
-                    <a:pt x="1207899" y="2094696"/>
-                  </a:lnTo>
-                  <a:lnTo>
-                    <a:pt x="1284531" y="2173382"/>
-                  </a:lnTo>
-                  <a:lnTo>
-                    <a:pt x="1361164" y="2247612"/>
-                  </a:lnTo>
-                  <a:lnTo>
-                    <a:pt x="1437797" y="2317636"/>
-                  </a:lnTo>
-                  <a:lnTo>
-                    <a:pt x="1514429" y="2383693"/>
-                  </a:lnTo>
-                  <a:lnTo>
-                    <a:pt x="1591062" y="2446009"/>
-                  </a:lnTo>
-                  <a:lnTo>
-                    <a:pt x="1667694" y="2504795"/>
-                  </a:lnTo>
-                  <a:lnTo>
-                    <a:pt x="1744327" y="2560250"/>
-                  </a:lnTo>
-                  <a:lnTo>
-                    <a:pt x="1820959" y="2612564"/>
-                  </a:lnTo>
-                  <a:lnTo>
-                    <a:pt x="1897592" y="2658449"/>
-                  </a:lnTo>
-                  <a:lnTo>
-                    <a:pt x="1974224" y="2684254"/>
-                  </a:lnTo>
-                  <a:lnTo>
-                    <a:pt x="2050857" y="2709252"/>
-                  </a:lnTo>
-                  <a:lnTo>
-                    <a:pt x="2127489" y="2733469"/>
-                  </a:lnTo>
-                  <a:lnTo>
-                    <a:pt x="2204122" y="2756928"/>
-                  </a:lnTo>
-                  <a:lnTo>
-                    <a:pt x="2280755" y="2779654"/>
-                  </a:lnTo>
-                  <a:lnTo>
-                    <a:pt x="2357387" y="2801669"/>
-                  </a:lnTo>
-                  <a:lnTo>
-                    <a:pt x="2434020" y="2822996"/>
-                  </a:lnTo>
-                  <a:lnTo>
-                    <a:pt x="2510652" y="2843656"/>
-                  </a:lnTo>
-                  <a:lnTo>
-                    <a:pt x="2587285" y="2863670"/>
-                  </a:lnTo>
-                  <a:lnTo>
-                    <a:pt x="2663917" y="2883058"/>
-                  </a:lnTo>
-                  <a:lnTo>
-                    <a:pt x="2740550" y="2901841"/>
-                  </a:lnTo>
-                  <a:lnTo>
-                    <a:pt x="2817182" y="2920035"/>
-                  </a:lnTo>
-                  <a:lnTo>
-                    <a:pt x="2893815" y="2937661"/>
-                  </a:lnTo>
-                  <a:lnTo>
-                    <a:pt x="2970447" y="2954736"/>
-                  </a:lnTo>
-                  <a:lnTo>
-                    <a:pt x="3047080" y="2971277"/>
-                  </a:lnTo>
-                  <a:lnTo>
-                    <a:pt x="3123713" y="2987301"/>
-                  </a:lnTo>
-                  <a:lnTo>
-                    <a:pt x="3200345" y="3002823"/>
-                  </a:lnTo>
-                  <a:lnTo>
-                    <a:pt x="3276978" y="3017860"/>
-                  </a:lnTo>
-                  <a:lnTo>
-                    <a:pt x="3353610" y="3032428"/>
-                  </a:lnTo>
-                  <a:lnTo>
-                    <a:pt x="3430243" y="3046539"/>
-                  </a:lnTo>
-                  <a:lnTo>
-                    <a:pt x="3506875" y="3060210"/>
-                  </a:lnTo>
-                  <a:lnTo>
-                    <a:pt x="3583508" y="3073453"/>
-                  </a:lnTo>
-                  <a:lnTo>
-                    <a:pt x="3660140" y="3086282"/>
-                  </a:lnTo>
-                  <a:lnTo>
-                    <a:pt x="3736773" y="3098709"/>
-                  </a:lnTo>
-                  <a:lnTo>
-                    <a:pt x="3813406" y="3110748"/>
-                  </a:lnTo>
-                  <a:lnTo>
-                    <a:pt x="3890038" y="3122411"/>
-                  </a:lnTo>
-                  <a:lnTo>
-                    <a:pt x="3966671" y="3133709"/>
-                  </a:lnTo>
-                  <a:lnTo>
-                    <a:pt x="4043303" y="3144654"/>
-                  </a:lnTo>
-                  <a:lnTo>
-                    <a:pt x="4119936" y="3155257"/>
-                  </a:lnTo>
-                  <a:lnTo>
-                    <a:pt x="4196568" y="3165528"/>
-                  </a:lnTo>
-                  <a:lnTo>
-                    <a:pt x="4273201" y="3175478"/>
-                  </a:lnTo>
-                  <a:lnTo>
-                    <a:pt x="4349833" y="3185116"/>
-                  </a:lnTo>
-                  <a:lnTo>
-                    <a:pt x="4426466" y="3194454"/>
-                  </a:lnTo>
-                  <a:lnTo>
-                    <a:pt x="4503098" y="3203499"/>
-                  </a:lnTo>
-                  <a:lnTo>
-                    <a:pt x="4579731" y="3212262"/>
-                  </a:lnTo>
-                  <a:lnTo>
-                    <a:pt x="4656364" y="3220751"/>
-                  </a:lnTo>
-                  <a:lnTo>
-                    <a:pt x="4732996" y="3228974"/>
-                  </a:lnTo>
-                  <a:lnTo>
-                    <a:pt x="4809629" y="3236940"/>
-                  </a:lnTo>
-                  <a:lnTo>
-                    <a:pt x="4886261" y="3244657"/>
-                  </a:lnTo>
-                  <a:lnTo>
-                    <a:pt x="4962894" y="3252133"/>
-                  </a:lnTo>
-                  <a:lnTo>
-                    <a:pt x="5039526" y="3259375"/>
-                  </a:lnTo>
-                  <a:lnTo>
-                    <a:pt x="5116159" y="3266390"/>
-                  </a:lnTo>
-                  <a:lnTo>
-                    <a:pt x="5192791" y="3273187"/>
-                  </a:lnTo>
-                  <a:lnTo>
-                    <a:pt x="5269424" y="3279770"/>
-                  </a:lnTo>
-                  <a:lnTo>
-                    <a:pt x="5346057" y="3286148"/>
-                  </a:lnTo>
-                  <a:lnTo>
-                    <a:pt x="5422689" y="3292327"/>
-                  </a:lnTo>
-                  <a:lnTo>
-                    <a:pt x="5499322" y="3298312"/>
-                  </a:lnTo>
-                  <a:lnTo>
-                    <a:pt x="5575954" y="3304110"/>
-                  </a:lnTo>
-                  <a:lnTo>
-                    <a:pt x="5652587" y="3309727"/>
-                  </a:lnTo>
-                  <a:lnTo>
-                    <a:pt x="5729219" y="3315168"/>
-                  </a:lnTo>
-                  <a:lnTo>
-                    <a:pt x="5805852" y="3320439"/>
-                  </a:lnTo>
-                  <a:lnTo>
-                    <a:pt x="5882484" y="3325545"/>
                   </a:lnTo>
                 </a:path>
               </a:pathLst>
@@ -3823,589 +4102,270 @@
           </p:nvSpPr>
           <p:spPr>
             <a:xfrm>
-              <a:off x="817517" y="2151870"/>
-              <a:ext cx="7403783" cy="3365767"/>
+              <a:off x="2244978" y="2073503"/>
+              <a:ext cx="6017700" cy="3404584"/>
             </a:xfrm>
             <a:custGeom>
               <a:avLst/>
               <a:pathLst>
-                <a:path w="7403783" h="3365767">
-                  <a:moveTo>
-                    <a:pt x="7403783" y="3365767"/>
-                  </a:moveTo>
-                  <a:lnTo>
-                    <a:pt x="7327150" y="3363388"/>
-                  </a:lnTo>
-                  <a:lnTo>
-                    <a:pt x="7250518" y="3360867"/>
-                  </a:lnTo>
-                  <a:lnTo>
-                    <a:pt x="7173885" y="3358194"/>
-                  </a:lnTo>
-                  <a:lnTo>
-                    <a:pt x="7097253" y="3355360"/>
-                  </a:lnTo>
-                  <a:lnTo>
-                    <a:pt x="7020620" y="3352357"/>
-                  </a:lnTo>
-                  <a:lnTo>
-                    <a:pt x="6943987" y="3349173"/>
-                  </a:lnTo>
-                  <a:lnTo>
-                    <a:pt x="6867355" y="3345798"/>
-                  </a:lnTo>
-                  <a:lnTo>
-                    <a:pt x="6790722" y="3342220"/>
-                  </a:lnTo>
-                  <a:lnTo>
-                    <a:pt x="6714090" y="3338427"/>
-                  </a:lnTo>
-                  <a:lnTo>
-                    <a:pt x="6637457" y="3334407"/>
-                  </a:lnTo>
-                  <a:lnTo>
-                    <a:pt x="6560825" y="3330145"/>
-                  </a:lnTo>
-                  <a:lnTo>
-                    <a:pt x="6484192" y="3325627"/>
-                  </a:lnTo>
-                  <a:lnTo>
-                    <a:pt x="6407560" y="3320838"/>
-                  </a:lnTo>
-                  <a:lnTo>
-                    <a:pt x="6330927" y="3315761"/>
-                  </a:lnTo>
-                  <a:lnTo>
-                    <a:pt x="6254294" y="3310380"/>
-                  </a:lnTo>
-                  <a:lnTo>
-                    <a:pt x="6177662" y="3304675"/>
-                  </a:lnTo>
-                  <a:lnTo>
-                    <a:pt x="6101029" y="3298628"/>
-                  </a:lnTo>
-                  <a:lnTo>
-                    <a:pt x="6024397" y="3292218"/>
-                  </a:lnTo>
-                  <a:lnTo>
-                    <a:pt x="5947764" y="3285423"/>
-                  </a:lnTo>
-                  <a:lnTo>
-                    <a:pt x="5871132" y="3278219"/>
-                  </a:lnTo>
-                  <a:lnTo>
-                    <a:pt x="5794499" y="3270584"/>
-                  </a:lnTo>
-                  <a:lnTo>
-                    <a:pt x="5717867" y="3262489"/>
-                  </a:lnTo>
-                  <a:lnTo>
-                    <a:pt x="5641234" y="3253909"/>
-                  </a:lnTo>
-                  <a:lnTo>
-                    <a:pt x="5564602" y="3244813"/>
-                  </a:lnTo>
-                  <a:lnTo>
-                    <a:pt x="5487969" y="3235171"/>
-                  </a:lnTo>
-                  <a:lnTo>
-                    <a:pt x="5411336" y="3224951"/>
-                  </a:lnTo>
-                  <a:lnTo>
-                    <a:pt x="5334704" y="3214116"/>
-                  </a:lnTo>
-                  <a:lnTo>
-                    <a:pt x="5258071" y="3202631"/>
-                  </a:lnTo>
-                  <a:lnTo>
-                    <a:pt x="5181439" y="3190456"/>
-                  </a:lnTo>
-                  <a:lnTo>
-                    <a:pt x="5104806" y="3177550"/>
-                  </a:lnTo>
-                  <a:lnTo>
-                    <a:pt x="5028174" y="3163869"/>
-                  </a:lnTo>
-                  <a:lnTo>
-                    <a:pt x="4951541" y="3149366"/>
-                  </a:lnTo>
-                  <a:lnTo>
-                    <a:pt x="4874909" y="3133993"/>
-                  </a:lnTo>
-                  <a:lnTo>
-                    <a:pt x="4798276" y="3117696"/>
-                  </a:lnTo>
-                  <a:lnTo>
-                    <a:pt x="4721644" y="3100421"/>
-                  </a:lnTo>
-                  <a:lnTo>
-                    <a:pt x="4645011" y="3082109"/>
-                  </a:lnTo>
-                  <a:lnTo>
-                    <a:pt x="4568378" y="3062697"/>
-                  </a:lnTo>
-                  <a:lnTo>
-                    <a:pt x="4491746" y="3042119"/>
-                  </a:lnTo>
-                  <a:lnTo>
-                    <a:pt x="4415113" y="3020305"/>
-                  </a:lnTo>
-                  <a:lnTo>
-                    <a:pt x="4338481" y="2997182"/>
-                  </a:lnTo>
-                  <a:lnTo>
-                    <a:pt x="4261848" y="2972670"/>
-                  </a:lnTo>
-                  <a:lnTo>
-                    <a:pt x="4185216" y="2946686"/>
-                  </a:lnTo>
-                  <a:lnTo>
-                    <a:pt x="4108583" y="2919142"/>
-                  </a:lnTo>
-                  <a:lnTo>
-                    <a:pt x="4031951" y="2889943"/>
-                  </a:lnTo>
-                  <a:lnTo>
-                    <a:pt x="3955318" y="2858992"/>
-                  </a:lnTo>
-                  <a:lnTo>
-                    <a:pt x="3878685" y="2826182"/>
-                  </a:lnTo>
-                  <a:lnTo>
-                    <a:pt x="3802053" y="2791401"/>
-                  </a:lnTo>
-                  <a:lnTo>
-                    <a:pt x="3725420" y="2754532"/>
-                  </a:lnTo>
-                  <a:lnTo>
-                    <a:pt x="3648788" y="2715449"/>
-                  </a:lnTo>
-                  <a:lnTo>
-                    <a:pt x="3572155" y="2674019"/>
-                  </a:lnTo>
-                  <a:lnTo>
-                    <a:pt x="3495523" y="2630102"/>
-                  </a:lnTo>
-                  <a:lnTo>
-                    <a:pt x="3418890" y="2583547"/>
-                  </a:lnTo>
-                  <a:lnTo>
-                    <a:pt x="3342258" y="2553443"/>
-                  </a:lnTo>
-                  <a:lnTo>
-                    <a:pt x="3265625" y="2525945"/>
-                  </a:lnTo>
-                  <a:lnTo>
-                    <a:pt x="3188993" y="2497560"/>
-                  </a:lnTo>
-                  <a:lnTo>
-                    <a:pt x="3112360" y="2468259"/>
-                  </a:lnTo>
-                  <a:lnTo>
-                    <a:pt x="3035727" y="2438011"/>
-                  </a:lnTo>
-                  <a:lnTo>
-                    <a:pt x="2959095" y="2406788"/>
-                  </a:lnTo>
-                  <a:lnTo>
-                    <a:pt x="2882462" y="2374556"/>
-                  </a:lnTo>
-                  <a:lnTo>
-                    <a:pt x="2805830" y="2341285"/>
-                  </a:lnTo>
-                  <a:lnTo>
-                    <a:pt x="2729197" y="2306939"/>
-                  </a:lnTo>
-                  <a:lnTo>
-                    <a:pt x="2652565" y="2271485"/>
-                  </a:lnTo>
-                  <a:lnTo>
-                    <a:pt x="2575932" y="2234887"/>
-                  </a:lnTo>
-                  <a:lnTo>
-                    <a:pt x="2499300" y="2197107"/>
-                  </a:lnTo>
-                  <a:lnTo>
-                    <a:pt x="2422667" y="2158108"/>
-                  </a:lnTo>
-                  <a:lnTo>
-                    <a:pt x="2346034" y="2117850"/>
-                  </a:lnTo>
-                  <a:lnTo>
-                    <a:pt x="2269402" y="2076293"/>
-                  </a:lnTo>
-                  <a:lnTo>
-                    <a:pt x="2192769" y="2033394"/>
-                  </a:lnTo>
-                  <a:lnTo>
-                    <a:pt x="2116137" y="1989111"/>
-                  </a:lnTo>
-                  <a:lnTo>
-                    <a:pt x="2039504" y="1943398"/>
-                  </a:lnTo>
-                  <a:lnTo>
-                    <a:pt x="1962872" y="1896210"/>
-                  </a:lnTo>
-                  <a:lnTo>
-                    <a:pt x="1886239" y="1847499"/>
-                  </a:lnTo>
-                  <a:lnTo>
-                    <a:pt x="1809607" y="1797216"/>
-                  </a:lnTo>
-                  <a:lnTo>
-                    <a:pt x="1732974" y="1745310"/>
-                  </a:lnTo>
-                  <a:lnTo>
-                    <a:pt x="1656342" y="1691728"/>
-                  </a:lnTo>
-                  <a:lnTo>
-                    <a:pt x="1579709" y="1636417"/>
-                  </a:lnTo>
-                  <a:lnTo>
-                    <a:pt x="1503076" y="1579320"/>
-                  </a:lnTo>
-                  <a:lnTo>
-                    <a:pt x="1426444" y="1520381"/>
-                  </a:lnTo>
-                  <a:lnTo>
-                    <a:pt x="1349811" y="1459539"/>
-                  </a:lnTo>
-                  <a:lnTo>
-                    <a:pt x="1273179" y="1396734"/>
-                  </a:lnTo>
-                  <a:lnTo>
-                    <a:pt x="1196546" y="1331901"/>
-                  </a:lnTo>
-                  <a:lnTo>
-                    <a:pt x="1119914" y="1264976"/>
-                  </a:lnTo>
-                  <a:lnTo>
-                    <a:pt x="1043281" y="1195891"/>
-                  </a:lnTo>
-                  <a:lnTo>
-                    <a:pt x="966649" y="1124576"/>
-                  </a:lnTo>
-                  <a:lnTo>
-                    <a:pt x="890016" y="1050959"/>
-                  </a:lnTo>
-                  <a:lnTo>
-                    <a:pt x="813384" y="974966"/>
-                  </a:lnTo>
-                  <a:lnTo>
-                    <a:pt x="736751" y="896520"/>
-                  </a:lnTo>
-                  <a:lnTo>
-                    <a:pt x="660118" y="815542"/>
-                  </a:lnTo>
-                  <a:lnTo>
-                    <a:pt x="583486" y="731950"/>
-                  </a:lnTo>
-                  <a:lnTo>
-                    <a:pt x="506853" y="645660"/>
-                  </a:lnTo>
-                  <a:lnTo>
-                    <a:pt x="430221" y="556586"/>
-                  </a:lnTo>
-                  <a:lnTo>
-                    <a:pt x="353588" y="464636"/>
-                  </a:lnTo>
-                  <a:lnTo>
-                    <a:pt x="276956" y="369718"/>
-                  </a:lnTo>
-                  <a:lnTo>
-                    <a:pt x="200323" y="271737"/>
-                  </a:lnTo>
-                  <a:lnTo>
-                    <a:pt x="123691" y="170593"/>
-                  </a:lnTo>
-                  <a:lnTo>
-                    <a:pt x="47058" y="66184"/>
-                  </a:lnTo>
-                  <a:lnTo>
-                    <a:pt x="0" y="0"/>
-                  </a:lnTo>
-                </a:path>
-              </a:pathLst>
-            </a:custGeom>
-          </p:spPr>
-          <p:txBody>
-            <a:bodyPr/>
-            <a:lstStyle/>
-            <a:p/>
-          </p:txBody>
-        </p:sp>
-        <p:sp>
-          <p:nvSpPr>
-            <p:cNvPr id="24" name="pl24"/>
-            <p:cNvSpPr/>
-            <p:nvPr/>
-          </p:nvSpPr>
-          <p:spPr>
-            <a:xfrm>
-              <a:off x="1782660" y="2073503"/>
-              <a:ext cx="6438640" cy="3404584"/>
-            </a:xfrm>
-            <a:custGeom>
-              <a:avLst/>
-              <a:pathLst>
-                <a:path w="6438640" h="3404584">
+                <a:path w="6017700" h="3404584">
                   <a:moveTo>
                     <a:pt x="0" y="0"/>
                   </a:moveTo>
                   <a:lnTo>
-                    <a:pt x="1506" y="3153"/>
-                  </a:lnTo>
-                  <a:lnTo>
-                    <a:pt x="78139" y="156445"/>
-                  </a:lnTo>
-                  <a:lnTo>
-                    <a:pt x="154771" y="302985"/>
-                  </a:lnTo>
-                  <a:lnTo>
-                    <a:pt x="231404" y="443072"/>
-                  </a:lnTo>
-                  <a:lnTo>
-                    <a:pt x="308037" y="576989"/>
-                  </a:lnTo>
-                  <a:lnTo>
-                    <a:pt x="384669" y="705008"/>
-                  </a:lnTo>
-                  <a:lnTo>
-                    <a:pt x="461302" y="827389"/>
-                  </a:lnTo>
-                  <a:lnTo>
-                    <a:pt x="537934" y="944380"/>
-                  </a:lnTo>
-                  <a:lnTo>
-                    <a:pt x="614567" y="1056219"/>
-                  </a:lnTo>
-                  <a:lnTo>
-                    <a:pt x="691199" y="1163132"/>
-                  </a:lnTo>
-                  <a:lnTo>
-                    <a:pt x="767832" y="1265336"/>
-                  </a:lnTo>
-                  <a:lnTo>
-                    <a:pt x="844464" y="1363039"/>
-                  </a:lnTo>
-                  <a:lnTo>
-                    <a:pt x="921097" y="1456439"/>
-                  </a:lnTo>
-                  <a:lnTo>
-                    <a:pt x="997729" y="1545725"/>
-                  </a:lnTo>
-                  <a:lnTo>
-                    <a:pt x="1074362" y="1631080"/>
-                  </a:lnTo>
-                  <a:lnTo>
-                    <a:pt x="1150995" y="1712675"/>
-                  </a:lnTo>
-                  <a:lnTo>
-                    <a:pt x="1227627" y="1790676"/>
-                  </a:lnTo>
-                  <a:lnTo>
-                    <a:pt x="1304260" y="1865242"/>
-                  </a:lnTo>
-                  <a:lnTo>
-                    <a:pt x="1380892" y="1936524"/>
-                  </a:lnTo>
-                  <a:lnTo>
-                    <a:pt x="1457525" y="2004667"/>
-                  </a:lnTo>
-                  <a:lnTo>
-                    <a:pt x="1534157" y="2069808"/>
-                  </a:lnTo>
-                  <a:lnTo>
-                    <a:pt x="1610790" y="2132081"/>
-                  </a:lnTo>
-                  <a:lnTo>
-                    <a:pt x="1687422" y="2191611"/>
-                  </a:lnTo>
-                  <a:lnTo>
-                    <a:pt x="1764055" y="2248519"/>
-                  </a:lnTo>
-                  <a:lnTo>
-                    <a:pt x="1840688" y="2302920"/>
-                  </a:lnTo>
-                  <a:lnTo>
-                    <a:pt x="1917320" y="2354926"/>
-                  </a:lnTo>
-                  <a:lnTo>
-                    <a:pt x="1993953" y="2404642"/>
-                  </a:lnTo>
-                  <a:lnTo>
-                    <a:pt x="2070585" y="2452167"/>
-                  </a:lnTo>
-                  <a:lnTo>
-                    <a:pt x="2147218" y="2497600"/>
-                  </a:lnTo>
-                  <a:lnTo>
-                    <a:pt x="2223850" y="2541032"/>
-                  </a:lnTo>
-                  <a:lnTo>
-                    <a:pt x="2300483" y="2582551"/>
-                  </a:lnTo>
-                  <a:lnTo>
-                    <a:pt x="2377115" y="2622241"/>
-                  </a:lnTo>
-                  <a:lnTo>
-                    <a:pt x="2453748" y="2660184"/>
-                  </a:lnTo>
-                  <a:lnTo>
-                    <a:pt x="2530380" y="2696455"/>
-                  </a:lnTo>
-                  <a:lnTo>
-                    <a:pt x="2607013" y="2731129"/>
-                  </a:lnTo>
-                  <a:lnTo>
-                    <a:pt x="2683646" y="2764275"/>
-                  </a:lnTo>
-                  <a:lnTo>
-                    <a:pt x="2760278" y="2795962"/>
-                  </a:lnTo>
-                  <a:lnTo>
-                    <a:pt x="2836911" y="2826254"/>
-                  </a:lnTo>
-                  <a:lnTo>
-                    <a:pt x="2913543" y="2855211"/>
-                  </a:lnTo>
-                  <a:lnTo>
-                    <a:pt x="2990176" y="2882893"/>
-                  </a:lnTo>
-                  <a:lnTo>
-                    <a:pt x="3066808" y="2909355"/>
-                  </a:lnTo>
-                  <a:lnTo>
-                    <a:pt x="3143441" y="2934653"/>
-                  </a:lnTo>
-                  <a:lnTo>
-                    <a:pt x="3220073" y="2958836"/>
-                  </a:lnTo>
-                  <a:lnTo>
-                    <a:pt x="3296706" y="2981954"/>
-                  </a:lnTo>
-                  <a:lnTo>
-                    <a:pt x="3373338" y="3004054"/>
-                  </a:lnTo>
-                  <a:lnTo>
-                    <a:pt x="3449971" y="3025180"/>
-                  </a:lnTo>
-                  <a:lnTo>
-                    <a:pt x="3526604" y="3045376"/>
-                  </a:lnTo>
-                  <a:lnTo>
-                    <a:pt x="3603236" y="3064683"/>
-                  </a:lnTo>
-                  <a:lnTo>
-                    <a:pt x="3679869" y="3083139"/>
-                  </a:lnTo>
-                  <a:lnTo>
-                    <a:pt x="3756501" y="3100783"/>
-                  </a:lnTo>
-                  <a:lnTo>
-                    <a:pt x="3833134" y="3117649"/>
-                  </a:lnTo>
-                  <a:lnTo>
-                    <a:pt x="3909766" y="3133773"/>
-                  </a:lnTo>
-                  <a:lnTo>
-                    <a:pt x="3986399" y="3149187"/>
-                  </a:lnTo>
-                  <a:lnTo>
-                    <a:pt x="4063031" y="3163921"/>
-                  </a:lnTo>
-                  <a:lnTo>
-                    <a:pt x="4139664" y="3178007"/>
-                  </a:lnTo>
-                  <a:lnTo>
-                    <a:pt x="4216297" y="3191472"/>
-                  </a:lnTo>
-                  <a:lnTo>
-                    <a:pt x="4292929" y="3204345"/>
-                  </a:lnTo>
-                  <a:lnTo>
-                    <a:pt x="4369562" y="3216650"/>
-                  </a:lnTo>
-                  <a:lnTo>
-                    <a:pt x="4446194" y="3228413"/>
-                  </a:lnTo>
-                  <a:lnTo>
-                    <a:pt x="4522827" y="3239659"/>
-                  </a:lnTo>
-                  <a:lnTo>
-                    <a:pt x="4599459" y="3250409"/>
-                  </a:lnTo>
-                  <a:lnTo>
-                    <a:pt x="4676092" y="3260685"/>
-                  </a:lnTo>
-                  <a:lnTo>
-                    <a:pt x="4752724" y="3270509"/>
-                  </a:lnTo>
-                  <a:lnTo>
-                    <a:pt x="4829357" y="3279901"/>
-                  </a:lnTo>
-                  <a:lnTo>
-                    <a:pt x="4905989" y="3288879"/>
-                  </a:lnTo>
-                  <a:lnTo>
-                    <a:pt x="4982622" y="3297461"/>
-                  </a:lnTo>
-                  <a:lnTo>
-                    <a:pt x="5059255" y="3305665"/>
-                  </a:lnTo>
-                  <a:lnTo>
-                    <a:pt x="5135887" y="3313508"/>
-                  </a:lnTo>
-                  <a:lnTo>
-                    <a:pt x="5212520" y="3321006"/>
-                  </a:lnTo>
-                  <a:lnTo>
-                    <a:pt x="5289152" y="3328173"/>
-                  </a:lnTo>
-                  <a:lnTo>
-                    <a:pt x="5365785" y="3335025"/>
-                  </a:lnTo>
-                  <a:lnTo>
-                    <a:pt x="5442417" y="3341575"/>
-                  </a:lnTo>
-                  <a:lnTo>
-                    <a:pt x="5519050" y="3347837"/>
-                  </a:lnTo>
-                  <a:lnTo>
-                    <a:pt x="5595682" y="3353822"/>
-                  </a:lnTo>
-                  <a:lnTo>
-                    <a:pt x="5672315" y="3359544"/>
-                  </a:lnTo>
-                  <a:lnTo>
-                    <a:pt x="5748948" y="3365014"/>
-                  </a:lnTo>
-                  <a:lnTo>
-                    <a:pt x="5825580" y="3370244"/>
-                  </a:lnTo>
-                  <a:lnTo>
-                    <a:pt x="5902213" y="3375243"/>
-                  </a:lnTo>
-                  <a:lnTo>
-                    <a:pt x="5978845" y="3380021"/>
-                  </a:lnTo>
-                  <a:lnTo>
-                    <a:pt x="6055478" y="3384589"/>
-                  </a:lnTo>
-                  <a:lnTo>
-                    <a:pt x="6132110" y="3388957"/>
-                  </a:lnTo>
-                  <a:lnTo>
-                    <a:pt x="6208743" y="3393131"/>
-                  </a:lnTo>
-                  <a:lnTo>
-                    <a:pt x="6285375" y="3397122"/>
-                  </a:lnTo>
-                  <a:lnTo>
-                    <a:pt x="6362008" y="3400937"/>
-                  </a:lnTo>
-                  <a:lnTo>
-                    <a:pt x="6438640" y="3404584"/>
+                    <a:pt x="1408" y="3153"/>
+                  </a:lnTo>
+                  <a:lnTo>
+                    <a:pt x="73030" y="156445"/>
+                  </a:lnTo>
+                  <a:lnTo>
+                    <a:pt x="144653" y="302985"/>
+                  </a:lnTo>
+                  <a:lnTo>
+                    <a:pt x="216275" y="443072"/>
+                  </a:lnTo>
+                  <a:lnTo>
+                    <a:pt x="287898" y="576989"/>
+                  </a:lnTo>
+                  <a:lnTo>
+                    <a:pt x="359520" y="705008"/>
+                  </a:lnTo>
+                  <a:lnTo>
+                    <a:pt x="431143" y="827389"/>
+                  </a:lnTo>
+                  <a:lnTo>
+                    <a:pt x="502766" y="944380"/>
+                  </a:lnTo>
+                  <a:lnTo>
+                    <a:pt x="574388" y="1056219"/>
+                  </a:lnTo>
+                  <a:lnTo>
+                    <a:pt x="646011" y="1163132"/>
+                  </a:lnTo>
+                  <a:lnTo>
+                    <a:pt x="717633" y="1265336"/>
+                  </a:lnTo>
+                  <a:lnTo>
+                    <a:pt x="789256" y="1363039"/>
+                  </a:lnTo>
+                  <a:lnTo>
+                    <a:pt x="860878" y="1456439"/>
+                  </a:lnTo>
+                  <a:lnTo>
+                    <a:pt x="932501" y="1545725"/>
+                  </a:lnTo>
+                  <a:lnTo>
+                    <a:pt x="1004123" y="1631080"/>
+                  </a:lnTo>
+                  <a:lnTo>
+                    <a:pt x="1075746" y="1712675"/>
+                  </a:lnTo>
+                  <a:lnTo>
+                    <a:pt x="1147368" y="1790676"/>
+                  </a:lnTo>
+                  <a:lnTo>
+                    <a:pt x="1218991" y="1865242"/>
+                  </a:lnTo>
+                  <a:lnTo>
+                    <a:pt x="1290613" y="1936524"/>
+                  </a:lnTo>
+                  <a:lnTo>
+                    <a:pt x="1362236" y="2004667"/>
+                  </a:lnTo>
+                  <a:lnTo>
+                    <a:pt x="1433858" y="2069808"/>
+                  </a:lnTo>
+                  <a:lnTo>
+                    <a:pt x="1505481" y="2132081"/>
+                  </a:lnTo>
+                  <a:lnTo>
+                    <a:pt x="1577103" y="2191611"/>
+                  </a:lnTo>
+                  <a:lnTo>
+                    <a:pt x="1648726" y="2248519"/>
+                  </a:lnTo>
+                  <a:lnTo>
+                    <a:pt x="1720348" y="2302920"/>
+                  </a:lnTo>
+                  <a:lnTo>
+                    <a:pt x="1791971" y="2354926"/>
+                  </a:lnTo>
+                  <a:lnTo>
+                    <a:pt x="1863593" y="2404642"/>
+                  </a:lnTo>
+                  <a:lnTo>
+                    <a:pt x="1935216" y="2452167"/>
+                  </a:lnTo>
+                  <a:lnTo>
+                    <a:pt x="2006839" y="2497600"/>
+                  </a:lnTo>
+                  <a:lnTo>
+                    <a:pt x="2078461" y="2541032"/>
+                  </a:lnTo>
+                  <a:lnTo>
+                    <a:pt x="2150084" y="2582551"/>
+                  </a:lnTo>
+                  <a:lnTo>
+                    <a:pt x="2221706" y="2622241"/>
+                  </a:lnTo>
+                  <a:lnTo>
+                    <a:pt x="2293329" y="2660184"/>
+                  </a:lnTo>
+                  <a:lnTo>
+                    <a:pt x="2364951" y="2696455"/>
+                  </a:lnTo>
+                  <a:lnTo>
+                    <a:pt x="2436574" y="2731129"/>
+                  </a:lnTo>
+                  <a:lnTo>
+                    <a:pt x="2508196" y="2764275"/>
+                  </a:lnTo>
+                  <a:lnTo>
+                    <a:pt x="2579819" y="2795962"/>
+                  </a:lnTo>
+                  <a:lnTo>
+                    <a:pt x="2651441" y="2826254"/>
+                  </a:lnTo>
+                  <a:lnTo>
+                    <a:pt x="2723064" y="2855211"/>
+                  </a:lnTo>
+                  <a:lnTo>
+                    <a:pt x="2794686" y="2882893"/>
+                  </a:lnTo>
+                  <a:lnTo>
+                    <a:pt x="2866309" y="2909355"/>
+                  </a:lnTo>
+                  <a:lnTo>
+                    <a:pt x="2937931" y="2934653"/>
+                  </a:lnTo>
+                  <a:lnTo>
+                    <a:pt x="3009554" y="2958836"/>
+                  </a:lnTo>
+                  <a:lnTo>
+                    <a:pt x="3081176" y="2981954"/>
+                  </a:lnTo>
+                  <a:lnTo>
+                    <a:pt x="3152799" y="3004054"/>
+                  </a:lnTo>
+                  <a:lnTo>
+                    <a:pt x="3224421" y="3025180"/>
+                  </a:lnTo>
+                  <a:lnTo>
+                    <a:pt x="3296044" y="3045376"/>
+                  </a:lnTo>
+                  <a:lnTo>
+                    <a:pt x="3367667" y="3064683"/>
+                  </a:lnTo>
+                  <a:lnTo>
+                    <a:pt x="3439289" y="3083139"/>
+                  </a:lnTo>
+                  <a:lnTo>
+                    <a:pt x="3510912" y="3100783"/>
+                  </a:lnTo>
+                  <a:lnTo>
+                    <a:pt x="3582534" y="3117649"/>
+                  </a:lnTo>
+                  <a:lnTo>
+                    <a:pt x="3654157" y="3133773"/>
+                  </a:lnTo>
+                  <a:lnTo>
+                    <a:pt x="3725779" y="3149187"/>
+                  </a:lnTo>
+                  <a:lnTo>
+                    <a:pt x="3797402" y="3163921"/>
+                  </a:lnTo>
+                  <a:lnTo>
+                    <a:pt x="3869024" y="3178007"/>
+                  </a:lnTo>
+                  <a:lnTo>
+                    <a:pt x="3940647" y="3191472"/>
+                  </a:lnTo>
+                  <a:lnTo>
+                    <a:pt x="4012269" y="3204345"/>
+                  </a:lnTo>
+                  <a:lnTo>
+                    <a:pt x="4083892" y="3216650"/>
+                  </a:lnTo>
+                  <a:lnTo>
+                    <a:pt x="4155514" y="3228413"/>
+                  </a:lnTo>
+                  <a:lnTo>
+                    <a:pt x="4227137" y="3239659"/>
+                  </a:lnTo>
+                  <a:lnTo>
+                    <a:pt x="4298759" y="3250409"/>
+                  </a:lnTo>
+                  <a:lnTo>
+                    <a:pt x="4370382" y="3260685"/>
+                  </a:lnTo>
+                  <a:lnTo>
+                    <a:pt x="4442004" y="3270509"/>
+                  </a:lnTo>
+                  <a:lnTo>
+                    <a:pt x="4513627" y="3279901"/>
+                  </a:lnTo>
+                  <a:lnTo>
+                    <a:pt x="4585249" y="3288879"/>
+                  </a:lnTo>
+                  <a:lnTo>
+                    <a:pt x="4656872" y="3297461"/>
+                  </a:lnTo>
+                  <a:lnTo>
+                    <a:pt x="4728495" y="3305665"/>
+                  </a:lnTo>
+                  <a:lnTo>
+                    <a:pt x="4800117" y="3313508"/>
+                  </a:lnTo>
+                  <a:lnTo>
+                    <a:pt x="4871740" y="3321006"/>
+                  </a:lnTo>
+                  <a:lnTo>
+                    <a:pt x="4943362" y="3328173"/>
+                  </a:lnTo>
+                  <a:lnTo>
+                    <a:pt x="5014985" y="3335025"/>
+                  </a:lnTo>
+                  <a:lnTo>
+                    <a:pt x="5086607" y="3341575"/>
+                  </a:lnTo>
+                  <a:lnTo>
+                    <a:pt x="5158230" y="3347837"/>
+                  </a:lnTo>
+                  <a:lnTo>
+                    <a:pt x="5229852" y="3353822"/>
+                  </a:lnTo>
+                  <a:lnTo>
+                    <a:pt x="5301475" y="3359544"/>
+                  </a:lnTo>
+                  <a:lnTo>
+                    <a:pt x="5373097" y="3365014"/>
+                  </a:lnTo>
+                  <a:lnTo>
+                    <a:pt x="5444720" y="3370244"/>
+                  </a:lnTo>
+                  <a:lnTo>
+                    <a:pt x="5516342" y="3375243"/>
+                  </a:lnTo>
+                  <a:lnTo>
+                    <a:pt x="5587965" y="3380021"/>
+                  </a:lnTo>
+                  <a:lnTo>
+                    <a:pt x="5659587" y="3384589"/>
+                  </a:lnTo>
+                  <a:lnTo>
+                    <a:pt x="5731210" y="3388957"/>
+                  </a:lnTo>
+                  <a:lnTo>
+                    <a:pt x="5802832" y="3393131"/>
+                  </a:lnTo>
+                  <a:lnTo>
+                    <a:pt x="5874455" y="3397122"/>
+                  </a:lnTo>
+                  <a:lnTo>
+                    <a:pt x="5946077" y="3400937"/>
+                  </a:lnTo>
+                  <a:lnTo>
+                    <a:pt x="6017700" y="3404584"/>
                   </a:lnTo>
                 </a:path>
               </a:pathLst>
@@ -4428,7 +4388,7 @@
         </p:sp>
         <p:sp>
           <p:nvSpPr>
-            <p:cNvPr id="25" name="pl25"/>
+            <p:cNvPr id="24" name="pl24"/>
             <p:cNvSpPr/>
             <p:nvPr/>
           </p:nvSpPr>
@@ -4471,13 +4431,13 @@
         </p:sp>
         <p:sp>
           <p:nvSpPr>
-            <p:cNvPr id="26" name="pl26"/>
+            <p:cNvPr id="25" name="pl25"/>
             <p:cNvSpPr/>
             <p:nvPr/>
           </p:nvSpPr>
           <p:spPr>
             <a:xfrm>
-              <a:off x="4224261" y="2073503"/>
+              <a:off x="4526955" y="2073503"/>
               <a:ext cx="0" cy="3649639"/>
             </a:xfrm>
             <a:custGeom>
@@ -4514,7 +4474,7 @@
         </p:sp>
         <p:sp>
           <p:nvSpPr>
-            <p:cNvPr id="27" name="tx27"/>
+            <p:cNvPr id="26" name="tx26"/>
             <p:cNvSpPr/>
             <p:nvPr/>
           </p:nvSpPr>
@@ -4560,7 +4520,7 @@
         </p:sp>
         <p:sp>
           <p:nvSpPr>
-            <p:cNvPr id="28" name="tx28"/>
+            <p:cNvPr id="27" name="tx27"/>
             <p:cNvSpPr/>
             <p:nvPr/>
           </p:nvSpPr>
@@ -4606,7 +4566,7 @@
         </p:sp>
         <p:sp>
           <p:nvSpPr>
-            <p:cNvPr id="29" name="tx29"/>
+            <p:cNvPr id="28" name="tx28"/>
             <p:cNvSpPr/>
             <p:nvPr/>
           </p:nvSpPr>
@@ -4652,7 +4612,7 @@
         </p:sp>
         <p:sp>
           <p:nvSpPr>
-            <p:cNvPr id="30" name="tx30"/>
+            <p:cNvPr id="29" name="tx29"/>
             <p:cNvSpPr/>
             <p:nvPr/>
           </p:nvSpPr>
@@ -4698,7 +4658,7 @@
         </p:sp>
         <p:sp>
           <p:nvSpPr>
-            <p:cNvPr id="31" name="tx31"/>
+            <p:cNvPr id="30" name="tx30"/>
             <p:cNvSpPr/>
             <p:nvPr/>
           </p:nvSpPr>
@@ -4744,14 +4704,14 @@
         </p:sp>
         <p:sp>
           <p:nvSpPr>
-            <p:cNvPr id="32" name="tx32"/>
+            <p:cNvPr id="31" name="tx31"/>
             <p:cNvSpPr/>
             <p:nvPr/>
           </p:nvSpPr>
           <p:spPr>
             <a:xfrm>
-              <a:off x="2423864" y="5785772"/>
-              <a:ext cx="155356" cy="80101"/>
+              <a:off x="2421884" y="5785772"/>
+              <a:ext cx="161574" cy="80101"/>
             </a:xfrm>
             <a:prstGeom prst="rect">
               <a:avLst/>
@@ -4783,21 +4743,21 @@
                   <a:latin typeface="Helvetica"/>
                   <a:cs typeface="Helvetica"/>
                 </a:rPr>
-                <a:t>0.8</a:t>
+                <a:t>-25</a:t>
               </a:r>
             </a:p>
           </p:txBody>
         </p:sp>
         <p:sp>
           <p:nvSpPr>
-            <p:cNvPr id="33" name="tx33"/>
+            <p:cNvPr id="32" name="tx32"/>
             <p:cNvSpPr/>
             <p:nvPr/>
           </p:nvSpPr>
           <p:spPr>
             <a:xfrm>
-              <a:off x="4196521" y="5785772"/>
-              <a:ext cx="155356" cy="80101"/>
+              <a:off x="4542539" y="5785772"/>
+              <a:ext cx="62179" cy="80101"/>
             </a:xfrm>
             <a:prstGeom prst="rect">
               <a:avLst/>
@@ -4829,21 +4789,21 @@
                   <a:latin typeface="Helvetica"/>
                   <a:cs typeface="Helvetica"/>
                 </a:rPr>
-                <a:t>1.0</a:t>
+                <a:t>0</a:t>
               </a:r>
             </a:p>
           </p:txBody>
         </p:sp>
         <p:sp>
           <p:nvSpPr>
-            <p:cNvPr id="34" name="tx34"/>
+            <p:cNvPr id="33" name="tx33"/>
             <p:cNvSpPr/>
             <p:nvPr/>
           </p:nvSpPr>
           <p:spPr>
             <a:xfrm>
-              <a:off x="5969179" y="5785772"/>
-              <a:ext cx="155356" cy="80101"/>
+              <a:off x="6582407" y="5785772"/>
+              <a:ext cx="124358" cy="80101"/>
             </a:xfrm>
             <a:prstGeom prst="rect">
               <a:avLst/>
@@ -4875,67 +4835,21 @@
                   <a:latin typeface="Helvetica"/>
                   <a:cs typeface="Helvetica"/>
                 </a:rPr>
-                <a:t>1.2</a:t>
+                <a:t>25</a:t>
               </a:r>
             </a:p>
           </p:txBody>
         </p:sp>
         <p:sp>
           <p:nvSpPr>
-            <p:cNvPr id="35" name="tx35"/>
+            <p:cNvPr id="34" name="tx34"/>
             <p:cNvSpPr/>
             <p:nvPr/>
           </p:nvSpPr>
           <p:spPr>
             <a:xfrm>
-              <a:off x="7741836" y="5785772"/>
-              <a:ext cx="155356" cy="80101"/>
-            </a:xfrm>
-            <a:prstGeom prst="rect">
-              <a:avLst/>
-            </a:prstGeom>
-            <a:noFill/>
-          </p:spPr>
-          <p:txBody>
-            <a:bodyPr lIns="0" rIns="0" tIns="0" bIns="0" anchorCtr="1" anchor="ctr" wrap="none"/>
-            <a:lstStyle/>
-            <a:p>
-              <a:pPr algn="l" marL="0" marR="0" indent="0">
-                <a:lnSpc>
-                  <a:spcPts val="880"/>
-                </a:lnSpc>
-                <a:spcBef>
-                  <a:spcPts val="0"/>
-                </a:spcBef>
-                <a:spcAft>
-                  <a:spcPts val="0"/>
-                </a:spcAft>
-              </a:pPr>
-              <a:r>
-                <a:rPr sz="880">
-                  <a:solidFill>
-                    <a:srgbClr val="4D4D4D">
-                      <a:alpha val="100000"/>
-                    </a:srgbClr>
-                  </a:solidFill>
-                  <a:latin typeface="Helvetica"/>
-                  <a:cs typeface="Helvetica"/>
-                </a:rPr>
-                <a:t>1.4</a:t>
-              </a:r>
-            </a:p>
-          </p:txBody>
-        </p:sp>
-        <p:sp>
-          <p:nvSpPr>
-            <p:cNvPr id="36" name="tx36"/>
-            <p:cNvSpPr/>
-            <p:nvPr/>
-          </p:nvSpPr>
-          <p:spPr>
-            <a:xfrm>
-              <a:off x="3879271" y="5925448"/>
-              <a:ext cx="1676186" cy="100218"/>
+              <a:off x="2928340" y="5925448"/>
+              <a:ext cx="3578047" cy="100218"/>
             </a:xfrm>
             <a:prstGeom prst="rect">
               <a:avLst/>
@@ -4967,14 +4881,14 @@
                   <a:latin typeface="Helvetica"/>
                   <a:cs typeface="Helvetica"/>
                 </a:rPr>
-                <a:t>CKD-EPI Cr-Cys / CG ratio</a:t>
+                <a:t>eGFR difference (%): 100 × (CKD-EPI Cr-Cys − CG) / CG</a:t>
               </a:r>
             </a:p>
           </p:txBody>
         </p:sp>
         <p:sp>
           <p:nvSpPr>
-            <p:cNvPr id="37" name="tx37"/>
+            <p:cNvPr id="35" name="tx35"/>
             <p:cNvSpPr/>
             <p:nvPr/>
           </p:nvSpPr>
@@ -5020,14 +4934,14 @@
         </p:sp>
         <p:sp>
           <p:nvSpPr>
-            <p:cNvPr id="38" name="tx38"/>
+            <p:cNvPr id="36" name="tx36"/>
             <p:cNvSpPr/>
             <p:nvPr/>
           </p:nvSpPr>
           <p:spPr>
             <a:xfrm>
               <a:off x="817517" y="1896563"/>
-              <a:ext cx="6899879" cy="82021"/>
+              <a:ext cx="7052127" cy="82021"/>
             </a:xfrm>
             <a:prstGeom prst="rect">
               <a:avLst/>
@@ -5059,14 +4973,14 @@
                   <a:latin typeface="Helvetica"/>
                   <a:cs typeface="Helvetica"/>
                 </a:rPr>
-                <a:t>subHR per 0.1 ratio decline: 1.68 (1.44-1.96), p_Bonf = &lt;0.001 (n = 6)  |  per IQR decline (Δ = 0.30): 4.75 (3.00-7.52)  |  IQR: [0.85, 1.15]</a:t>
+                <a:t>subHR per 10 % decline: 1.68 (1.44-1.96), p_Bonf = &lt;0.001 (n = 6)  |  per IQR decline (Δ = 29.9 %): 4.75 (3.00-7.52)  |  IQR: [-15.0, 14.9] %</a:t>
               </a:r>
             </a:p>
           </p:txBody>
         </p:sp>
         <p:sp>
           <p:nvSpPr>
-            <p:cNvPr id="39" name="tx39"/>
+            <p:cNvPr id="37" name="tx37"/>
             <p:cNvSpPr/>
             <p:nvPr/>
           </p:nvSpPr>

--- a/docs/pptx/carbo/jx-carbo-linsubhr-ratio-grade3.pptx
+++ b/docs/pptx/carbo/jx-carbo-linsubhr-ratio-grade3.pptx
@@ -2265,34 +2265,26 @@
         </p:sp>
         <p:sp>
           <p:nvSpPr>
-            <p:cNvPr id="4" name="pl4"/>
+            <p:cNvPr id="4" name="rc4"/>
             <p:cNvSpPr/>
             <p:nvPr/>
           </p:nvSpPr>
           <p:spPr>
             <a:xfrm>
-              <a:off x="817517" y="5142518"/>
-              <a:ext cx="7799693" cy="0"/>
+              <a:off x="457200" y="1600200"/>
+              <a:ext cx="8229600" cy="4525962"/>
             </a:xfrm>
-            <a:custGeom>
+            <a:prstGeom prst="rect">
               <a:avLst/>
-              <a:pathLst>
-                <a:path w="7799693" h="0">
-                  <a:moveTo>
-                    <a:pt x="0" y="0"/>
-                  </a:moveTo>
-                  <a:lnTo>
-                    <a:pt x="7799693" y="0"/>
-                  </a:lnTo>
-                  <a:lnTo>
-                    <a:pt x="7799693" y="0"/>
-                  </a:lnTo>
-                </a:path>
-              </a:pathLst>
-            </a:custGeom>
-            <a:ln w="6775" cap="flat">
+            </a:prstGeom>
+            <a:solidFill>
+              <a:srgbClr val="FFFFFF">
+                <a:alpha val="100000"/>
+              </a:srgbClr>
+            </a:solidFill>
+            <a:ln w="13550" cap="rnd">
               <a:solidFill>
-                <a:srgbClr val="EBEBEB">
+                <a:srgbClr val="FFFFFF">
                   <a:alpha val="100000"/>
                 </a:srgbClr>
               </a:solidFill>
@@ -2314,21 +2306,21 @@
           </p:nvSpPr>
           <p:spPr>
             <a:xfrm>
-              <a:off x="817517" y="4313054"/>
-              <a:ext cx="7799693" cy="0"/>
+              <a:off x="887106" y="3250627"/>
+              <a:ext cx="7660515" cy="0"/>
             </a:xfrm>
             <a:custGeom>
               <a:avLst/>
               <a:pathLst>
-                <a:path w="7799693" h="0">
+                <a:path w="7660515" h="0">
                   <a:moveTo>
                     <a:pt x="0" y="0"/>
                   </a:moveTo>
                   <a:lnTo>
-                    <a:pt x="7799693" y="0"/>
-                  </a:lnTo>
-                  <a:lnTo>
-                    <a:pt x="7799693" y="0"/>
+                    <a:pt x="7660515" y="0"/>
+                  </a:lnTo>
+                  <a:lnTo>
+                    <a:pt x="7660515" y="0"/>
                   </a:lnTo>
                 </a:path>
               </a:pathLst>
@@ -2357,21 +2349,21 @@
           </p:nvSpPr>
           <p:spPr>
             <a:xfrm>
-              <a:off x="817517" y="3483591"/>
-              <a:ext cx="7799693" cy="0"/>
+              <a:off x="887106" y="2951293"/>
+              <a:ext cx="7660515" cy="0"/>
             </a:xfrm>
             <a:custGeom>
               <a:avLst/>
               <a:pathLst>
-                <a:path w="7799693" h="0">
+                <a:path w="7660515" h="0">
                   <a:moveTo>
                     <a:pt x="0" y="0"/>
                   </a:moveTo>
                   <a:lnTo>
-                    <a:pt x="7799693" y="0"/>
-                  </a:lnTo>
-                  <a:lnTo>
-                    <a:pt x="7799693" y="0"/>
+                    <a:pt x="7660515" y="0"/>
+                  </a:lnTo>
+                  <a:lnTo>
+                    <a:pt x="7660515" y="0"/>
                   </a:lnTo>
                 </a:path>
               </a:pathLst>
@@ -2400,21 +2392,21 @@
           </p:nvSpPr>
           <p:spPr>
             <a:xfrm>
-              <a:off x="817517" y="2654127"/>
-              <a:ext cx="7799693" cy="0"/>
+              <a:off x="887106" y="2651959"/>
+              <a:ext cx="7660515" cy="0"/>
             </a:xfrm>
             <a:custGeom>
               <a:avLst/>
               <a:pathLst>
-                <a:path w="7799693" h="0">
+                <a:path w="7660515" h="0">
                   <a:moveTo>
                     <a:pt x="0" y="0"/>
                   </a:moveTo>
                   <a:lnTo>
-                    <a:pt x="7799693" y="0"/>
-                  </a:lnTo>
-                  <a:lnTo>
-                    <a:pt x="7799693" y="0"/>
+                    <a:pt x="7660515" y="0"/>
+                  </a:lnTo>
+                  <a:lnTo>
+                    <a:pt x="7660515" y="0"/>
                   </a:lnTo>
                 </a:path>
               </a:pathLst>
@@ -2443,21 +2435,21 @@
           </p:nvSpPr>
           <p:spPr>
             <a:xfrm>
-              <a:off x="1467192" y="2073503"/>
-              <a:ext cx="0" cy="3649639"/>
+              <a:off x="887106" y="2352625"/>
+              <a:ext cx="7660515" cy="0"/>
             </a:xfrm>
             <a:custGeom>
               <a:avLst/>
               <a:pathLst>
-                <a:path w="0" h="3649639">
+                <a:path w="7660515" h="0">
                   <a:moveTo>
-                    <a:pt x="0" y="3649639"/>
+                    <a:pt x="0" y="0"/>
                   </a:moveTo>
                   <a:lnTo>
-                    <a:pt x="0" y="0"/>
-                  </a:lnTo>
-                  <a:lnTo>
-                    <a:pt x="0" y="0"/>
+                    <a:pt x="7660515" y="0"/>
+                  </a:lnTo>
+                  <a:lnTo>
+                    <a:pt x="7660515" y="0"/>
                   </a:lnTo>
                 </a:path>
               </a:pathLst>
@@ -2486,15 +2478,15 @@
           </p:nvSpPr>
           <p:spPr>
             <a:xfrm>
-              <a:off x="3538150" y="2073503"/>
-              <a:ext cx="0" cy="3649639"/>
+              <a:off x="1525188" y="2143092"/>
+              <a:ext cx="0" cy="1317069"/>
             </a:xfrm>
             <a:custGeom>
               <a:avLst/>
               <a:pathLst>
-                <a:path w="0" h="3649639">
+                <a:path w="0" h="1317069">
                   <a:moveTo>
-                    <a:pt x="0" y="3649639"/>
+                    <a:pt x="0" y="1317069"/>
                   </a:moveTo>
                   <a:lnTo>
                     <a:pt x="0" y="0"/>
@@ -2529,15 +2521,15 @@
           </p:nvSpPr>
           <p:spPr>
             <a:xfrm>
-              <a:off x="5609107" y="2073503"/>
-              <a:ext cx="0" cy="3649639"/>
+              <a:off x="3559192" y="2143092"/>
+              <a:ext cx="0" cy="1317069"/>
             </a:xfrm>
             <a:custGeom>
               <a:avLst/>
               <a:pathLst>
-                <a:path w="0" h="3649639">
+                <a:path w="0" h="1317069">
                   <a:moveTo>
-                    <a:pt x="0" y="3649639"/>
+                    <a:pt x="0" y="1317069"/>
                   </a:moveTo>
                   <a:lnTo>
                     <a:pt x="0" y="0"/>
@@ -2572,15 +2564,15 @@
           </p:nvSpPr>
           <p:spPr>
             <a:xfrm>
-              <a:off x="7680065" y="2073503"/>
-              <a:ext cx="0" cy="3649639"/>
+              <a:off x="5593195" y="2143092"/>
+              <a:ext cx="0" cy="1317069"/>
             </a:xfrm>
             <a:custGeom>
               <a:avLst/>
               <a:pathLst>
-                <a:path w="0" h="3649639">
+                <a:path w="0" h="1317069">
                   <a:moveTo>
-                    <a:pt x="0" y="3649639"/>
+                    <a:pt x="0" y="1317069"/>
                   </a:moveTo>
                   <a:lnTo>
                     <a:pt x="0" y="0"/>
@@ -2615,26 +2607,26 @@
           </p:nvSpPr>
           <p:spPr>
             <a:xfrm>
-              <a:off x="817517" y="5557249"/>
-              <a:ext cx="7799693" cy="0"/>
+              <a:off x="7627198" y="2143092"/>
+              <a:ext cx="0" cy="1317069"/>
             </a:xfrm>
             <a:custGeom>
               <a:avLst/>
               <a:pathLst>
-                <a:path w="7799693" h="0">
+                <a:path w="0" h="1317069">
                   <a:moveTo>
+                    <a:pt x="0" y="1317069"/>
+                  </a:moveTo>
+                  <a:lnTo>
                     <a:pt x="0" y="0"/>
-                  </a:moveTo>
-                  <a:lnTo>
-                    <a:pt x="7799693" y="0"/>
-                  </a:lnTo>
-                  <a:lnTo>
-                    <a:pt x="7799693" y="0"/>
+                  </a:lnTo>
+                  <a:lnTo>
+                    <a:pt x="0" y="0"/>
                   </a:lnTo>
                 </a:path>
               </a:pathLst>
             </a:custGeom>
-            <a:ln w="13550" cap="flat">
+            <a:ln w="6775" cap="flat">
               <a:solidFill>
                 <a:srgbClr val="EBEBEB">
                   <a:alpha val="100000"/>
@@ -2658,21 +2650,21 @@
           </p:nvSpPr>
           <p:spPr>
             <a:xfrm>
-              <a:off x="817517" y="4727786"/>
-              <a:ext cx="7799693" cy="0"/>
+              <a:off x="887106" y="3400294"/>
+              <a:ext cx="7660515" cy="0"/>
             </a:xfrm>
             <a:custGeom>
               <a:avLst/>
               <a:pathLst>
-                <a:path w="7799693" h="0">
+                <a:path w="7660515" h="0">
                   <a:moveTo>
                     <a:pt x="0" y="0"/>
                   </a:moveTo>
                   <a:lnTo>
-                    <a:pt x="7799693" y="0"/>
-                  </a:lnTo>
-                  <a:lnTo>
-                    <a:pt x="7799693" y="0"/>
+                    <a:pt x="7660515" y="0"/>
+                  </a:lnTo>
+                  <a:lnTo>
+                    <a:pt x="7660515" y="0"/>
                   </a:lnTo>
                 </a:path>
               </a:pathLst>
@@ -2701,21 +2693,21 @@
           </p:nvSpPr>
           <p:spPr>
             <a:xfrm>
-              <a:off x="817517" y="3898322"/>
-              <a:ext cx="7799693" cy="0"/>
+              <a:off x="887106" y="3100960"/>
+              <a:ext cx="7660515" cy="0"/>
             </a:xfrm>
             <a:custGeom>
               <a:avLst/>
               <a:pathLst>
-                <a:path w="7799693" h="0">
+                <a:path w="7660515" h="0">
                   <a:moveTo>
                     <a:pt x="0" y="0"/>
                   </a:moveTo>
                   <a:lnTo>
-                    <a:pt x="7799693" y="0"/>
-                  </a:lnTo>
-                  <a:lnTo>
-                    <a:pt x="7799693" y="0"/>
+                    <a:pt x="7660515" y="0"/>
+                  </a:lnTo>
+                  <a:lnTo>
+                    <a:pt x="7660515" y="0"/>
                   </a:lnTo>
                 </a:path>
               </a:pathLst>
@@ -2744,21 +2736,21 @@
           </p:nvSpPr>
           <p:spPr>
             <a:xfrm>
-              <a:off x="817517" y="3068859"/>
-              <a:ext cx="7799693" cy="0"/>
+              <a:off x="887106" y="2801626"/>
+              <a:ext cx="7660515" cy="0"/>
             </a:xfrm>
             <a:custGeom>
               <a:avLst/>
               <a:pathLst>
-                <a:path w="7799693" h="0">
+                <a:path w="7660515" h="0">
                   <a:moveTo>
                     <a:pt x="0" y="0"/>
                   </a:moveTo>
                   <a:lnTo>
-                    <a:pt x="7799693" y="0"/>
-                  </a:lnTo>
-                  <a:lnTo>
-                    <a:pt x="7799693" y="0"/>
+                    <a:pt x="7660515" y="0"/>
+                  </a:lnTo>
+                  <a:lnTo>
+                    <a:pt x="7660515" y="0"/>
                   </a:lnTo>
                 </a:path>
               </a:pathLst>
@@ -2787,21 +2779,21 @@
           </p:nvSpPr>
           <p:spPr>
             <a:xfrm>
-              <a:off x="817517" y="2239395"/>
-              <a:ext cx="7799693" cy="0"/>
+              <a:off x="887106" y="2502292"/>
+              <a:ext cx="7660515" cy="0"/>
             </a:xfrm>
             <a:custGeom>
               <a:avLst/>
               <a:pathLst>
-                <a:path w="7799693" h="0">
+                <a:path w="7660515" h="0">
                   <a:moveTo>
                     <a:pt x="0" y="0"/>
                   </a:moveTo>
                   <a:lnTo>
-                    <a:pt x="7799693" y="0"/>
-                  </a:lnTo>
-                  <a:lnTo>
-                    <a:pt x="7799693" y="0"/>
+                    <a:pt x="7660515" y="0"/>
+                  </a:lnTo>
+                  <a:lnTo>
+                    <a:pt x="7660515" y="0"/>
                   </a:lnTo>
                 </a:path>
               </a:pathLst>
@@ -2830,21 +2822,21 @@
           </p:nvSpPr>
           <p:spPr>
             <a:xfrm>
-              <a:off x="2502671" y="2073503"/>
-              <a:ext cx="0" cy="3649639"/>
+              <a:off x="887106" y="2202958"/>
+              <a:ext cx="7660515" cy="0"/>
             </a:xfrm>
             <a:custGeom>
               <a:avLst/>
               <a:pathLst>
-                <a:path w="0" h="3649639">
+                <a:path w="7660515" h="0">
                   <a:moveTo>
-                    <a:pt x="0" y="3649639"/>
+                    <a:pt x="0" y="0"/>
                   </a:moveTo>
                   <a:lnTo>
-                    <a:pt x="0" y="0"/>
-                  </a:lnTo>
-                  <a:lnTo>
-                    <a:pt x="0" y="0"/>
+                    <a:pt x="7660515" y="0"/>
+                  </a:lnTo>
+                  <a:lnTo>
+                    <a:pt x="7660515" y="0"/>
                   </a:lnTo>
                 </a:path>
               </a:pathLst>
@@ -2873,15 +2865,15 @@
           </p:nvSpPr>
           <p:spPr>
             <a:xfrm>
-              <a:off x="4573628" y="2073503"/>
-              <a:ext cx="0" cy="3649639"/>
+              <a:off x="2542190" y="2143092"/>
+              <a:ext cx="0" cy="1317069"/>
             </a:xfrm>
             <a:custGeom>
               <a:avLst/>
               <a:pathLst>
-                <a:path w="0" h="3649639">
+                <a:path w="0" h="1317069">
                   <a:moveTo>
-                    <a:pt x="0" y="3649639"/>
+                    <a:pt x="0" y="1317069"/>
                   </a:moveTo>
                   <a:lnTo>
                     <a:pt x="0" y="0"/>
@@ -2916,15 +2908,15 @@
           </p:nvSpPr>
           <p:spPr>
             <a:xfrm>
-              <a:off x="6644586" y="2073503"/>
-              <a:ext cx="0" cy="3649639"/>
+              <a:off x="4576193" y="2143092"/>
+              <a:ext cx="0" cy="1317069"/>
             </a:xfrm>
             <a:custGeom>
               <a:avLst/>
               <a:pathLst>
-                <a:path w="0" h="3649639">
+                <a:path w="0" h="1317069">
                   <a:moveTo>
-                    <a:pt x="0" y="3649639"/>
+                    <a:pt x="0" y="1317069"/>
                   </a:moveTo>
                   <a:lnTo>
                     <a:pt x="0" y="0"/>
@@ -2953,546 +2945,589 @@
         </p:sp>
         <p:sp>
           <p:nvSpPr>
-            <p:cNvPr id="20" name="pg20"/>
+            <p:cNvPr id="20" name="pl20"/>
             <p:cNvSpPr/>
             <p:nvPr/>
           </p:nvSpPr>
           <p:spPr>
             <a:xfrm>
-              <a:off x="1291620" y="2073503"/>
-              <a:ext cx="6971058" cy="3444135"/>
+              <a:off x="6610197" y="2143092"/>
+              <a:ext cx="0" cy="1317069"/>
             </a:xfrm>
             <a:custGeom>
               <a:avLst/>
               <a:pathLst>
-                <a:path w="6971058" h="3444135">
+                <a:path w="0" h="1317069">
                   <a:moveTo>
-                    <a:pt x="1473154" y="0"/>
+                    <a:pt x="0" y="1317069"/>
                   </a:moveTo>
                   <a:lnTo>
-                    <a:pt x="1527746" y="152475"/>
-                  </a:lnTo>
-                  <a:lnTo>
-                    <a:pt x="1599369" y="341185"/>
-                  </a:lnTo>
-                  <a:lnTo>
-                    <a:pt x="1670991" y="519204"/>
-                  </a:lnTo>
-                  <a:lnTo>
-                    <a:pt x="1742614" y="687138"/>
-                  </a:lnTo>
-                  <a:lnTo>
-                    <a:pt x="1814236" y="845560"/>
-                  </a:lnTo>
-                  <a:lnTo>
-                    <a:pt x="1885859" y="995008"/>
-                  </a:lnTo>
-                  <a:lnTo>
-                    <a:pt x="1957481" y="1135989"/>
-                  </a:lnTo>
-                  <a:lnTo>
-                    <a:pt x="2029104" y="1268984"/>
-                  </a:lnTo>
-                  <a:lnTo>
-                    <a:pt x="2100726" y="1394446"/>
-                  </a:lnTo>
-                  <a:lnTo>
-                    <a:pt x="2172349" y="1512800"/>
-                  </a:lnTo>
-                  <a:lnTo>
-                    <a:pt x="2243971" y="1624450"/>
-                  </a:lnTo>
-                  <a:lnTo>
-                    <a:pt x="2315594" y="1729775"/>
-                  </a:lnTo>
-                  <a:lnTo>
-                    <a:pt x="2387216" y="1829133"/>
-                  </a:lnTo>
-                  <a:lnTo>
-                    <a:pt x="2458839" y="1922863"/>
-                  </a:lnTo>
-                  <a:lnTo>
-                    <a:pt x="2530461" y="2011284"/>
-                  </a:lnTo>
-                  <a:lnTo>
-                    <a:pt x="2602084" y="2094696"/>
-                  </a:lnTo>
-                  <a:lnTo>
-                    <a:pt x="2673707" y="2173382"/>
-                  </a:lnTo>
-                  <a:lnTo>
-                    <a:pt x="2745329" y="2247612"/>
-                  </a:lnTo>
-                  <a:lnTo>
-                    <a:pt x="2816952" y="2317636"/>
-                  </a:lnTo>
-                  <a:lnTo>
-                    <a:pt x="2888574" y="2383693"/>
-                  </a:lnTo>
-                  <a:lnTo>
-                    <a:pt x="2960197" y="2446009"/>
-                  </a:lnTo>
-                  <a:lnTo>
-                    <a:pt x="3031819" y="2504795"/>
-                  </a:lnTo>
-                  <a:lnTo>
-                    <a:pt x="3103442" y="2560250"/>
-                  </a:lnTo>
-                  <a:lnTo>
-                    <a:pt x="3175064" y="2612564"/>
-                  </a:lnTo>
-                  <a:lnTo>
-                    <a:pt x="3246687" y="2658449"/>
-                  </a:lnTo>
-                  <a:lnTo>
-                    <a:pt x="3318309" y="2684254"/>
-                  </a:lnTo>
-                  <a:lnTo>
-                    <a:pt x="3389932" y="2709252"/>
-                  </a:lnTo>
-                  <a:lnTo>
-                    <a:pt x="3461554" y="2733469"/>
-                  </a:lnTo>
-                  <a:lnTo>
-                    <a:pt x="3533177" y="2756928"/>
-                  </a:lnTo>
-                  <a:lnTo>
-                    <a:pt x="3604799" y="2779654"/>
-                  </a:lnTo>
-                  <a:lnTo>
-                    <a:pt x="3676422" y="2801669"/>
-                  </a:lnTo>
-                  <a:lnTo>
-                    <a:pt x="3748044" y="2822996"/>
-                  </a:lnTo>
-                  <a:lnTo>
-                    <a:pt x="3819667" y="2843656"/>
-                  </a:lnTo>
-                  <a:lnTo>
-                    <a:pt x="3891289" y="2863670"/>
-                  </a:lnTo>
-                  <a:lnTo>
-                    <a:pt x="3962912" y="2883058"/>
-                  </a:lnTo>
-                  <a:lnTo>
-                    <a:pt x="4034535" y="2901841"/>
-                  </a:lnTo>
-                  <a:lnTo>
-                    <a:pt x="4106157" y="2920035"/>
-                  </a:lnTo>
-                  <a:lnTo>
-                    <a:pt x="4177780" y="2937661"/>
-                  </a:lnTo>
-                  <a:lnTo>
-                    <a:pt x="4249402" y="2954736"/>
-                  </a:lnTo>
-                  <a:lnTo>
-                    <a:pt x="4321025" y="2971277"/>
-                  </a:lnTo>
-                  <a:lnTo>
-                    <a:pt x="4392647" y="2987301"/>
-                  </a:lnTo>
-                  <a:lnTo>
-                    <a:pt x="4464270" y="3002823"/>
-                  </a:lnTo>
-                  <a:lnTo>
-                    <a:pt x="4535892" y="3017860"/>
-                  </a:lnTo>
-                  <a:lnTo>
-                    <a:pt x="4607515" y="3032428"/>
-                  </a:lnTo>
-                  <a:lnTo>
-                    <a:pt x="4679137" y="3046539"/>
-                  </a:lnTo>
-                  <a:lnTo>
-                    <a:pt x="4750760" y="3060210"/>
-                  </a:lnTo>
-                  <a:lnTo>
-                    <a:pt x="4822382" y="3073453"/>
-                  </a:lnTo>
-                  <a:lnTo>
-                    <a:pt x="4894005" y="3086282"/>
-                  </a:lnTo>
-                  <a:lnTo>
-                    <a:pt x="4965627" y="3098709"/>
-                  </a:lnTo>
-                  <a:lnTo>
-                    <a:pt x="5037250" y="3110748"/>
-                  </a:lnTo>
-                  <a:lnTo>
-                    <a:pt x="5108872" y="3122411"/>
-                  </a:lnTo>
-                  <a:lnTo>
-                    <a:pt x="5180495" y="3133709"/>
-                  </a:lnTo>
-                  <a:lnTo>
-                    <a:pt x="5252117" y="3144654"/>
-                  </a:lnTo>
-                  <a:lnTo>
-                    <a:pt x="5323740" y="3155257"/>
-                  </a:lnTo>
-                  <a:lnTo>
-                    <a:pt x="5395363" y="3165528"/>
-                  </a:lnTo>
-                  <a:lnTo>
-                    <a:pt x="5466985" y="3175478"/>
-                  </a:lnTo>
-                  <a:lnTo>
-                    <a:pt x="5538608" y="3185116"/>
-                  </a:lnTo>
-                  <a:lnTo>
-                    <a:pt x="5610230" y="3194454"/>
-                  </a:lnTo>
-                  <a:lnTo>
-                    <a:pt x="5681853" y="3203499"/>
-                  </a:lnTo>
-                  <a:lnTo>
-                    <a:pt x="5753475" y="3212262"/>
-                  </a:lnTo>
-                  <a:lnTo>
-                    <a:pt x="5825098" y="3220751"/>
-                  </a:lnTo>
-                  <a:lnTo>
-                    <a:pt x="5896720" y="3228974"/>
-                  </a:lnTo>
-                  <a:lnTo>
-                    <a:pt x="5968343" y="3236940"/>
-                  </a:lnTo>
-                  <a:lnTo>
-                    <a:pt x="6039965" y="3244657"/>
-                  </a:lnTo>
-                  <a:lnTo>
-                    <a:pt x="6111588" y="3252133"/>
-                  </a:lnTo>
-                  <a:lnTo>
-                    <a:pt x="6183210" y="3259375"/>
-                  </a:lnTo>
-                  <a:lnTo>
-                    <a:pt x="6254833" y="3266390"/>
-                  </a:lnTo>
-                  <a:lnTo>
-                    <a:pt x="6326455" y="3273187"/>
-                  </a:lnTo>
-                  <a:lnTo>
-                    <a:pt x="6398078" y="3279770"/>
-                  </a:lnTo>
-                  <a:lnTo>
-                    <a:pt x="6469700" y="3286148"/>
-                  </a:lnTo>
-                  <a:lnTo>
-                    <a:pt x="6541323" y="3292327"/>
-                  </a:lnTo>
-                  <a:lnTo>
-                    <a:pt x="6612945" y="3298312"/>
-                  </a:lnTo>
-                  <a:lnTo>
-                    <a:pt x="6684568" y="3304110"/>
-                  </a:lnTo>
-                  <a:lnTo>
-                    <a:pt x="6756191" y="3309727"/>
-                  </a:lnTo>
-                  <a:lnTo>
-                    <a:pt x="6827813" y="3315168"/>
-                  </a:lnTo>
-                  <a:lnTo>
-                    <a:pt x="6899436" y="3320439"/>
-                  </a:lnTo>
-                  <a:lnTo>
-                    <a:pt x="6971058" y="3325545"/>
-                  </a:lnTo>
-                  <a:lnTo>
-                    <a:pt x="6971058" y="3444135"/>
-                  </a:lnTo>
-                  <a:lnTo>
-                    <a:pt x="6899436" y="3441756"/>
-                  </a:lnTo>
-                  <a:lnTo>
-                    <a:pt x="6827813" y="3439234"/>
-                  </a:lnTo>
-                  <a:lnTo>
-                    <a:pt x="6756191" y="3436562"/>
-                  </a:lnTo>
-                  <a:lnTo>
-                    <a:pt x="6684568" y="3433728"/>
-                  </a:lnTo>
-                  <a:lnTo>
-                    <a:pt x="6612945" y="3430725"/>
-                  </a:lnTo>
-                  <a:lnTo>
-                    <a:pt x="6541323" y="3427541"/>
-                  </a:lnTo>
-                  <a:lnTo>
-                    <a:pt x="6469700" y="3424165"/>
-                  </a:lnTo>
-                  <a:lnTo>
-                    <a:pt x="6398078" y="3420588"/>
-                  </a:lnTo>
-                  <a:lnTo>
-                    <a:pt x="6326455" y="3416795"/>
-                  </a:lnTo>
-                  <a:lnTo>
-                    <a:pt x="6254833" y="3412775"/>
-                  </a:lnTo>
-                  <a:lnTo>
-                    <a:pt x="6183210" y="3408513"/>
-                  </a:lnTo>
-                  <a:lnTo>
-                    <a:pt x="6111588" y="3403995"/>
-                  </a:lnTo>
-                  <a:lnTo>
-                    <a:pt x="6039965" y="3399206"/>
-                  </a:lnTo>
-                  <a:lnTo>
-                    <a:pt x="5968343" y="3394129"/>
-                  </a:lnTo>
-                  <a:lnTo>
-                    <a:pt x="5896720" y="3388748"/>
-                  </a:lnTo>
-                  <a:lnTo>
-                    <a:pt x="5825098" y="3383043"/>
-                  </a:lnTo>
-                  <a:lnTo>
-                    <a:pt x="5753475" y="3376996"/>
-                  </a:lnTo>
-                  <a:lnTo>
-                    <a:pt x="5681853" y="3370586"/>
-                  </a:lnTo>
-                  <a:lnTo>
-                    <a:pt x="5610230" y="3363791"/>
-                  </a:lnTo>
-                  <a:lnTo>
-                    <a:pt x="5538608" y="3356587"/>
-                  </a:lnTo>
-                  <a:lnTo>
-                    <a:pt x="5466985" y="3348952"/>
-                  </a:lnTo>
-                  <a:lnTo>
-                    <a:pt x="5395363" y="3340857"/>
-                  </a:lnTo>
-                  <a:lnTo>
-                    <a:pt x="5323740" y="3332277"/>
-                  </a:lnTo>
-                  <a:lnTo>
-                    <a:pt x="5252117" y="3323181"/>
-                  </a:lnTo>
-                  <a:lnTo>
-                    <a:pt x="5180495" y="3313539"/>
-                  </a:lnTo>
-                  <a:lnTo>
-                    <a:pt x="5108872" y="3303318"/>
-                  </a:lnTo>
-                  <a:lnTo>
-                    <a:pt x="5037250" y="3292484"/>
-                  </a:lnTo>
-                  <a:lnTo>
-                    <a:pt x="4965627" y="3280999"/>
-                  </a:lnTo>
-                  <a:lnTo>
-                    <a:pt x="4894005" y="3268824"/>
-                  </a:lnTo>
-                  <a:lnTo>
-                    <a:pt x="4822382" y="3255918"/>
-                  </a:lnTo>
-                  <a:lnTo>
-                    <a:pt x="4750760" y="3242237"/>
-                  </a:lnTo>
-                  <a:lnTo>
-                    <a:pt x="4679137" y="3227734"/>
-                  </a:lnTo>
-                  <a:lnTo>
-                    <a:pt x="4607515" y="3212361"/>
-                  </a:lnTo>
-                  <a:lnTo>
-                    <a:pt x="4535892" y="3196064"/>
-                  </a:lnTo>
-                  <a:lnTo>
-                    <a:pt x="4464270" y="3178789"/>
-                  </a:lnTo>
-                  <a:lnTo>
-                    <a:pt x="4392647" y="3160477"/>
-                  </a:lnTo>
-                  <a:lnTo>
-                    <a:pt x="4321025" y="3141065"/>
-                  </a:lnTo>
-                  <a:lnTo>
-                    <a:pt x="4249402" y="3120487"/>
-                  </a:lnTo>
-                  <a:lnTo>
-                    <a:pt x="4177780" y="3098673"/>
-                  </a:lnTo>
-                  <a:lnTo>
-                    <a:pt x="4106157" y="3075550"/>
-                  </a:lnTo>
-                  <a:lnTo>
-                    <a:pt x="4034535" y="3051038"/>
-                  </a:lnTo>
-                  <a:lnTo>
-                    <a:pt x="3962912" y="3025054"/>
-                  </a:lnTo>
-                  <a:lnTo>
-                    <a:pt x="3891289" y="2997510"/>
-                  </a:lnTo>
-                  <a:lnTo>
-                    <a:pt x="3819667" y="2968311"/>
-                  </a:lnTo>
-                  <a:lnTo>
-                    <a:pt x="3748044" y="2937360"/>
-                  </a:lnTo>
-                  <a:lnTo>
-                    <a:pt x="3676422" y="2904550"/>
-                  </a:lnTo>
-                  <a:lnTo>
-                    <a:pt x="3604799" y="2869769"/>
-                  </a:lnTo>
-                  <a:lnTo>
-                    <a:pt x="3533177" y="2832900"/>
-                  </a:lnTo>
-                  <a:lnTo>
-                    <a:pt x="3461554" y="2793817"/>
-                  </a:lnTo>
-                  <a:lnTo>
-                    <a:pt x="3389932" y="2752387"/>
-                  </a:lnTo>
-                  <a:lnTo>
-                    <a:pt x="3318309" y="2708470"/>
-                  </a:lnTo>
-                  <a:lnTo>
-                    <a:pt x="3246687" y="2661915"/>
-                  </a:lnTo>
-                  <a:lnTo>
-                    <a:pt x="3175064" y="2631811"/>
-                  </a:lnTo>
-                  <a:lnTo>
-                    <a:pt x="3103442" y="2604313"/>
-                  </a:lnTo>
-                  <a:lnTo>
-                    <a:pt x="3031819" y="2575928"/>
-                  </a:lnTo>
-                  <a:lnTo>
-                    <a:pt x="2960197" y="2546626"/>
-                  </a:lnTo>
-                  <a:lnTo>
-                    <a:pt x="2888574" y="2516379"/>
-                  </a:lnTo>
-                  <a:lnTo>
-                    <a:pt x="2816952" y="2485156"/>
-                  </a:lnTo>
-                  <a:lnTo>
-                    <a:pt x="2745329" y="2452924"/>
-                  </a:lnTo>
-                  <a:lnTo>
-                    <a:pt x="2673707" y="2419653"/>
-                  </a:lnTo>
-                  <a:lnTo>
-                    <a:pt x="2602084" y="2385307"/>
-                  </a:lnTo>
-                  <a:lnTo>
-                    <a:pt x="2530461" y="2349853"/>
-                  </a:lnTo>
-                  <a:lnTo>
-                    <a:pt x="2458839" y="2313255"/>
-                  </a:lnTo>
-                  <a:lnTo>
-                    <a:pt x="2387216" y="2275475"/>
-                  </a:lnTo>
-                  <a:lnTo>
-                    <a:pt x="2315594" y="2236476"/>
-                  </a:lnTo>
-                  <a:lnTo>
-                    <a:pt x="2243971" y="2196218"/>
-                  </a:lnTo>
-                  <a:lnTo>
-                    <a:pt x="2172349" y="2154661"/>
-                  </a:lnTo>
-                  <a:lnTo>
-                    <a:pt x="2100726" y="2111762"/>
-                  </a:lnTo>
-                  <a:lnTo>
-                    <a:pt x="2029104" y="2067479"/>
-                  </a:lnTo>
-                  <a:lnTo>
-                    <a:pt x="1957481" y="2021766"/>
-                  </a:lnTo>
-                  <a:lnTo>
-                    <a:pt x="1885859" y="1974578"/>
-                  </a:lnTo>
-                  <a:lnTo>
-                    <a:pt x="1814236" y="1925867"/>
-                  </a:lnTo>
-                  <a:lnTo>
-                    <a:pt x="1742614" y="1875584"/>
-                  </a:lnTo>
-                  <a:lnTo>
-                    <a:pt x="1670991" y="1823677"/>
-                  </a:lnTo>
-                  <a:lnTo>
-                    <a:pt x="1599369" y="1770096"/>
-                  </a:lnTo>
-                  <a:lnTo>
-                    <a:pt x="1527746" y="1714785"/>
-                  </a:lnTo>
-                  <a:lnTo>
-                    <a:pt x="1456124" y="1657688"/>
-                  </a:lnTo>
-                  <a:lnTo>
-                    <a:pt x="1384501" y="1598749"/>
-                  </a:lnTo>
-                  <a:lnTo>
-                    <a:pt x="1312879" y="1537907"/>
-                  </a:lnTo>
-                  <a:lnTo>
-                    <a:pt x="1241256" y="1475102"/>
-                  </a:lnTo>
-                  <a:lnTo>
-                    <a:pt x="1169633" y="1410269"/>
-                  </a:lnTo>
-                  <a:lnTo>
-                    <a:pt x="1098011" y="1343344"/>
-                  </a:lnTo>
-                  <a:lnTo>
-                    <a:pt x="1026388" y="1274259"/>
-                  </a:lnTo>
-                  <a:lnTo>
-                    <a:pt x="954766" y="1202944"/>
-                  </a:lnTo>
-                  <a:lnTo>
-                    <a:pt x="883143" y="1129327"/>
-                  </a:lnTo>
-                  <a:lnTo>
-                    <a:pt x="811521" y="1053333"/>
-                  </a:lnTo>
-                  <a:lnTo>
-                    <a:pt x="739898" y="974888"/>
-                  </a:lnTo>
-                  <a:lnTo>
-                    <a:pt x="668276" y="893910"/>
-                  </a:lnTo>
-                  <a:lnTo>
-                    <a:pt x="596653" y="810318"/>
-                  </a:lnTo>
-                  <a:lnTo>
-                    <a:pt x="525031" y="724028"/>
-                  </a:lnTo>
-                  <a:lnTo>
-                    <a:pt x="453408" y="634953"/>
-                  </a:lnTo>
-                  <a:lnTo>
-                    <a:pt x="381786" y="543004"/>
-                  </a:lnTo>
-                  <a:lnTo>
-                    <a:pt x="310163" y="448086"/>
-                  </a:lnTo>
-                  <a:lnTo>
-                    <a:pt x="238541" y="350104"/>
-                  </a:lnTo>
-                  <a:lnTo>
-                    <a:pt x="166918" y="248961"/>
-                  </a:lnTo>
-                  <a:lnTo>
-                    <a:pt x="95296" y="144552"/>
-                  </a:lnTo>
-                  <a:lnTo>
-                    <a:pt x="23673" y="36774"/>
+                    <a:pt x="0" y="0"/>
+                  </a:lnTo>
+                  <a:lnTo>
+                    <a:pt x="0" y="0"/>
+                  </a:lnTo>
+                </a:path>
+              </a:pathLst>
+            </a:custGeom>
+            <a:ln w="13550" cap="flat">
+              <a:solidFill>
+                <a:srgbClr val="EBEBEB">
+                  <a:alpha val="100000"/>
+                </a:srgbClr>
+              </a:solidFill>
+              <a:prstDash val="solid"/>
+              <a:round/>
+            </a:ln>
+          </p:spPr>
+          <p:txBody>
+            <a:bodyPr/>
+            <a:lstStyle/>
+            <a:p/>
+          </p:txBody>
+        </p:sp>
+        <p:sp>
+          <p:nvSpPr>
+            <p:cNvPr id="21" name="pg21"/>
+            <p:cNvSpPr/>
+            <p:nvPr/>
+          </p:nvSpPr>
+          <p:spPr>
+            <a:xfrm>
+              <a:off x="1352750" y="2143092"/>
+              <a:ext cx="6846666" cy="1242907"/>
+            </a:xfrm>
+            <a:custGeom>
+              <a:avLst/>
+              <a:pathLst>
+                <a:path w="6846666" h="1242907">
+                  <a:moveTo>
+                    <a:pt x="1446867" y="0"/>
+                  </a:moveTo>
+                  <a:lnTo>
+                    <a:pt x="1500485" y="55024"/>
+                  </a:lnTo>
+                  <a:lnTo>
+                    <a:pt x="1570829" y="123125"/>
+                  </a:lnTo>
+                  <a:lnTo>
+                    <a:pt x="1641174" y="187368"/>
+                  </a:lnTo>
+                  <a:lnTo>
+                    <a:pt x="1711518" y="247972"/>
+                  </a:lnTo>
+                  <a:lnTo>
+                    <a:pt x="1781863" y="305142"/>
+                  </a:lnTo>
+                  <a:lnTo>
+                    <a:pt x="1852207" y="359074"/>
+                  </a:lnTo>
+                  <a:lnTo>
+                    <a:pt x="1922552" y="409951"/>
+                  </a:lnTo>
+                  <a:lnTo>
+                    <a:pt x="1992896" y="457946"/>
+                  </a:lnTo>
+                  <a:lnTo>
+                    <a:pt x="2063241" y="503222"/>
+                  </a:lnTo>
+                  <a:lnTo>
+                    <a:pt x="2133585" y="545934"/>
+                  </a:lnTo>
+                  <a:lnTo>
+                    <a:pt x="2203930" y="586225"/>
+                  </a:lnTo>
+                  <a:lnTo>
+                    <a:pt x="2274274" y="624235"/>
+                  </a:lnTo>
+                  <a:lnTo>
+                    <a:pt x="2344619" y="660091"/>
+                  </a:lnTo>
+                  <a:lnTo>
+                    <a:pt x="2414963" y="693916"/>
+                  </a:lnTo>
+                  <a:lnTo>
+                    <a:pt x="2485308" y="725825"/>
+                  </a:lnTo>
+                  <a:lnTo>
+                    <a:pt x="2555652" y="755926"/>
+                  </a:lnTo>
+                  <a:lnTo>
+                    <a:pt x="2625997" y="784322"/>
+                  </a:lnTo>
+                  <a:lnTo>
+                    <a:pt x="2696341" y="811110"/>
+                  </a:lnTo>
+                  <a:lnTo>
+                    <a:pt x="2766686" y="836380"/>
+                  </a:lnTo>
+                  <a:lnTo>
+                    <a:pt x="2837030" y="860219"/>
+                  </a:lnTo>
+                  <a:lnTo>
+                    <a:pt x="2907375" y="882707"/>
+                  </a:lnTo>
+                  <a:lnTo>
+                    <a:pt x="2977719" y="903921"/>
+                  </a:lnTo>
+                  <a:lnTo>
+                    <a:pt x="3048064" y="923934"/>
+                  </a:lnTo>
+                  <a:lnTo>
+                    <a:pt x="3118408" y="942813"/>
+                  </a:lnTo>
+                  <a:lnTo>
+                    <a:pt x="3188753" y="959371"/>
+                  </a:lnTo>
+                  <a:lnTo>
+                    <a:pt x="3259097" y="968684"/>
+                  </a:lnTo>
+                  <a:lnTo>
+                    <a:pt x="3329442" y="977705"/>
+                  </a:lnTo>
+                  <a:lnTo>
+                    <a:pt x="3399786" y="986444"/>
+                  </a:lnTo>
+                  <a:lnTo>
+                    <a:pt x="3470131" y="994910"/>
+                  </a:lnTo>
+                  <a:lnTo>
+                    <a:pt x="3540475" y="1003111"/>
+                  </a:lnTo>
+                  <a:lnTo>
+                    <a:pt x="3610820" y="1011056"/>
+                  </a:lnTo>
+                  <a:lnTo>
+                    <a:pt x="3681164" y="1018753"/>
+                  </a:lnTo>
+                  <a:lnTo>
+                    <a:pt x="3751509" y="1026208"/>
+                  </a:lnTo>
+                  <a:lnTo>
+                    <a:pt x="3821853" y="1033431"/>
+                  </a:lnTo>
+                  <a:lnTo>
+                    <a:pt x="3892198" y="1040428"/>
+                  </a:lnTo>
+                  <a:lnTo>
+                    <a:pt x="3962542" y="1047206"/>
+                  </a:lnTo>
+                  <a:lnTo>
+                    <a:pt x="4032887" y="1053772"/>
+                  </a:lnTo>
+                  <a:lnTo>
+                    <a:pt x="4103231" y="1060132"/>
+                  </a:lnTo>
+                  <a:lnTo>
+                    <a:pt x="4173576" y="1066294"/>
+                  </a:lnTo>
+                  <a:lnTo>
+                    <a:pt x="4243920" y="1072264"/>
+                  </a:lnTo>
+                  <a:lnTo>
+                    <a:pt x="4314265" y="1078046"/>
+                  </a:lnTo>
+                  <a:lnTo>
+                    <a:pt x="4384609" y="1083648"/>
+                  </a:lnTo>
+                  <a:lnTo>
+                    <a:pt x="4454954" y="1089075"/>
+                  </a:lnTo>
+                  <a:lnTo>
+                    <a:pt x="4525298" y="1094331"/>
+                  </a:lnTo>
+                  <a:lnTo>
+                    <a:pt x="4595642" y="1099424"/>
+                  </a:lnTo>
+                  <a:lnTo>
+                    <a:pt x="4665987" y="1104357"/>
+                  </a:lnTo>
+                  <a:lnTo>
+                    <a:pt x="4736331" y="1109136"/>
+                  </a:lnTo>
+                  <a:lnTo>
+                    <a:pt x="4806676" y="1113766"/>
+                  </a:lnTo>
+                  <a:lnTo>
+                    <a:pt x="4877020" y="1118251"/>
+                  </a:lnTo>
+                  <a:lnTo>
+                    <a:pt x="4947365" y="1122596"/>
+                  </a:lnTo>
+                  <a:lnTo>
+                    <a:pt x="5017709" y="1126804"/>
+                  </a:lnTo>
+                  <a:lnTo>
+                    <a:pt x="5088054" y="1130882"/>
+                  </a:lnTo>
+                  <a:lnTo>
+                    <a:pt x="5158398" y="1134831"/>
+                  </a:lnTo>
+                  <a:lnTo>
+                    <a:pt x="5228743" y="1138658"/>
+                  </a:lnTo>
+                  <a:lnTo>
+                    <a:pt x="5299087" y="1142364"/>
+                  </a:lnTo>
+                  <a:lnTo>
+                    <a:pt x="5369432" y="1145955"/>
+                  </a:lnTo>
+                  <a:lnTo>
+                    <a:pt x="5439776" y="1149433"/>
+                  </a:lnTo>
+                  <a:lnTo>
+                    <a:pt x="5510121" y="1152803"/>
+                  </a:lnTo>
+                  <a:lnTo>
+                    <a:pt x="5580465" y="1156067"/>
+                  </a:lnTo>
+                  <a:lnTo>
+                    <a:pt x="5650810" y="1159229"/>
+                  </a:lnTo>
+                  <a:lnTo>
+                    <a:pt x="5721154" y="1162293"/>
+                  </a:lnTo>
+                  <a:lnTo>
+                    <a:pt x="5791499" y="1165260"/>
+                  </a:lnTo>
+                  <a:lnTo>
+                    <a:pt x="5861843" y="1168135"/>
+                  </a:lnTo>
+                  <a:lnTo>
+                    <a:pt x="5932188" y="1170920"/>
+                  </a:lnTo>
+                  <a:lnTo>
+                    <a:pt x="6002532" y="1173618"/>
+                  </a:lnTo>
+                  <a:lnTo>
+                    <a:pt x="6072877" y="1176231"/>
+                  </a:lnTo>
+                  <a:lnTo>
+                    <a:pt x="6143221" y="1178763"/>
+                  </a:lnTo>
+                  <a:lnTo>
+                    <a:pt x="6213566" y="1181216"/>
+                  </a:lnTo>
+                  <a:lnTo>
+                    <a:pt x="6283910" y="1183592"/>
+                  </a:lnTo>
+                  <a:lnTo>
+                    <a:pt x="6354255" y="1185893"/>
+                  </a:lnTo>
+                  <a:lnTo>
+                    <a:pt x="6424599" y="1188123"/>
+                  </a:lnTo>
+                  <a:lnTo>
+                    <a:pt x="6494944" y="1190283"/>
+                  </a:lnTo>
+                  <a:lnTo>
+                    <a:pt x="6565288" y="1192375"/>
+                  </a:lnTo>
+                  <a:lnTo>
+                    <a:pt x="6635633" y="1194402"/>
+                  </a:lnTo>
+                  <a:lnTo>
+                    <a:pt x="6705977" y="1196366"/>
+                  </a:lnTo>
+                  <a:lnTo>
+                    <a:pt x="6776322" y="1198268"/>
+                  </a:lnTo>
+                  <a:lnTo>
+                    <a:pt x="6846666" y="1200111"/>
+                  </a:lnTo>
+                  <a:lnTo>
+                    <a:pt x="6846666" y="1242907"/>
+                  </a:lnTo>
+                  <a:lnTo>
+                    <a:pt x="6776322" y="1242048"/>
+                  </a:lnTo>
+                  <a:lnTo>
+                    <a:pt x="6705977" y="1241138"/>
+                  </a:lnTo>
+                  <a:lnTo>
+                    <a:pt x="6635633" y="1240174"/>
+                  </a:lnTo>
+                  <a:lnTo>
+                    <a:pt x="6565288" y="1239151"/>
+                  </a:lnTo>
+                  <a:lnTo>
+                    <a:pt x="6494944" y="1238067"/>
+                  </a:lnTo>
+                  <a:lnTo>
+                    <a:pt x="6424599" y="1236918"/>
+                  </a:lnTo>
+                  <a:lnTo>
+                    <a:pt x="6354255" y="1235700"/>
+                  </a:lnTo>
+                  <a:lnTo>
+                    <a:pt x="6283910" y="1234409"/>
+                  </a:lnTo>
+                  <a:lnTo>
+                    <a:pt x="6213566" y="1233041"/>
+                  </a:lnTo>
+                  <a:lnTo>
+                    <a:pt x="6143221" y="1231590"/>
+                  </a:lnTo>
+                  <a:lnTo>
+                    <a:pt x="6072877" y="1230052"/>
+                  </a:lnTo>
+                  <a:lnTo>
+                    <a:pt x="6002532" y="1228421"/>
+                  </a:lnTo>
+                  <a:lnTo>
+                    <a:pt x="5932188" y="1226693"/>
+                  </a:lnTo>
+                  <a:lnTo>
+                    <a:pt x="5861843" y="1224861"/>
+                  </a:lnTo>
+                  <a:lnTo>
+                    <a:pt x="5791499" y="1222919"/>
+                  </a:lnTo>
+                  <a:lnTo>
+                    <a:pt x="5721154" y="1220860"/>
+                  </a:lnTo>
+                  <a:lnTo>
+                    <a:pt x="5650810" y="1218678"/>
+                  </a:lnTo>
+                  <a:lnTo>
+                    <a:pt x="5580465" y="1216365"/>
+                  </a:lnTo>
+                  <a:lnTo>
+                    <a:pt x="5510121" y="1213913"/>
+                  </a:lnTo>
+                  <a:lnTo>
+                    <a:pt x="5439776" y="1211313"/>
+                  </a:lnTo>
+                  <a:lnTo>
+                    <a:pt x="5369432" y="1208558"/>
+                  </a:lnTo>
+                  <a:lnTo>
+                    <a:pt x="5299087" y="1205636"/>
+                  </a:lnTo>
+                  <a:lnTo>
+                    <a:pt x="5228743" y="1202540"/>
+                  </a:lnTo>
+                  <a:lnTo>
+                    <a:pt x="5158398" y="1199258"/>
+                  </a:lnTo>
+                  <a:lnTo>
+                    <a:pt x="5088054" y="1195778"/>
+                  </a:lnTo>
+                  <a:lnTo>
+                    <a:pt x="5017709" y="1192090"/>
+                  </a:lnTo>
+                  <a:lnTo>
+                    <a:pt x="4947365" y="1188180"/>
+                  </a:lnTo>
+                  <a:lnTo>
+                    <a:pt x="4877020" y="1184035"/>
+                  </a:lnTo>
+                  <a:lnTo>
+                    <a:pt x="4806676" y="1179641"/>
+                  </a:lnTo>
+                  <a:lnTo>
+                    <a:pt x="4736331" y="1174984"/>
+                  </a:lnTo>
+                  <a:lnTo>
+                    <a:pt x="4665987" y="1170047"/>
+                  </a:lnTo>
+                  <a:lnTo>
+                    <a:pt x="4595642" y="1164813"/>
+                  </a:lnTo>
+                  <a:lnTo>
+                    <a:pt x="4525298" y="1159265"/>
+                  </a:lnTo>
+                  <a:lnTo>
+                    <a:pt x="4454954" y="1153384"/>
+                  </a:lnTo>
+                  <a:lnTo>
+                    <a:pt x="4384609" y="1147150"/>
+                  </a:lnTo>
+                  <a:lnTo>
+                    <a:pt x="4314265" y="1140541"/>
+                  </a:lnTo>
+                  <a:lnTo>
+                    <a:pt x="4243920" y="1133536"/>
+                  </a:lnTo>
+                  <a:lnTo>
+                    <a:pt x="4173576" y="1126110"/>
+                  </a:lnTo>
+                  <a:lnTo>
+                    <a:pt x="4103231" y="1118238"/>
+                  </a:lnTo>
+                  <a:lnTo>
+                    <a:pt x="4032887" y="1109893"/>
+                  </a:lnTo>
+                  <a:lnTo>
+                    <a:pt x="3962542" y="1101047"/>
+                  </a:lnTo>
+                  <a:lnTo>
+                    <a:pt x="3892198" y="1091670"/>
+                  </a:lnTo>
+                  <a:lnTo>
+                    <a:pt x="3821853" y="1081730"/>
+                  </a:lnTo>
+                  <a:lnTo>
+                    <a:pt x="3751509" y="1071193"/>
+                  </a:lnTo>
+                  <a:lnTo>
+                    <a:pt x="3681164" y="1060024"/>
+                  </a:lnTo>
+                  <a:lnTo>
+                    <a:pt x="3610820" y="1048183"/>
+                  </a:lnTo>
+                  <a:lnTo>
+                    <a:pt x="3540475" y="1035632"/>
+                  </a:lnTo>
+                  <a:lnTo>
+                    <a:pt x="3470131" y="1022327"/>
+                  </a:lnTo>
+                  <a:lnTo>
+                    <a:pt x="3399786" y="1008223"/>
+                  </a:lnTo>
+                  <a:lnTo>
+                    <a:pt x="3329442" y="993271"/>
+                  </a:lnTo>
+                  <a:lnTo>
+                    <a:pt x="3259097" y="977423"/>
+                  </a:lnTo>
+                  <a:lnTo>
+                    <a:pt x="3188753" y="960622"/>
+                  </a:lnTo>
+                  <a:lnTo>
+                    <a:pt x="3118408" y="949758"/>
+                  </a:lnTo>
+                  <a:lnTo>
+                    <a:pt x="3048064" y="939835"/>
+                  </a:lnTo>
+                  <a:lnTo>
+                    <a:pt x="2977719" y="929591"/>
+                  </a:lnTo>
+                  <a:lnTo>
+                    <a:pt x="2907375" y="919017"/>
+                  </a:lnTo>
+                  <a:lnTo>
+                    <a:pt x="2837030" y="908102"/>
+                  </a:lnTo>
+                  <a:lnTo>
+                    <a:pt x="2766686" y="896834"/>
+                  </a:lnTo>
+                  <a:lnTo>
+                    <a:pt x="2696341" y="885202"/>
+                  </a:lnTo>
+                  <a:lnTo>
+                    <a:pt x="2625997" y="873195"/>
+                  </a:lnTo>
+                  <a:lnTo>
+                    <a:pt x="2555652" y="860801"/>
+                  </a:lnTo>
+                  <a:lnTo>
+                    <a:pt x="2485308" y="848006"/>
+                  </a:lnTo>
+                  <a:lnTo>
+                    <a:pt x="2414963" y="834799"/>
+                  </a:lnTo>
+                  <a:lnTo>
+                    <a:pt x="2344619" y="821165"/>
+                  </a:lnTo>
+                  <a:lnTo>
+                    <a:pt x="2274274" y="807091"/>
+                  </a:lnTo>
+                  <a:lnTo>
+                    <a:pt x="2203930" y="792563"/>
+                  </a:lnTo>
+                  <a:lnTo>
+                    <a:pt x="2133585" y="777566"/>
+                  </a:lnTo>
+                  <a:lnTo>
+                    <a:pt x="2063241" y="762085"/>
+                  </a:lnTo>
+                  <a:lnTo>
+                    <a:pt x="1992896" y="746104"/>
+                  </a:lnTo>
+                  <a:lnTo>
+                    <a:pt x="1922552" y="729608"/>
+                  </a:lnTo>
+                  <a:lnTo>
+                    <a:pt x="1852207" y="712579"/>
+                  </a:lnTo>
+                  <a:lnTo>
+                    <a:pt x="1781863" y="695000"/>
+                  </a:lnTo>
+                  <a:lnTo>
+                    <a:pt x="1711518" y="676854"/>
+                  </a:lnTo>
+                  <a:lnTo>
+                    <a:pt x="1641174" y="658122"/>
+                  </a:lnTo>
+                  <a:lnTo>
+                    <a:pt x="1570829" y="638786"/>
+                  </a:lnTo>
+                  <a:lnTo>
+                    <a:pt x="1500485" y="618825"/>
+                  </a:lnTo>
+                  <a:lnTo>
+                    <a:pt x="1430140" y="598220"/>
+                  </a:lnTo>
+                  <a:lnTo>
+                    <a:pt x="1359796" y="576951"/>
+                  </a:lnTo>
+                  <a:lnTo>
+                    <a:pt x="1289451" y="554994"/>
+                  </a:lnTo>
+                  <a:lnTo>
+                    <a:pt x="1219107" y="532329"/>
+                  </a:lnTo>
+                  <a:lnTo>
+                    <a:pt x="1148762" y="508933"/>
+                  </a:lnTo>
+                  <a:lnTo>
+                    <a:pt x="1078418" y="484781"/>
+                  </a:lnTo>
+                  <a:lnTo>
+                    <a:pt x="1008073" y="459850"/>
+                  </a:lnTo>
+                  <a:lnTo>
+                    <a:pt x="937729" y="434114"/>
+                  </a:lnTo>
+                  <a:lnTo>
+                    <a:pt x="867384" y="407547"/>
+                  </a:lnTo>
+                  <a:lnTo>
+                    <a:pt x="797040" y="380123"/>
+                  </a:lnTo>
+                  <a:lnTo>
+                    <a:pt x="726696" y="351814"/>
+                  </a:lnTo>
+                  <a:lnTo>
+                    <a:pt x="656351" y="322591"/>
+                  </a:lnTo>
+                  <a:lnTo>
+                    <a:pt x="586007" y="292424"/>
+                  </a:lnTo>
+                  <a:lnTo>
+                    <a:pt x="515662" y="261284"/>
+                  </a:lnTo>
+                  <a:lnTo>
+                    <a:pt x="445318" y="229139"/>
+                  </a:lnTo>
+                  <a:lnTo>
+                    <a:pt x="374973" y="195957"/>
+                  </a:lnTo>
+                  <a:lnTo>
+                    <a:pt x="304629" y="161703"/>
+                  </a:lnTo>
+                  <a:lnTo>
+                    <a:pt x="234284" y="126344"/>
+                  </a:lnTo>
+                  <a:lnTo>
+                    <a:pt x="163940" y="89844"/>
+                  </a:lnTo>
+                  <a:lnTo>
+                    <a:pt x="93595" y="52165"/>
+                  </a:lnTo>
+                  <a:lnTo>
+                    <a:pt x="23251" y="13270"/>
                   </a:lnTo>
                   <a:lnTo>
                     <a:pt x="0" y="0"/>
@@ -3515,574 +3550,252 @@
         </p:sp>
         <p:sp>
           <p:nvSpPr>
-            <p:cNvPr id="21" name="pl21"/>
-            <p:cNvSpPr/>
-            <p:nvPr/>
-          </p:nvSpPr>
-          <p:spPr>
-            <a:xfrm>
-              <a:off x="2764775" y="2073503"/>
-              <a:ext cx="5497904" cy="3325545"/>
-            </a:xfrm>
-            <a:custGeom>
-              <a:avLst/>
-              <a:pathLst>
-                <a:path w="5497904" h="3325545">
-                  <a:moveTo>
-                    <a:pt x="0" y="0"/>
-                  </a:moveTo>
-                  <a:lnTo>
-                    <a:pt x="54592" y="152475"/>
-                  </a:lnTo>
-                  <a:lnTo>
-                    <a:pt x="126214" y="341185"/>
-                  </a:lnTo>
-                  <a:lnTo>
-                    <a:pt x="197837" y="519204"/>
-                  </a:lnTo>
-                  <a:lnTo>
-                    <a:pt x="269459" y="687138"/>
-                  </a:lnTo>
-                  <a:lnTo>
-                    <a:pt x="341082" y="845560"/>
-                  </a:lnTo>
-                  <a:lnTo>
-                    <a:pt x="412705" y="995008"/>
-                  </a:lnTo>
-                  <a:lnTo>
-                    <a:pt x="484327" y="1135989"/>
-                  </a:lnTo>
-                  <a:lnTo>
-                    <a:pt x="555950" y="1268984"/>
-                  </a:lnTo>
-                  <a:lnTo>
-                    <a:pt x="627572" y="1394446"/>
-                  </a:lnTo>
-                  <a:lnTo>
-                    <a:pt x="699195" y="1512800"/>
-                  </a:lnTo>
-                  <a:lnTo>
-                    <a:pt x="770817" y="1624450"/>
-                  </a:lnTo>
-                  <a:lnTo>
-                    <a:pt x="842440" y="1729775"/>
-                  </a:lnTo>
-                  <a:lnTo>
-                    <a:pt x="914062" y="1829133"/>
-                  </a:lnTo>
-                  <a:lnTo>
-                    <a:pt x="985685" y="1922863"/>
-                  </a:lnTo>
-                  <a:lnTo>
-                    <a:pt x="1057307" y="2011284"/>
-                  </a:lnTo>
-                  <a:lnTo>
-                    <a:pt x="1128930" y="2094696"/>
-                  </a:lnTo>
-                  <a:lnTo>
-                    <a:pt x="1200552" y="2173382"/>
-                  </a:lnTo>
-                  <a:lnTo>
-                    <a:pt x="1272175" y="2247612"/>
-                  </a:lnTo>
-                  <a:lnTo>
-                    <a:pt x="1343797" y="2317636"/>
-                  </a:lnTo>
-                  <a:lnTo>
-                    <a:pt x="1415420" y="2383693"/>
-                  </a:lnTo>
-                  <a:lnTo>
-                    <a:pt x="1487042" y="2446009"/>
-                  </a:lnTo>
-                  <a:lnTo>
-                    <a:pt x="1558665" y="2504795"/>
-                  </a:lnTo>
-                  <a:lnTo>
-                    <a:pt x="1630287" y="2560250"/>
-                  </a:lnTo>
-                  <a:lnTo>
-                    <a:pt x="1701910" y="2612564"/>
-                  </a:lnTo>
-                  <a:lnTo>
-                    <a:pt x="1773533" y="2658449"/>
-                  </a:lnTo>
-                  <a:lnTo>
-                    <a:pt x="1845155" y="2684254"/>
-                  </a:lnTo>
-                  <a:lnTo>
-                    <a:pt x="1916778" y="2709252"/>
-                  </a:lnTo>
-                  <a:lnTo>
-                    <a:pt x="1988400" y="2733469"/>
-                  </a:lnTo>
-                  <a:lnTo>
-                    <a:pt x="2060023" y="2756928"/>
-                  </a:lnTo>
-                  <a:lnTo>
-                    <a:pt x="2131645" y="2779654"/>
-                  </a:lnTo>
-                  <a:lnTo>
-                    <a:pt x="2203268" y="2801669"/>
-                  </a:lnTo>
-                  <a:lnTo>
-                    <a:pt x="2274890" y="2822996"/>
-                  </a:lnTo>
-                  <a:lnTo>
-                    <a:pt x="2346513" y="2843656"/>
-                  </a:lnTo>
-                  <a:lnTo>
-                    <a:pt x="2418135" y="2863670"/>
-                  </a:lnTo>
-                  <a:lnTo>
-                    <a:pt x="2489758" y="2883058"/>
-                  </a:lnTo>
-                  <a:lnTo>
-                    <a:pt x="2561380" y="2901841"/>
-                  </a:lnTo>
-                  <a:lnTo>
-                    <a:pt x="2633003" y="2920035"/>
-                  </a:lnTo>
-                  <a:lnTo>
-                    <a:pt x="2704625" y="2937661"/>
-                  </a:lnTo>
-                  <a:lnTo>
-                    <a:pt x="2776248" y="2954736"/>
-                  </a:lnTo>
-                  <a:lnTo>
-                    <a:pt x="2847870" y="2971277"/>
-                  </a:lnTo>
-                  <a:lnTo>
-                    <a:pt x="2919493" y="2987301"/>
-                  </a:lnTo>
-                  <a:lnTo>
-                    <a:pt x="2991115" y="3002823"/>
-                  </a:lnTo>
-                  <a:lnTo>
-                    <a:pt x="3062738" y="3017860"/>
-                  </a:lnTo>
-                  <a:lnTo>
-                    <a:pt x="3134361" y="3032428"/>
-                  </a:lnTo>
-                  <a:lnTo>
-                    <a:pt x="3205983" y="3046539"/>
-                  </a:lnTo>
-                  <a:lnTo>
-                    <a:pt x="3277606" y="3060210"/>
-                  </a:lnTo>
-                  <a:lnTo>
-                    <a:pt x="3349228" y="3073453"/>
-                  </a:lnTo>
-                  <a:lnTo>
-                    <a:pt x="3420851" y="3086282"/>
-                  </a:lnTo>
-                  <a:lnTo>
-                    <a:pt x="3492473" y="3098709"/>
-                  </a:lnTo>
-                  <a:lnTo>
-                    <a:pt x="3564096" y="3110748"/>
-                  </a:lnTo>
-                  <a:lnTo>
-                    <a:pt x="3635718" y="3122411"/>
-                  </a:lnTo>
-                  <a:lnTo>
-                    <a:pt x="3707341" y="3133709"/>
-                  </a:lnTo>
-                  <a:lnTo>
-                    <a:pt x="3778963" y="3144654"/>
-                  </a:lnTo>
-                  <a:lnTo>
-                    <a:pt x="3850586" y="3155257"/>
-                  </a:lnTo>
-                  <a:lnTo>
-                    <a:pt x="3922208" y="3165528"/>
-                  </a:lnTo>
-                  <a:lnTo>
-                    <a:pt x="3993831" y="3175478"/>
-                  </a:lnTo>
-                  <a:lnTo>
-                    <a:pt x="4065453" y="3185116"/>
-                  </a:lnTo>
-                  <a:lnTo>
-                    <a:pt x="4137076" y="3194454"/>
-                  </a:lnTo>
-                  <a:lnTo>
-                    <a:pt x="4208698" y="3203499"/>
-                  </a:lnTo>
-                  <a:lnTo>
-                    <a:pt x="4280321" y="3212262"/>
-                  </a:lnTo>
-                  <a:lnTo>
-                    <a:pt x="4351943" y="3220751"/>
-                  </a:lnTo>
-                  <a:lnTo>
-                    <a:pt x="4423566" y="3228974"/>
-                  </a:lnTo>
-                  <a:lnTo>
-                    <a:pt x="4495189" y="3236940"/>
-                  </a:lnTo>
-                  <a:lnTo>
-                    <a:pt x="4566811" y="3244657"/>
-                  </a:lnTo>
-                  <a:lnTo>
-                    <a:pt x="4638434" y="3252133"/>
-                  </a:lnTo>
-                  <a:lnTo>
-                    <a:pt x="4710056" y="3259375"/>
-                  </a:lnTo>
-                  <a:lnTo>
-                    <a:pt x="4781679" y="3266390"/>
-                  </a:lnTo>
-                  <a:lnTo>
-                    <a:pt x="4853301" y="3273187"/>
-                  </a:lnTo>
-                  <a:lnTo>
-                    <a:pt x="4924924" y="3279770"/>
-                  </a:lnTo>
-                  <a:lnTo>
-                    <a:pt x="4996546" y="3286148"/>
-                  </a:lnTo>
-                  <a:lnTo>
-                    <a:pt x="5068169" y="3292327"/>
-                  </a:lnTo>
-                  <a:lnTo>
-                    <a:pt x="5139791" y="3298312"/>
-                  </a:lnTo>
-                  <a:lnTo>
-                    <a:pt x="5211414" y="3304110"/>
-                  </a:lnTo>
-                  <a:lnTo>
-                    <a:pt x="5283036" y="3309727"/>
-                  </a:lnTo>
-                  <a:lnTo>
-                    <a:pt x="5354659" y="3315168"/>
-                  </a:lnTo>
-                  <a:lnTo>
-                    <a:pt x="5426281" y="3320439"/>
-                  </a:lnTo>
-                  <a:lnTo>
-                    <a:pt x="5497904" y="3325545"/>
-                  </a:lnTo>
-                </a:path>
-              </a:pathLst>
-            </a:custGeom>
-          </p:spPr>
-          <p:txBody>
-            <a:bodyPr/>
-            <a:lstStyle/>
-            <a:p/>
-          </p:txBody>
-        </p:sp>
-        <p:sp>
-          <p:nvSpPr>
             <p:cNvPr id="22" name="pl22"/>
             <p:cNvSpPr/>
             <p:nvPr/>
           </p:nvSpPr>
           <p:spPr>
             <a:xfrm>
-              <a:off x="1291620" y="2073503"/>
-              <a:ext cx="6971058" cy="3444135"/>
+              <a:off x="2799617" y="2143092"/>
+              <a:ext cx="5399799" cy="1200111"/>
             </a:xfrm>
             <a:custGeom>
               <a:avLst/>
               <a:pathLst>
-                <a:path w="6971058" h="3444135">
+                <a:path w="5399799" h="1200111">
                   <a:moveTo>
-                    <a:pt x="6971058" y="3444135"/>
+                    <a:pt x="0" y="0"/>
                   </a:moveTo>
                   <a:lnTo>
-                    <a:pt x="6899436" y="3441756"/>
-                  </a:lnTo>
-                  <a:lnTo>
-                    <a:pt x="6827813" y="3439234"/>
-                  </a:lnTo>
-                  <a:lnTo>
-                    <a:pt x="6756191" y="3436562"/>
-                  </a:lnTo>
-                  <a:lnTo>
-                    <a:pt x="6684568" y="3433728"/>
-                  </a:lnTo>
-                  <a:lnTo>
-                    <a:pt x="6612945" y="3430725"/>
-                  </a:lnTo>
-                  <a:lnTo>
-                    <a:pt x="6541323" y="3427541"/>
-                  </a:lnTo>
-                  <a:lnTo>
-                    <a:pt x="6469700" y="3424165"/>
-                  </a:lnTo>
-                  <a:lnTo>
-                    <a:pt x="6398078" y="3420588"/>
-                  </a:lnTo>
-                  <a:lnTo>
-                    <a:pt x="6326455" y="3416795"/>
-                  </a:lnTo>
-                  <a:lnTo>
-                    <a:pt x="6254833" y="3412775"/>
-                  </a:lnTo>
-                  <a:lnTo>
-                    <a:pt x="6183210" y="3408513"/>
-                  </a:lnTo>
-                  <a:lnTo>
-                    <a:pt x="6111588" y="3403995"/>
-                  </a:lnTo>
-                  <a:lnTo>
-                    <a:pt x="6039965" y="3399206"/>
-                  </a:lnTo>
-                  <a:lnTo>
-                    <a:pt x="5968343" y="3394129"/>
-                  </a:lnTo>
-                  <a:lnTo>
-                    <a:pt x="5896720" y="3388748"/>
-                  </a:lnTo>
-                  <a:lnTo>
-                    <a:pt x="5825098" y="3383043"/>
-                  </a:lnTo>
-                  <a:lnTo>
-                    <a:pt x="5753475" y="3376996"/>
-                  </a:lnTo>
-                  <a:lnTo>
-                    <a:pt x="5681853" y="3370586"/>
-                  </a:lnTo>
-                  <a:lnTo>
-                    <a:pt x="5610230" y="3363791"/>
-                  </a:lnTo>
-                  <a:lnTo>
-                    <a:pt x="5538608" y="3356587"/>
-                  </a:lnTo>
-                  <a:lnTo>
-                    <a:pt x="5466985" y="3348952"/>
-                  </a:lnTo>
-                  <a:lnTo>
-                    <a:pt x="5395363" y="3340857"/>
-                  </a:lnTo>
-                  <a:lnTo>
-                    <a:pt x="5323740" y="3332277"/>
-                  </a:lnTo>
-                  <a:lnTo>
-                    <a:pt x="5252117" y="3323181"/>
-                  </a:lnTo>
-                  <a:lnTo>
-                    <a:pt x="5180495" y="3313539"/>
-                  </a:lnTo>
-                  <a:lnTo>
-                    <a:pt x="5108872" y="3303318"/>
-                  </a:lnTo>
-                  <a:lnTo>
-                    <a:pt x="5037250" y="3292484"/>
-                  </a:lnTo>
-                  <a:lnTo>
-                    <a:pt x="4965627" y="3280999"/>
-                  </a:lnTo>
-                  <a:lnTo>
-                    <a:pt x="4894005" y="3268824"/>
-                  </a:lnTo>
-                  <a:lnTo>
-                    <a:pt x="4822382" y="3255918"/>
-                  </a:lnTo>
-                  <a:lnTo>
-                    <a:pt x="4750760" y="3242237"/>
-                  </a:lnTo>
-                  <a:lnTo>
-                    <a:pt x="4679137" y="3227734"/>
-                  </a:lnTo>
-                  <a:lnTo>
-                    <a:pt x="4607515" y="3212361"/>
-                  </a:lnTo>
-                  <a:lnTo>
-                    <a:pt x="4535892" y="3196064"/>
-                  </a:lnTo>
-                  <a:lnTo>
-                    <a:pt x="4464270" y="3178789"/>
-                  </a:lnTo>
-                  <a:lnTo>
-                    <a:pt x="4392647" y="3160477"/>
-                  </a:lnTo>
-                  <a:lnTo>
-                    <a:pt x="4321025" y="3141065"/>
-                  </a:lnTo>
-                  <a:lnTo>
-                    <a:pt x="4249402" y="3120487"/>
-                  </a:lnTo>
-                  <a:lnTo>
-                    <a:pt x="4177780" y="3098673"/>
-                  </a:lnTo>
-                  <a:lnTo>
-                    <a:pt x="4106157" y="3075550"/>
-                  </a:lnTo>
-                  <a:lnTo>
-                    <a:pt x="4034535" y="3051038"/>
-                  </a:lnTo>
-                  <a:lnTo>
-                    <a:pt x="3962912" y="3025054"/>
-                  </a:lnTo>
-                  <a:lnTo>
-                    <a:pt x="3891289" y="2997510"/>
-                  </a:lnTo>
-                  <a:lnTo>
-                    <a:pt x="3819667" y="2968311"/>
-                  </a:lnTo>
-                  <a:lnTo>
-                    <a:pt x="3748044" y="2937360"/>
-                  </a:lnTo>
-                  <a:lnTo>
-                    <a:pt x="3676422" y="2904550"/>
-                  </a:lnTo>
-                  <a:lnTo>
-                    <a:pt x="3604799" y="2869769"/>
-                  </a:lnTo>
-                  <a:lnTo>
-                    <a:pt x="3533177" y="2832900"/>
-                  </a:lnTo>
-                  <a:lnTo>
-                    <a:pt x="3461554" y="2793817"/>
-                  </a:lnTo>
-                  <a:lnTo>
-                    <a:pt x="3389932" y="2752387"/>
-                  </a:lnTo>
-                  <a:lnTo>
-                    <a:pt x="3318309" y="2708470"/>
-                  </a:lnTo>
-                  <a:lnTo>
-                    <a:pt x="3246687" y="2661915"/>
-                  </a:lnTo>
-                  <a:lnTo>
-                    <a:pt x="3175064" y="2631811"/>
-                  </a:lnTo>
-                  <a:lnTo>
-                    <a:pt x="3103442" y="2604313"/>
-                  </a:lnTo>
-                  <a:lnTo>
-                    <a:pt x="3031819" y="2575928"/>
-                  </a:lnTo>
-                  <a:lnTo>
-                    <a:pt x="2960197" y="2546626"/>
-                  </a:lnTo>
-                  <a:lnTo>
-                    <a:pt x="2888574" y="2516379"/>
-                  </a:lnTo>
-                  <a:lnTo>
-                    <a:pt x="2816952" y="2485156"/>
-                  </a:lnTo>
-                  <a:lnTo>
-                    <a:pt x="2745329" y="2452924"/>
-                  </a:lnTo>
-                  <a:lnTo>
-                    <a:pt x="2673707" y="2419653"/>
-                  </a:lnTo>
-                  <a:lnTo>
-                    <a:pt x="2602084" y="2385307"/>
-                  </a:lnTo>
-                  <a:lnTo>
-                    <a:pt x="2530461" y="2349853"/>
-                  </a:lnTo>
-                  <a:lnTo>
-                    <a:pt x="2458839" y="2313255"/>
-                  </a:lnTo>
-                  <a:lnTo>
-                    <a:pt x="2387216" y="2275475"/>
-                  </a:lnTo>
-                  <a:lnTo>
-                    <a:pt x="2315594" y="2236476"/>
-                  </a:lnTo>
-                  <a:lnTo>
-                    <a:pt x="2243971" y="2196218"/>
-                  </a:lnTo>
-                  <a:lnTo>
-                    <a:pt x="2172349" y="2154661"/>
-                  </a:lnTo>
-                  <a:lnTo>
-                    <a:pt x="2100726" y="2111762"/>
-                  </a:lnTo>
-                  <a:lnTo>
-                    <a:pt x="2029104" y="2067479"/>
-                  </a:lnTo>
-                  <a:lnTo>
-                    <a:pt x="1957481" y="2021766"/>
-                  </a:lnTo>
-                  <a:lnTo>
-                    <a:pt x="1885859" y="1974578"/>
-                  </a:lnTo>
-                  <a:lnTo>
-                    <a:pt x="1814236" y="1925867"/>
-                  </a:lnTo>
-                  <a:lnTo>
-                    <a:pt x="1742614" y="1875584"/>
-                  </a:lnTo>
-                  <a:lnTo>
-                    <a:pt x="1670991" y="1823677"/>
-                  </a:lnTo>
-                  <a:lnTo>
-                    <a:pt x="1599369" y="1770096"/>
-                  </a:lnTo>
-                  <a:lnTo>
-                    <a:pt x="1527746" y="1714785"/>
-                  </a:lnTo>
-                  <a:lnTo>
-                    <a:pt x="1456124" y="1657688"/>
-                  </a:lnTo>
-                  <a:lnTo>
-                    <a:pt x="1384501" y="1598749"/>
-                  </a:lnTo>
-                  <a:lnTo>
-                    <a:pt x="1312879" y="1537907"/>
-                  </a:lnTo>
-                  <a:lnTo>
-                    <a:pt x="1241256" y="1475102"/>
-                  </a:lnTo>
-                  <a:lnTo>
-                    <a:pt x="1169633" y="1410269"/>
-                  </a:lnTo>
-                  <a:lnTo>
-                    <a:pt x="1098011" y="1343344"/>
-                  </a:lnTo>
-                  <a:lnTo>
-                    <a:pt x="1026388" y="1274259"/>
-                  </a:lnTo>
-                  <a:lnTo>
-                    <a:pt x="954766" y="1202944"/>
-                  </a:lnTo>
-                  <a:lnTo>
-                    <a:pt x="883143" y="1129327"/>
-                  </a:lnTo>
-                  <a:lnTo>
-                    <a:pt x="811521" y="1053333"/>
-                  </a:lnTo>
-                  <a:lnTo>
-                    <a:pt x="739898" y="974888"/>
-                  </a:lnTo>
-                  <a:lnTo>
-                    <a:pt x="668276" y="893910"/>
-                  </a:lnTo>
-                  <a:lnTo>
-                    <a:pt x="596653" y="810318"/>
-                  </a:lnTo>
-                  <a:lnTo>
-                    <a:pt x="525031" y="724028"/>
-                  </a:lnTo>
-                  <a:lnTo>
-                    <a:pt x="453408" y="634953"/>
-                  </a:lnTo>
-                  <a:lnTo>
-                    <a:pt x="381786" y="543004"/>
-                  </a:lnTo>
-                  <a:lnTo>
-                    <a:pt x="310163" y="448086"/>
-                  </a:lnTo>
-                  <a:lnTo>
-                    <a:pt x="238541" y="350104"/>
-                  </a:lnTo>
-                  <a:lnTo>
-                    <a:pt x="166918" y="248961"/>
-                  </a:lnTo>
-                  <a:lnTo>
-                    <a:pt x="95296" y="144552"/>
-                  </a:lnTo>
-                  <a:lnTo>
-                    <a:pt x="23673" y="36774"/>
-                  </a:lnTo>
-                  <a:lnTo>
-                    <a:pt x="0" y="0"/>
+                    <a:pt x="53618" y="55024"/>
+                  </a:lnTo>
+                  <a:lnTo>
+                    <a:pt x="123962" y="123125"/>
+                  </a:lnTo>
+                  <a:lnTo>
+                    <a:pt x="194307" y="187368"/>
+                  </a:lnTo>
+                  <a:lnTo>
+                    <a:pt x="264651" y="247972"/>
+                  </a:lnTo>
+                  <a:lnTo>
+                    <a:pt x="334996" y="305142"/>
+                  </a:lnTo>
+                  <a:lnTo>
+                    <a:pt x="405340" y="359074"/>
+                  </a:lnTo>
+                  <a:lnTo>
+                    <a:pt x="475685" y="409951"/>
+                  </a:lnTo>
+                  <a:lnTo>
+                    <a:pt x="546029" y="457946"/>
+                  </a:lnTo>
+                  <a:lnTo>
+                    <a:pt x="616374" y="503222"/>
+                  </a:lnTo>
+                  <a:lnTo>
+                    <a:pt x="686718" y="545934"/>
+                  </a:lnTo>
+                  <a:lnTo>
+                    <a:pt x="757063" y="586225"/>
+                  </a:lnTo>
+                  <a:lnTo>
+                    <a:pt x="827407" y="624235"/>
+                  </a:lnTo>
+                  <a:lnTo>
+                    <a:pt x="897752" y="660091"/>
+                  </a:lnTo>
+                  <a:lnTo>
+                    <a:pt x="968096" y="693916"/>
+                  </a:lnTo>
+                  <a:lnTo>
+                    <a:pt x="1038441" y="725825"/>
+                  </a:lnTo>
+                  <a:lnTo>
+                    <a:pt x="1108785" y="755926"/>
+                  </a:lnTo>
+                  <a:lnTo>
+                    <a:pt x="1179130" y="784322"/>
+                  </a:lnTo>
+                  <a:lnTo>
+                    <a:pt x="1249474" y="811110"/>
+                  </a:lnTo>
+                  <a:lnTo>
+                    <a:pt x="1319819" y="836380"/>
+                  </a:lnTo>
+                  <a:lnTo>
+                    <a:pt x="1390163" y="860219"/>
+                  </a:lnTo>
+                  <a:lnTo>
+                    <a:pt x="1460508" y="882707"/>
+                  </a:lnTo>
+                  <a:lnTo>
+                    <a:pt x="1530852" y="903921"/>
+                  </a:lnTo>
+                  <a:lnTo>
+                    <a:pt x="1601197" y="923934"/>
+                  </a:lnTo>
+                  <a:lnTo>
+                    <a:pt x="1671541" y="942813"/>
+                  </a:lnTo>
+                  <a:lnTo>
+                    <a:pt x="1741886" y="959371"/>
+                  </a:lnTo>
+                  <a:lnTo>
+                    <a:pt x="1812230" y="968684"/>
+                  </a:lnTo>
+                  <a:lnTo>
+                    <a:pt x="1882574" y="977705"/>
+                  </a:lnTo>
+                  <a:lnTo>
+                    <a:pt x="1952919" y="986444"/>
+                  </a:lnTo>
+                  <a:lnTo>
+                    <a:pt x="2023263" y="994910"/>
+                  </a:lnTo>
+                  <a:lnTo>
+                    <a:pt x="2093608" y="1003111"/>
+                  </a:lnTo>
+                  <a:lnTo>
+                    <a:pt x="2163952" y="1011056"/>
+                  </a:lnTo>
+                  <a:lnTo>
+                    <a:pt x="2234297" y="1018753"/>
+                  </a:lnTo>
+                  <a:lnTo>
+                    <a:pt x="2304641" y="1026208"/>
+                  </a:lnTo>
+                  <a:lnTo>
+                    <a:pt x="2374986" y="1033431"/>
+                  </a:lnTo>
+                  <a:lnTo>
+                    <a:pt x="2445330" y="1040428"/>
+                  </a:lnTo>
+                  <a:lnTo>
+                    <a:pt x="2515675" y="1047206"/>
+                  </a:lnTo>
+                  <a:lnTo>
+                    <a:pt x="2586019" y="1053772"/>
+                  </a:lnTo>
+                  <a:lnTo>
+                    <a:pt x="2656364" y="1060132"/>
+                  </a:lnTo>
+                  <a:lnTo>
+                    <a:pt x="2726708" y="1066294"/>
+                  </a:lnTo>
+                  <a:lnTo>
+                    <a:pt x="2797053" y="1072264"/>
+                  </a:lnTo>
+                  <a:lnTo>
+                    <a:pt x="2867397" y="1078046"/>
+                  </a:lnTo>
+                  <a:lnTo>
+                    <a:pt x="2937742" y="1083648"/>
+                  </a:lnTo>
+                  <a:lnTo>
+                    <a:pt x="3008086" y="1089075"/>
+                  </a:lnTo>
+                  <a:lnTo>
+                    <a:pt x="3078431" y="1094331"/>
+                  </a:lnTo>
+                  <a:lnTo>
+                    <a:pt x="3148775" y="1099424"/>
+                  </a:lnTo>
+                  <a:lnTo>
+                    <a:pt x="3219120" y="1104357"/>
+                  </a:lnTo>
+                  <a:lnTo>
+                    <a:pt x="3289464" y="1109136"/>
+                  </a:lnTo>
+                  <a:lnTo>
+                    <a:pt x="3359809" y="1113766"/>
+                  </a:lnTo>
+                  <a:lnTo>
+                    <a:pt x="3430153" y="1118251"/>
+                  </a:lnTo>
+                  <a:lnTo>
+                    <a:pt x="3500498" y="1122596"/>
+                  </a:lnTo>
+                  <a:lnTo>
+                    <a:pt x="3570842" y="1126804"/>
+                  </a:lnTo>
+                  <a:lnTo>
+                    <a:pt x="3641187" y="1130882"/>
+                  </a:lnTo>
+                  <a:lnTo>
+                    <a:pt x="3711531" y="1134831"/>
+                  </a:lnTo>
+                  <a:lnTo>
+                    <a:pt x="3781876" y="1138658"/>
+                  </a:lnTo>
+                  <a:lnTo>
+                    <a:pt x="3852220" y="1142364"/>
+                  </a:lnTo>
+                  <a:lnTo>
+                    <a:pt x="3922565" y="1145955"/>
+                  </a:lnTo>
+                  <a:lnTo>
+                    <a:pt x="3992909" y="1149433"/>
+                  </a:lnTo>
+                  <a:lnTo>
+                    <a:pt x="4063254" y="1152803"/>
+                  </a:lnTo>
+                  <a:lnTo>
+                    <a:pt x="4133598" y="1156067"/>
+                  </a:lnTo>
+                  <a:lnTo>
+                    <a:pt x="4203943" y="1159229"/>
+                  </a:lnTo>
+                  <a:lnTo>
+                    <a:pt x="4274287" y="1162293"/>
+                  </a:lnTo>
+                  <a:lnTo>
+                    <a:pt x="4344632" y="1165260"/>
+                  </a:lnTo>
+                  <a:lnTo>
+                    <a:pt x="4414976" y="1168135"/>
+                  </a:lnTo>
+                  <a:lnTo>
+                    <a:pt x="4485321" y="1170920"/>
+                  </a:lnTo>
+                  <a:lnTo>
+                    <a:pt x="4555665" y="1173618"/>
+                  </a:lnTo>
+                  <a:lnTo>
+                    <a:pt x="4626010" y="1176231"/>
+                  </a:lnTo>
+                  <a:lnTo>
+                    <a:pt x="4696354" y="1178763"/>
+                  </a:lnTo>
+                  <a:lnTo>
+                    <a:pt x="4766699" y="1181216"/>
+                  </a:lnTo>
+                  <a:lnTo>
+                    <a:pt x="4837043" y="1183592"/>
+                  </a:lnTo>
+                  <a:lnTo>
+                    <a:pt x="4907388" y="1185893"/>
+                  </a:lnTo>
+                  <a:lnTo>
+                    <a:pt x="4977732" y="1188123"/>
+                  </a:lnTo>
+                  <a:lnTo>
+                    <a:pt x="5048077" y="1190283"/>
+                  </a:lnTo>
+                  <a:lnTo>
+                    <a:pt x="5118421" y="1192375"/>
+                  </a:lnTo>
+                  <a:lnTo>
+                    <a:pt x="5188766" y="1194402"/>
+                  </a:lnTo>
+                  <a:lnTo>
+                    <a:pt x="5259110" y="1196366"/>
+                  </a:lnTo>
+                  <a:lnTo>
+                    <a:pt x="5329455" y="1198268"/>
+                  </a:lnTo>
+                  <a:lnTo>
+                    <a:pt x="5399799" y="1200111"/>
                   </a:lnTo>
                 </a:path>
               </a:pathLst>
@@ -4102,270 +3815,592 @@
           </p:nvSpPr>
           <p:spPr>
             <a:xfrm>
-              <a:off x="2244978" y="2073503"/>
-              <a:ext cx="6017700" cy="3404584"/>
+              <a:off x="1352750" y="2143092"/>
+              <a:ext cx="6846666" cy="1242907"/>
             </a:xfrm>
             <a:custGeom>
               <a:avLst/>
               <a:pathLst>
-                <a:path w="6017700" h="3404584">
+                <a:path w="6846666" h="1242907">
+                  <a:moveTo>
+                    <a:pt x="6846666" y="1242907"/>
+                  </a:moveTo>
+                  <a:lnTo>
+                    <a:pt x="6776322" y="1242048"/>
+                  </a:lnTo>
+                  <a:lnTo>
+                    <a:pt x="6705977" y="1241138"/>
+                  </a:lnTo>
+                  <a:lnTo>
+                    <a:pt x="6635633" y="1240174"/>
+                  </a:lnTo>
+                  <a:lnTo>
+                    <a:pt x="6565288" y="1239151"/>
+                  </a:lnTo>
+                  <a:lnTo>
+                    <a:pt x="6494944" y="1238067"/>
+                  </a:lnTo>
+                  <a:lnTo>
+                    <a:pt x="6424599" y="1236918"/>
+                  </a:lnTo>
+                  <a:lnTo>
+                    <a:pt x="6354255" y="1235700"/>
+                  </a:lnTo>
+                  <a:lnTo>
+                    <a:pt x="6283910" y="1234409"/>
+                  </a:lnTo>
+                  <a:lnTo>
+                    <a:pt x="6213566" y="1233041"/>
+                  </a:lnTo>
+                  <a:lnTo>
+                    <a:pt x="6143221" y="1231590"/>
+                  </a:lnTo>
+                  <a:lnTo>
+                    <a:pt x="6072877" y="1230052"/>
+                  </a:lnTo>
+                  <a:lnTo>
+                    <a:pt x="6002532" y="1228421"/>
+                  </a:lnTo>
+                  <a:lnTo>
+                    <a:pt x="5932188" y="1226693"/>
+                  </a:lnTo>
+                  <a:lnTo>
+                    <a:pt x="5861843" y="1224861"/>
+                  </a:lnTo>
+                  <a:lnTo>
+                    <a:pt x="5791499" y="1222919"/>
+                  </a:lnTo>
+                  <a:lnTo>
+                    <a:pt x="5721154" y="1220860"/>
+                  </a:lnTo>
+                  <a:lnTo>
+                    <a:pt x="5650810" y="1218678"/>
+                  </a:lnTo>
+                  <a:lnTo>
+                    <a:pt x="5580465" y="1216365"/>
+                  </a:lnTo>
+                  <a:lnTo>
+                    <a:pt x="5510121" y="1213913"/>
+                  </a:lnTo>
+                  <a:lnTo>
+                    <a:pt x="5439776" y="1211313"/>
+                  </a:lnTo>
+                  <a:lnTo>
+                    <a:pt x="5369432" y="1208558"/>
+                  </a:lnTo>
+                  <a:lnTo>
+                    <a:pt x="5299087" y="1205636"/>
+                  </a:lnTo>
+                  <a:lnTo>
+                    <a:pt x="5228743" y="1202540"/>
+                  </a:lnTo>
+                  <a:lnTo>
+                    <a:pt x="5158398" y="1199258"/>
+                  </a:lnTo>
+                  <a:lnTo>
+                    <a:pt x="5088054" y="1195778"/>
+                  </a:lnTo>
+                  <a:lnTo>
+                    <a:pt x="5017709" y="1192090"/>
+                  </a:lnTo>
+                  <a:lnTo>
+                    <a:pt x="4947365" y="1188180"/>
+                  </a:lnTo>
+                  <a:lnTo>
+                    <a:pt x="4877020" y="1184035"/>
+                  </a:lnTo>
+                  <a:lnTo>
+                    <a:pt x="4806676" y="1179641"/>
+                  </a:lnTo>
+                  <a:lnTo>
+                    <a:pt x="4736331" y="1174984"/>
+                  </a:lnTo>
+                  <a:lnTo>
+                    <a:pt x="4665987" y="1170047"/>
+                  </a:lnTo>
+                  <a:lnTo>
+                    <a:pt x="4595642" y="1164813"/>
+                  </a:lnTo>
+                  <a:lnTo>
+                    <a:pt x="4525298" y="1159265"/>
+                  </a:lnTo>
+                  <a:lnTo>
+                    <a:pt x="4454954" y="1153384"/>
+                  </a:lnTo>
+                  <a:lnTo>
+                    <a:pt x="4384609" y="1147150"/>
+                  </a:lnTo>
+                  <a:lnTo>
+                    <a:pt x="4314265" y="1140541"/>
+                  </a:lnTo>
+                  <a:lnTo>
+                    <a:pt x="4243920" y="1133536"/>
+                  </a:lnTo>
+                  <a:lnTo>
+                    <a:pt x="4173576" y="1126110"/>
+                  </a:lnTo>
+                  <a:lnTo>
+                    <a:pt x="4103231" y="1118238"/>
+                  </a:lnTo>
+                  <a:lnTo>
+                    <a:pt x="4032887" y="1109893"/>
+                  </a:lnTo>
+                  <a:lnTo>
+                    <a:pt x="3962542" y="1101047"/>
+                  </a:lnTo>
+                  <a:lnTo>
+                    <a:pt x="3892198" y="1091670"/>
+                  </a:lnTo>
+                  <a:lnTo>
+                    <a:pt x="3821853" y="1081730"/>
+                  </a:lnTo>
+                  <a:lnTo>
+                    <a:pt x="3751509" y="1071193"/>
+                  </a:lnTo>
+                  <a:lnTo>
+                    <a:pt x="3681164" y="1060024"/>
+                  </a:lnTo>
+                  <a:lnTo>
+                    <a:pt x="3610820" y="1048183"/>
+                  </a:lnTo>
+                  <a:lnTo>
+                    <a:pt x="3540475" y="1035632"/>
+                  </a:lnTo>
+                  <a:lnTo>
+                    <a:pt x="3470131" y="1022327"/>
+                  </a:lnTo>
+                  <a:lnTo>
+                    <a:pt x="3399786" y="1008223"/>
+                  </a:lnTo>
+                  <a:lnTo>
+                    <a:pt x="3329442" y="993271"/>
+                  </a:lnTo>
+                  <a:lnTo>
+                    <a:pt x="3259097" y="977423"/>
+                  </a:lnTo>
+                  <a:lnTo>
+                    <a:pt x="3188753" y="960622"/>
+                  </a:lnTo>
+                  <a:lnTo>
+                    <a:pt x="3118408" y="949758"/>
+                  </a:lnTo>
+                  <a:lnTo>
+                    <a:pt x="3048064" y="939835"/>
+                  </a:lnTo>
+                  <a:lnTo>
+                    <a:pt x="2977719" y="929591"/>
+                  </a:lnTo>
+                  <a:lnTo>
+                    <a:pt x="2907375" y="919017"/>
+                  </a:lnTo>
+                  <a:lnTo>
+                    <a:pt x="2837030" y="908102"/>
+                  </a:lnTo>
+                  <a:lnTo>
+                    <a:pt x="2766686" y="896834"/>
+                  </a:lnTo>
+                  <a:lnTo>
+                    <a:pt x="2696341" y="885202"/>
+                  </a:lnTo>
+                  <a:lnTo>
+                    <a:pt x="2625997" y="873195"/>
+                  </a:lnTo>
+                  <a:lnTo>
+                    <a:pt x="2555652" y="860801"/>
+                  </a:lnTo>
+                  <a:lnTo>
+                    <a:pt x="2485308" y="848006"/>
+                  </a:lnTo>
+                  <a:lnTo>
+                    <a:pt x="2414963" y="834799"/>
+                  </a:lnTo>
+                  <a:lnTo>
+                    <a:pt x="2344619" y="821165"/>
+                  </a:lnTo>
+                  <a:lnTo>
+                    <a:pt x="2274274" y="807091"/>
+                  </a:lnTo>
+                  <a:lnTo>
+                    <a:pt x="2203930" y="792563"/>
+                  </a:lnTo>
+                  <a:lnTo>
+                    <a:pt x="2133585" y="777566"/>
+                  </a:lnTo>
+                  <a:lnTo>
+                    <a:pt x="2063241" y="762085"/>
+                  </a:lnTo>
+                  <a:lnTo>
+                    <a:pt x="1992896" y="746104"/>
+                  </a:lnTo>
+                  <a:lnTo>
+                    <a:pt x="1922552" y="729608"/>
+                  </a:lnTo>
+                  <a:lnTo>
+                    <a:pt x="1852207" y="712579"/>
+                  </a:lnTo>
+                  <a:lnTo>
+                    <a:pt x="1781863" y="695000"/>
+                  </a:lnTo>
+                  <a:lnTo>
+                    <a:pt x="1711518" y="676854"/>
+                  </a:lnTo>
+                  <a:lnTo>
+                    <a:pt x="1641174" y="658122"/>
+                  </a:lnTo>
+                  <a:lnTo>
+                    <a:pt x="1570829" y="638786"/>
+                  </a:lnTo>
+                  <a:lnTo>
+                    <a:pt x="1500485" y="618825"/>
+                  </a:lnTo>
+                  <a:lnTo>
+                    <a:pt x="1430140" y="598220"/>
+                  </a:lnTo>
+                  <a:lnTo>
+                    <a:pt x="1359796" y="576951"/>
+                  </a:lnTo>
+                  <a:lnTo>
+                    <a:pt x="1289451" y="554994"/>
+                  </a:lnTo>
+                  <a:lnTo>
+                    <a:pt x="1219107" y="532329"/>
+                  </a:lnTo>
+                  <a:lnTo>
+                    <a:pt x="1148762" y="508933"/>
+                  </a:lnTo>
+                  <a:lnTo>
+                    <a:pt x="1078418" y="484781"/>
+                  </a:lnTo>
+                  <a:lnTo>
+                    <a:pt x="1008073" y="459850"/>
+                  </a:lnTo>
+                  <a:lnTo>
+                    <a:pt x="937729" y="434114"/>
+                  </a:lnTo>
+                  <a:lnTo>
+                    <a:pt x="867384" y="407547"/>
+                  </a:lnTo>
+                  <a:lnTo>
+                    <a:pt x="797040" y="380123"/>
+                  </a:lnTo>
+                  <a:lnTo>
+                    <a:pt x="726696" y="351814"/>
+                  </a:lnTo>
+                  <a:lnTo>
+                    <a:pt x="656351" y="322591"/>
+                  </a:lnTo>
+                  <a:lnTo>
+                    <a:pt x="586007" y="292424"/>
+                  </a:lnTo>
+                  <a:lnTo>
+                    <a:pt x="515662" y="261284"/>
+                  </a:lnTo>
+                  <a:lnTo>
+                    <a:pt x="445318" y="229139"/>
+                  </a:lnTo>
+                  <a:lnTo>
+                    <a:pt x="374973" y="195957"/>
+                  </a:lnTo>
+                  <a:lnTo>
+                    <a:pt x="304629" y="161703"/>
+                  </a:lnTo>
+                  <a:lnTo>
+                    <a:pt x="234284" y="126344"/>
+                  </a:lnTo>
+                  <a:lnTo>
+                    <a:pt x="163940" y="89844"/>
+                  </a:lnTo>
+                  <a:lnTo>
+                    <a:pt x="93595" y="52165"/>
+                  </a:lnTo>
+                  <a:lnTo>
+                    <a:pt x="23251" y="13270"/>
+                  </a:lnTo>
+                  <a:lnTo>
+                    <a:pt x="0" y="0"/>
+                  </a:lnTo>
+                </a:path>
+              </a:pathLst>
+            </a:custGeom>
+          </p:spPr>
+          <p:txBody>
+            <a:bodyPr/>
+            <a:lstStyle/>
+            <a:p/>
+          </p:txBody>
+        </p:sp>
+        <p:sp>
+          <p:nvSpPr>
+            <p:cNvPr id="24" name="pl24"/>
+            <p:cNvSpPr/>
+            <p:nvPr/>
+          </p:nvSpPr>
+          <p:spPr>
+            <a:xfrm>
+              <a:off x="2289096" y="2143092"/>
+              <a:ext cx="5910320" cy="1228634"/>
+            </a:xfrm>
+            <a:custGeom>
+              <a:avLst/>
+              <a:pathLst>
+                <a:path w="5910320" h="1228634">
                   <a:moveTo>
                     <a:pt x="0" y="0"/>
                   </a:moveTo>
                   <a:lnTo>
-                    <a:pt x="1408" y="3153"/>
-                  </a:lnTo>
-                  <a:lnTo>
-                    <a:pt x="73030" y="156445"/>
-                  </a:lnTo>
-                  <a:lnTo>
-                    <a:pt x="144653" y="302985"/>
-                  </a:lnTo>
-                  <a:lnTo>
-                    <a:pt x="216275" y="443072"/>
-                  </a:lnTo>
-                  <a:lnTo>
-                    <a:pt x="287898" y="576989"/>
-                  </a:lnTo>
-                  <a:lnTo>
-                    <a:pt x="359520" y="705008"/>
-                  </a:lnTo>
-                  <a:lnTo>
-                    <a:pt x="431143" y="827389"/>
-                  </a:lnTo>
-                  <a:lnTo>
-                    <a:pt x="502766" y="944380"/>
-                  </a:lnTo>
-                  <a:lnTo>
-                    <a:pt x="574388" y="1056219"/>
-                  </a:lnTo>
-                  <a:lnTo>
-                    <a:pt x="646011" y="1163132"/>
-                  </a:lnTo>
-                  <a:lnTo>
-                    <a:pt x="717633" y="1265336"/>
-                  </a:lnTo>
-                  <a:lnTo>
-                    <a:pt x="789256" y="1363039"/>
-                  </a:lnTo>
-                  <a:lnTo>
-                    <a:pt x="860878" y="1456439"/>
-                  </a:lnTo>
-                  <a:lnTo>
-                    <a:pt x="932501" y="1545725"/>
-                  </a:lnTo>
-                  <a:lnTo>
-                    <a:pt x="1004123" y="1631080"/>
-                  </a:lnTo>
-                  <a:lnTo>
-                    <a:pt x="1075746" y="1712675"/>
-                  </a:lnTo>
-                  <a:lnTo>
-                    <a:pt x="1147368" y="1790676"/>
-                  </a:lnTo>
-                  <a:lnTo>
-                    <a:pt x="1218991" y="1865242"/>
-                  </a:lnTo>
-                  <a:lnTo>
-                    <a:pt x="1290613" y="1936524"/>
-                  </a:lnTo>
-                  <a:lnTo>
-                    <a:pt x="1362236" y="2004667"/>
-                  </a:lnTo>
-                  <a:lnTo>
-                    <a:pt x="1433858" y="2069808"/>
-                  </a:lnTo>
-                  <a:lnTo>
-                    <a:pt x="1505481" y="2132081"/>
-                  </a:lnTo>
-                  <a:lnTo>
-                    <a:pt x="1577103" y="2191611"/>
-                  </a:lnTo>
-                  <a:lnTo>
-                    <a:pt x="1648726" y="2248519"/>
-                  </a:lnTo>
-                  <a:lnTo>
-                    <a:pt x="1720348" y="2302920"/>
-                  </a:lnTo>
-                  <a:lnTo>
-                    <a:pt x="1791971" y="2354926"/>
-                  </a:lnTo>
-                  <a:lnTo>
-                    <a:pt x="1863593" y="2404642"/>
-                  </a:lnTo>
-                  <a:lnTo>
-                    <a:pt x="1935216" y="2452167"/>
-                  </a:lnTo>
-                  <a:lnTo>
-                    <a:pt x="2006839" y="2497600"/>
-                  </a:lnTo>
-                  <a:lnTo>
-                    <a:pt x="2078461" y="2541032"/>
-                  </a:lnTo>
-                  <a:lnTo>
-                    <a:pt x="2150084" y="2582551"/>
-                  </a:lnTo>
-                  <a:lnTo>
-                    <a:pt x="2221706" y="2622241"/>
-                  </a:lnTo>
-                  <a:lnTo>
-                    <a:pt x="2293329" y="2660184"/>
-                  </a:lnTo>
-                  <a:lnTo>
-                    <a:pt x="2364951" y="2696455"/>
-                  </a:lnTo>
-                  <a:lnTo>
-                    <a:pt x="2436574" y="2731129"/>
-                  </a:lnTo>
-                  <a:lnTo>
-                    <a:pt x="2508196" y="2764275"/>
-                  </a:lnTo>
-                  <a:lnTo>
-                    <a:pt x="2579819" y="2795962"/>
-                  </a:lnTo>
-                  <a:lnTo>
-                    <a:pt x="2651441" y="2826254"/>
-                  </a:lnTo>
-                  <a:lnTo>
-                    <a:pt x="2723064" y="2855211"/>
-                  </a:lnTo>
-                  <a:lnTo>
-                    <a:pt x="2794686" y="2882893"/>
-                  </a:lnTo>
-                  <a:lnTo>
-                    <a:pt x="2866309" y="2909355"/>
-                  </a:lnTo>
-                  <a:lnTo>
-                    <a:pt x="2937931" y="2934653"/>
-                  </a:lnTo>
-                  <a:lnTo>
-                    <a:pt x="3009554" y="2958836"/>
-                  </a:lnTo>
-                  <a:lnTo>
-                    <a:pt x="3081176" y="2981954"/>
-                  </a:lnTo>
-                  <a:lnTo>
-                    <a:pt x="3152799" y="3004054"/>
-                  </a:lnTo>
-                  <a:lnTo>
-                    <a:pt x="3224421" y="3025180"/>
-                  </a:lnTo>
-                  <a:lnTo>
-                    <a:pt x="3296044" y="3045376"/>
-                  </a:lnTo>
-                  <a:lnTo>
-                    <a:pt x="3367667" y="3064683"/>
-                  </a:lnTo>
-                  <a:lnTo>
-                    <a:pt x="3439289" y="3083139"/>
-                  </a:lnTo>
-                  <a:lnTo>
-                    <a:pt x="3510912" y="3100783"/>
-                  </a:lnTo>
-                  <a:lnTo>
-                    <a:pt x="3582534" y="3117649"/>
-                  </a:lnTo>
-                  <a:lnTo>
-                    <a:pt x="3654157" y="3133773"/>
-                  </a:lnTo>
-                  <a:lnTo>
-                    <a:pt x="3725779" y="3149187"/>
-                  </a:lnTo>
-                  <a:lnTo>
-                    <a:pt x="3797402" y="3163921"/>
-                  </a:lnTo>
-                  <a:lnTo>
-                    <a:pt x="3869024" y="3178007"/>
-                  </a:lnTo>
-                  <a:lnTo>
-                    <a:pt x="3940647" y="3191472"/>
-                  </a:lnTo>
-                  <a:lnTo>
-                    <a:pt x="4012269" y="3204345"/>
-                  </a:lnTo>
-                  <a:lnTo>
-                    <a:pt x="4083892" y="3216650"/>
-                  </a:lnTo>
-                  <a:lnTo>
-                    <a:pt x="4155514" y="3228413"/>
-                  </a:lnTo>
-                  <a:lnTo>
-                    <a:pt x="4227137" y="3239659"/>
-                  </a:lnTo>
-                  <a:lnTo>
-                    <a:pt x="4298759" y="3250409"/>
-                  </a:lnTo>
-                  <a:lnTo>
-                    <a:pt x="4370382" y="3260685"/>
-                  </a:lnTo>
-                  <a:lnTo>
-                    <a:pt x="4442004" y="3270509"/>
-                  </a:lnTo>
-                  <a:lnTo>
-                    <a:pt x="4513627" y="3279901"/>
-                  </a:lnTo>
-                  <a:lnTo>
-                    <a:pt x="4585249" y="3288879"/>
-                  </a:lnTo>
-                  <a:lnTo>
-                    <a:pt x="4656872" y="3297461"/>
-                  </a:lnTo>
-                  <a:lnTo>
-                    <a:pt x="4728495" y="3305665"/>
-                  </a:lnTo>
-                  <a:lnTo>
-                    <a:pt x="4800117" y="3313508"/>
-                  </a:lnTo>
-                  <a:lnTo>
-                    <a:pt x="4871740" y="3321006"/>
-                  </a:lnTo>
-                  <a:lnTo>
-                    <a:pt x="4943362" y="3328173"/>
-                  </a:lnTo>
-                  <a:lnTo>
-                    <a:pt x="5014985" y="3335025"/>
-                  </a:lnTo>
-                  <a:lnTo>
-                    <a:pt x="5086607" y="3341575"/>
-                  </a:lnTo>
-                  <a:lnTo>
-                    <a:pt x="5158230" y="3347837"/>
-                  </a:lnTo>
-                  <a:lnTo>
-                    <a:pt x="5229852" y="3353822"/>
-                  </a:lnTo>
-                  <a:lnTo>
-                    <a:pt x="5301475" y="3359544"/>
-                  </a:lnTo>
-                  <a:lnTo>
-                    <a:pt x="5373097" y="3365014"/>
-                  </a:lnTo>
-                  <a:lnTo>
-                    <a:pt x="5444720" y="3370244"/>
-                  </a:lnTo>
-                  <a:lnTo>
-                    <a:pt x="5516342" y="3375243"/>
-                  </a:lnTo>
-                  <a:lnTo>
-                    <a:pt x="5587965" y="3380021"/>
-                  </a:lnTo>
-                  <a:lnTo>
-                    <a:pt x="5659587" y="3384589"/>
-                  </a:lnTo>
-                  <a:lnTo>
-                    <a:pt x="5731210" y="3388957"/>
-                  </a:lnTo>
-                  <a:lnTo>
-                    <a:pt x="5802832" y="3393131"/>
-                  </a:lnTo>
-                  <a:lnTo>
-                    <a:pt x="5874455" y="3397122"/>
-                  </a:lnTo>
-                  <a:lnTo>
-                    <a:pt x="5946077" y="3400937"/>
-                  </a:lnTo>
-                  <a:lnTo>
-                    <a:pt x="6017700" y="3404584"/>
+                    <a:pt x="1383" y="1137"/>
+                  </a:lnTo>
+                  <a:lnTo>
+                    <a:pt x="71727" y="56457"/>
+                  </a:lnTo>
+                  <a:lnTo>
+                    <a:pt x="142072" y="109340"/>
+                  </a:lnTo>
+                  <a:lnTo>
+                    <a:pt x="212416" y="159894"/>
+                  </a:lnTo>
+                  <a:lnTo>
+                    <a:pt x="282761" y="208221"/>
+                  </a:lnTo>
+                  <a:lnTo>
+                    <a:pt x="353105" y="254421"/>
+                  </a:lnTo>
+                  <a:lnTo>
+                    <a:pt x="423450" y="298585"/>
+                  </a:lnTo>
+                  <a:lnTo>
+                    <a:pt x="493794" y="340804"/>
+                  </a:lnTo>
+                  <a:lnTo>
+                    <a:pt x="564139" y="381164"/>
+                  </a:lnTo>
+                  <a:lnTo>
+                    <a:pt x="634483" y="419747"/>
+                  </a:lnTo>
+                  <a:lnTo>
+                    <a:pt x="704828" y="456630"/>
+                  </a:lnTo>
+                  <a:lnTo>
+                    <a:pt x="775172" y="491888"/>
+                  </a:lnTo>
+                  <a:lnTo>
+                    <a:pt x="845517" y="525594"/>
+                  </a:lnTo>
+                  <a:lnTo>
+                    <a:pt x="915861" y="557816"/>
+                  </a:lnTo>
+                  <a:lnTo>
+                    <a:pt x="986206" y="588618"/>
+                  </a:lnTo>
+                  <a:lnTo>
+                    <a:pt x="1056550" y="618064"/>
+                  </a:lnTo>
+                  <a:lnTo>
+                    <a:pt x="1126895" y="646212"/>
+                  </a:lnTo>
+                  <a:lnTo>
+                    <a:pt x="1197239" y="673122"/>
+                  </a:lnTo>
+                  <a:lnTo>
+                    <a:pt x="1267584" y="698846"/>
+                  </a:lnTo>
+                  <a:lnTo>
+                    <a:pt x="1337928" y="723437"/>
+                  </a:lnTo>
+                  <a:lnTo>
+                    <a:pt x="1408272" y="746945"/>
+                  </a:lnTo>
+                  <a:lnTo>
+                    <a:pt x="1478617" y="769417"/>
+                  </a:lnTo>
+                  <a:lnTo>
+                    <a:pt x="1548961" y="790900"/>
+                  </a:lnTo>
+                  <a:lnTo>
+                    <a:pt x="1619306" y="811437"/>
+                  </a:lnTo>
+                  <a:lnTo>
+                    <a:pt x="1689650" y="831069"/>
+                  </a:lnTo>
+                  <a:lnTo>
+                    <a:pt x="1759995" y="849837"/>
+                  </a:lnTo>
+                  <a:lnTo>
+                    <a:pt x="1830339" y="867778"/>
+                  </a:lnTo>
+                  <a:lnTo>
+                    <a:pt x="1900684" y="884929"/>
+                  </a:lnTo>
+                  <a:lnTo>
+                    <a:pt x="1971028" y="901325"/>
+                  </a:lnTo>
+                  <a:lnTo>
+                    <a:pt x="2041373" y="916998"/>
+                  </a:lnTo>
+                  <a:lnTo>
+                    <a:pt x="2111717" y="931982"/>
+                  </a:lnTo>
+                  <a:lnTo>
+                    <a:pt x="2182062" y="946305"/>
+                  </a:lnTo>
+                  <a:lnTo>
+                    <a:pt x="2252406" y="959997"/>
+                  </a:lnTo>
+                  <a:lnTo>
+                    <a:pt x="2322751" y="973087"/>
+                  </a:lnTo>
+                  <a:lnTo>
+                    <a:pt x="2393095" y="985600"/>
+                  </a:lnTo>
+                  <a:lnTo>
+                    <a:pt x="2463440" y="997562"/>
+                  </a:lnTo>
+                  <a:lnTo>
+                    <a:pt x="2533784" y="1008997"/>
+                  </a:lnTo>
+                  <a:lnTo>
+                    <a:pt x="2604129" y="1019928"/>
+                  </a:lnTo>
+                  <a:lnTo>
+                    <a:pt x="2674473" y="1030378"/>
+                  </a:lnTo>
+                  <a:lnTo>
+                    <a:pt x="2744818" y="1040368"/>
+                  </a:lnTo>
+                  <a:lnTo>
+                    <a:pt x="2815162" y="1049918"/>
+                  </a:lnTo>
+                  <a:lnTo>
+                    <a:pt x="2885507" y="1059047"/>
+                  </a:lnTo>
+                  <a:lnTo>
+                    <a:pt x="2955851" y="1067774"/>
+                  </a:lnTo>
+                  <a:lnTo>
+                    <a:pt x="3026196" y="1076117"/>
+                  </a:lnTo>
+                  <a:lnTo>
+                    <a:pt x="3096540" y="1084092"/>
+                  </a:lnTo>
+                  <a:lnTo>
+                    <a:pt x="3166885" y="1091716"/>
+                  </a:lnTo>
+                  <a:lnTo>
+                    <a:pt x="3237229" y="1099004"/>
+                  </a:lnTo>
+                  <a:lnTo>
+                    <a:pt x="3307574" y="1105972"/>
+                  </a:lnTo>
+                  <a:lnTo>
+                    <a:pt x="3377918" y="1112632"/>
+                  </a:lnTo>
+                  <a:lnTo>
+                    <a:pt x="3448263" y="1118999"/>
+                  </a:lnTo>
+                  <a:lnTo>
+                    <a:pt x="3518607" y="1125086"/>
+                  </a:lnTo>
+                  <a:lnTo>
+                    <a:pt x="3588952" y="1130905"/>
+                  </a:lnTo>
+                  <a:lnTo>
+                    <a:pt x="3659296" y="1136467"/>
+                  </a:lnTo>
+                  <a:lnTo>
+                    <a:pt x="3729641" y="1141784"/>
+                  </a:lnTo>
+                  <a:lnTo>
+                    <a:pt x="3799985" y="1146868"/>
+                  </a:lnTo>
+                  <a:lnTo>
+                    <a:pt x="3870330" y="1151727"/>
+                  </a:lnTo>
+                  <a:lnTo>
+                    <a:pt x="3940674" y="1156372"/>
+                  </a:lnTo>
+                  <a:lnTo>
+                    <a:pt x="4011019" y="1160813"/>
+                  </a:lnTo>
+                  <a:lnTo>
+                    <a:pt x="4081363" y="1165058"/>
+                  </a:lnTo>
+                  <a:lnTo>
+                    <a:pt x="4151708" y="1169116"/>
+                  </a:lnTo>
+                  <a:lnTo>
+                    <a:pt x="4222052" y="1172996"/>
+                  </a:lnTo>
+                  <a:lnTo>
+                    <a:pt x="4292397" y="1176704"/>
+                  </a:lnTo>
+                  <a:lnTo>
+                    <a:pt x="4362741" y="1180250"/>
+                  </a:lnTo>
+                  <a:lnTo>
+                    <a:pt x="4433086" y="1183639"/>
+                  </a:lnTo>
+                  <a:lnTo>
+                    <a:pt x="4503430" y="1186879"/>
+                  </a:lnTo>
+                  <a:lnTo>
+                    <a:pt x="4573775" y="1189976"/>
+                  </a:lnTo>
+                  <a:lnTo>
+                    <a:pt x="4644119" y="1192937"/>
+                  </a:lnTo>
+                  <a:lnTo>
+                    <a:pt x="4714464" y="1195767"/>
+                  </a:lnTo>
+                  <a:lnTo>
+                    <a:pt x="4784808" y="1198473"/>
+                  </a:lnTo>
+                  <a:lnTo>
+                    <a:pt x="4855153" y="1201059"/>
+                  </a:lnTo>
+                  <a:lnTo>
+                    <a:pt x="4925497" y="1203532"/>
+                  </a:lnTo>
+                  <a:lnTo>
+                    <a:pt x="4995842" y="1205895"/>
+                  </a:lnTo>
+                  <a:lnTo>
+                    <a:pt x="5066186" y="1208155"/>
+                  </a:lnTo>
+                  <a:lnTo>
+                    <a:pt x="5136530" y="1210315"/>
+                  </a:lnTo>
+                  <a:lnTo>
+                    <a:pt x="5206875" y="1212380"/>
+                  </a:lnTo>
+                  <a:lnTo>
+                    <a:pt x="5277219" y="1214354"/>
+                  </a:lnTo>
+                  <a:lnTo>
+                    <a:pt x="5347564" y="1216241"/>
+                  </a:lnTo>
+                  <a:lnTo>
+                    <a:pt x="5417908" y="1218045"/>
+                  </a:lnTo>
+                  <a:lnTo>
+                    <a:pt x="5488253" y="1219770"/>
+                  </a:lnTo>
+                  <a:lnTo>
+                    <a:pt x="5558597" y="1221418"/>
+                  </a:lnTo>
+                  <a:lnTo>
+                    <a:pt x="5628942" y="1222994"/>
+                  </a:lnTo>
+                  <a:lnTo>
+                    <a:pt x="5699286" y="1224501"/>
+                  </a:lnTo>
+                  <a:lnTo>
+                    <a:pt x="5769631" y="1225941"/>
+                  </a:lnTo>
+                  <a:lnTo>
+                    <a:pt x="5839975" y="1227318"/>
+                  </a:lnTo>
+                  <a:lnTo>
+                    <a:pt x="5910320" y="1228634"/>
                   </a:lnTo>
                 </a:path>
               </a:pathLst>
@@ -4388,27 +4423,27 @@
         </p:sp>
         <p:sp>
           <p:nvSpPr>
-            <p:cNvPr id="24" name="pl24"/>
+            <p:cNvPr id="25" name="pl25"/>
             <p:cNvSpPr/>
             <p:nvPr/>
           </p:nvSpPr>
           <p:spPr>
             <a:xfrm>
-              <a:off x="817517" y="4727786"/>
-              <a:ext cx="7799693" cy="0"/>
+              <a:off x="887106" y="3100960"/>
+              <a:ext cx="7660515" cy="0"/>
             </a:xfrm>
             <a:custGeom>
               <a:avLst/>
               <a:pathLst>
-                <a:path w="7799693" h="0">
+                <a:path w="7660515" h="0">
                   <a:moveTo>
                     <a:pt x="0" y="0"/>
                   </a:moveTo>
                   <a:lnTo>
-                    <a:pt x="7799693" y="0"/>
-                  </a:lnTo>
-                  <a:lnTo>
-                    <a:pt x="7799693" y="0"/>
+                    <a:pt x="7660515" y="0"/>
+                  </a:lnTo>
+                  <a:lnTo>
+                    <a:pt x="7660515" y="0"/>
                   </a:lnTo>
                 </a:path>
               </a:pathLst>
@@ -4431,21 +4466,21 @@
         </p:sp>
         <p:sp>
           <p:nvSpPr>
-            <p:cNvPr id="25" name="pl25"/>
+            <p:cNvPr id="26" name="pl26"/>
             <p:cNvSpPr/>
             <p:nvPr/>
           </p:nvSpPr>
           <p:spPr>
             <a:xfrm>
-              <a:off x="4526955" y="2073503"/>
-              <a:ext cx="0" cy="3649639"/>
+              <a:off x="4530353" y="2143092"/>
+              <a:ext cx="0" cy="1317069"/>
             </a:xfrm>
             <a:custGeom>
               <a:avLst/>
               <a:pathLst>
-                <a:path w="0" h="3649639">
+                <a:path w="0" h="1317069">
                   <a:moveTo>
-                    <a:pt x="0" y="3649639"/>
+                    <a:pt x="0" y="1317069"/>
                   </a:moveTo>
                   <a:lnTo>
                     <a:pt x="0" y="0"/>
@@ -4474,13 +4509,13 @@
         </p:sp>
         <p:sp>
           <p:nvSpPr>
-            <p:cNvPr id="26" name="tx26"/>
+            <p:cNvPr id="27" name="tx27"/>
             <p:cNvSpPr/>
             <p:nvPr/>
           </p:nvSpPr>
           <p:spPr>
             <a:xfrm>
-              <a:off x="692708" y="5517199"/>
+              <a:off x="762297" y="3360243"/>
               <a:ext cx="62179" cy="80101"/>
             </a:xfrm>
             <a:prstGeom prst="rect">
@@ -4520,13 +4555,13 @@
         </p:sp>
         <p:sp>
           <p:nvSpPr>
-            <p:cNvPr id="27" name="tx27"/>
+            <p:cNvPr id="28" name="tx28"/>
             <p:cNvSpPr/>
             <p:nvPr/>
           </p:nvSpPr>
           <p:spPr>
             <a:xfrm>
-              <a:off x="692708" y="4687735"/>
+              <a:off x="762297" y="3060909"/>
               <a:ext cx="62179" cy="80101"/>
             </a:xfrm>
             <a:prstGeom prst="rect">
@@ -4566,13 +4601,13 @@
         </p:sp>
         <p:sp>
           <p:nvSpPr>
-            <p:cNvPr id="28" name="tx28"/>
+            <p:cNvPr id="29" name="tx29"/>
             <p:cNvSpPr/>
             <p:nvPr/>
           </p:nvSpPr>
           <p:spPr>
             <a:xfrm>
-              <a:off x="692708" y="3858272"/>
+              <a:off x="762297" y="2761575"/>
               <a:ext cx="62179" cy="80101"/>
             </a:xfrm>
             <a:prstGeom prst="rect">
@@ -4612,13 +4647,13 @@
         </p:sp>
         <p:sp>
           <p:nvSpPr>
-            <p:cNvPr id="29" name="tx29"/>
+            <p:cNvPr id="30" name="tx30"/>
             <p:cNvSpPr/>
             <p:nvPr/>
           </p:nvSpPr>
           <p:spPr>
             <a:xfrm>
-              <a:off x="692708" y="3028808"/>
+              <a:off x="762297" y="2462242"/>
               <a:ext cx="62179" cy="80101"/>
             </a:xfrm>
             <a:prstGeom prst="rect">
@@ -4658,13 +4693,13 @@
         </p:sp>
         <p:sp>
           <p:nvSpPr>
-            <p:cNvPr id="30" name="tx30"/>
+            <p:cNvPr id="31" name="tx31"/>
             <p:cNvSpPr/>
             <p:nvPr/>
           </p:nvSpPr>
           <p:spPr>
             <a:xfrm>
-              <a:off x="692708" y="2199345"/>
+              <a:off x="762297" y="2162908"/>
               <a:ext cx="62179" cy="80101"/>
             </a:xfrm>
             <a:prstGeom prst="rect">
@@ -4704,13 +4739,13 @@
         </p:sp>
         <p:sp>
           <p:nvSpPr>
-            <p:cNvPr id="31" name="tx31"/>
+            <p:cNvPr id="32" name="tx32"/>
             <p:cNvSpPr/>
             <p:nvPr/>
           </p:nvSpPr>
           <p:spPr>
             <a:xfrm>
-              <a:off x="2421884" y="5785772"/>
+              <a:off x="2461403" y="3522791"/>
               <a:ext cx="161574" cy="80101"/>
             </a:xfrm>
             <a:prstGeom prst="rect">
@@ -4750,13 +4785,13 @@
         </p:sp>
         <p:sp>
           <p:nvSpPr>
-            <p:cNvPr id="32" name="tx32"/>
+            <p:cNvPr id="33" name="tx33"/>
             <p:cNvSpPr/>
             <p:nvPr/>
           </p:nvSpPr>
           <p:spPr>
             <a:xfrm>
-              <a:off x="4542539" y="5785772"/>
+              <a:off x="4545104" y="3522791"/>
               <a:ext cx="62179" cy="80101"/>
             </a:xfrm>
             <a:prstGeom prst="rect">
@@ -4796,13 +4831,13 @@
         </p:sp>
         <p:sp>
           <p:nvSpPr>
-            <p:cNvPr id="33" name="tx33"/>
+            <p:cNvPr id="34" name="tx34"/>
             <p:cNvSpPr/>
             <p:nvPr/>
           </p:nvSpPr>
           <p:spPr>
             <a:xfrm>
-              <a:off x="6582407" y="5785772"/>
+              <a:off x="6548017" y="3522791"/>
               <a:ext cx="124358" cy="80101"/>
             </a:xfrm>
             <a:prstGeom prst="rect">
@@ -4842,13 +4877,13 @@
         </p:sp>
         <p:sp>
           <p:nvSpPr>
-            <p:cNvPr id="34" name="tx34"/>
+            <p:cNvPr id="35" name="tx35"/>
             <p:cNvSpPr/>
             <p:nvPr/>
           </p:nvSpPr>
           <p:spPr>
             <a:xfrm>
-              <a:off x="2928340" y="5925448"/>
+              <a:off x="2928340" y="3662467"/>
               <a:ext cx="3578047" cy="100218"/>
             </a:xfrm>
             <a:prstGeom prst="rect">
@@ -4888,13 +4923,13 @@
         </p:sp>
         <p:sp>
           <p:nvSpPr>
-            <p:cNvPr id="35" name="tx35"/>
+            <p:cNvPr id="36" name="tx36"/>
             <p:cNvSpPr/>
             <p:nvPr/>
           </p:nvSpPr>
           <p:spPr>
             <a:xfrm rot="-5400000">
-              <a:off x="68446" y="3848213"/>
+              <a:off x="138035" y="2751517"/>
               <a:ext cx="1016904" cy="100218"/>
             </a:xfrm>
             <a:prstGeom prst="rect">
@@ -4934,13 +4969,13 @@
         </p:sp>
         <p:sp>
           <p:nvSpPr>
-            <p:cNvPr id="36" name="tx36"/>
+            <p:cNvPr id="37" name="tx37"/>
             <p:cNvSpPr/>
             <p:nvPr/>
           </p:nvSpPr>
           <p:spPr>
             <a:xfrm>
-              <a:off x="817517" y="1896563"/>
+              <a:off x="887106" y="1966152"/>
               <a:ext cx="7052127" cy="82021"/>
             </a:xfrm>
             <a:prstGeom prst="rect">
@@ -4980,13 +5015,3566 @@
         </p:sp>
         <p:sp>
           <p:nvSpPr>
-            <p:cNvPr id="37" name="tx37"/>
+            <p:cNvPr id="38" name="tx38"/>
             <p:cNvSpPr/>
             <p:nvPr/>
           </p:nvSpPr>
           <p:spPr>
             <a:xfrm>
-              <a:off x="817517" y="1669789"/>
+              <a:off x="887106" y="1739378"/>
+              <a:ext cx="2821289" cy="120152"/>
+            </a:xfrm>
+            <a:prstGeom prst="rect">
+              <a:avLst/>
+            </a:prstGeom>
+            <a:noFill/>
+          </p:spPr>
+          <p:txBody>
+            <a:bodyPr lIns="0" rIns="0" tIns="0" bIns="0" anchorCtr="1" anchor="ctr" wrap="none"/>
+            <a:lstStyle/>
+            <a:p>
+              <a:pPr algn="l" marL="0" marR="0" indent="0">
+                <a:lnSpc>
+                  <a:spcPts val="1320"/>
+                </a:lnSpc>
+                <a:spcBef>
+                  <a:spcPts val="0"/>
+                </a:spcBef>
+                <a:spcAft>
+                  <a:spcPts val="0"/>
+                </a:spcAft>
+              </a:pPr>
+              <a:r>
+                <a:rPr sz="1320">
+                  <a:solidFill>
+                    <a:srgbClr val="000000">
+                      <a:alpha val="100000"/>
+                    </a:srgbClr>
+                  </a:solidFill>
+                  <a:latin typeface="Helvetica"/>
+                  <a:cs typeface="Helvetica"/>
+                </a:rPr>
+                <a:t>Composite Grade 3 AEs (Carboplatin)</a:t>
+              </a:r>
+            </a:p>
+          </p:txBody>
+        </p:sp>
+        <p:sp>
+          <p:nvSpPr>
+            <p:cNvPr id="39" name="pl39"/>
+            <p:cNvSpPr/>
+            <p:nvPr/>
+          </p:nvSpPr>
+          <p:spPr>
+            <a:xfrm>
+              <a:off x="887106" y="5444019"/>
+              <a:ext cx="7660515" cy="0"/>
+            </a:xfrm>
+            <a:custGeom>
+              <a:avLst/>
+              <a:pathLst>
+                <a:path w="7660515" h="0">
+                  <a:moveTo>
+                    <a:pt x="0" y="0"/>
+                  </a:moveTo>
+                  <a:lnTo>
+                    <a:pt x="7660515" y="0"/>
+                  </a:lnTo>
+                  <a:lnTo>
+                    <a:pt x="7660515" y="0"/>
+                  </a:lnTo>
+                </a:path>
+              </a:pathLst>
+            </a:custGeom>
+            <a:ln w="6775" cap="flat">
+              <a:solidFill>
+                <a:srgbClr val="EBEBEB">
+                  <a:alpha val="100000"/>
+                </a:srgbClr>
+              </a:solidFill>
+              <a:prstDash val="solid"/>
+              <a:round/>
+            </a:ln>
+          </p:spPr>
+          <p:txBody>
+            <a:bodyPr/>
+            <a:lstStyle/>
+            <a:p/>
+          </p:txBody>
+        </p:sp>
+        <p:sp>
+          <p:nvSpPr>
+            <p:cNvPr id="40" name="pl40"/>
+            <p:cNvSpPr/>
+            <p:nvPr/>
+          </p:nvSpPr>
+          <p:spPr>
+            <a:xfrm>
+              <a:off x="887106" y="5144686"/>
+              <a:ext cx="7660515" cy="0"/>
+            </a:xfrm>
+            <a:custGeom>
+              <a:avLst/>
+              <a:pathLst>
+                <a:path w="7660515" h="0">
+                  <a:moveTo>
+                    <a:pt x="0" y="0"/>
+                  </a:moveTo>
+                  <a:lnTo>
+                    <a:pt x="7660515" y="0"/>
+                  </a:lnTo>
+                  <a:lnTo>
+                    <a:pt x="7660515" y="0"/>
+                  </a:lnTo>
+                </a:path>
+              </a:pathLst>
+            </a:custGeom>
+            <a:ln w="6775" cap="flat">
+              <a:solidFill>
+                <a:srgbClr val="EBEBEB">
+                  <a:alpha val="100000"/>
+                </a:srgbClr>
+              </a:solidFill>
+              <a:prstDash val="solid"/>
+              <a:round/>
+            </a:ln>
+          </p:spPr>
+          <p:txBody>
+            <a:bodyPr/>
+            <a:lstStyle/>
+            <a:p/>
+          </p:txBody>
+        </p:sp>
+        <p:sp>
+          <p:nvSpPr>
+            <p:cNvPr id="41" name="pl41"/>
+            <p:cNvSpPr/>
+            <p:nvPr/>
+          </p:nvSpPr>
+          <p:spPr>
+            <a:xfrm>
+              <a:off x="887106" y="4845352"/>
+              <a:ext cx="7660515" cy="0"/>
+            </a:xfrm>
+            <a:custGeom>
+              <a:avLst/>
+              <a:pathLst>
+                <a:path w="7660515" h="0">
+                  <a:moveTo>
+                    <a:pt x="0" y="0"/>
+                  </a:moveTo>
+                  <a:lnTo>
+                    <a:pt x="7660515" y="0"/>
+                  </a:lnTo>
+                  <a:lnTo>
+                    <a:pt x="7660515" y="0"/>
+                  </a:lnTo>
+                </a:path>
+              </a:pathLst>
+            </a:custGeom>
+            <a:ln w="6775" cap="flat">
+              <a:solidFill>
+                <a:srgbClr val="EBEBEB">
+                  <a:alpha val="100000"/>
+                </a:srgbClr>
+              </a:solidFill>
+              <a:prstDash val="solid"/>
+              <a:round/>
+            </a:ln>
+          </p:spPr>
+          <p:txBody>
+            <a:bodyPr/>
+            <a:lstStyle/>
+            <a:p/>
+          </p:txBody>
+        </p:sp>
+        <p:sp>
+          <p:nvSpPr>
+            <p:cNvPr id="42" name="pl42"/>
+            <p:cNvSpPr/>
+            <p:nvPr/>
+          </p:nvSpPr>
+          <p:spPr>
+            <a:xfrm>
+              <a:off x="887106" y="4546018"/>
+              <a:ext cx="7660515" cy="0"/>
+            </a:xfrm>
+            <a:custGeom>
+              <a:avLst/>
+              <a:pathLst>
+                <a:path w="7660515" h="0">
+                  <a:moveTo>
+                    <a:pt x="0" y="0"/>
+                  </a:moveTo>
+                  <a:lnTo>
+                    <a:pt x="7660515" y="0"/>
+                  </a:lnTo>
+                  <a:lnTo>
+                    <a:pt x="7660515" y="0"/>
+                  </a:lnTo>
+                </a:path>
+              </a:pathLst>
+            </a:custGeom>
+            <a:ln w="6775" cap="flat">
+              <a:solidFill>
+                <a:srgbClr val="EBEBEB">
+                  <a:alpha val="100000"/>
+                </a:srgbClr>
+              </a:solidFill>
+              <a:prstDash val="solid"/>
+              <a:round/>
+            </a:ln>
+          </p:spPr>
+          <p:txBody>
+            <a:bodyPr/>
+            <a:lstStyle/>
+            <a:p/>
+          </p:txBody>
+        </p:sp>
+        <p:sp>
+          <p:nvSpPr>
+            <p:cNvPr id="43" name="pl43"/>
+            <p:cNvSpPr/>
+            <p:nvPr/>
+          </p:nvSpPr>
+          <p:spPr>
+            <a:xfrm>
+              <a:off x="914987" y="4336484"/>
+              <a:ext cx="0" cy="1317069"/>
+            </a:xfrm>
+            <a:custGeom>
+              <a:avLst/>
+              <a:pathLst>
+                <a:path w="0" h="1317069">
+                  <a:moveTo>
+                    <a:pt x="0" y="1317069"/>
+                  </a:moveTo>
+                  <a:lnTo>
+                    <a:pt x="0" y="0"/>
+                  </a:lnTo>
+                  <a:lnTo>
+                    <a:pt x="0" y="0"/>
+                  </a:lnTo>
+                </a:path>
+              </a:pathLst>
+            </a:custGeom>
+            <a:ln w="6775" cap="flat">
+              <a:solidFill>
+                <a:srgbClr val="EBEBEB">
+                  <a:alpha val="100000"/>
+                </a:srgbClr>
+              </a:solidFill>
+              <a:prstDash val="solid"/>
+              <a:round/>
+            </a:ln>
+          </p:spPr>
+          <p:txBody>
+            <a:bodyPr/>
+            <a:lstStyle/>
+            <a:p/>
+          </p:txBody>
+        </p:sp>
+        <p:sp>
+          <p:nvSpPr>
+            <p:cNvPr id="44" name="pl44"/>
+            <p:cNvSpPr/>
+            <p:nvPr/>
+          </p:nvSpPr>
+          <p:spPr>
+            <a:xfrm>
+              <a:off x="1728588" y="4336484"/>
+              <a:ext cx="0" cy="1317069"/>
+            </a:xfrm>
+            <a:custGeom>
+              <a:avLst/>
+              <a:pathLst>
+                <a:path w="0" h="1317069">
+                  <a:moveTo>
+                    <a:pt x="0" y="1317069"/>
+                  </a:moveTo>
+                  <a:lnTo>
+                    <a:pt x="0" y="0"/>
+                  </a:lnTo>
+                  <a:lnTo>
+                    <a:pt x="0" y="0"/>
+                  </a:lnTo>
+                </a:path>
+              </a:pathLst>
+            </a:custGeom>
+            <a:ln w="6775" cap="flat">
+              <a:solidFill>
+                <a:srgbClr val="EBEBEB">
+                  <a:alpha val="100000"/>
+                </a:srgbClr>
+              </a:solidFill>
+              <a:prstDash val="solid"/>
+              <a:round/>
+            </a:ln>
+          </p:spPr>
+          <p:txBody>
+            <a:bodyPr/>
+            <a:lstStyle/>
+            <a:p/>
+          </p:txBody>
+        </p:sp>
+        <p:sp>
+          <p:nvSpPr>
+            <p:cNvPr id="45" name="pl45"/>
+            <p:cNvSpPr/>
+            <p:nvPr/>
+          </p:nvSpPr>
+          <p:spPr>
+            <a:xfrm>
+              <a:off x="2542190" y="4336484"/>
+              <a:ext cx="0" cy="1317069"/>
+            </a:xfrm>
+            <a:custGeom>
+              <a:avLst/>
+              <a:pathLst>
+                <a:path w="0" h="1317069">
+                  <a:moveTo>
+                    <a:pt x="0" y="1317069"/>
+                  </a:moveTo>
+                  <a:lnTo>
+                    <a:pt x="0" y="0"/>
+                  </a:lnTo>
+                  <a:lnTo>
+                    <a:pt x="0" y="0"/>
+                  </a:lnTo>
+                </a:path>
+              </a:pathLst>
+            </a:custGeom>
+            <a:ln w="6775" cap="flat">
+              <a:solidFill>
+                <a:srgbClr val="EBEBEB">
+                  <a:alpha val="100000"/>
+                </a:srgbClr>
+              </a:solidFill>
+              <a:prstDash val="solid"/>
+              <a:round/>
+            </a:ln>
+          </p:spPr>
+          <p:txBody>
+            <a:bodyPr/>
+            <a:lstStyle/>
+            <a:p/>
+          </p:txBody>
+        </p:sp>
+        <p:sp>
+          <p:nvSpPr>
+            <p:cNvPr id="46" name="pl46"/>
+            <p:cNvSpPr/>
+            <p:nvPr/>
+          </p:nvSpPr>
+          <p:spPr>
+            <a:xfrm>
+              <a:off x="3355791" y="4336484"/>
+              <a:ext cx="0" cy="1317069"/>
+            </a:xfrm>
+            <a:custGeom>
+              <a:avLst/>
+              <a:pathLst>
+                <a:path w="0" h="1317069">
+                  <a:moveTo>
+                    <a:pt x="0" y="1317069"/>
+                  </a:moveTo>
+                  <a:lnTo>
+                    <a:pt x="0" y="0"/>
+                  </a:lnTo>
+                  <a:lnTo>
+                    <a:pt x="0" y="0"/>
+                  </a:lnTo>
+                </a:path>
+              </a:pathLst>
+            </a:custGeom>
+            <a:ln w="6775" cap="flat">
+              <a:solidFill>
+                <a:srgbClr val="EBEBEB">
+                  <a:alpha val="100000"/>
+                </a:srgbClr>
+              </a:solidFill>
+              <a:prstDash val="solid"/>
+              <a:round/>
+            </a:ln>
+          </p:spPr>
+          <p:txBody>
+            <a:bodyPr/>
+            <a:lstStyle/>
+            <a:p/>
+          </p:txBody>
+        </p:sp>
+        <p:sp>
+          <p:nvSpPr>
+            <p:cNvPr id="47" name="pl47"/>
+            <p:cNvSpPr/>
+            <p:nvPr/>
+          </p:nvSpPr>
+          <p:spPr>
+            <a:xfrm>
+              <a:off x="4169393" y="4336484"/>
+              <a:ext cx="0" cy="1317069"/>
+            </a:xfrm>
+            <a:custGeom>
+              <a:avLst/>
+              <a:pathLst>
+                <a:path w="0" h="1317069">
+                  <a:moveTo>
+                    <a:pt x="0" y="1317069"/>
+                  </a:moveTo>
+                  <a:lnTo>
+                    <a:pt x="0" y="0"/>
+                  </a:lnTo>
+                  <a:lnTo>
+                    <a:pt x="0" y="0"/>
+                  </a:lnTo>
+                </a:path>
+              </a:pathLst>
+            </a:custGeom>
+            <a:ln w="6775" cap="flat">
+              <a:solidFill>
+                <a:srgbClr val="EBEBEB">
+                  <a:alpha val="100000"/>
+                </a:srgbClr>
+              </a:solidFill>
+              <a:prstDash val="solid"/>
+              <a:round/>
+            </a:ln>
+          </p:spPr>
+          <p:txBody>
+            <a:bodyPr/>
+            <a:lstStyle/>
+            <a:p/>
+          </p:txBody>
+        </p:sp>
+        <p:sp>
+          <p:nvSpPr>
+            <p:cNvPr id="48" name="pl48"/>
+            <p:cNvSpPr/>
+            <p:nvPr/>
+          </p:nvSpPr>
+          <p:spPr>
+            <a:xfrm>
+              <a:off x="4982994" y="4336484"/>
+              <a:ext cx="0" cy="1317069"/>
+            </a:xfrm>
+            <a:custGeom>
+              <a:avLst/>
+              <a:pathLst>
+                <a:path w="0" h="1317069">
+                  <a:moveTo>
+                    <a:pt x="0" y="1317069"/>
+                  </a:moveTo>
+                  <a:lnTo>
+                    <a:pt x="0" y="0"/>
+                  </a:lnTo>
+                  <a:lnTo>
+                    <a:pt x="0" y="0"/>
+                  </a:lnTo>
+                </a:path>
+              </a:pathLst>
+            </a:custGeom>
+            <a:ln w="6775" cap="flat">
+              <a:solidFill>
+                <a:srgbClr val="EBEBEB">
+                  <a:alpha val="100000"/>
+                </a:srgbClr>
+              </a:solidFill>
+              <a:prstDash val="solid"/>
+              <a:round/>
+            </a:ln>
+          </p:spPr>
+          <p:txBody>
+            <a:bodyPr/>
+            <a:lstStyle/>
+            <a:p/>
+          </p:txBody>
+        </p:sp>
+        <p:sp>
+          <p:nvSpPr>
+            <p:cNvPr id="49" name="pl49"/>
+            <p:cNvSpPr/>
+            <p:nvPr/>
+          </p:nvSpPr>
+          <p:spPr>
+            <a:xfrm>
+              <a:off x="5796595" y="4336484"/>
+              <a:ext cx="0" cy="1317069"/>
+            </a:xfrm>
+            <a:custGeom>
+              <a:avLst/>
+              <a:pathLst>
+                <a:path w="0" h="1317069">
+                  <a:moveTo>
+                    <a:pt x="0" y="1317069"/>
+                  </a:moveTo>
+                  <a:lnTo>
+                    <a:pt x="0" y="0"/>
+                  </a:lnTo>
+                  <a:lnTo>
+                    <a:pt x="0" y="0"/>
+                  </a:lnTo>
+                </a:path>
+              </a:pathLst>
+            </a:custGeom>
+            <a:ln w="6775" cap="flat">
+              <a:solidFill>
+                <a:srgbClr val="EBEBEB">
+                  <a:alpha val="100000"/>
+                </a:srgbClr>
+              </a:solidFill>
+              <a:prstDash val="solid"/>
+              <a:round/>
+            </a:ln>
+          </p:spPr>
+          <p:txBody>
+            <a:bodyPr/>
+            <a:lstStyle/>
+            <a:p/>
+          </p:txBody>
+        </p:sp>
+        <p:sp>
+          <p:nvSpPr>
+            <p:cNvPr id="50" name="pl50"/>
+            <p:cNvSpPr/>
+            <p:nvPr/>
+          </p:nvSpPr>
+          <p:spPr>
+            <a:xfrm>
+              <a:off x="6610197" y="4336484"/>
+              <a:ext cx="0" cy="1317069"/>
+            </a:xfrm>
+            <a:custGeom>
+              <a:avLst/>
+              <a:pathLst>
+                <a:path w="0" h="1317069">
+                  <a:moveTo>
+                    <a:pt x="0" y="1317069"/>
+                  </a:moveTo>
+                  <a:lnTo>
+                    <a:pt x="0" y="0"/>
+                  </a:lnTo>
+                  <a:lnTo>
+                    <a:pt x="0" y="0"/>
+                  </a:lnTo>
+                </a:path>
+              </a:pathLst>
+            </a:custGeom>
+            <a:ln w="6775" cap="flat">
+              <a:solidFill>
+                <a:srgbClr val="EBEBEB">
+                  <a:alpha val="100000"/>
+                </a:srgbClr>
+              </a:solidFill>
+              <a:prstDash val="solid"/>
+              <a:round/>
+            </a:ln>
+          </p:spPr>
+          <p:txBody>
+            <a:bodyPr/>
+            <a:lstStyle/>
+            <a:p/>
+          </p:txBody>
+        </p:sp>
+        <p:sp>
+          <p:nvSpPr>
+            <p:cNvPr id="51" name="pl51"/>
+            <p:cNvSpPr/>
+            <p:nvPr/>
+          </p:nvSpPr>
+          <p:spPr>
+            <a:xfrm>
+              <a:off x="7423798" y="4336484"/>
+              <a:ext cx="0" cy="1317069"/>
+            </a:xfrm>
+            <a:custGeom>
+              <a:avLst/>
+              <a:pathLst>
+                <a:path w="0" h="1317069">
+                  <a:moveTo>
+                    <a:pt x="0" y="1317069"/>
+                  </a:moveTo>
+                  <a:lnTo>
+                    <a:pt x="0" y="0"/>
+                  </a:lnTo>
+                  <a:lnTo>
+                    <a:pt x="0" y="0"/>
+                  </a:lnTo>
+                </a:path>
+              </a:pathLst>
+            </a:custGeom>
+            <a:ln w="6775" cap="flat">
+              <a:solidFill>
+                <a:srgbClr val="EBEBEB">
+                  <a:alpha val="100000"/>
+                </a:srgbClr>
+              </a:solidFill>
+              <a:prstDash val="solid"/>
+              <a:round/>
+            </a:ln>
+          </p:spPr>
+          <p:txBody>
+            <a:bodyPr/>
+            <a:lstStyle/>
+            <a:p/>
+          </p:txBody>
+        </p:sp>
+        <p:sp>
+          <p:nvSpPr>
+            <p:cNvPr id="52" name="pl52"/>
+            <p:cNvSpPr/>
+            <p:nvPr/>
+          </p:nvSpPr>
+          <p:spPr>
+            <a:xfrm>
+              <a:off x="8237399" y="4336484"/>
+              <a:ext cx="0" cy="1317069"/>
+            </a:xfrm>
+            <a:custGeom>
+              <a:avLst/>
+              <a:pathLst>
+                <a:path w="0" h="1317069">
+                  <a:moveTo>
+                    <a:pt x="0" y="1317069"/>
+                  </a:moveTo>
+                  <a:lnTo>
+                    <a:pt x="0" y="0"/>
+                  </a:lnTo>
+                  <a:lnTo>
+                    <a:pt x="0" y="0"/>
+                  </a:lnTo>
+                </a:path>
+              </a:pathLst>
+            </a:custGeom>
+            <a:ln w="6775" cap="flat">
+              <a:solidFill>
+                <a:srgbClr val="EBEBEB">
+                  <a:alpha val="100000"/>
+                </a:srgbClr>
+              </a:solidFill>
+              <a:prstDash val="solid"/>
+              <a:round/>
+            </a:ln>
+          </p:spPr>
+          <p:txBody>
+            <a:bodyPr/>
+            <a:lstStyle/>
+            <a:p/>
+          </p:txBody>
+        </p:sp>
+        <p:sp>
+          <p:nvSpPr>
+            <p:cNvPr id="53" name="pl53"/>
+            <p:cNvSpPr/>
+            <p:nvPr/>
+          </p:nvSpPr>
+          <p:spPr>
+            <a:xfrm>
+              <a:off x="887106" y="5593686"/>
+              <a:ext cx="7660515" cy="0"/>
+            </a:xfrm>
+            <a:custGeom>
+              <a:avLst/>
+              <a:pathLst>
+                <a:path w="7660515" h="0">
+                  <a:moveTo>
+                    <a:pt x="0" y="0"/>
+                  </a:moveTo>
+                  <a:lnTo>
+                    <a:pt x="7660515" y="0"/>
+                  </a:lnTo>
+                  <a:lnTo>
+                    <a:pt x="7660515" y="0"/>
+                  </a:lnTo>
+                </a:path>
+              </a:pathLst>
+            </a:custGeom>
+            <a:ln w="13550" cap="flat">
+              <a:solidFill>
+                <a:srgbClr val="EBEBEB">
+                  <a:alpha val="100000"/>
+                </a:srgbClr>
+              </a:solidFill>
+              <a:prstDash val="solid"/>
+              <a:round/>
+            </a:ln>
+          </p:spPr>
+          <p:txBody>
+            <a:bodyPr/>
+            <a:lstStyle/>
+            <a:p/>
+          </p:txBody>
+        </p:sp>
+        <p:sp>
+          <p:nvSpPr>
+            <p:cNvPr id="54" name="pl54"/>
+            <p:cNvSpPr/>
+            <p:nvPr/>
+          </p:nvSpPr>
+          <p:spPr>
+            <a:xfrm>
+              <a:off x="887106" y="5294352"/>
+              <a:ext cx="7660515" cy="0"/>
+            </a:xfrm>
+            <a:custGeom>
+              <a:avLst/>
+              <a:pathLst>
+                <a:path w="7660515" h="0">
+                  <a:moveTo>
+                    <a:pt x="0" y="0"/>
+                  </a:moveTo>
+                  <a:lnTo>
+                    <a:pt x="7660515" y="0"/>
+                  </a:lnTo>
+                  <a:lnTo>
+                    <a:pt x="7660515" y="0"/>
+                  </a:lnTo>
+                </a:path>
+              </a:pathLst>
+            </a:custGeom>
+            <a:ln w="13550" cap="flat">
+              <a:solidFill>
+                <a:srgbClr val="EBEBEB">
+                  <a:alpha val="100000"/>
+                </a:srgbClr>
+              </a:solidFill>
+              <a:prstDash val="solid"/>
+              <a:round/>
+            </a:ln>
+          </p:spPr>
+          <p:txBody>
+            <a:bodyPr/>
+            <a:lstStyle/>
+            <a:p/>
+          </p:txBody>
+        </p:sp>
+        <p:sp>
+          <p:nvSpPr>
+            <p:cNvPr id="55" name="pl55"/>
+            <p:cNvSpPr/>
+            <p:nvPr/>
+          </p:nvSpPr>
+          <p:spPr>
+            <a:xfrm>
+              <a:off x="887106" y="4995019"/>
+              <a:ext cx="7660515" cy="0"/>
+            </a:xfrm>
+            <a:custGeom>
+              <a:avLst/>
+              <a:pathLst>
+                <a:path w="7660515" h="0">
+                  <a:moveTo>
+                    <a:pt x="0" y="0"/>
+                  </a:moveTo>
+                  <a:lnTo>
+                    <a:pt x="7660515" y="0"/>
+                  </a:lnTo>
+                  <a:lnTo>
+                    <a:pt x="7660515" y="0"/>
+                  </a:lnTo>
+                </a:path>
+              </a:pathLst>
+            </a:custGeom>
+            <a:ln w="13550" cap="flat">
+              <a:solidFill>
+                <a:srgbClr val="EBEBEB">
+                  <a:alpha val="100000"/>
+                </a:srgbClr>
+              </a:solidFill>
+              <a:prstDash val="solid"/>
+              <a:round/>
+            </a:ln>
+          </p:spPr>
+          <p:txBody>
+            <a:bodyPr/>
+            <a:lstStyle/>
+            <a:p/>
+          </p:txBody>
+        </p:sp>
+        <p:sp>
+          <p:nvSpPr>
+            <p:cNvPr id="56" name="pl56"/>
+            <p:cNvSpPr/>
+            <p:nvPr/>
+          </p:nvSpPr>
+          <p:spPr>
+            <a:xfrm>
+              <a:off x="887106" y="4695685"/>
+              <a:ext cx="7660515" cy="0"/>
+            </a:xfrm>
+            <a:custGeom>
+              <a:avLst/>
+              <a:pathLst>
+                <a:path w="7660515" h="0">
+                  <a:moveTo>
+                    <a:pt x="0" y="0"/>
+                  </a:moveTo>
+                  <a:lnTo>
+                    <a:pt x="7660515" y="0"/>
+                  </a:lnTo>
+                  <a:lnTo>
+                    <a:pt x="7660515" y="0"/>
+                  </a:lnTo>
+                </a:path>
+              </a:pathLst>
+            </a:custGeom>
+            <a:ln w="13550" cap="flat">
+              <a:solidFill>
+                <a:srgbClr val="EBEBEB">
+                  <a:alpha val="100000"/>
+                </a:srgbClr>
+              </a:solidFill>
+              <a:prstDash val="solid"/>
+              <a:round/>
+            </a:ln>
+          </p:spPr>
+          <p:txBody>
+            <a:bodyPr/>
+            <a:lstStyle/>
+            <a:p/>
+          </p:txBody>
+        </p:sp>
+        <p:sp>
+          <p:nvSpPr>
+            <p:cNvPr id="57" name="pl57"/>
+            <p:cNvSpPr/>
+            <p:nvPr/>
+          </p:nvSpPr>
+          <p:spPr>
+            <a:xfrm>
+              <a:off x="887106" y="4396351"/>
+              <a:ext cx="7660515" cy="0"/>
+            </a:xfrm>
+            <a:custGeom>
+              <a:avLst/>
+              <a:pathLst>
+                <a:path w="7660515" h="0">
+                  <a:moveTo>
+                    <a:pt x="0" y="0"/>
+                  </a:moveTo>
+                  <a:lnTo>
+                    <a:pt x="7660515" y="0"/>
+                  </a:lnTo>
+                  <a:lnTo>
+                    <a:pt x="7660515" y="0"/>
+                  </a:lnTo>
+                </a:path>
+              </a:pathLst>
+            </a:custGeom>
+            <a:ln w="13550" cap="flat">
+              <a:solidFill>
+                <a:srgbClr val="EBEBEB">
+                  <a:alpha val="100000"/>
+                </a:srgbClr>
+              </a:solidFill>
+              <a:prstDash val="solid"/>
+              <a:round/>
+            </a:ln>
+          </p:spPr>
+          <p:txBody>
+            <a:bodyPr/>
+            <a:lstStyle/>
+            <a:p/>
+          </p:txBody>
+        </p:sp>
+        <p:sp>
+          <p:nvSpPr>
+            <p:cNvPr id="58" name="pl58"/>
+            <p:cNvSpPr/>
+            <p:nvPr/>
+          </p:nvSpPr>
+          <p:spPr>
+            <a:xfrm>
+              <a:off x="1321788" y="4336484"/>
+              <a:ext cx="0" cy="1317069"/>
+            </a:xfrm>
+            <a:custGeom>
+              <a:avLst/>
+              <a:pathLst>
+                <a:path w="0" h="1317069">
+                  <a:moveTo>
+                    <a:pt x="0" y="1317069"/>
+                  </a:moveTo>
+                  <a:lnTo>
+                    <a:pt x="0" y="0"/>
+                  </a:lnTo>
+                  <a:lnTo>
+                    <a:pt x="0" y="0"/>
+                  </a:lnTo>
+                </a:path>
+              </a:pathLst>
+            </a:custGeom>
+            <a:ln w="13550" cap="flat">
+              <a:solidFill>
+                <a:srgbClr val="EBEBEB">
+                  <a:alpha val="100000"/>
+                </a:srgbClr>
+              </a:solidFill>
+              <a:prstDash val="solid"/>
+              <a:round/>
+            </a:ln>
+          </p:spPr>
+          <p:txBody>
+            <a:bodyPr/>
+            <a:lstStyle/>
+            <a:p/>
+          </p:txBody>
+        </p:sp>
+        <p:sp>
+          <p:nvSpPr>
+            <p:cNvPr id="59" name="pl59"/>
+            <p:cNvSpPr/>
+            <p:nvPr/>
+          </p:nvSpPr>
+          <p:spPr>
+            <a:xfrm>
+              <a:off x="2135389" y="4336484"/>
+              <a:ext cx="0" cy="1317069"/>
+            </a:xfrm>
+            <a:custGeom>
+              <a:avLst/>
+              <a:pathLst>
+                <a:path w="0" h="1317069">
+                  <a:moveTo>
+                    <a:pt x="0" y="1317069"/>
+                  </a:moveTo>
+                  <a:lnTo>
+                    <a:pt x="0" y="0"/>
+                  </a:lnTo>
+                  <a:lnTo>
+                    <a:pt x="0" y="0"/>
+                  </a:lnTo>
+                </a:path>
+              </a:pathLst>
+            </a:custGeom>
+            <a:ln w="13550" cap="flat">
+              <a:solidFill>
+                <a:srgbClr val="EBEBEB">
+                  <a:alpha val="100000"/>
+                </a:srgbClr>
+              </a:solidFill>
+              <a:prstDash val="solid"/>
+              <a:round/>
+            </a:ln>
+          </p:spPr>
+          <p:txBody>
+            <a:bodyPr/>
+            <a:lstStyle/>
+            <a:p/>
+          </p:txBody>
+        </p:sp>
+        <p:sp>
+          <p:nvSpPr>
+            <p:cNvPr id="60" name="pl60"/>
+            <p:cNvSpPr/>
+            <p:nvPr/>
+          </p:nvSpPr>
+          <p:spPr>
+            <a:xfrm>
+              <a:off x="2948991" y="4336484"/>
+              <a:ext cx="0" cy="1317069"/>
+            </a:xfrm>
+            <a:custGeom>
+              <a:avLst/>
+              <a:pathLst>
+                <a:path w="0" h="1317069">
+                  <a:moveTo>
+                    <a:pt x="0" y="1317069"/>
+                  </a:moveTo>
+                  <a:lnTo>
+                    <a:pt x="0" y="0"/>
+                  </a:lnTo>
+                  <a:lnTo>
+                    <a:pt x="0" y="0"/>
+                  </a:lnTo>
+                </a:path>
+              </a:pathLst>
+            </a:custGeom>
+            <a:ln w="13550" cap="flat">
+              <a:solidFill>
+                <a:srgbClr val="EBEBEB">
+                  <a:alpha val="100000"/>
+                </a:srgbClr>
+              </a:solidFill>
+              <a:prstDash val="solid"/>
+              <a:round/>
+            </a:ln>
+          </p:spPr>
+          <p:txBody>
+            <a:bodyPr/>
+            <a:lstStyle/>
+            <a:p/>
+          </p:txBody>
+        </p:sp>
+        <p:sp>
+          <p:nvSpPr>
+            <p:cNvPr id="61" name="pl61"/>
+            <p:cNvSpPr/>
+            <p:nvPr/>
+          </p:nvSpPr>
+          <p:spPr>
+            <a:xfrm>
+              <a:off x="3762592" y="4336484"/>
+              <a:ext cx="0" cy="1317069"/>
+            </a:xfrm>
+            <a:custGeom>
+              <a:avLst/>
+              <a:pathLst>
+                <a:path w="0" h="1317069">
+                  <a:moveTo>
+                    <a:pt x="0" y="1317069"/>
+                  </a:moveTo>
+                  <a:lnTo>
+                    <a:pt x="0" y="0"/>
+                  </a:lnTo>
+                  <a:lnTo>
+                    <a:pt x="0" y="0"/>
+                  </a:lnTo>
+                </a:path>
+              </a:pathLst>
+            </a:custGeom>
+            <a:ln w="13550" cap="flat">
+              <a:solidFill>
+                <a:srgbClr val="EBEBEB">
+                  <a:alpha val="100000"/>
+                </a:srgbClr>
+              </a:solidFill>
+              <a:prstDash val="solid"/>
+              <a:round/>
+            </a:ln>
+          </p:spPr>
+          <p:txBody>
+            <a:bodyPr/>
+            <a:lstStyle/>
+            <a:p/>
+          </p:txBody>
+        </p:sp>
+        <p:sp>
+          <p:nvSpPr>
+            <p:cNvPr id="62" name="pl62"/>
+            <p:cNvSpPr/>
+            <p:nvPr/>
+          </p:nvSpPr>
+          <p:spPr>
+            <a:xfrm>
+              <a:off x="4576193" y="4336484"/>
+              <a:ext cx="0" cy="1317069"/>
+            </a:xfrm>
+            <a:custGeom>
+              <a:avLst/>
+              <a:pathLst>
+                <a:path w="0" h="1317069">
+                  <a:moveTo>
+                    <a:pt x="0" y="1317069"/>
+                  </a:moveTo>
+                  <a:lnTo>
+                    <a:pt x="0" y="0"/>
+                  </a:lnTo>
+                  <a:lnTo>
+                    <a:pt x="0" y="0"/>
+                  </a:lnTo>
+                </a:path>
+              </a:pathLst>
+            </a:custGeom>
+            <a:ln w="13550" cap="flat">
+              <a:solidFill>
+                <a:srgbClr val="EBEBEB">
+                  <a:alpha val="100000"/>
+                </a:srgbClr>
+              </a:solidFill>
+              <a:prstDash val="solid"/>
+              <a:round/>
+            </a:ln>
+          </p:spPr>
+          <p:txBody>
+            <a:bodyPr/>
+            <a:lstStyle/>
+            <a:p/>
+          </p:txBody>
+        </p:sp>
+        <p:sp>
+          <p:nvSpPr>
+            <p:cNvPr id="63" name="pl63"/>
+            <p:cNvSpPr/>
+            <p:nvPr/>
+          </p:nvSpPr>
+          <p:spPr>
+            <a:xfrm>
+              <a:off x="5389795" y="4336484"/>
+              <a:ext cx="0" cy="1317069"/>
+            </a:xfrm>
+            <a:custGeom>
+              <a:avLst/>
+              <a:pathLst>
+                <a:path w="0" h="1317069">
+                  <a:moveTo>
+                    <a:pt x="0" y="1317069"/>
+                  </a:moveTo>
+                  <a:lnTo>
+                    <a:pt x="0" y="0"/>
+                  </a:lnTo>
+                  <a:lnTo>
+                    <a:pt x="0" y="0"/>
+                  </a:lnTo>
+                </a:path>
+              </a:pathLst>
+            </a:custGeom>
+            <a:ln w="13550" cap="flat">
+              <a:solidFill>
+                <a:srgbClr val="EBEBEB">
+                  <a:alpha val="100000"/>
+                </a:srgbClr>
+              </a:solidFill>
+              <a:prstDash val="solid"/>
+              <a:round/>
+            </a:ln>
+          </p:spPr>
+          <p:txBody>
+            <a:bodyPr/>
+            <a:lstStyle/>
+            <a:p/>
+          </p:txBody>
+        </p:sp>
+        <p:sp>
+          <p:nvSpPr>
+            <p:cNvPr id="64" name="pl64"/>
+            <p:cNvSpPr/>
+            <p:nvPr/>
+          </p:nvSpPr>
+          <p:spPr>
+            <a:xfrm>
+              <a:off x="6203396" y="4336484"/>
+              <a:ext cx="0" cy="1317069"/>
+            </a:xfrm>
+            <a:custGeom>
+              <a:avLst/>
+              <a:pathLst>
+                <a:path w="0" h="1317069">
+                  <a:moveTo>
+                    <a:pt x="0" y="1317069"/>
+                  </a:moveTo>
+                  <a:lnTo>
+                    <a:pt x="0" y="0"/>
+                  </a:lnTo>
+                  <a:lnTo>
+                    <a:pt x="0" y="0"/>
+                  </a:lnTo>
+                </a:path>
+              </a:pathLst>
+            </a:custGeom>
+            <a:ln w="13550" cap="flat">
+              <a:solidFill>
+                <a:srgbClr val="EBEBEB">
+                  <a:alpha val="100000"/>
+                </a:srgbClr>
+              </a:solidFill>
+              <a:prstDash val="solid"/>
+              <a:round/>
+            </a:ln>
+          </p:spPr>
+          <p:txBody>
+            <a:bodyPr/>
+            <a:lstStyle/>
+            <a:p/>
+          </p:txBody>
+        </p:sp>
+        <p:sp>
+          <p:nvSpPr>
+            <p:cNvPr id="65" name="pl65"/>
+            <p:cNvSpPr/>
+            <p:nvPr/>
+          </p:nvSpPr>
+          <p:spPr>
+            <a:xfrm>
+              <a:off x="7016997" y="4336484"/>
+              <a:ext cx="0" cy="1317069"/>
+            </a:xfrm>
+            <a:custGeom>
+              <a:avLst/>
+              <a:pathLst>
+                <a:path w="0" h="1317069">
+                  <a:moveTo>
+                    <a:pt x="0" y="1317069"/>
+                  </a:moveTo>
+                  <a:lnTo>
+                    <a:pt x="0" y="0"/>
+                  </a:lnTo>
+                  <a:lnTo>
+                    <a:pt x="0" y="0"/>
+                  </a:lnTo>
+                </a:path>
+              </a:pathLst>
+            </a:custGeom>
+            <a:ln w="13550" cap="flat">
+              <a:solidFill>
+                <a:srgbClr val="EBEBEB">
+                  <a:alpha val="100000"/>
+                </a:srgbClr>
+              </a:solidFill>
+              <a:prstDash val="solid"/>
+              <a:round/>
+            </a:ln>
+          </p:spPr>
+          <p:txBody>
+            <a:bodyPr/>
+            <a:lstStyle/>
+            <a:p/>
+          </p:txBody>
+        </p:sp>
+        <p:sp>
+          <p:nvSpPr>
+            <p:cNvPr id="66" name="pl66"/>
+            <p:cNvSpPr/>
+            <p:nvPr/>
+          </p:nvSpPr>
+          <p:spPr>
+            <a:xfrm>
+              <a:off x="7830599" y="4336484"/>
+              <a:ext cx="0" cy="1317069"/>
+            </a:xfrm>
+            <a:custGeom>
+              <a:avLst/>
+              <a:pathLst>
+                <a:path w="0" h="1317069">
+                  <a:moveTo>
+                    <a:pt x="0" y="1317069"/>
+                  </a:moveTo>
+                  <a:lnTo>
+                    <a:pt x="0" y="0"/>
+                  </a:lnTo>
+                  <a:lnTo>
+                    <a:pt x="0" y="0"/>
+                  </a:lnTo>
+                </a:path>
+              </a:pathLst>
+            </a:custGeom>
+            <a:ln w="13550" cap="flat">
+              <a:solidFill>
+                <a:srgbClr val="EBEBEB">
+                  <a:alpha val="100000"/>
+                </a:srgbClr>
+              </a:solidFill>
+              <a:prstDash val="solid"/>
+              <a:round/>
+            </a:ln>
+          </p:spPr>
+          <p:txBody>
+            <a:bodyPr/>
+            <a:lstStyle/>
+            <a:p/>
+          </p:txBody>
+        </p:sp>
+        <p:sp>
+          <p:nvSpPr>
+            <p:cNvPr id="67" name="pg67"/>
+            <p:cNvSpPr/>
+            <p:nvPr/>
+          </p:nvSpPr>
+          <p:spPr>
+            <a:xfrm>
+              <a:off x="1352750" y="4336484"/>
+              <a:ext cx="6846666" cy="1242907"/>
+            </a:xfrm>
+            <a:custGeom>
+              <a:avLst/>
+              <a:pathLst>
+                <a:path w="6846666" h="1242907">
+                  <a:moveTo>
+                    <a:pt x="1446867" y="0"/>
+                  </a:moveTo>
+                  <a:lnTo>
+                    <a:pt x="1500485" y="55024"/>
+                  </a:lnTo>
+                  <a:lnTo>
+                    <a:pt x="1570829" y="123125"/>
+                  </a:lnTo>
+                  <a:lnTo>
+                    <a:pt x="1641174" y="187368"/>
+                  </a:lnTo>
+                  <a:lnTo>
+                    <a:pt x="1711518" y="247972"/>
+                  </a:lnTo>
+                  <a:lnTo>
+                    <a:pt x="1781863" y="305142"/>
+                  </a:lnTo>
+                  <a:lnTo>
+                    <a:pt x="1852207" y="359074"/>
+                  </a:lnTo>
+                  <a:lnTo>
+                    <a:pt x="1922552" y="409951"/>
+                  </a:lnTo>
+                  <a:lnTo>
+                    <a:pt x="1992896" y="457946"/>
+                  </a:lnTo>
+                  <a:lnTo>
+                    <a:pt x="2063241" y="503222"/>
+                  </a:lnTo>
+                  <a:lnTo>
+                    <a:pt x="2133585" y="545934"/>
+                  </a:lnTo>
+                  <a:lnTo>
+                    <a:pt x="2203930" y="586225"/>
+                  </a:lnTo>
+                  <a:lnTo>
+                    <a:pt x="2274274" y="624235"/>
+                  </a:lnTo>
+                  <a:lnTo>
+                    <a:pt x="2344619" y="660091"/>
+                  </a:lnTo>
+                  <a:lnTo>
+                    <a:pt x="2414963" y="693916"/>
+                  </a:lnTo>
+                  <a:lnTo>
+                    <a:pt x="2485308" y="725825"/>
+                  </a:lnTo>
+                  <a:lnTo>
+                    <a:pt x="2555652" y="755926"/>
+                  </a:lnTo>
+                  <a:lnTo>
+                    <a:pt x="2625997" y="784322"/>
+                  </a:lnTo>
+                  <a:lnTo>
+                    <a:pt x="2696341" y="811110"/>
+                  </a:lnTo>
+                  <a:lnTo>
+                    <a:pt x="2766686" y="836380"/>
+                  </a:lnTo>
+                  <a:lnTo>
+                    <a:pt x="2837030" y="860219"/>
+                  </a:lnTo>
+                  <a:lnTo>
+                    <a:pt x="2907375" y="882707"/>
+                  </a:lnTo>
+                  <a:lnTo>
+                    <a:pt x="2977719" y="903921"/>
+                  </a:lnTo>
+                  <a:lnTo>
+                    <a:pt x="3048064" y="923934"/>
+                  </a:lnTo>
+                  <a:lnTo>
+                    <a:pt x="3118408" y="942813"/>
+                  </a:lnTo>
+                  <a:lnTo>
+                    <a:pt x="3188753" y="959371"/>
+                  </a:lnTo>
+                  <a:lnTo>
+                    <a:pt x="3259097" y="968684"/>
+                  </a:lnTo>
+                  <a:lnTo>
+                    <a:pt x="3329442" y="977705"/>
+                  </a:lnTo>
+                  <a:lnTo>
+                    <a:pt x="3399786" y="986444"/>
+                  </a:lnTo>
+                  <a:lnTo>
+                    <a:pt x="3470131" y="994910"/>
+                  </a:lnTo>
+                  <a:lnTo>
+                    <a:pt x="3540475" y="1003111"/>
+                  </a:lnTo>
+                  <a:lnTo>
+                    <a:pt x="3610820" y="1011056"/>
+                  </a:lnTo>
+                  <a:lnTo>
+                    <a:pt x="3681164" y="1018753"/>
+                  </a:lnTo>
+                  <a:lnTo>
+                    <a:pt x="3751509" y="1026208"/>
+                  </a:lnTo>
+                  <a:lnTo>
+                    <a:pt x="3821853" y="1033431"/>
+                  </a:lnTo>
+                  <a:lnTo>
+                    <a:pt x="3892198" y="1040428"/>
+                  </a:lnTo>
+                  <a:lnTo>
+                    <a:pt x="3962542" y="1047206"/>
+                  </a:lnTo>
+                  <a:lnTo>
+                    <a:pt x="4032887" y="1053772"/>
+                  </a:lnTo>
+                  <a:lnTo>
+                    <a:pt x="4103231" y="1060132"/>
+                  </a:lnTo>
+                  <a:lnTo>
+                    <a:pt x="4173576" y="1066294"/>
+                  </a:lnTo>
+                  <a:lnTo>
+                    <a:pt x="4243920" y="1072264"/>
+                  </a:lnTo>
+                  <a:lnTo>
+                    <a:pt x="4314265" y="1078046"/>
+                  </a:lnTo>
+                  <a:lnTo>
+                    <a:pt x="4384609" y="1083648"/>
+                  </a:lnTo>
+                  <a:lnTo>
+                    <a:pt x="4454954" y="1089075"/>
+                  </a:lnTo>
+                  <a:lnTo>
+                    <a:pt x="4525298" y="1094331"/>
+                  </a:lnTo>
+                  <a:lnTo>
+                    <a:pt x="4595642" y="1099424"/>
+                  </a:lnTo>
+                  <a:lnTo>
+                    <a:pt x="4665987" y="1104357"/>
+                  </a:lnTo>
+                  <a:lnTo>
+                    <a:pt x="4736331" y="1109136"/>
+                  </a:lnTo>
+                  <a:lnTo>
+                    <a:pt x="4806676" y="1113766"/>
+                  </a:lnTo>
+                  <a:lnTo>
+                    <a:pt x="4877020" y="1118251"/>
+                  </a:lnTo>
+                  <a:lnTo>
+                    <a:pt x="4947365" y="1122596"/>
+                  </a:lnTo>
+                  <a:lnTo>
+                    <a:pt x="5017709" y="1126804"/>
+                  </a:lnTo>
+                  <a:lnTo>
+                    <a:pt x="5088054" y="1130882"/>
+                  </a:lnTo>
+                  <a:lnTo>
+                    <a:pt x="5158398" y="1134831"/>
+                  </a:lnTo>
+                  <a:lnTo>
+                    <a:pt x="5228743" y="1138658"/>
+                  </a:lnTo>
+                  <a:lnTo>
+                    <a:pt x="5299087" y="1142364"/>
+                  </a:lnTo>
+                  <a:lnTo>
+                    <a:pt x="5369432" y="1145955"/>
+                  </a:lnTo>
+                  <a:lnTo>
+                    <a:pt x="5439776" y="1149433"/>
+                  </a:lnTo>
+                  <a:lnTo>
+                    <a:pt x="5510121" y="1152803"/>
+                  </a:lnTo>
+                  <a:lnTo>
+                    <a:pt x="5580465" y="1156067"/>
+                  </a:lnTo>
+                  <a:lnTo>
+                    <a:pt x="5650810" y="1159229"/>
+                  </a:lnTo>
+                  <a:lnTo>
+                    <a:pt x="5721154" y="1162293"/>
+                  </a:lnTo>
+                  <a:lnTo>
+                    <a:pt x="5791499" y="1165260"/>
+                  </a:lnTo>
+                  <a:lnTo>
+                    <a:pt x="5861843" y="1168135"/>
+                  </a:lnTo>
+                  <a:lnTo>
+                    <a:pt x="5932188" y="1170920"/>
+                  </a:lnTo>
+                  <a:lnTo>
+                    <a:pt x="6002532" y="1173618"/>
+                  </a:lnTo>
+                  <a:lnTo>
+                    <a:pt x="6072877" y="1176231"/>
+                  </a:lnTo>
+                  <a:lnTo>
+                    <a:pt x="6143221" y="1178763"/>
+                  </a:lnTo>
+                  <a:lnTo>
+                    <a:pt x="6213566" y="1181216"/>
+                  </a:lnTo>
+                  <a:lnTo>
+                    <a:pt x="6283910" y="1183592"/>
+                  </a:lnTo>
+                  <a:lnTo>
+                    <a:pt x="6354255" y="1185893"/>
+                  </a:lnTo>
+                  <a:lnTo>
+                    <a:pt x="6424599" y="1188123"/>
+                  </a:lnTo>
+                  <a:lnTo>
+                    <a:pt x="6494944" y="1190283"/>
+                  </a:lnTo>
+                  <a:lnTo>
+                    <a:pt x="6565288" y="1192375"/>
+                  </a:lnTo>
+                  <a:lnTo>
+                    <a:pt x="6635633" y="1194402"/>
+                  </a:lnTo>
+                  <a:lnTo>
+                    <a:pt x="6705977" y="1196366"/>
+                  </a:lnTo>
+                  <a:lnTo>
+                    <a:pt x="6776322" y="1198268"/>
+                  </a:lnTo>
+                  <a:lnTo>
+                    <a:pt x="6846666" y="1200111"/>
+                  </a:lnTo>
+                  <a:lnTo>
+                    <a:pt x="6846666" y="1242907"/>
+                  </a:lnTo>
+                  <a:lnTo>
+                    <a:pt x="6776322" y="1242048"/>
+                  </a:lnTo>
+                  <a:lnTo>
+                    <a:pt x="6705977" y="1241138"/>
+                  </a:lnTo>
+                  <a:lnTo>
+                    <a:pt x="6635633" y="1240174"/>
+                  </a:lnTo>
+                  <a:lnTo>
+                    <a:pt x="6565288" y="1239151"/>
+                  </a:lnTo>
+                  <a:lnTo>
+                    <a:pt x="6494944" y="1238067"/>
+                  </a:lnTo>
+                  <a:lnTo>
+                    <a:pt x="6424599" y="1236918"/>
+                  </a:lnTo>
+                  <a:lnTo>
+                    <a:pt x="6354255" y="1235700"/>
+                  </a:lnTo>
+                  <a:lnTo>
+                    <a:pt x="6283910" y="1234409"/>
+                  </a:lnTo>
+                  <a:lnTo>
+                    <a:pt x="6213566" y="1233041"/>
+                  </a:lnTo>
+                  <a:lnTo>
+                    <a:pt x="6143221" y="1231590"/>
+                  </a:lnTo>
+                  <a:lnTo>
+                    <a:pt x="6072877" y="1230052"/>
+                  </a:lnTo>
+                  <a:lnTo>
+                    <a:pt x="6002532" y="1228421"/>
+                  </a:lnTo>
+                  <a:lnTo>
+                    <a:pt x="5932188" y="1226693"/>
+                  </a:lnTo>
+                  <a:lnTo>
+                    <a:pt x="5861843" y="1224861"/>
+                  </a:lnTo>
+                  <a:lnTo>
+                    <a:pt x="5791499" y="1222919"/>
+                  </a:lnTo>
+                  <a:lnTo>
+                    <a:pt x="5721154" y="1220860"/>
+                  </a:lnTo>
+                  <a:lnTo>
+                    <a:pt x="5650810" y="1218678"/>
+                  </a:lnTo>
+                  <a:lnTo>
+                    <a:pt x="5580465" y="1216365"/>
+                  </a:lnTo>
+                  <a:lnTo>
+                    <a:pt x="5510121" y="1213913"/>
+                  </a:lnTo>
+                  <a:lnTo>
+                    <a:pt x="5439776" y="1211313"/>
+                  </a:lnTo>
+                  <a:lnTo>
+                    <a:pt x="5369432" y="1208558"/>
+                  </a:lnTo>
+                  <a:lnTo>
+                    <a:pt x="5299087" y="1205636"/>
+                  </a:lnTo>
+                  <a:lnTo>
+                    <a:pt x="5228743" y="1202540"/>
+                  </a:lnTo>
+                  <a:lnTo>
+                    <a:pt x="5158398" y="1199258"/>
+                  </a:lnTo>
+                  <a:lnTo>
+                    <a:pt x="5088054" y="1195778"/>
+                  </a:lnTo>
+                  <a:lnTo>
+                    <a:pt x="5017709" y="1192090"/>
+                  </a:lnTo>
+                  <a:lnTo>
+                    <a:pt x="4947365" y="1188180"/>
+                  </a:lnTo>
+                  <a:lnTo>
+                    <a:pt x="4877020" y="1184035"/>
+                  </a:lnTo>
+                  <a:lnTo>
+                    <a:pt x="4806676" y="1179641"/>
+                  </a:lnTo>
+                  <a:lnTo>
+                    <a:pt x="4736331" y="1174984"/>
+                  </a:lnTo>
+                  <a:lnTo>
+                    <a:pt x="4665987" y="1170047"/>
+                  </a:lnTo>
+                  <a:lnTo>
+                    <a:pt x="4595642" y="1164813"/>
+                  </a:lnTo>
+                  <a:lnTo>
+                    <a:pt x="4525298" y="1159265"/>
+                  </a:lnTo>
+                  <a:lnTo>
+                    <a:pt x="4454954" y="1153384"/>
+                  </a:lnTo>
+                  <a:lnTo>
+                    <a:pt x="4384609" y="1147150"/>
+                  </a:lnTo>
+                  <a:lnTo>
+                    <a:pt x="4314265" y="1140541"/>
+                  </a:lnTo>
+                  <a:lnTo>
+                    <a:pt x="4243920" y="1133536"/>
+                  </a:lnTo>
+                  <a:lnTo>
+                    <a:pt x="4173576" y="1126110"/>
+                  </a:lnTo>
+                  <a:lnTo>
+                    <a:pt x="4103231" y="1118238"/>
+                  </a:lnTo>
+                  <a:lnTo>
+                    <a:pt x="4032887" y="1109893"/>
+                  </a:lnTo>
+                  <a:lnTo>
+                    <a:pt x="3962542" y="1101047"/>
+                  </a:lnTo>
+                  <a:lnTo>
+                    <a:pt x="3892198" y="1091670"/>
+                  </a:lnTo>
+                  <a:lnTo>
+                    <a:pt x="3821853" y="1081730"/>
+                  </a:lnTo>
+                  <a:lnTo>
+                    <a:pt x="3751509" y="1071193"/>
+                  </a:lnTo>
+                  <a:lnTo>
+                    <a:pt x="3681164" y="1060024"/>
+                  </a:lnTo>
+                  <a:lnTo>
+                    <a:pt x="3610820" y="1048183"/>
+                  </a:lnTo>
+                  <a:lnTo>
+                    <a:pt x="3540475" y="1035632"/>
+                  </a:lnTo>
+                  <a:lnTo>
+                    <a:pt x="3470131" y="1022327"/>
+                  </a:lnTo>
+                  <a:lnTo>
+                    <a:pt x="3399786" y="1008223"/>
+                  </a:lnTo>
+                  <a:lnTo>
+                    <a:pt x="3329442" y="993271"/>
+                  </a:lnTo>
+                  <a:lnTo>
+                    <a:pt x="3259097" y="977423"/>
+                  </a:lnTo>
+                  <a:lnTo>
+                    <a:pt x="3188753" y="960622"/>
+                  </a:lnTo>
+                  <a:lnTo>
+                    <a:pt x="3118408" y="949758"/>
+                  </a:lnTo>
+                  <a:lnTo>
+                    <a:pt x="3048064" y="939835"/>
+                  </a:lnTo>
+                  <a:lnTo>
+                    <a:pt x="2977719" y="929591"/>
+                  </a:lnTo>
+                  <a:lnTo>
+                    <a:pt x="2907375" y="919017"/>
+                  </a:lnTo>
+                  <a:lnTo>
+                    <a:pt x="2837030" y="908102"/>
+                  </a:lnTo>
+                  <a:lnTo>
+                    <a:pt x="2766686" y="896834"/>
+                  </a:lnTo>
+                  <a:lnTo>
+                    <a:pt x="2696341" y="885202"/>
+                  </a:lnTo>
+                  <a:lnTo>
+                    <a:pt x="2625997" y="873195"/>
+                  </a:lnTo>
+                  <a:lnTo>
+                    <a:pt x="2555652" y="860801"/>
+                  </a:lnTo>
+                  <a:lnTo>
+                    <a:pt x="2485308" y="848006"/>
+                  </a:lnTo>
+                  <a:lnTo>
+                    <a:pt x="2414963" y="834799"/>
+                  </a:lnTo>
+                  <a:lnTo>
+                    <a:pt x="2344619" y="821165"/>
+                  </a:lnTo>
+                  <a:lnTo>
+                    <a:pt x="2274274" y="807091"/>
+                  </a:lnTo>
+                  <a:lnTo>
+                    <a:pt x="2203930" y="792563"/>
+                  </a:lnTo>
+                  <a:lnTo>
+                    <a:pt x="2133585" y="777566"/>
+                  </a:lnTo>
+                  <a:lnTo>
+                    <a:pt x="2063241" y="762085"/>
+                  </a:lnTo>
+                  <a:lnTo>
+                    <a:pt x="1992896" y="746104"/>
+                  </a:lnTo>
+                  <a:lnTo>
+                    <a:pt x="1922552" y="729608"/>
+                  </a:lnTo>
+                  <a:lnTo>
+                    <a:pt x="1852207" y="712579"/>
+                  </a:lnTo>
+                  <a:lnTo>
+                    <a:pt x="1781863" y="695000"/>
+                  </a:lnTo>
+                  <a:lnTo>
+                    <a:pt x="1711518" y="676854"/>
+                  </a:lnTo>
+                  <a:lnTo>
+                    <a:pt x="1641174" y="658122"/>
+                  </a:lnTo>
+                  <a:lnTo>
+                    <a:pt x="1570829" y="638786"/>
+                  </a:lnTo>
+                  <a:lnTo>
+                    <a:pt x="1500485" y="618825"/>
+                  </a:lnTo>
+                  <a:lnTo>
+                    <a:pt x="1430140" y="598220"/>
+                  </a:lnTo>
+                  <a:lnTo>
+                    <a:pt x="1359796" y="576951"/>
+                  </a:lnTo>
+                  <a:lnTo>
+                    <a:pt x="1289451" y="554994"/>
+                  </a:lnTo>
+                  <a:lnTo>
+                    <a:pt x="1219107" y="532329"/>
+                  </a:lnTo>
+                  <a:lnTo>
+                    <a:pt x="1148762" y="508933"/>
+                  </a:lnTo>
+                  <a:lnTo>
+                    <a:pt x="1078418" y="484781"/>
+                  </a:lnTo>
+                  <a:lnTo>
+                    <a:pt x="1008073" y="459850"/>
+                  </a:lnTo>
+                  <a:lnTo>
+                    <a:pt x="937729" y="434114"/>
+                  </a:lnTo>
+                  <a:lnTo>
+                    <a:pt x="867384" y="407547"/>
+                  </a:lnTo>
+                  <a:lnTo>
+                    <a:pt x="797040" y="380123"/>
+                  </a:lnTo>
+                  <a:lnTo>
+                    <a:pt x="726696" y="351814"/>
+                  </a:lnTo>
+                  <a:lnTo>
+                    <a:pt x="656351" y="322591"/>
+                  </a:lnTo>
+                  <a:lnTo>
+                    <a:pt x="586007" y="292424"/>
+                  </a:lnTo>
+                  <a:lnTo>
+                    <a:pt x="515662" y="261284"/>
+                  </a:lnTo>
+                  <a:lnTo>
+                    <a:pt x="445318" y="229139"/>
+                  </a:lnTo>
+                  <a:lnTo>
+                    <a:pt x="374973" y="195957"/>
+                  </a:lnTo>
+                  <a:lnTo>
+                    <a:pt x="304629" y="161703"/>
+                  </a:lnTo>
+                  <a:lnTo>
+                    <a:pt x="234284" y="126344"/>
+                  </a:lnTo>
+                  <a:lnTo>
+                    <a:pt x="163940" y="89844"/>
+                  </a:lnTo>
+                  <a:lnTo>
+                    <a:pt x="93595" y="52165"/>
+                  </a:lnTo>
+                  <a:lnTo>
+                    <a:pt x="23251" y="13270"/>
+                  </a:lnTo>
+                  <a:lnTo>
+                    <a:pt x="0" y="0"/>
+                  </a:lnTo>
+                  <a:close/>
+                </a:path>
+              </a:pathLst>
+            </a:custGeom>
+            <a:solidFill>
+              <a:srgbClr val="FF8C00">
+                <a:alpha val="20000"/>
+              </a:srgbClr>
+            </a:solidFill>
+          </p:spPr>
+          <p:txBody>
+            <a:bodyPr/>
+            <a:lstStyle/>
+            <a:p/>
+          </p:txBody>
+        </p:sp>
+        <p:sp>
+          <p:nvSpPr>
+            <p:cNvPr id="68" name="pl68"/>
+            <p:cNvSpPr/>
+            <p:nvPr/>
+          </p:nvSpPr>
+          <p:spPr>
+            <a:xfrm>
+              <a:off x="2799617" y="4336484"/>
+              <a:ext cx="5399799" cy="1200111"/>
+            </a:xfrm>
+            <a:custGeom>
+              <a:avLst/>
+              <a:pathLst>
+                <a:path w="5399799" h="1200111">
+                  <a:moveTo>
+                    <a:pt x="0" y="0"/>
+                  </a:moveTo>
+                  <a:lnTo>
+                    <a:pt x="53618" y="55024"/>
+                  </a:lnTo>
+                  <a:lnTo>
+                    <a:pt x="123962" y="123125"/>
+                  </a:lnTo>
+                  <a:lnTo>
+                    <a:pt x="194307" y="187368"/>
+                  </a:lnTo>
+                  <a:lnTo>
+                    <a:pt x="264651" y="247972"/>
+                  </a:lnTo>
+                  <a:lnTo>
+                    <a:pt x="334996" y="305142"/>
+                  </a:lnTo>
+                  <a:lnTo>
+                    <a:pt x="405340" y="359074"/>
+                  </a:lnTo>
+                  <a:lnTo>
+                    <a:pt x="475685" y="409951"/>
+                  </a:lnTo>
+                  <a:lnTo>
+                    <a:pt x="546029" y="457946"/>
+                  </a:lnTo>
+                  <a:lnTo>
+                    <a:pt x="616374" y="503222"/>
+                  </a:lnTo>
+                  <a:lnTo>
+                    <a:pt x="686718" y="545934"/>
+                  </a:lnTo>
+                  <a:lnTo>
+                    <a:pt x="757063" y="586225"/>
+                  </a:lnTo>
+                  <a:lnTo>
+                    <a:pt x="827407" y="624235"/>
+                  </a:lnTo>
+                  <a:lnTo>
+                    <a:pt x="897752" y="660091"/>
+                  </a:lnTo>
+                  <a:lnTo>
+                    <a:pt x="968096" y="693916"/>
+                  </a:lnTo>
+                  <a:lnTo>
+                    <a:pt x="1038441" y="725825"/>
+                  </a:lnTo>
+                  <a:lnTo>
+                    <a:pt x="1108785" y="755926"/>
+                  </a:lnTo>
+                  <a:lnTo>
+                    <a:pt x="1179130" y="784322"/>
+                  </a:lnTo>
+                  <a:lnTo>
+                    <a:pt x="1249474" y="811110"/>
+                  </a:lnTo>
+                  <a:lnTo>
+                    <a:pt x="1319819" y="836380"/>
+                  </a:lnTo>
+                  <a:lnTo>
+                    <a:pt x="1390163" y="860219"/>
+                  </a:lnTo>
+                  <a:lnTo>
+                    <a:pt x="1460508" y="882707"/>
+                  </a:lnTo>
+                  <a:lnTo>
+                    <a:pt x="1530852" y="903921"/>
+                  </a:lnTo>
+                  <a:lnTo>
+                    <a:pt x="1601197" y="923934"/>
+                  </a:lnTo>
+                  <a:lnTo>
+                    <a:pt x="1671541" y="942813"/>
+                  </a:lnTo>
+                  <a:lnTo>
+                    <a:pt x="1741886" y="959371"/>
+                  </a:lnTo>
+                  <a:lnTo>
+                    <a:pt x="1812230" y="968684"/>
+                  </a:lnTo>
+                  <a:lnTo>
+                    <a:pt x="1882574" y="977705"/>
+                  </a:lnTo>
+                  <a:lnTo>
+                    <a:pt x="1952919" y="986444"/>
+                  </a:lnTo>
+                  <a:lnTo>
+                    <a:pt x="2023263" y="994910"/>
+                  </a:lnTo>
+                  <a:lnTo>
+                    <a:pt x="2093608" y="1003111"/>
+                  </a:lnTo>
+                  <a:lnTo>
+                    <a:pt x="2163952" y="1011056"/>
+                  </a:lnTo>
+                  <a:lnTo>
+                    <a:pt x="2234297" y="1018753"/>
+                  </a:lnTo>
+                  <a:lnTo>
+                    <a:pt x="2304641" y="1026208"/>
+                  </a:lnTo>
+                  <a:lnTo>
+                    <a:pt x="2374986" y="1033431"/>
+                  </a:lnTo>
+                  <a:lnTo>
+                    <a:pt x="2445330" y="1040428"/>
+                  </a:lnTo>
+                  <a:lnTo>
+                    <a:pt x="2515675" y="1047206"/>
+                  </a:lnTo>
+                  <a:lnTo>
+                    <a:pt x="2586019" y="1053772"/>
+                  </a:lnTo>
+                  <a:lnTo>
+                    <a:pt x="2656364" y="1060132"/>
+                  </a:lnTo>
+                  <a:lnTo>
+                    <a:pt x="2726708" y="1066294"/>
+                  </a:lnTo>
+                  <a:lnTo>
+                    <a:pt x="2797053" y="1072264"/>
+                  </a:lnTo>
+                  <a:lnTo>
+                    <a:pt x="2867397" y="1078046"/>
+                  </a:lnTo>
+                  <a:lnTo>
+                    <a:pt x="2937742" y="1083648"/>
+                  </a:lnTo>
+                  <a:lnTo>
+                    <a:pt x="3008086" y="1089075"/>
+                  </a:lnTo>
+                  <a:lnTo>
+                    <a:pt x="3078431" y="1094331"/>
+                  </a:lnTo>
+                  <a:lnTo>
+                    <a:pt x="3148775" y="1099424"/>
+                  </a:lnTo>
+                  <a:lnTo>
+                    <a:pt x="3219120" y="1104357"/>
+                  </a:lnTo>
+                  <a:lnTo>
+                    <a:pt x="3289464" y="1109136"/>
+                  </a:lnTo>
+                  <a:lnTo>
+                    <a:pt x="3359809" y="1113766"/>
+                  </a:lnTo>
+                  <a:lnTo>
+                    <a:pt x="3430153" y="1118251"/>
+                  </a:lnTo>
+                  <a:lnTo>
+                    <a:pt x="3500498" y="1122596"/>
+                  </a:lnTo>
+                  <a:lnTo>
+                    <a:pt x="3570842" y="1126804"/>
+                  </a:lnTo>
+                  <a:lnTo>
+                    <a:pt x="3641187" y="1130882"/>
+                  </a:lnTo>
+                  <a:lnTo>
+                    <a:pt x="3711531" y="1134831"/>
+                  </a:lnTo>
+                  <a:lnTo>
+                    <a:pt x="3781876" y="1138658"/>
+                  </a:lnTo>
+                  <a:lnTo>
+                    <a:pt x="3852220" y="1142364"/>
+                  </a:lnTo>
+                  <a:lnTo>
+                    <a:pt x="3922565" y="1145955"/>
+                  </a:lnTo>
+                  <a:lnTo>
+                    <a:pt x="3992909" y="1149433"/>
+                  </a:lnTo>
+                  <a:lnTo>
+                    <a:pt x="4063254" y="1152803"/>
+                  </a:lnTo>
+                  <a:lnTo>
+                    <a:pt x="4133598" y="1156067"/>
+                  </a:lnTo>
+                  <a:lnTo>
+                    <a:pt x="4203943" y="1159229"/>
+                  </a:lnTo>
+                  <a:lnTo>
+                    <a:pt x="4274287" y="1162293"/>
+                  </a:lnTo>
+                  <a:lnTo>
+                    <a:pt x="4344632" y="1165260"/>
+                  </a:lnTo>
+                  <a:lnTo>
+                    <a:pt x="4414976" y="1168135"/>
+                  </a:lnTo>
+                  <a:lnTo>
+                    <a:pt x="4485321" y="1170920"/>
+                  </a:lnTo>
+                  <a:lnTo>
+                    <a:pt x="4555665" y="1173618"/>
+                  </a:lnTo>
+                  <a:lnTo>
+                    <a:pt x="4626010" y="1176231"/>
+                  </a:lnTo>
+                  <a:lnTo>
+                    <a:pt x="4696354" y="1178763"/>
+                  </a:lnTo>
+                  <a:lnTo>
+                    <a:pt x="4766699" y="1181216"/>
+                  </a:lnTo>
+                  <a:lnTo>
+                    <a:pt x="4837043" y="1183592"/>
+                  </a:lnTo>
+                  <a:lnTo>
+                    <a:pt x="4907388" y="1185893"/>
+                  </a:lnTo>
+                  <a:lnTo>
+                    <a:pt x="4977732" y="1188123"/>
+                  </a:lnTo>
+                  <a:lnTo>
+                    <a:pt x="5048077" y="1190283"/>
+                  </a:lnTo>
+                  <a:lnTo>
+                    <a:pt x="5118421" y="1192375"/>
+                  </a:lnTo>
+                  <a:lnTo>
+                    <a:pt x="5188766" y="1194402"/>
+                  </a:lnTo>
+                  <a:lnTo>
+                    <a:pt x="5259110" y="1196366"/>
+                  </a:lnTo>
+                  <a:lnTo>
+                    <a:pt x="5329455" y="1198268"/>
+                  </a:lnTo>
+                  <a:lnTo>
+                    <a:pt x="5399799" y="1200111"/>
+                  </a:lnTo>
+                </a:path>
+              </a:pathLst>
+            </a:custGeom>
+          </p:spPr>
+          <p:txBody>
+            <a:bodyPr/>
+            <a:lstStyle/>
+            <a:p/>
+          </p:txBody>
+        </p:sp>
+        <p:sp>
+          <p:nvSpPr>
+            <p:cNvPr id="69" name="pl69"/>
+            <p:cNvSpPr/>
+            <p:nvPr/>
+          </p:nvSpPr>
+          <p:spPr>
+            <a:xfrm>
+              <a:off x="1352750" y="4336484"/>
+              <a:ext cx="6846666" cy="1242907"/>
+            </a:xfrm>
+            <a:custGeom>
+              <a:avLst/>
+              <a:pathLst>
+                <a:path w="6846666" h="1242907">
+                  <a:moveTo>
+                    <a:pt x="6846666" y="1242907"/>
+                  </a:moveTo>
+                  <a:lnTo>
+                    <a:pt x="6776322" y="1242048"/>
+                  </a:lnTo>
+                  <a:lnTo>
+                    <a:pt x="6705977" y="1241138"/>
+                  </a:lnTo>
+                  <a:lnTo>
+                    <a:pt x="6635633" y="1240174"/>
+                  </a:lnTo>
+                  <a:lnTo>
+                    <a:pt x="6565288" y="1239151"/>
+                  </a:lnTo>
+                  <a:lnTo>
+                    <a:pt x="6494944" y="1238067"/>
+                  </a:lnTo>
+                  <a:lnTo>
+                    <a:pt x="6424599" y="1236918"/>
+                  </a:lnTo>
+                  <a:lnTo>
+                    <a:pt x="6354255" y="1235700"/>
+                  </a:lnTo>
+                  <a:lnTo>
+                    <a:pt x="6283910" y="1234409"/>
+                  </a:lnTo>
+                  <a:lnTo>
+                    <a:pt x="6213566" y="1233041"/>
+                  </a:lnTo>
+                  <a:lnTo>
+                    <a:pt x="6143221" y="1231590"/>
+                  </a:lnTo>
+                  <a:lnTo>
+                    <a:pt x="6072877" y="1230052"/>
+                  </a:lnTo>
+                  <a:lnTo>
+                    <a:pt x="6002532" y="1228421"/>
+                  </a:lnTo>
+                  <a:lnTo>
+                    <a:pt x="5932188" y="1226693"/>
+                  </a:lnTo>
+                  <a:lnTo>
+                    <a:pt x="5861843" y="1224861"/>
+                  </a:lnTo>
+                  <a:lnTo>
+                    <a:pt x="5791499" y="1222919"/>
+                  </a:lnTo>
+                  <a:lnTo>
+                    <a:pt x="5721154" y="1220860"/>
+                  </a:lnTo>
+                  <a:lnTo>
+                    <a:pt x="5650810" y="1218678"/>
+                  </a:lnTo>
+                  <a:lnTo>
+                    <a:pt x="5580465" y="1216365"/>
+                  </a:lnTo>
+                  <a:lnTo>
+                    <a:pt x="5510121" y="1213913"/>
+                  </a:lnTo>
+                  <a:lnTo>
+                    <a:pt x="5439776" y="1211313"/>
+                  </a:lnTo>
+                  <a:lnTo>
+                    <a:pt x="5369432" y="1208558"/>
+                  </a:lnTo>
+                  <a:lnTo>
+                    <a:pt x="5299087" y="1205636"/>
+                  </a:lnTo>
+                  <a:lnTo>
+                    <a:pt x="5228743" y="1202540"/>
+                  </a:lnTo>
+                  <a:lnTo>
+                    <a:pt x="5158398" y="1199258"/>
+                  </a:lnTo>
+                  <a:lnTo>
+                    <a:pt x="5088054" y="1195778"/>
+                  </a:lnTo>
+                  <a:lnTo>
+                    <a:pt x="5017709" y="1192090"/>
+                  </a:lnTo>
+                  <a:lnTo>
+                    <a:pt x="4947365" y="1188180"/>
+                  </a:lnTo>
+                  <a:lnTo>
+                    <a:pt x="4877020" y="1184035"/>
+                  </a:lnTo>
+                  <a:lnTo>
+                    <a:pt x="4806676" y="1179641"/>
+                  </a:lnTo>
+                  <a:lnTo>
+                    <a:pt x="4736331" y="1174984"/>
+                  </a:lnTo>
+                  <a:lnTo>
+                    <a:pt x="4665987" y="1170047"/>
+                  </a:lnTo>
+                  <a:lnTo>
+                    <a:pt x="4595642" y="1164813"/>
+                  </a:lnTo>
+                  <a:lnTo>
+                    <a:pt x="4525298" y="1159265"/>
+                  </a:lnTo>
+                  <a:lnTo>
+                    <a:pt x="4454954" y="1153384"/>
+                  </a:lnTo>
+                  <a:lnTo>
+                    <a:pt x="4384609" y="1147150"/>
+                  </a:lnTo>
+                  <a:lnTo>
+                    <a:pt x="4314265" y="1140541"/>
+                  </a:lnTo>
+                  <a:lnTo>
+                    <a:pt x="4243920" y="1133536"/>
+                  </a:lnTo>
+                  <a:lnTo>
+                    <a:pt x="4173576" y="1126110"/>
+                  </a:lnTo>
+                  <a:lnTo>
+                    <a:pt x="4103231" y="1118238"/>
+                  </a:lnTo>
+                  <a:lnTo>
+                    <a:pt x="4032887" y="1109893"/>
+                  </a:lnTo>
+                  <a:lnTo>
+                    <a:pt x="3962542" y="1101047"/>
+                  </a:lnTo>
+                  <a:lnTo>
+                    <a:pt x="3892198" y="1091670"/>
+                  </a:lnTo>
+                  <a:lnTo>
+                    <a:pt x="3821853" y="1081730"/>
+                  </a:lnTo>
+                  <a:lnTo>
+                    <a:pt x="3751509" y="1071193"/>
+                  </a:lnTo>
+                  <a:lnTo>
+                    <a:pt x="3681164" y="1060024"/>
+                  </a:lnTo>
+                  <a:lnTo>
+                    <a:pt x="3610820" y="1048183"/>
+                  </a:lnTo>
+                  <a:lnTo>
+                    <a:pt x="3540475" y="1035632"/>
+                  </a:lnTo>
+                  <a:lnTo>
+                    <a:pt x="3470131" y="1022327"/>
+                  </a:lnTo>
+                  <a:lnTo>
+                    <a:pt x="3399786" y="1008223"/>
+                  </a:lnTo>
+                  <a:lnTo>
+                    <a:pt x="3329442" y="993271"/>
+                  </a:lnTo>
+                  <a:lnTo>
+                    <a:pt x="3259097" y="977423"/>
+                  </a:lnTo>
+                  <a:lnTo>
+                    <a:pt x="3188753" y="960622"/>
+                  </a:lnTo>
+                  <a:lnTo>
+                    <a:pt x="3118408" y="949758"/>
+                  </a:lnTo>
+                  <a:lnTo>
+                    <a:pt x="3048064" y="939835"/>
+                  </a:lnTo>
+                  <a:lnTo>
+                    <a:pt x="2977719" y="929591"/>
+                  </a:lnTo>
+                  <a:lnTo>
+                    <a:pt x="2907375" y="919017"/>
+                  </a:lnTo>
+                  <a:lnTo>
+                    <a:pt x="2837030" y="908102"/>
+                  </a:lnTo>
+                  <a:lnTo>
+                    <a:pt x="2766686" y="896834"/>
+                  </a:lnTo>
+                  <a:lnTo>
+                    <a:pt x="2696341" y="885202"/>
+                  </a:lnTo>
+                  <a:lnTo>
+                    <a:pt x="2625997" y="873195"/>
+                  </a:lnTo>
+                  <a:lnTo>
+                    <a:pt x="2555652" y="860801"/>
+                  </a:lnTo>
+                  <a:lnTo>
+                    <a:pt x="2485308" y="848006"/>
+                  </a:lnTo>
+                  <a:lnTo>
+                    <a:pt x="2414963" y="834799"/>
+                  </a:lnTo>
+                  <a:lnTo>
+                    <a:pt x="2344619" y="821165"/>
+                  </a:lnTo>
+                  <a:lnTo>
+                    <a:pt x="2274274" y="807091"/>
+                  </a:lnTo>
+                  <a:lnTo>
+                    <a:pt x="2203930" y="792563"/>
+                  </a:lnTo>
+                  <a:lnTo>
+                    <a:pt x="2133585" y="777566"/>
+                  </a:lnTo>
+                  <a:lnTo>
+                    <a:pt x="2063241" y="762085"/>
+                  </a:lnTo>
+                  <a:lnTo>
+                    <a:pt x="1992896" y="746104"/>
+                  </a:lnTo>
+                  <a:lnTo>
+                    <a:pt x="1922552" y="729608"/>
+                  </a:lnTo>
+                  <a:lnTo>
+                    <a:pt x="1852207" y="712579"/>
+                  </a:lnTo>
+                  <a:lnTo>
+                    <a:pt x="1781863" y="695000"/>
+                  </a:lnTo>
+                  <a:lnTo>
+                    <a:pt x="1711518" y="676854"/>
+                  </a:lnTo>
+                  <a:lnTo>
+                    <a:pt x="1641174" y="658122"/>
+                  </a:lnTo>
+                  <a:lnTo>
+                    <a:pt x="1570829" y="638786"/>
+                  </a:lnTo>
+                  <a:lnTo>
+                    <a:pt x="1500485" y="618825"/>
+                  </a:lnTo>
+                  <a:lnTo>
+                    <a:pt x="1430140" y="598220"/>
+                  </a:lnTo>
+                  <a:lnTo>
+                    <a:pt x="1359796" y="576951"/>
+                  </a:lnTo>
+                  <a:lnTo>
+                    <a:pt x="1289451" y="554994"/>
+                  </a:lnTo>
+                  <a:lnTo>
+                    <a:pt x="1219107" y="532329"/>
+                  </a:lnTo>
+                  <a:lnTo>
+                    <a:pt x="1148762" y="508933"/>
+                  </a:lnTo>
+                  <a:lnTo>
+                    <a:pt x="1078418" y="484781"/>
+                  </a:lnTo>
+                  <a:lnTo>
+                    <a:pt x="1008073" y="459850"/>
+                  </a:lnTo>
+                  <a:lnTo>
+                    <a:pt x="937729" y="434114"/>
+                  </a:lnTo>
+                  <a:lnTo>
+                    <a:pt x="867384" y="407547"/>
+                  </a:lnTo>
+                  <a:lnTo>
+                    <a:pt x="797040" y="380123"/>
+                  </a:lnTo>
+                  <a:lnTo>
+                    <a:pt x="726696" y="351814"/>
+                  </a:lnTo>
+                  <a:lnTo>
+                    <a:pt x="656351" y="322591"/>
+                  </a:lnTo>
+                  <a:lnTo>
+                    <a:pt x="586007" y="292424"/>
+                  </a:lnTo>
+                  <a:lnTo>
+                    <a:pt x="515662" y="261284"/>
+                  </a:lnTo>
+                  <a:lnTo>
+                    <a:pt x="445318" y="229139"/>
+                  </a:lnTo>
+                  <a:lnTo>
+                    <a:pt x="374973" y="195957"/>
+                  </a:lnTo>
+                  <a:lnTo>
+                    <a:pt x="304629" y="161703"/>
+                  </a:lnTo>
+                  <a:lnTo>
+                    <a:pt x="234284" y="126344"/>
+                  </a:lnTo>
+                  <a:lnTo>
+                    <a:pt x="163940" y="89844"/>
+                  </a:lnTo>
+                  <a:lnTo>
+                    <a:pt x="93595" y="52165"/>
+                  </a:lnTo>
+                  <a:lnTo>
+                    <a:pt x="23251" y="13270"/>
+                  </a:lnTo>
+                  <a:lnTo>
+                    <a:pt x="0" y="0"/>
+                  </a:lnTo>
+                </a:path>
+              </a:pathLst>
+            </a:custGeom>
+          </p:spPr>
+          <p:txBody>
+            <a:bodyPr/>
+            <a:lstStyle/>
+            <a:p/>
+          </p:txBody>
+        </p:sp>
+        <p:sp>
+          <p:nvSpPr>
+            <p:cNvPr id="70" name="pl70"/>
+            <p:cNvSpPr/>
+            <p:nvPr/>
+          </p:nvSpPr>
+          <p:spPr>
+            <a:xfrm>
+              <a:off x="2289096" y="4336484"/>
+              <a:ext cx="5910320" cy="1228634"/>
+            </a:xfrm>
+            <a:custGeom>
+              <a:avLst/>
+              <a:pathLst>
+                <a:path w="5910320" h="1228634">
+                  <a:moveTo>
+                    <a:pt x="0" y="0"/>
+                  </a:moveTo>
+                  <a:lnTo>
+                    <a:pt x="1383" y="1137"/>
+                  </a:lnTo>
+                  <a:lnTo>
+                    <a:pt x="71727" y="56457"/>
+                  </a:lnTo>
+                  <a:lnTo>
+                    <a:pt x="142072" y="109340"/>
+                  </a:lnTo>
+                  <a:lnTo>
+                    <a:pt x="212416" y="159894"/>
+                  </a:lnTo>
+                  <a:lnTo>
+                    <a:pt x="282761" y="208221"/>
+                  </a:lnTo>
+                  <a:lnTo>
+                    <a:pt x="353105" y="254421"/>
+                  </a:lnTo>
+                  <a:lnTo>
+                    <a:pt x="423450" y="298585"/>
+                  </a:lnTo>
+                  <a:lnTo>
+                    <a:pt x="493794" y="340804"/>
+                  </a:lnTo>
+                  <a:lnTo>
+                    <a:pt x="564139" y="381164"/>
+                  </a:lnTo>
+                  <a:lnTo>
+                    <a:pt x="634483" y="419747"/>
+                  </a:lnTo>
+                  <a:lnTo>
+                    <a:pt x="704828" y="456630"/>
+                  </a:lnTo>
+                  <a:lnTo>
+                    <a:pt x="775172" y="491888"/>
+                  </a:lnTo>
+                  <a:lnTo>
+                    <a:pt x="845517" y="525594"/>
+                  </a:lnTo>
+                  <a:lnTo>
+                    <a:pt x="915861" y="557816"/>
+                  </a:lnTo>
+                  <a:lnTo>
+                    <a:pt x="986206" y="588618"/>
+                  </a:lnTo>
+                  <a:lnTo>
+                    <a:pt x="1056550" y="618064"/>
+                  </a:lnTo>
+                  <a:lnTo>
+                    <a:pt x="1126895" y="646212"/>
+                  </a:lnTo>
+                  <a:lnTo>
+                    <a:pt x="1197239" y="673122"/>
+                  </a:lnTo>
+                  <a:lnTo>
+                    <a:pt x="1267584" y="698846"/>
+                  </a:lnTo>
+                  <a:lnTo>
+                    <a:pt x="1337928" y="723437"/>
+                  </a:lnTo>
+                  <a:lnTo>
+                    <a:pt x="1408272" y="746945"/>
+                  </a:lnTo>
+                  <a:lnTo>
+                    <a:pt x="1478617" y="769417"/>
+                  </a:lnTo>
+                  <a:lnTo>
+                    <a:pt x="1548961" y="790900"/>
+                  </a:lnTo>
+                  <a:lnTo>
+                    <a:pt x="1619306" y="811437"/>
+                  </a:lnTo>
+                  <a:lnTo>
+                    <a:pt x="1689650" y="831069"/>
+                  </a:lnTo>
+                  <a:lnTo>
+                    <a:pt x="1759995" y="849837"/>
+                  </a:lnTo>
+                  <a:lnTo>
+                    <a:pt x="1830339" y="867778"/>
+                  </a:lnTo>
+                  <a:lnTo>
+                    <a:pt x="1900684" y="884929"/>
+                  </a:lnTo>
+                  <a:lnTo>
+                    <a:pt x="1971028" y="901325"/>
+                  </a:lnTo>
+                  <a:lnTo>
+                    <a:pt x="2041373" y="916998"/>
+                  </a:lnTo>
+                  <a:lnTo>
+                    <a:pt x="2111717" y="931982"/>
+                  </a:lnTo>
+                  <a:lnTo>
+                    <a:pt x="2182062" y="946305"/>
+                  </a:lnTo>
+                  <a:lnTo>
+                    <a:pt x="2252406" y="959997"/>
+                  </a:lnTo>
+                  <a:lnTo>
+                    <a:pt x="2322751" y="973087"/>
+                  </a:lnTo>
+                  <a:lnTo>
+                    <a:pt x="2393095" y="985600"/>
+                  </a:lnTo>
+                  <a:lnTo>
+                    <a:pt x="2463440" y="997562"/>
+                  </a:lnTo>
+                  <a:lnTo>
+                    <a:pt x="2533784" y="1008997"/>
+                  </a:lnTo>
+                  <a:lnTo>
+                    <a:pt x="2604129" y="1019928"/>
+                  </a:lnTo>
+                  <a:lnTo>
+                    <a:pt x="2674473" y="1030378"/>
+                  </a:lnTo>
+                  <a:lnTo>
+                    <a:pt x="2744818" y="1040368"/>
+                  </a:lnTo>
+                  <a:lnTo>
+                    <a:pt x="2815162" y="1049918"/>
+                  </a:lnTo>
+                  <a:lnTo>
+                    <a:pt x="2885507" y="1059047"/>
+                  </a:lnTo>
+                  <a:lnTo>
+                    <a:pt x="2955851" y="1067774"/>
+                  </a:lnTo>
+                  <a:lnTo>
+                    <a:pt x="3026196" y="1076117"/>
+                  </a:lnTo>
+                  <a:lnTo>
+                    <a:pt x="3096540" y="1084092"/>
+                  </a:lnTo>
+                  <a:lnTo>
+                    <a:pt x="3166885" y="1091716"/>
+                  </a:lnTo>
+                  <a:lnTo>
+                    <a:pt x="3237229" y="1099004"/>
+                  </a:lnTo>
+                  <a:lnTo>
+                    <a:pt x="3307574" y="1105972"/>
+                  </a:lnTo>
+                  <a:lnTo>
+                    <a:pt x="3377918" y="1112632"/>
+                  </a:lnTo>
+                  <a:lnTo>
+                    <a:pt x="3448263" y="1118999"/>
+                  </a:lnTo>
+                  <a:lnTo>
+                    <a:pt x="3518607" y="1125086"/>
+                  </a:lnTo>
+                  <a:lnTo>
+                    <a:pt x="3588952" y="1130905"/>
+                  </a:lnTo>
+                  <a:lnTo>
+                    <a:pt x="3659296" y="1136467"/>
+                  </a:lnTo>
+                  <a:lnTo>
+                    <a:pt x="3729641" y="1141784"/>
+                  </a:lnTo>
+                  <a:lnTo>
+                    <a:pt x="3799985" y="1146868"/>
+                  </a:lnTo>
+                  <a:lnTo>
+                    <a:pt x="3870330" y="1151727"/>
+                  </a:lnTo>
+                  <a:lnTo>
+                    <a:pt x="3940674" y="1156372"/>
+                  </a:lnTo>
+                  <a:lnTo>
+                    <a:pt x="4011019" y="1160813"/>
+                  </a:lnTo>
+                  <a:lnTo>
+                    <a:pt x="4081363" y="1165058"/>
+                  </a:lnTo>
+                  <a:lnTo>
+                    <a:pt x="4151708" y="1169116"/>
+                  </a:lnTo>
+                  <a:lnTo>
+                    <a:pt x="4222052" y="1172996"/>
+                  </a:lnTo>
+                  <a:lnTo>
+                    <a:pt x="4292397" y="1176704"/>
+                  </a:lnTo>
+                  <a:lnTo>
+                    <a:pt x="4362741" y="1180250"/>
+                  </a:lnTo>
+                  <a:lnTo>
+                    <a:pt x="4433086" y="1183639"/>
+                  </a:lnTo>
+                  <a:lnTo>
+                    <a:pt x="4503430" y="1186879"/>
+                  </a:lnTo>
+                  <a:lnTo>
+                    <a:pt x="4573775" y="1189976"/>
+                  </a:lnTo>
+                  <a:lnTo>
+                    <a:pt x="4644119" y="1192937"/>
+                  </a:lnTo>
+                  <a:lnTo>
+                    <a:pt x="4714464" y="1195767"/>
+                  </a:lnTo>
+                  <a:lnTo>
+                    <a:pt x="4784808" y="1198473"/>
+                  </a:lnTo>
+                  <a:lnTo>
+                    <a:pt x="4855153" y="1201059"/>
+                  </a:lnTo>
+                  <a:lnTo>
+                    <a:pt x="4925497" y="1203532"/>
+                  </a:lnTo>
+                  <a:lnTo>
+                    <a:pt x="4995842" y="1205895"/>
+                  </a:lnTo>
+                  <a:lnTo>
+                    <a:pt x="5066186" y="1208155"/>
+                  </a:lnTo>
+                  <a:lnTo>
+                    <a:pt x="5136530" y="1210315"/>
+                  </a:lnTo>
+                  <a:lnTo>
+                    <a:pt x="5206875" y="1212380"/>
+                  </a:lnTo>
+                  <a:lnTo>
+                    <a:pt x="5277219" y="1214354"/>
+                  </a:lnTo>
+                  <a:lnTo>
+                    <a:pt x="5347564" y="1216241"/>
+                  </a:lnTo>
+                  <a:lnTo>
+                    <a:pt x="5417908" y="1218045"/>
+                  </a:lnTo>
+                  <a:lnTo>
+                    <a:pt x="5488253" y="1219770"/>
+                  </a:lnTo>
+                  <a:lnTo>
+                    <a:pt x="5558597" y="1221418"/>
+                  </a:lnTo>
+                  <a:lnTo>
+                    <a:pt x="5628942" y="1222994"/>
+                  </a:lnTo>
+                  <a:lnTo>
+                    <a:pt x="5699286" y="1224501"/>
+                  </a:lnTo>
+                  <a:lnTo>
+                    <a:pt x="5769631" y="1225941"/>
+                  </a:lnTo>
+                  <a:lnTo>
+                    <a:pt x="5839975" y="1227318"/>
+                  </a:lnTo>
+                  <a:lnTo>
+                    <a:pt x="5910320" y="1228634"/>
+                  </a:lnTo>
+                </a:path>
+              </a:pathLst>
+            </a:custGeom>
+            <a:ln w="27101" cap="flat">
+              <a:solidFill>
+                <a:srgbClr val="FF8C00">
+                  <a:alpha val="100000"/>
+                </a:srgbClr>
+              </a:solidFill>
+              <a:prstDash val="solid"/>
+              <a:round/>
+            </a:ln>
+          </p:spPr>
+          <p:txBody>
+            <a:bodyPr/>
+            <a:lstStyle/>
+            <a:p/>
+          </p:txBody>
+        </p:sp>
+        <p:sp>
+          <p:nvSpPr>
+            <p:cNvPr id="71" name="pl71"/>
+            <p:cNvSpPr/>
+            <p:nvPr/>
+          </p:nvSpPr>
+          <p:spPr>
+            <a:xfrm>
+              <a:off x="887106" y="5294352"/>
+              <a:ext cx="7660515" cy="0"/>
+            </a:xfrm>
+            <a:custGeom>
+              <a:avLst/>
+              <a:pathLst>
+                <a:path w="7660515" h="0">
+                  <a:moveTo>
+                    <a:pt x="0" y="0"/>
+                  </a:moveTo>
+                  <a:lnTo>
+                    <a:pt x="7660515" y="0"/>
+                  </a:lnTo>
+                  <a:lnTo>
+                    <a:pt x="7660515" y="0"/>
+                  </a:lnTo>
+                </a:path>
+              </a:pathLst>
+            </a:custGeom>
+            <a:ln w="13550" cap="flat">
+              <a:solidFill>
+                <a:srgbClr val="7F7F7F">
+                  <a:alpha val="100000"/>
+                </a:srgbClr>
+              </a:solidFill>
+              <a:prstDash val="dash"/>
+              <a:round/>
+            </a:ln>
+          </p:spPr>
+          <p:txBody>
+            <a:bodyPr/>
+            <a:lstStyle/>
+            <a:p/>
+          </p:txBody>
+        </p:sp>
+        <p:sp>
+          <p:nvSpPr>
+            <p:cNvPr id="72" name="pl72"/>
+            <p:cNvSpPr/>
+            <p:nvPr/>
+          </p:nvSpPr>
+          <p:spPr>
+            <a:xfrm>
+              <a:off x="4530353" y="4336484"/>
+              <a:ext cx="0" cy="1317069"/>
+            </a:xfrm>
+            <a:custGeom>
+              <a:avLst/>
+              <a:pathLst>
+                <a:path w="0" h="1317069">
+                  <a:moveTo>
+                    <a:pt x="0" y="1317069"/>
+                  </a:moveTo>
+                  <a:lnTo>
+                    <a:pt x="0" y="0"/>
+                  </a:lnTo>
+                  <a:lnTo>
+                    <a:pt x="0" y="0"/>
+                  </a:lnTo>
+                </a:path>
+              </a:pathLst>
+            </a:custGeom>
+            <a:ln w="13550" cap="flat">
+              <a:solidFill>
+                <a:srgbClr val="666666">
+                  <a:alpha val="100000"/>
+                </a:srgbClr>
+              </a:solidFill>
+              <a:prstDash val="dot"/>
+              <a:round/>
+            </a:ln>
+          </p:spPr>
+          <p:txBody>
+            <a:bodyPr/>
+            <a:lstStyle/>
+            <a:p/>
+          </p:txBody>
+        </p:sp>
+        <p:sp>
+          <p:nvSpPr>
+            <p:cNvPr id="73" name="tx73"/>
+            <p:cNvSpPr/>
+            <p:nvPr/>
+          </p:nvSpPr>
+          <p:spPr>
+            <a:xfrm>
+              <a:off x="762297" y="5553636"/>
+              <a:ext cx="62179" cy="80101"/>
+            </a:xfrm>
+            <a:prstGeom prst="rect">
+              <a:avLst/>
+            </a:prstGeom>
+            <a:noFill/>
+          </p:spPr>
+          <p:txBody>
+            <a:bodyPr lIns="0" rIns="0" tIns="0" bIns="0" anchorCtr="1" anchor="ctr" wrap="none"/>
+            <a:lstStyle/>
+            <a:p>
+              <a:pPr algn="l" marL="0" marR="0" indent="0">
+                <a:lnSpc>
+                  <a:spcPts val="880"/>
+                </a:lnSpc>
+                <a:spcBef>
+                  <a:spcPts val="0"/>
+                </a:spcBef>
+                <a:spcAft>
+                  <a:spcPts val="0"/>
+                </a:spcAft>
+              </a:pPr>
+              <a:r>
+                <a:rPr sz="880">
+                  <a:solidFill>
+                    <a:srgbClr val="4D4D4D">
+                      <a:alpha val="100000"/>
+                    </a:srgbClr>
+                  </a:solidFill>
+                  <a:latin typeface="Helvetica"/>
+                  <a:cs typeface="Helvetica"/>
+                </a:rPr>
+                <a:t>0</a:t>
+              </a:r>
+            </a:p>
+          </p:txBody>
+        </p:sp>
+        <p:sp>
+          <p:nvSpPr>
+            <p:cNvPr id="74" name="tx74"/>
+            <p:cNvSpPr/>
+            <p:nvPr/>
+          </p:nvSpPr>
+          <p:spPr>
+            <a:xfrm>
+              <a:off x="762297" y="5254302"/>
+              <a:ext cx="62179" cy="80101"/>
+            </a:xfrm>
+            <a:prstGeom prst="rect">
+              <a:avLst/>
+            </a:prstGeom>
+            <a:noFill/>
+          </p:spPr>
+          <p:txBody>
+            <a:bodyPr lIns="0" rIns="0" tIns="0" bIns="0" anchorCtr="1" anchor="ctr" wrap="none"/>
+            <a:lstStyle/>
+            <a:p>
+              <a:pPr algn="l" marL="0" marR="0" indent="0">
+                <a:lnSpc>
+                  <a:spcPts val="880"/>
+                </a:lnSpc>
+                <a:spcBef>
+                  <a:spcPts val="0"/>
+                </a:spcBef>
+                <a:spcAft>
+                  <a:spcPts val="0"/>
+                </a:spcAft>
+              </a:pPr>
+              <a:r>
+                <a:rPr sz="880">
+                  <a:solidFill>
+                    <a:srgbClr val="4D4D4D">
+                      <a:alpha val="100000"/>
+                    </a:srgbClr>
+                  </a:solidFill>
+                  <a:latin typeface="Helvetica"/>
+                  <a:cs typeface="Helvetica"/>
+                </a:rPr>
+                <a:t>1</a:t>
+              </a:r>
+            </a:p>
+          </p:txBody>
+        </p:sp>
+        <p:sp>
+          <p:nvSpPr>
+            <p:cNvPr id="75" name="tx75"/>
+            <p:cNvSpPr/>
+            <p:nvPr/>
+          </p:nvSpPr>
+          <p:spPr>
+            <a:xfrm>
+              <a:off x="762297" y="4954968"/>
+              <a:ext cx="62179" cy="80101"/>
+            </a:xfrm>
+            <a:prstGeom prst="rect">
+              <a:avLst/>
+            </a:prstGeom>
+            <a:noFill/>
+          </p:spPr>
+          <p:txBody>
+            <a:bodyPr lIns="0" rIns="0" tIns="0" bIns="0" anchorCtr="1" anchor="ctr" wrap="none"/>
+            <a:lstStyle/>
+            <a:p>
+              <a:pPr algn="l" marL="0" marR="0" indent="0">
+                <a:lnSpc>
+                  <a:spcPts val="880"/>
+                </a:lnSpc>
+                <a:spcBef>
+                  <a:spcPts val="0"/>
+                </a:spcBef>
+                <a:spcAft>
+                  <a:spcPts val="0"/>
+                </a:spcAft>
+              </a:pPr>
+              <a:r>
+                <a:rPr sz="880">
+                  <a:solidFill>
+                    <a:srgbClr val="4D4D4D">
+                      <a:alpha val="100000"/>
+                    </a:srgbClr>
+                  </a:solidFill>
+                  <a:latin typeface="Helvetica"/>
+                  <a:cs typeface="Helvetica"/>
+                </a:rPr>
+                <a:t>2</a:t>
+              </a:r>
+            </a:p>
+          </p:txBody>
+        </p:sp>
+        <p:sp>
+          <p:nvSpPr>
+            <p:cNvPr id="76" name="tx76"/>
+            <p:cNvSpPr/>
+            <p:nvPr/>
+          </p:nvSpPr>
+          <p:spPr>
+            <a:xfrm>
+              <a:off x="762297" y="4655634"/>
+              <a:ext cx="62179" cy="80101"/>
+            </a:xfrm>
+            <a:prstGeom prst="rect">
+              <a:avLst/>
+            </a:prstGeom>
+            <a:noFill/>
+          </p:spPr>
+          <p:txBody>
+            <a:bodyPr lIns="0" rIns="0" tIns="0" bIns="0" anchorCtr="1" anchor="ctr" wrap="none"/>
+            <a:lstStyle/>
+            <a:p>
+              <a:pPr algn="l" marL="0" marR="0" indent="0">
+                <a:lnSpc>
+                  <a:spcPts val="880"/>
+                </a:lnSpc>
+                <a:spcBef>
+                  <a:spcPts val="0"/>
+                </a:spcBef>
+                <a:spcAft>
+                  <a:spcPts val="0"/>
+                </a:spcAft>
+              </a:pPr>
+              <a:r>
+                <a:rPr sz="880">
+                  <a:solidFill>
+                    <a:srgbClr val="4D4D4D">
+                      <a:alpha val="100000"/>
+                    </a:srgbClr>
+                  </a:solidFill>
+                  <a:latin typeface="Helvetica"/>
+                  <a:cs typeface="Helvetica"/>
+                </a:rPr>
+                <a:t>3</a:t>
+              </a:r>
+            </a:p>
+          </p:txBody>
+        </p:sp>
+        <p:sp>
+          <p:nvSpPr>
+            <p:cNvPr id="77" name="tx77"/>
+            <p:cNvSpPr/>
+            <p:nvPr/>
+          </p:nvSpPr>
+          <p:spPr>
+            <a:xfrm>
+              <a:off x="762297" y="4356300"/>
+              <a:ext cx="62179" cy="80101"/>
+            </a:xfrm>
+            <a:prstGeom prst="rect">
+              <a:avLst/>
+            </a:prstGeom>
+            <a:noFill/>
+          </p:spPr>
+          <p:txBody>
+            <a:bodyPr lIns="0" rIns="0" tIns="0" bIns="0" anchorCtr="1" anchor="ctr" wrap="none"/>
+            <a:lstStyle/>
+            <a:p>
+              <a:pPr algn="l" marL="0" marR="0" indent="0">
+                <a:lnSpc>
+                  <a:spcPts val="880"/>
+                </a:lnSpc>
+                <a:spcBef>
+                  <a:spcPts val="0"/>
+                </a:spcBef>
+                <a:spcAft>
+                  <a:spcPts val="0"/>
+                </a:spcAft>
+              </a:pPr>
+              <a:r>
+                <a:rPr sz="880">
+                  <a:solidFill>
+                    <a:srgbClr val="4D4D4D">
+                      <a:alpha val="100000"/>
+                    </a:srgbClr>
+                  </a:solidFill>
+                  <a:latin typeface="Helvetica"/>
+                  <a:cs typeface="Helvetica"/>
+                </a:rPr>
+                <a:t>4</a:t>
+              </a:r>
+            </a:p>
+          </p:txBody>
+        </p:sp>
+        <p:sp>
+          <p:nvSpPr>
+            <p:cNvPr id="78" name="tx78"/>
+            <p:cNvSpPr/>
+            <p:nvPr/>
+          </p:nvSpPr>
+          <p:spPr>
+            <a:xfrm>
+              <a:off x="1241001" y="5716183"/>
+              <a:ext cx="161574" cy="80101"/>
+            </a:xfrm>
+            <a:prstGeom prst="rect">
+              <a:avLst/>
+            </a:prstGeom>
+            <a:noFill/>
+          </p:spPr>
+          <p:txBody>
+            <a:bodyPr lIns="0" rIns="0" tIns="0" bIns="0" anchorCtr="1" anchor="ctr" wrap="none"/>
+            <a:lstStyle/>
+            <a:p>
+              <a:pPr algn="l" marL="0" marR="0" indent="0">
+                <a:lnSpc>
+                  <a:spcPts val="880"/>
+                </a:lnSpc>
+                <a:spcBef>
+                  <a:spcPts val="0"/>
+                </a:spcBef>
+                <a:spcAft>
+                  <a:spcPts val="0"/>
+                </a:spcAft>
+              </a:pPr>
+              <a:r>
+                <a:rPr sz="880">
+                  <a:solidFill>
+                    <a:srgbClr val="4D4D4D">
+                      <a:alpha val="100000"/>
+                    </a:srgbClr>
+                  </a:solidFill>
+                  <a:latin typeface="Helvetica"/>
+                  <a:cs typeface="Helvetica"/>
+                </a:rPr>
+                <a:t>-40</a:t>
+              </a:r>
+            </a:p>
+          </p:txBody>
+        </p:sp>
+        <p:sp>
+          <p:nvSpPr>
+            <p:cNvPr id="79" name="tx79"/>
+            <p:cNvSpPr/>
+            <p:nvPr/>
+          </p:nvSpPr>
+          <p:spPr>
+            <a:xfrm>
+              <a:off x="2054602" y="5716183"/>
+              <a:ext cx="161574" cy="80101"/>
+            </a:xfrm>
+            <a:prstGeom prst="rect">
+              <a:avLst/>
+            </a:prstGeom>
+            <a:noFill/>
+          </p:spPr>
+          <p:txBody>
+            <a:bodyPr lIns="0" rIns="0" tIns="0" bIns="0" anchorCtr="1" anchor="ctr" wrap="none"/>
+            <a:lstStyle/>
+            <a:p>
+              <a:pPr algn="l" marL="0" marR="0" indent="0">
+                <a:lnSpc>
+                  <a:spcPts val="880"/>
+                </a:lnSpc>
+                <a:spcBef>
+                  <a:spcPts val="0"/>
+                </a:spcBef>
+                <a:spcAft>
+                  <a:spcPts val="0"/>
+                </a:spcAft>
+              </a:pPr>
+              <a:r>
+                <a:rPr sz="880">
+                  <a:solidFill>
+                    <a:srgbClr val="4D4D4D">
+                      <a:alpha val="100000"/>
+                    </a:srgbClr>
+                  </a:solidFill>
+                  <a:latin typeface="Helvetica"/>
+                  <a:cs typeface="Helvetica"/>
+                </a:rPr>
+                <a:t>-30</a:t>
+              </a:r>
+            </a:p>
+          </p:txBody>
+        </p:sp>
+        <p:sp>
+          <p:nvSpPr>
+            <p:cNvPr id="80" name="tx80"/>
+            <p:cNvSpPr/>
+            <p:nvPr/>
+          </p:nvSpPr>
+          <p:spPr>
+            <a:xfrm>
+              <a:off x="2868203" y="5716183"/>
+              <a:ext cx="161574" cy="80101"/>
+            </a:xfrm>
+            <a:prstGeom prst="rect">
+              <a:avLst/>
+            </a:prstGeom>
+            <a:noFill/>
+          </p:spPr>
+          <p:txBody>
+            <a:bodyPr lIns="0" rIns="0" tIns="0" bIns="0" anchorCtr="1" anchor="ctr" wrap="none"/>
+            <a:lstStyle/>
+            <a:p>
+              <a:pPr algn="l" marL="0" marR="0" indent="0">
+                <a:lnSpc>
+                  <a:spcPts val="880"/>
+                </a:lnSpc>
+                <a:spcBef>
+                  <a:spcPts val="0"/>
+                </a:spcBef>
+                <a:spcAft>
+                  <a:spcPts val="0"/>
+                </a:spcAft>
+              </a:pPr>
+              <a:r>
+                <a:rPr sz="880">
+                  <a:solidFill>
+                    <a:srgbClr val="4D4D4D">
+                      <a:alpha val="100000"/>
+                    </a:srgbClr>
+                  </a:solidFill>
+                  <a:latin typeface="Helvetica"/>
+                  <a:cs typeface="Helvetica"/>
+                </a:rPr>
+                <a:t>-20</a:t>
+              </a:r>
+            </a:p>
+          </p:txBody>
+        </p:sp>
+        <p:sp>
+          <p:nvSpPr>
+            <p:cNvPr id="81" name="tx81"/>
+            <p:cNvSpPr/>
+            <p:nvPr/>
+          </p:nvSpPr>
+          <p:spPr>
+            <a:xfrm>
+              <a:off x="3681805" y="5716183"/>
+              <a:ext cx="161574" cy="80101"/>
+            </a:xfrm>
+            <a:prstGeom prst="rect">
+              <a:avLst/>
+            </a:prstGeom>
+            <a:noFill/>
+          </p:spPr>
+          <p:txBody>
+            <a:bodyPr lIns="0" rIns="0" tIns="0" bIns="0" anchorCtr="1" anchor="ctr" wrap="none"/>
+            <a:lstStyle/>
+            <a:p>
+              <a:pPr algn="l" marL="0" marR="0" indent="0">
+                <a:lnSpc>
+                  <a:spcPts val="880"/>
+                </a:lnSpc>
+                <a:spcBef>
+                  <a:spcPts val="0"/>
+                </a:spcBef>
+                <a:spcAft>
+                  <a:spcPts val="0"/>
+                </a:spcAft>
+              </a:pPr>
+              <a:r>
+                <a:rPr sz="880">
+                  <a:solidFill>
+                    <a:srgbClr val="4D4D4D">
+                      <a:alpha val="100000"/>
+                    </a:srgbClr>
+                  </a:solidFill>
+                  <a:latin typeface="Helvetica"/>
+                  <a:cs typeface="Helvetica"/>
+                </a:rPr>
+                <a:t>-10</a:t>
+              </a:r>
+            </a:p>
+          </p:txBody>
+        </p:sp>
+        <p:sp>
+          <p:nvSpPr>
+            <p:cNvPr id="82" name="tx82"/>
+            <p:cNvSpPr/>
+            <p:nvPr/>
+          </p:nvSpPr>
+          <p:spPr>
+            <a:xfrm>
+              <a:off x="4545104" y="5716183"/>
+              <a:ext cx="62179" cy="80101"/>
+            </a:xfrm>
+            <a:prstGeom prst="rect">
+              <a:avLst/>
+            </a:prstGeom>
+            <a:noFill/>
+          </p:spPr>
+          <p:txBody>
+            <a:bodyPr lIns="0" rIns="0" tIns="0" bIns="0" anchorCtr="1" anchor="ctr" wrap="none"/>
+            <a:lstStyle/>
+            <a:p>
+              <a:pPr algn="l" marL="0" marR="0" indent="0">
+                <a:lnSpc>
+                  <a:spcPts val="880"/>
+                </a:lnSpc>
+                <a:spcBef>
+                  <a:spcPts val="0"/>
+                </a:spcBef>
+                <a:spcAft>
+                  <a:spcPts val="0"/>
+                </a:spcAft>
+              </a:pPr>
+              <a:r>
+                <a:rPr sz="880">
+                  <a:solidFill>
+                    <a:srgbClr val="4D4D4D">
+                      <a:alpha val="100000"/>
+                    </a:srgbClr>
+                  </a:solidFill>
+                  <a:latin typeface="Helvetica"/>
+                  <a:cs typeface="Helvetica"/>
+                </a:rPr>
+                <a:t>0</a:t>
+              </a:r>
+            </a:p>
+          </p:txBody>
+        </p:sp>
+        <p:sp>
+          <p:nvSpPr>
+            <p:cNvPr id="83" name="tx83"/>
+            <p:cNvSpPr/>
+            <p:nvPr/>
+          </p:nvSpPr>
+          <p:spPr>
+            <a:xfrm>
+              <a:off x="5327615" y="5716183"/>
+              <a:ext cx="124358" cy="80101"/>
+            </a:xfrm>
+            <a:prstGeom prst="rect">
+              <a:avLst/>
+            </a:prstGeom>
+            <a:noFill/>
+          </p:spPr>
+          <p:txBody>
+            <a:bodyPr lIns="0" rIns="0" tIns="0" bIns="0" anchorCtr="1" anchor="ctr" wrap="none"/>
+            <a:lstStyle/>
+            <a:p>
+              <a:pPr algn="l" marL="0" marR="0" indent="0">
+                <a:lnSpc>
+                  <a:spcPts val="880"/>
+                </a:lnSpc>
+                <a:spcBef>
+                  <a:spcPts val="0"/>
+                </a:spcBef>
+                <a:spcAft>
+                  <a:spcPts val="0"/>
+                </a:spcAft>
+              </a:pPr>
+              <a:r>
+                <a:rPr sz="880">
+                  <a:solidFill>
+                    <a:srgbClr val="4D4D4D">
+                      <a:alpha val="100000"/>
+                    </a:srgbClr>
+                  </a:solidFill>
+                  <a:latin typeface="Helvetica"/>
+                  <a:cs typeface="Helvetica"/>
+                </a:rPr>
+                <a:t>10</a:t>
+              </a:r>
+            </a:p>
+          </p:txBody>
+        </p:sp>
+        <p:sp>
+          <p:nvSpPr>
+            <p:cNvPr id="84" name="tx84"/>
+            <p:cNvSpPr/>
+            <p:nvPr/>
+          </p:nvSpPr>
+          <p:spPr>
+            <a:xfrm>
+              <a:off x="6141217" y="5716183"/>
+              <a:ext cx="124358" cy="80101"/>
+            </a:xfrm>
+            <a:prstGeom prst="rect">
+              <a:avLst/>
+            </a:prstGeom>
+            <a:noFill/>
+          </p:spPr>
+          <p:txBody>
+            <a:bodyPr lIns="0" rIns="0" tIns="0" bIns="0" anchorCtr="1" anchor="ctr" wrap="none"/>
+            <a:lstStyle/>
+            <a:p>
+              <a:pPr algn="l" marL="0" marR="0" indent="0">
+                <a:lnSpc>
+                  <a:spcPts val="880"/>
+                </a:lnSpc>
+                <a:spcBef>
+                  <a:spcPts val="0"/>
+                </a:spcBef>
+                <a:spcAft>
+                  <a:spcPts val="0"/>
+                </a:spcAft>
+              </a:pPr>
+              <a:r>
+                <a:rPr sz="880">
+                  <a:solidFill>
+                    <a:srgbClr val="4D4D4D">
+                      <a:alpha val="100000"/>
+                    </a:srgbClr>
+                  </a:solidFill>
+                  <a:latin typeface="Helvetica"/>
+                  <a:cs typeface="Helvetica"/>
+                </a:rPr>
+                <a:t>20</a:t>
+              </a:r>
+            </a:p>
+          </p:txBody>
+        </p:sp>
+        <p:sp>
+          <p:nvSpPr>
+            <p:cNvPr id="85" name="tx85"/>
+            <p:cNvSpPr/>
+            <p:nvPr/>
+          </p:nvSpPr>
+          <p:spPr>
+            <a:xfrm>
+              <a:off x="6954818" y="5716183"/>
+              <a:ext cx="124358" cy="80101"/>
+            </a:xfrm>
+            <a:prstGeom prst="rect">
+              <a:avLst/>
+            </a:prstGeom>
+            <a:noFill/>
+          </p:spPr>
+          <p:txBody>
+            <a:bodyPr lIns="0" rIns="0" tIns="0" bIns="0" anchorCtr="1" anchor="ctr" wrap="none"/>
+            <a:lstStyle/>
+            <a:p>
+              <a:pPr algn="l" marL="0" marR="0" indent="0">
+                <a:lnSpc>
+                  <a:spcPts val="880"/>
+                </a:lnSpc>
+                <a:spcBef>
+                  <a:spcPts val="0"/>
+                </a:spcBef>
+                <a:spcAft>
+                  <a:spcPts val="0"/>
+                </a:spcAft>
+              </a:pPr>
+              <a:r>
+                <a:rPr sz="880">
+                  <a:solidFill>
+                    <a:srgbClr val="4D4D4D">
+                      <a:alpha val="100000"/>
+                    </a:srgbClr>
+                  </a:solidFill>
+                  <a:latin typeface="Helvetica"/>
+                  <a:cs typeface="Helvetica"/>
+                </a:rPr>
+                <a:t>30</a:t>
+              </a:r>
+            </a:p>
+          </p:txBody>
+        </p:sp>
+        <p:sp>
+          <p:nvSpPr>
+            <p:cNvPr id="86" name="tx86"/>
+            <p:cNvSpPr/>
+            <p:nvPr/>
+          </p:nvSpPr>
+          <p:spPr>
+            <a:xfrm>
+              <a:off x="7768419" y="5716183"/>
+              <a:ext cx="124358" cy="80101"/>
+            </a:xfrm>
+            <a:prstGeom prst="rect">
+              <a:avLst/>
+            </a:prstGeom>
+            <a:noFill/>
+          </p:spPr>
+          <p:txBody>
+            <a:bodyPr lIns="0" rIns="0" tIns="0" bIns="0" anchorCtr="1" anchor="ctr" wrap="none"/>
+            <a:lstStyle/>
+            <a:p>
+              <a:pPr algn="l" marL="0" marR="0" indent="0">
+                <a:lnSpc>
+                  <a:spcPts val="880"/>
+                </a:lnSpc>
+                <a:spcBef>
+                  <a:spcPts val="0"/>
+                </a:spcBef>
+                <a:spcAft>
+                  <a:spcPts val="0"/>
+                </a:spcAft>
+              </a:pPr>
+              <a:r>
+                <a:rPr sz="880">
+                  <a:solidFill>
+                    <a:srgbClr val="4D4D4D">
+                      <a:alpha val="100000"/>
+                    </a:srgbClr>
+                  </a:solidFill>
+                  <a:latin typeface="Helvetica"/>
+                  <a:cs typeface="Helvetica"/>
+                </a:rPr>
+                <a:t>40</a:t>
+              </a:r>
+            </a:p>
+          </p:txBody>
+        </p:sp>
+        <p:sp>
+          <p:nvSpPr>
+            <p:cNvPr id="87" name="tx87"/>
+            <p:cNvSpPr/>
+            <p:nvPr/>
+          </p:nvSpPr>
+          <p:spPr>
+            <a:xfrm>
+              <a:off x="2928340" y="5855859"/>
+              <a:ext cx="3578047" cy="100218"/>
+            </a:xfrm>
+            <a:prstGeom prst="rect">
+              <a:avLst/>
+            </a:prstGeom>
+            <a:noFill/>
+          </p:spPr>
+          <p:txBody>
+            <a:bodyPr lIns="0" rIns="0" tIns="0" bIns="0" anchorCtr="1" anchor="ctr" wrap="none"/>
+            <a:lstStyle/>
+            <a:p>
+              <a:pPr algn="l" marL="0" marR="0" indent="0">
+                <a:lnSpc>
+                  <a:spcPts val="1100"/>
+                </a:lnSpc>
+                <a:spcBef>
+                  <a:spcPts val="0"/>
+                </a:spcBef>
+                <a:spcAft>
+                  <a:spcPts val="0"/>
+                </a:spcAft>
+              </a:pPr>
+              <a:r>
+                <a:rPr sz="1100">
+                  <a:solidFill>
+                    <a:srgbClr val="000000">
+                      <a:alpha val="100000"/>
+                    </a:srgbClr>
+                  </a:solidFill>
+                  <a:latin typeface="Helvetica"/>
+                  <a:cs typeface="Helvetica"/>
+                </a:rPr>
+                <a:t>eGFR difference (%): 100 × (CKD-EPI Cr-Cys − CG) / CG</a:t>
+              </a:r>
+            </a:p>
+          </p:txBody>
+        </p:sp>
+        <p:sp>
+          <p:nvSpPr>
+            <p:cNvPr id="88" name="tx88"/>
+            <p:cNvSpPr/>
+            <p:nvPr/>
+          </p:nvSpPr>
+          <p:spPr>
+            <a:xfrm rot="-5400000">
+              <a:off x="138035" y="4944909"/>
+              <a:ext cx="1016904" cy="100218"/>
+            </a:xfrm>
+            <a:prstGeom prst="rect">
+              <a:avLst/>
+            </a:prstGeom>
+            <a:noFill/>
+          </p:spPr>
+          <p:txBody>
+            <a:bodyPr lIns="0" rIns="0" tIns="0" bIns="0" anchorCtr="1" anchor="ctr" wrap="none"/>
+            <a:lstStyle/>
+            <a:p>
+              <a:pPr algn="l" marL="0" marR="0" indent="0">
+                <a:lnSpc>
+                  <a:spcPts val="1100"/>
+                </a:lnSpc>
+                <a:spcBef>
+                  <a:spcPts val="0"/>
+                </a:spcBef>
+                <a:spcAft>
+                  <a:spcPts val="0"/>
+                </a:spcAft>
+              </a:pPr>
+              <a:r>
+                <a:rPr sz="1100">
+                  <a:solidFill>
+                    <a:srgbClr val="000000">
+                      <a:alpha val="100000"/>
+                    </a:srgbClr>
+                  </a:solidFill>
+                  <a:latin typeface="Helvetica"/>
+                  <a:cs typeface="Helvetica"/>
+                </a:rPr>
+                <a:t>subHR (95% CI)</a:t>
+              </a:r>
+            </a:p>
+          </p:txBody>
+        </p:sp>
+        <p:sp>
+          <p:nvSpPr>
+            <p:cNvPr id="89" name="tx89"/>
+            <p:cNvSpPr/>
+            <p:nvPr/>
+          </p:nvSpPr>
+          <p:spPr>
+            <a:xfrm>
+              <a:off x="887106" y="4159544"/>
+              <a:ext cx="7052127" cy="82021"/>
+            </a:xfrm>
+            <a:prstGeom prst="rect">
+              <a:avLst/>
+            </a:prstGeom>
+            <a:noFill/>
+          </p:spPr>
+          <p:txBody>
+            <a:bodyPr lIns="0" rIns="0" tIns="0" bIns="0" anchorCtr="1" anchor="ctr" wrap="none"/>
+            <a:lstStyle/>
+            <a:p>
+              <a:pPr algn="l" marL="0" marR="0" indent="0">
+                <a:lnSpc>
+                  <a:spcPts val="900"/>
+                </a:lnSpc>
+                <a:spcBef>
+                  <a:spcPts val="0"/>
+                </a:spcBef>
+                <a:spcAft>
+                  <a:spcPts val="0"/>
+                </a:spcAft>
+              </a:pPr>
+              <a:r>
+                <a:rPr sz="900">
+                  <a:solidFill>
+                    <a:srgbClr val="404040">
+                      <a:alpha val="100000"/>
+                    </a:srgbClr>
+                  </a:solidFill>
+                  <a:latin typeface="Helvetica"/>
+                  <a:cs typeface="Helvetica"/>
+                </a:rPr>
+                <a:t>subHR per 10 % decline: 1.68 (1.44-1.96), p_Bonf = &lt;0.001 (n = 6)  |  per IQR decline (Δ = 29.9 %): 4.75 (3.00-7.52)  |  IQR: [-15.0, 14.9] %</a:t>
+              </a:r>
+            </a:p>
+          </p:txBody>
+        </p:sp>
+        <p:sp>
+          <p:nvSpPr>
+            <p:cNvPr id="90" name="tx90"/>
+            <p:cNvSpPr/>
+            <p:nvPr/>
+          </p:nvSpPr>
+          <p:spPr>
+            <a:xfrm>
+              <a:off x="887106" y="3932770"/>
               <a:ext cx="2821289" cy="120152"/>
             </a:xfrm>
             <a:prstGeom prst="rect">
